--- a/docs/PhDapp_Student_Overview.pptx
+++ b/docs/PhDapp_Student_Overview.pptx
@@ -2232,7 +2232,7 @@
         <p:spPr>
           <a:xfrm>
             <a:off x="914400" y="5166360"/>
-            <a:ext cx="10058400" cy="731520"/>
+            <a:ext cx="10058400" cy="822960"/>
           </a:xfrm>
           <a:prstGeom prst="rect">
             <a:avLst/>
@@ -2248,7 +2248,7 @@
               <a:buNone/>
             </a:pPr>
             <a:r>
-              <a:rPr lang="en-US" sz="2200" dirty="0">
+              <a:rPr lang="en-US" sz="2400" dirty="0">
                 <a:solidFill>
                   <a:srgbClr val="FFFFFF">
                     <a:alpha val="90000"/>
@@ -2260,7 +2260,7 @@
               </a:rPr>
               <a:t>Tasks, calendar, chat, reading, thesis — all linked to you.</a:t>
             </a:r>
-            <a:endParaRPr lang="en-US" sz="2200" dirty="0"/>
+            <a:endParaRPr lang="en-US" sz="2400" dirty="0"/>
           </a:p>
         </p:txBody>
       </p:sp>
@@ -2429,7 +2429,7 @@
         <p:spPr>
           <a:xfrm>
             <a:off x="1261872" y="749808"/>
-            <a:ext cx="10381183" cy="640080"/>
+            <a:ext cx="10381183" cy="713232"/>
           </a:xfrm>
           <a:prstGeom prst="rect">
             <a:avLst/>
@@ -2445,7 +2445,7 @@
               <a:buNone/>
             </a:pPr>
             <a:r>
-              <a:rPr lang="en-US" sz="3600" b="1" dirty="0">
+              <a:rPr lang="en-US" sz="4000" b="1" dirty="0">
                 <a:solidFill>
                   <a:srgbClr val="0F172A"/>
                 </a:solidFill>
@@ -2455,7 +2455,7 @@
               </a:rPr>
               <a:t>Files, Thesis &amp; Publications</a:t>
             </a:r>
-            <a:endParaRPr lang="en-US" sz="3600" dirty="0"/>
+            <a:endParaRPr lang="en-US" sz="4000" dirty="0"/>
           </a:p>
         </p:txBody>
       </p:sp>
@@ -2468,7 +2468,7 @@
         <p:spPr>
           <a:xfrm>
             <a:off x="548640" y="1828800"/>
-            <a:ext cx="5486400" cy="3291840"/>
+            <a:ext cx="5486400" cy="3931920"/>
           </a:xfrm>
           <a:prstGeom prst="rect">
             <a:avLst/>
@@ -2500,7 +2500,7 @@
         <p:spPr>
           <a:xfrm>
             <a:off x="548640" y="1828800"/>
-            <a:ext cx="73152" cy="3291840"/>
+            <a:ext cx="73152" cy="3931920"/>
           </a:xfrm>
           <a:prstGeom prst="rect">
             <a:avLst/>
@@ -2520,7 +2520,7 @@
         <p:spPr>
           <a:xfrm>
             <a:off x="749808" y="1993392"/>
-            <a:ext cx="5166360" cy="502920"/>
+            <a:ext cx="5166360" cy="594360"/>
           </a:xfrm>
           <a:prstGeom prst="rect">
             <a:avLst/>
@@ -2536,7 +2536,7 @@
               <a:buNone/>
             </a:pPr>
             <a:r>
-              <a:rPr lang="en-US" sz="1800" b="1" dirty="0">
+              <a:rPr lang="en-US" sz="2200" b="1" dirty="0">
                 <a:solidFill>
                   <a:srgbClr val="0F172A"/>
                 </a:solidFill>
@@ -2546,7 +2546,7 @@
               </a:rPr>
               <a:t>Files (Drive)</a:t>
             </a:r>
-            <a:endParaRPr lang="en-US" sz="1800" dirty="0"/>
+            <a:endParaRPr lang="en-US" sz="2200" dirty="0"/>
           </a:p>
         </p:txBody>
       </p:sp>
@@ -2558,8 +2558,8 @@
         </p:nvSpPr>
         <p:spPr>
           <a:xfrm>
-            <a:off x="777240" y="2377440"/>
-            <a:ext cx="5074920" cy="2651760"/>
+            <a:off x="777240" y="2697480"/>
+            <a:ext cx="5074920" cy="2926080"/>
           </a:xfrm>
           <a:prstGeom prst="rect">
             <a:avLst/>
@@ -2573,13 +2573,13 @@
           <a:p>
             <a:pPr marL="342900" indent="-342900">
               <a:spcAft>
-                <a:spcPts val="400"/>
+                <a:spcPts val="600"/>
               </a:spcAft>
               <a:buSzPct val="100000"/>
               <a:buChar char="•"/>
             </a:pPr>
             <a:r>
-              <a:rPr lang="en-US" sz="1300" dirty="0">
+              <a:rPr lang="en-US" sz="1800" dirty="0">
                 <a:solidFill>
                   <a:srgbClr val="334155"/>
                 </a:solidFill>
@@ -2589,18 +2589,18 @@
               </a:rPr>
               <a:t>Your shared Drive folder lives on your supervisor's Google.</a:t>
             </a:r>
-            <a:endParaRPr lang="en-US" sz="1300" dirty="0"/>
+            <a:endParaRPr lang="en-US" sz="1800" dirty="0"/>
           </a:p>
           <a:p>
             <a:pPr marL="342900" indent="-342900">
               <a:spcAft>
-                <a:spcPts val="400"/>
+                <a:spcPts val="600"/>
               </a:spcAft>
               <a:buSzPct val="100000"/>
               <a:buChar char="•"/>
             </a:pPr>
             <a:r>
-              <a:rPr lang="en-US" sz="1300" dirty="0">
+              <a:rPr lang="en-US" sz="1800" dirty="0">
                 <a:solidFill>
                   <a:srgbClr val="334155"/>
                 </a:solidFill>
@@ -2610,18 +2610,18 @@
               </a:rPr>
               <a:t>Open any file or folder in a new tab.</a:t>
             </a:r>
-            <a:endParaRPr lang="en-US" sz="1300" dirty="0"/>
+            <a:endParaRPr lang="en-US" sz="1800" dirty="0"/>
           </a:p>
           <a:p>
             <a:pPr marL="342900" indent="-342900">
               <a:spcAft>
-                <a:spcPts val="400"/>
+                <a:spcPts val="600"/>
               </a:spcAft>
               <a:buSzPct val="100000"/>
               <a:buChar char="•"/>
             </a:pPr>
             <a:r>
-              <a:rPr lang="en-US" sz="1300" dirty="0">
+              <a:rPr lang="en-US" sz="1800" dirty="0">
                 <a:solidFill>
                   <a:srgbClr val="334155"/>
                 </a:solidFill>
@@ -2631,7 +2631,7 @@
               </a:rPr>
               <a:t>Tasks and thesis chapters can link a specific folder via the Drive picker — no URL pasting needed.</a:t>
             </a:r>
-            <a:endParaRPr lang="en-US" sz="1300" dirty="0"/>
+            <a:endParaRPr lang="en-US" sz="1800" dirty="0"/>
           </a:p>
         </p:txBody>
       </p:sp>
@@ -2644,7 +2644,7 @@
         <p:spPr>
           <a:xfrm>
             <a:off x="6400800" y="1828800"/>
-            <a:ext cx="5242255" cy="3291840"/>
+            <a:ext cx="5242255" cy="3931920"/>
           </a:xfrm>
           <a:prstGeom prst="rect">
             <a:avLst/>
@@ -2676,7 +2676,7 @@
         <p:spPr>
           <a:xfrm>
             <a:off x="6400800" y="1828800"/>
-            <a:ext cx="73152" cy="3291840"/>
+            <a:ext cx="73152" cy="3931920"/>
           </a:xfrm>
           <a:prstGeom prst="rect">
             <a:avLst/>
@@ -2696,7 +2696,7 @@
         <p:spPr>
           <a:xfrm>
             <a:off x="6601968" y="1993392"/>
-            <a:ext cx="4922215" cy="502920"/>
+            <a:ext cx="4922215" cy="594360"/>
           </a:xfrm>
           <a:prstGeom prst="rect">
             <a:avLst/>
@@ -2712,7 +2712,7 @@
               <a:buNone/>
             </a:pPr>
             <a:r>
-              <a:rPr lang="en-US" sz="1800" b="1" dirty="0">
+              <a:rPr lang="en-US" sz="2200" b="1" dirty="0">
                 <a:solidFill>
                   <a:srgbClr val="0F172A"/>
                 </a:solidFill>
@@ -2722,7 +2722,7 @@
               </a:rPr>
               <a:t>Thesis &amp; publications</a:t>
             </a:r>
-            <a:endParaRPr lang="en-US" sz="1800" dirty="0"/>
+            <a:endParaRPr lang="en-US" sz="2200" dirty="0"/>
           </a:p>
         </p:txBody>
       </p:sp>
@@ -2734,8 +2734,8 @@
         </p:nvSpPr>
         <p:spPr>
           <a:xfrm>
-            <a:off x="6629400" y="2377440"/>
-            <a:ext cx="4876495" cy="2651760"/>
+            <a:off x="6629400" y="2697480"/>
+            <a:ext cx="4876495" cy="2926080"/>
           </a:xfrm>
           <a:prstGeom prst="rect">
             <a:avLst/>
@@ -2749,13 +2749,13 @@
           <a:p>
             <a:pPr marL="342900" indent="-342900">
               <a:spcAft>
-                <a:spcPts val="400"/>
+                <a:spcPts val="600"/>
               </a:spcAft>
               <a:buSzPct val="100000"/>
               <a:buChar char="•"/>
             </a:pPr>
             <a:r>
-              <a:rPr lang="en-US" sz="1300" dirty="0">
+              <a:rPr lang="en-US" sz="1800" dirty="0">
                 <a:solidFill>
                   <a:srgbClr val="334155"/>
                 </a:solidFill>
@@ -2765,18 +2765,18 @@
               </a:rPr>
               <a:t>Chapters: planned → drafting → in review → revising → done.</a:t>
             </a:r>
-            <a:endParaRPr lang="en-US" sz="1300" dirty="0"/>
+            <a:endParaRPr lang="en-US" sz="1800" dirty="0"/>
           </a:p>
           <a:p>
             <a:pPr marL="342900" indent="-342900">
               <a:spcAft>
-                <a:spcPts val="400"/>
+                <a:spcPts val="600"/>
               </a:spcAft>
               <a:buSzPct val="100000"/>
               <a:buChar char="•"/>
             </a:pPr>
             <a:r>
-              <a:rPr lang="en-US" sz="1300" dirty="0">
+              <a:rPr lang="en-US" sz="1800" dirty="0">
                 <a:solidFill>
                   <a:srgbClr val="334155"/>
                 </a:solidFill>
@@ -2786,18 +2786,18 @@
               </a:rPr>
               <a:t>Publications: in prep → submitted → under review → revisions → accepted/published.</a:t>
             </a:r>
-            <a:endParaRPr lang="en-US" sz="1300" dirty="0"/>
+            <a:endParaRPr lang="en-US" sz="1800" dirty="0"/>
           </a:p>
           <a:p>
             <a:pPr marL="342900" indent="-342900">
               <a:spcAft>
-                <a:spcPts val="400"/>
+                <a:spcPts val="600"/>
               </a:spcAft>
               <a:buSzPct val="100000"/>
               <a:buChar char="•"/>
             </a:pPr>
             <a:r>
-              <a:rPr lang="en-US" sz="1300" dirty="0">
+              <a:rPr lang="en-US" sz="1800" dirty="0">
                 <a:solidFill>
                   <a:srgbClr val="334155"/>
                 </a:solidFill>
@@ -2807,18 +2807,18 @@
               </a:rPr>
               <a:t>Each can carry a Drive link via the picker.</a:t>
             </a:r>
-            <a:endParaRPr lang="en-US" sz="1300" dirty="0"/>
+            <a:endParaRPr lang="en-US" sz="1800" dirty="0"/>
           </a:p>
           <a:p>
             <a:pPr marL="342900" indent="-342900">
               <a:spcAft>
-                <a:spcPts val="400"/>
+                <a:spcPts val="600"/>
               </a:spcAft>
               <a:buSzPct val="100000"/>
               <a:buChar char="•"/>
             </a:pPr>
             <a:r>
-              <a:rPr lang="en-US" sz="1300" dirty="0">
+              <a:rPr lang="en-US" sz="1800" dirty="0">
                 <a:solidFill>
                   <a:srgbClr val="334155"/>
                 </a:solidFill>
@@ -2828,7 +2828,7 @@
               </a:rPr>
               <a:t>Used by the Annual review export (Cmd+P → Save as PDF).</a:t>
             </a:r>
-            <a:endParaRPr lang="en-US" sz="1300" dirty="0"/>
+            <a:endParaRPr lang="en-US" sz="1800" dirty="0"/>
           </a:p>
         </p:txBody>
       </p:sp>
@@ -2880,7 +2880,7 @@
               <a:buNone/>
             </a:pPr>
             <a:r>
-              <a:rPr lang="en-US" sz="1100" dirty="0">
+              <a:rPr lang="en-US" sz="1300" dirty="0">
                 <a:solidFill>
                   <a:srgbClr val="64748B"/>
                 </a:solidFill>
@@ -2890,7 +2890,7 @@
               </a:rPr>
               <a:t>PhDapp · for students</a:t>
             </a:r>
-            <a:endParaRPr lang="en-US" sz="1100" dirty="0"/>
+            <a:endParaRPr lang="en-US" sz="1300" dirty="0"/>
           </a:p>
         </p:txBody>
       </p:sp>
@@ -2919,7 +2919,7 @@
               <a:buNone/>
             </a:pPr>
             <a:r>
-              <a:rPr lang="en-US" sz="1100" dirty="0">
+              <a:rPr lang="en-US" sz="1300" dirty="0">
                 <a:solidFill>
                   <a:srgbClr val="64748B"/>
                 </a:solidFill>
@@ -2929,7 +2929,7 @@
               </a:rPr>
               <a:t>10 / 15</a:t>
             </a:r>
-            <a:endParaRPr lang="en-US" sz="1100" dirty="0"/>
+            <a:endParaRPr lang="en-US" sz="1300" dirty="0"/>
           </a:p>
         </p:txBody>
       </p:sp>
@@ -3059,7 +3059,7 @@
         <p:spPr>
           <a:xfrm>
             <a:off x="1261872" y="749808"/>
-            <a:ext cx="10381183" cy="640080"/>
+            <a:ext cx="10381183" cy="713232"/>
           </a:xfrm>
           <a:prstGeom prst="rect">
             <a:avLst/>
@@ -3075,7 +3075,7 @@
               <a:buNone/>
             </a:pPr>
             <a:r>
-              <a:rPr lang="en-US" sz="3600" b="1" dirty="0">
+              <a:rPr lang="en-US" sz="4000" b="1" dirty="0">
                 <a:solidFill>
                   <a:srgbClr val="0F172A"/>
                 </a:solidFill>
@@ -3085,7 +3085,7 @@
               </a:rPr>
               <a:t>Reading list</a:t>
             </a:r>
-            <a:endParaRPr lang="en-US" sz="3600" dirty="0"/>
+            <a:endParaRPr lang="en-US" sz="4000" dirty="0"/>
           </a:p>
         </p:txBody>
       </p:sp>
@@ -3098,7 +3098,7 @@
         <p:spPr>
           <a:xfrm>
             <a:off x="548640" y="1508760"/>
-            <a:ext cx="11094415" cy="731520"/>
+            <a:ext cx="11094415" cy="822960"/>
           </a:xfrm>
           <a:prstGeom prst="rect">
             <a:avLst/>
@@ -3114,7 +3114,7 @@
               <a:buNone/>
             </a:pPr>
             <a:r>
-              <a:rPr lang="en-US" sz="1600" i="1" dirty="0">
+              <a:rPr lang="en-US" sz="2000" i="1" dirty="0">
                 <a:solidFill>
                   <a:srgbClr val="334155"/>
                 </a:solidFill>
@@ -3124,7 +3124,7 @@
               </a:rPr>
               <a:t>Papers you should read, and ones you propose for your supervisor's approval.</a:t>
             </a:r>
-            <a:endParaRPr lang="en-US" sz="1600" dirty="0"/>
+            <a:endParaRPr lang="en-US" sz="2000" dirty="0"/>
           </a:p>
         </p:txBody>
       </p:sp>
@@ -3137,7 +3137,7 @@
         <p:spPr>
           <a:xfrm>
             <a:off x="548640" y="1828800"/>
-            <a:ext cx="5486400" cy="3291840"/>
+            <a:ext cx="5486400" cy="3931920"/>
           </a:xfrm>
           <a:prstGeom prst="rect">
             <a:avLst/>
@@ -3169,7 +3169,7 @@
         <p:spPr>
           <a:xfrm>
             <a:off x="548640" y="1828800"/>
-            <a:ext cx="73152" cy="3291840"/>
+            <a:ext cx="73152" cy="3931920"/>
           </a:xfrm>
           <a:prstGeom prst="rect">
             <a:avLst/>
@@ -3189,7 +3189,7 @@
         <p:spPr>
           <a:xfrm>
             <a:off x="749808" y="1993392"/>
-            <a:ext cx="5166360" cy="502920"/>
+            <a:ext cx="5166360" cy="594360"/>
           </a:xfrm>
           <a:prstGeom prst="rect">
             <a:avLst/>
@@ -3205,7 +3205,7 @@
               <a:buNone/>
             </a:pPr>
             <a:r>
-              <a:rPr lang="en-US" sz="1800" b="1" dirty="0">
+              <a:rPr lang="en-US" sz="2200" b="1" dirty="0">
                 <a:solidFill>
                   <a:srgbClr val="0F172A"/>
                 </a:solidFill>
@@ -3215,7 +3215,7 @@
               </a:rPr>
               <a:t>What's there</a:t>
             </a:r>
-            <a:endParaRPr lang="en-US" sz="1800" dirty="0"/>
+            <a:endParaRPr lang="en-US" sz="2200" dirty="0"/>
           </a:p>
         </p:txBody>
       </p:sp>
@@ -3227,8 +3227,8 @@
         </p:nvSpPr>
         <p:spPr>
           <a:xfrm>
-            <a:off x="777240" y="2377440"/>
-            <a:ext cx="5074920" cy="2651760"/>
+            <a:off x="777240" y="2697480"/>
+            <a:ext cx="5074920" cy="2926080"/>
           </a:xfrm>
           <a:prstGeom prst="rect">
             <a:avLst/>
@@ -3242,13 +3242,13 @@
           <a:p>
             <a:pPr marL="342900" indent="-342900">
               <a:spcAft>
-                <a:spcPts val="400"/>
+                <a:spcPts val="600"/>
               </a:spcAft>
               <a:buSzPct val="100000"/>
               <a:buChar char="•"/>
             </a:pPr>
             <a:r>
-              <a:rPr lang="en-US" sz="1300" dirty="0">
+              <a:rPr lang="en-US" sz="1800" dirty="0">
                 <a:solidFill>
                   <a:srgbClr val="334155"/>
                 </a:solidFill>
@@ -3258,18 +3258,18 @@
               </a:rPr>
               <a:t>Your supervisor adds papers (auto-approved) — title, authors, link, status.</a:t>
             </a:r>
-            <a:endParaRPr lang="en-US" sz="1300" dirty="0"/>
+            <a:endParaRPr lang="en-US" sz="1800" dirty="0"/>
           </a:p>
           <a:p>
             <a:pPr marL="342900" indent="-342900">
               <a:spcAft>
-                <a:spcPts val="400"/>
+                <a:spcPts val="600"/>
               </a:spcAft>
               <a:buSzPct val="100000"/>
               <a:buChar char="•"/>
             </a:pPr>
             <a:r>
-              <a:rPr lang="en-US" sz="1300" dirty="0">
+              <a:rPr lang="en-US" sz="1800" dirty="0">
                 <a:solidFill>
                   <a:srgbClr val="334155"/>
                 </a:solidFill>
@@ -3279,18 +3279,18 @@
               </a:rPr>
               <a:t>Mark items reading / done as you go.</a:t>
             </a:r>
-            <a:endParaRPr lang="en-US" sz="1300" dirty="0"/>
+            <a:endParaRPr lang="en-US" sz="1800" dirty="0"/>
           </a:p>
           <a:p>
             <a:pPr marL="342900" indent="-342900">
               <a:spcAft>
-                <a:spcPts val="400"/>
+                <a:spcPts val="600"/>
               </a:spcAft>
               <a:buSzPct val="100000"/>
               <a:buChar char="•"/>
             </a:pPr>
             <a:r>
-              <a:rPr lang="en-US" sz="1300" dirty="0">
+              <a:rPr lang="en-US" sz="1800" dirty="0">
                 <a:solidFill>
                   <a:srgbClr val="334155"/>
                 </a:solidFill>
@@ -3300,7 +3300,7 @@
               </a:rPr>
               <a:t>Status flow: proposed → approved → reading → done (or rejected).</a:t>
             </a:r>
-            <a:endParaRPr lang="en-US" sz="1300" dirty="0"/>
+            <a:endParaRPr lang="en-US" sz="1800" dirty="0"/>
           </a:p>
         </p:txBody>
       </p:sp>
@@ -3313,7 +3313,7 @@
         <p:spPr>
           <a:xfrm>
             <a:off x="6400800" y="1828800"/>
-            <a:ext cx="5242255" cy="3291840"/>
+            <a:ext cx="5242255" cy="3931920"/>
           </a:xfrm>
           <a:prstGeom prst="rect">
             <a:avLst/>
@@ -3345,7 +3345,7 @@
         <p:spPr>
           <a:xfrm>
             <a:off x="6400800" y="1828800"/>
-            <a:ext cx="73152" cy="3291840"/>
+            <a:ext cx="73152" cy="3931920"/>
           </a:xfrm>
           <a:prstGeom prst="rect">
             <a:avLst/>
@@ -3365,7 +3365,7 @@
         <p:spPr>
           <a:xfrm>
             <a:off x="6601968" y="1993392"/>
-            <a:ext cx="4922215" cy="502920"/>
+            <a:ext cx="4922215" cy="594360"/>
           </a:xfrm>
           <a:prstGeom prst="rect">
             <a:avLst/>
@@ -3381,7 +3381,7 @@
               <a:buNone/>
             </a:pPr>
             <a:r>
-              <a:rPr lang="en-US" sz="1800" b="1" dirty="0">
+              <a:rPr lang="en-US" sz="2200" b="1" dirty="0">
                 <a:solidFill>
                   <a:srgbClr val="0F172A"/>
                 </a:solidFill>
@@ -3391,7 +3391,7 @@
               </a:rPr>
               <a:t>Proposing a paper</a:t>
             </a:r>
-            <a:endParaRPr lang="en-US" sz="1800" dirty="0"/>
+            <a:endParaRPr lang="en-US" sz="2200" dirty="0"/>
           </a:p>
         </p:txBody>
       </p:sp>
@@ -3403,8 +3403,8 @@
         </p:nvSpPr>
         <p:spPr>
           <a:xfrm>
-            <a:off x="6629400" y="2377440"/>
-            <a:ext cx="4876495" cy="2651760"/>
+            <a:off x="6629400" y="2697480"/>
+            <a:ext cx="4876495" cy="2926080"/>
           </a:xfrm>
           <a:prstGeom prst="rect">
             <a:avLst/>
@@ -3418,13 +3418,13 @@
           <a:p>
             <a:pPr marL="342900" indent="-342900">
               <a:spcAft>
-                <a:spcPts val="400"/>
+                <a:spcPts val="600"/>
               </a:spcAft>
               <a:buSzPct val="100000"/>
               <a:buChar char="•"/>
             </a:pPr>
             <a:r>
-              <a:rPr lang="en-US" sz="1300" dirty="0">
+              <a:rPr lang="en-US" sz="1800" dirty="0">
                 <a:solidFill>
                   <a:srgbClr val="334155"/>
                 </a:solidFill>
@@ -3434,18 +3434,18 @@
               </a:rPr>
               <a:t>Add the title/authors and a ‘Why is this relevant?’ note.</a:t>
             </a:r>
-            <a:endParaRPr lang="en-US" sz="1300" dirty="0"/>
+            <a:endParaRPr lang="en-US" sz="1800" dirty="0"/>
           </a:p>
           <a:p>
             <a:pPr marL="342900" indent="-342900">
               <a:spcAft>
-                <a:spcPts val="400"/>
+                <a:spcPts val="600"/>
               </a:spcAft>
               <a:buSzPct val="100000"/>
               <a:buChar char="•"/>
             </a:pPr>
             <a:r>
-              <a:rPr lang="en-US" sz="1300" dirty="0">
+              <a:rPr lang="en-US" sz="1800" dirty="0">
                 <a:solidFill>
                   <a:srgbClr val="334155"/>
                 </a:solidFill>
@@ -3455,18 +3455,18 @@
               </a:rPr>
               <a:t>Your supervisors are notified.</a:t>
             </a:r>
-            <a:endParaRPr lang="en-US" sz="1300" dirty="0"/>
+            <a:endParaRPr lang="en-US" sz="1800" dirty="0"/>
           </a:p>
           <a:p>
             <a:pPr marL="342900" indent="-342900">
               <a:spcAft>
-                <a:spcPts val="400"/>
+                <a:spcPts val="600"/>
               </a:spcAft>
               <a:buSzPct val="100000"/>
               <a:buChar char="•"/>
             </a:pPr>
             <a:r>
-              <a:rPr lang="en-US" sz="1300" dirty="0">
+              <a:rPr lang="en-US" sz="1800" dirty="0">
                 <a:solidFill>
                   <a:srgbClr val="334155"/>
                 </a:solidFill>
@@ -3476,18 +3476,18 @@
               </a:rPr>
               <a:t>They approve (with optional comment) or reject (with reason).</a:t>
             </a:r>
-            <a:endParaRPr lang="en-US" sz="1300" dirty="0"/>
+            <a:endParaRPr lang="en-US" sz="1800" dirty="0"/>
           </a:p>
           <a:p>
             <a:pPr marL="342900" indent="-342900">
               <a:spcAft>
-                <a:spcPts val="400"/>
+                <a:spcPts val="600"/>
               </a:spcAft>
               <a:buSzPct val="100000"/>
               <a:buChar char="•"/>
             </a:pPr>
             <a:r>
-              <a:rPr lang="en-US" sz="1300" dirty="0">
+              <a:rPr lang="en-US" sz="1800" dirty="0">
                 <a:solidFill>
                   <a:srgbClr val="334155"/>
                 </a:solidFill>
@@ -3497,7 +3497,7 @@
               </a:rPr>
               <a:t>Approved items move to the main reading queue.</a:t>
             </a:r>
-            <a:endParaRPr lang="en-US" sz="1300" dirty="0"/>
+            <a:endParaRPr lang="en-US" sz="1800" dirty="0"/>
           </a:p>
         </p:txBody>
       </p:sp>
@@ -3549,7 +3549,7 @@
               <a:buNone/>
             </a:pPr>
             <a:r>
-              <a:rPr lang="en-US" sz="1100" dirty="0">
+              <a:rPr lang="en-US" sz="1300" dirty="0">
                 <a:solidFill>
                   <a:srgbClr val="64748B"/>
                 </a:solidFill>
@@ -3559,7 +3559,7 @@
               </a:rPr>
               <a:t>PhDapp · for students</a:t>
             </a:r>
-            <a:endParaRPr lang="en-US" sz="1100" dirty="0"/>
+            <a:endParaRPr lang="en-US" sz="1300" dirty="0"/>
           </a:p>
         </p:txBody>
       </p:sp>
@@ -3588,7 +3588,7 @@
               <a:buNone/>
             </a:pPr>
             <a:r>
-              <a:rPr lang="en-US" sz="1100" dirty="0">
+              <a:rPr lang="en-US" sz="1300" dirty="0">
                 <a:solidFill>
                   <a:srgbClr val="64748B"/>
                 </a:solidFill>
@@ -3598,7 +3598,7 @@
               </a:rPr>
               <a:t>11 / 15</a:t>
             </a:r>
-            <a:endParaRPr lang="en-US" sz="1100" dirty="0"/>
+            <a:endParaRPr lang="en-US" sz="1300" dirty="0"/>
           </a:p>
         </p:txBody>
       </p:sp>
@@ -3728,7 +3728,7 @@
         <p:spPr>
           <a:xfrm>
             <a:off x="1261872" y="749808"/>
-            <a:ext cx="10381183" cy="640080"/>
+            <a:ext cx="10381183" cy="713232"/>
           </a:xfrm>
           <a:prstGeom prst="rect">
             <a:avLst/>
@@ -3744,7 +3744,7 @@
               <a:buNone/>
             </a:pPr>
             <a:r>
-              <a:rPr lang="en-US" sz="3600" b="1" dirty="0">
+              <a:rPr lang="en-US" sz="4000" b="1" dirty="0">
                 <a:solidFill>
                   <a:srgbClr val="0F172A"/>
                 </a:solidFill>
@@ -3754,7 +3754,7 @@
               </a:rPr>
               <a:t>Weekly check-in</a:t>
             </a:r>
-            <a:endParaRPr lang="en-US" sz="3600" dirty="0"/>
+            <a:endParaRPr lang="en-US" sz="4000" dirty="0"/>
           </a:p>
         </p:txBody>
       </p:sp>
@@ -3767,7 +3767,7 @@
         <p:spPr>
           <a:xfrm>
             <a:off x="548640" y="1508760"/>
-            <a:ext cx="11094415" cy="731520"/>
+            <a:ext cx="11094415" cy="822960"/>
           </a:xfrm>
           <a:prstGeom prst="rect">
             <a:avLst/>
@@ -3783,7 +3783,7 @@
               <a:buNone/>
             </a:pPr>
             <a:r>
-              <a:rPr lang="en-US" sz="1600" i="1" dirty="0">
+              <a:rPr lang="en-US" sz="2000" i="1" dirty="0">
                 <a:solidFill>
                   <a:srgbClr val="334155"/>
                 </a:solidFill>
@@ -3793,7 +3793,7 @@
               </a:rPr>
               <a:t>A two-minute reflection each week. Your supervisors see it; only they see your wellbeing.</a:t>
             </a:r>
-            <a:endParaRPr lang="en-US" sz="1600" dirty="0"/>
+            <a:endParaRPr lang="en-US" sz="2000" dirty="0"/>
           </a:p>
         </p:txBody>
       </p:sp>
@@ -3806,7 +3806,7 @@
         <p:spPr>
           <a:xfrm>
             <a:off x="548640" y="1828800"/>
-            <a:ext cx="5486400" cy="3291840"/>
+            <a:ext cx="5486400" cy="3931920"/>
           </a:xfrm>
           <a:prstGeom prst="rect">
             <a:avLst/>
@@ -3838,7 +3838,7 @@
         <p:spPr>
           <a:xfrm>
             <a:off x="548640" y="1828800"/>
-            <a:ext cx="73152" cy="3291840"/>
+            <a:ext cx="73152" cy="3931920"/>
           </a:xfrm>
           <a:prstGeom prst="rect">
             <a:avLst/>
@@ -3858,7 +3858,7 @@
         <p:spPr>
           <a:xfrm>
             <a:off x="749808" y="1993392"/>
-            <a:ext cx="5166360" cy="502920"/>
+            <a:ext cx="5166360" cy="594360"/>
           </a:xfrm>
           <a:prstGeom prst="rect">
             <a:avLst/>
@@ -3874,7 +3874,7 @@
               <a:buNone/>
             </a:pPr>
             <a:r>
-              <a:rPr lang="en-US" sz="1800" b="1" dirty="0">
+              <a:rPr lang="en-US" sz="2200" b="1" dirty="0">
                 <a:solidFill>
                   <a:srgbClr val="0F172A"/>
                 </a:solidFill>
@@ -3884,7 +3884,7 @@
               </a:rPr>
               <a:t>Three short prompts</a:t>
             </a:r>
-            <a:endParaRPr lang="en-US" sz="1800" dirty="0"/>
+            <a:endParaRPr lang="en-US" sz="2200" dirty="0"/>
           </a:p>
         </p:txBody>
       </p:sp>
@@ -3896,8 +3896,8 @@
         </p:nvSpPr>
         <p:spPr>
           <a:xfrm>
-            <a:off x="777240" y="2377440"/>
-            <a:ext cx="5074920" cy="2651760"/>
+            <a:off x="777240" y="2697480"/>
+            <a:ext cx="5074920" cy="2926080"/>
           </a:xfrm>
           <a:prstGeom prst="rect">
             <a:avLst/>
@@ -3911,13 +3911,13 @@
           <a:p>
             <a:pPr marL="342900" indent="-342900">
               <a:spcAft>
-                <a:spcPts val="400"/>
+                <a:spcPts val="600"/>
               </a:spcAft>
               <a:buSzPct val="100000"/>
               <a:buChar char="•"/>
             </a:pPr>
             <a:r>
-              <a:rPr lang="en-US" sz="1300" dirty="0">
+              <a:rPr lang="en-US" sz="1800" dirty="0">
                 <a:solidFill>
                   <a:srgbClr val="334155"/>
                 </a:solidFill>
@@ -3927,18 +3927,18 @@
               </a:rPr>
               <a:t>Did this week — what you actually shipped.</a:t>
             </a:r>
-            <a:endParaRPr lang="en-US" sz="1300" dirty="0"/>
+            <a:endParaRPr lang="en-US" sz="1800" dirty="0"/>
           </a:p>
           <a:p>
             <a:pPr marL="342900" indent="-342900">
               <a:spcAft>
-                <a:spcPts val="400"/>
+                <a:spcPts val="600"/>
               </a:spcAft>
               <a:buSzPct val="100000"/>
               <a:buChar char="•"/>
             </a:pPr>
             <a:r>
-              <a:rPr lang="en-US" sz="1300" dirty="0">
+              <a:rPr lang="en-US" sz="1800" dirty="0">
                 <a:solidFill>
                   <a:srgbClr val="334155"/>
                 </a:solidFill>
@@ -3948,18 +3948,18 @@
               </a:rPr>
               <a:t>Blockers — what's in the way.</a:t>
             </a:r>
-            <a:endParaRPr lang="en-US" sz="1300" dirty="0"/>
+            <a:endParaRPr lang="en-US" sz="1800" dirty="0"/>
           </a:p>
           <a:p>
             <a:pPr marL="342900" indent="-342900">
               <a:spcAft>
-                <a:spcPts val="400"/>
+                <a:spcPts val="600"/>
               </a:spcAft>
               <a:buSzPct val="100000"/>
               <a:buChar char="•"/>
             </a:pPr>
             <a:r>
-              <a:rPr lang="en-US" sz="1300" dirty="0">
+              <a:rPr lang="en-US" sz="1800" dirty="0">
                 <a:solidFill>
                   <a:srgbClr val="334155"/>
                 </a:solidFill>
@@ -3969,18 +3969,18 @@
               </a:rPr>
               <a:t>Next week — what you're planning.</a:t>
             </a:r>
-            <a:endParaRPr lang="en-US" sz="1300" dirty="0"/>
+            <a:endParaRPr lang="en-US" sz="1800" dirty="0"/>
           </a:p>
           <a:p>
             <a:pPr marL="342900" indent="-342900">
               <a:spcAft>
-                <a:spcPts val="400"/>
+                <a:spcPts val="600"/>
               </a:spcAft>
               <a:buSzPct val="100000"/>
               <a:buChar char="•"/>
             </a:pPr>
             <a:r>
-              <a:rPr lang="en-US" sz="1300" dirty="0">
+              <a:rPr lang="en-US" sz="1800" dirty="0">
                 <a:solidFill>
                   <a:srgbClr val="334155"/>
                 </a:solidFill>
@@ -3990,7 +3990,7 @@
               </a:rPr>
               <a:t>Edit it any time during the same week.</a:t>
             </a:r>
-            <a:endParaRPr lang="en-US" sz="1300" dirty="0"/>
+            <a:endParaRPr lang="en-US" sz="1800" dirty="0"/>
           </a:p>
         </p:txBody>
       </p:sp>
@@ -4003,7 +4003,7 @@
         <p:spPr>
           <a:xfrm>
             <a:off x="6400800" y="1828800"/>
-            <a:ext cx="5242255" cy="3291840"/>
+            <a:ext cx="5242255" cy="3931920"/>
           </a:xfrm>
           <a:prstGeom prst="rect">
             <a:avLst/>
@@ -4035,7 +4035,7 @@
         <p:spPr>
           <a:xfrm>
             <a:off x="6400800" y="1828800"/>
-            <a:ext cx="73152" cy="3291840"/>
+            <a:ext cx="73152" cy="3931920"/>
           </a:xfrm>
           <a:prstGeom prst="rect">
             <a:avLst/>
@@ -4055,7 +4055,7 @@
         <p:spPr>
           <a:xfrm>
             <a:off x="6601968" y="1993392"/>
-            <a:ext cx="4922215" cy="502920"/>
+            <a:ext cx="4922215" cy="594360"/>
           </a:xfrm>
           <a:prstGeom prst="rect">
             <a:avLst/>
@@ -4071,7 +4071,7 @@
               <a:buNone/>
             </a:pPr>
             <a:r>
-              <a:rPr lang="en-US" sz="1800" b="1" dirty="0">
+              <a:rPr lang="en-US" sz="2200" b="1" dirty="0">
                 <a:solidFill>
                   <a:srgbClr val="0F172A"/>
                 </a:solidFill>
@@ -4081,7 +4081,7 @@
               </a:rPr>
               <a:t>Wellbeing (private)</a:t>
             </a:r>
-            <a:endParaRPr lang="en-US" sz="1800" dirty="0"/>
+            <a:endParaRPr lang="en-US" sz="2200" dirty="0"/>
           </a:p>
         </p:txBody>
       </p:sp>
@@ -4093,8 +4093,8 @@
         </p:nvSpPr>
         <p:spPr>
           <a:xfrm>
-            <a:off x="6629400" y="2377440"/>
-            <a:ext cx="4876495" cy="2651760"/>
+            <a:off x="6629400" y="2697480"/>
+            <a:ext cx="4876495" cy="2926080"/>
           </a:xfrm>
           <a:prstGeom prst="rect">
             <a:avLst/>
@@ -4108,13 +4108,13 @@
           <a:p>
             <a:pPr marL="342900" indent="-342900">
               <a:spcAft>
-                <a:spcPts val="400"/>
+                <a:spcPts val="600"/>
               </a:spcAft>
               <a:buSzPct val="100000"/>
               <a:buChar char="•"/>
             </a:pPr>
             <a:r>
-              <a:rPr lang="en-US" sz="1300" dirty="0">
+              <a:rPr lang="en-US" sz="1800" dirty="0">
                 <a:solidFill>
                   <a:srgbClr val="334155"/>
                 </a:solidFill>
@@ -4124,18 +4124,18 @@
               </a:rPr>
               <a:t>Optional 1–5 score for how the week felt.</a:t>
             </a:r>
-            <a:endParaRPr lang="en-US" sz="1300" dirty="0"/>
+            <a:endParaRPr lang="en-US" sz="1800" dirty="0"/>
           </a:p>
           <a:p>
             <a:pPr marL="342900" indent="-342900">
               <a:spcAft>
-                <a:spcPts val="400"/>
+                <a:spcPts val="600"/>
               </a:spcAft>
               <a:buSzPct val="100000"/>
               <a:buChar char="•"/>
             </a:pPr>
             <a:r>
-              <a:rPr lang="en-US" sz="1300" dirty="0">
+              <a:rPr lang="en-US" sz="1800" dirty="0">
                 <a:solidFill>
                   <a:srgbClr val="334155"/>
                 </a:solidFill>
@@ -4145,18 +4145,18 @@
               </a:rPr>
               <a:t>Visible only to your supervisors and the admin — never to peers or external advisors.</a:t>
             </a:r>
-            <a:endParaRPr lang="en-US" sz="1300" dirty="0"/>
+            <a:endParaRPr lang="en-US" sz="1800" dirty="0"/>
           </a:p>
           <a:p>
             <a:pPr marL="342900" indent="-342900">
               <a:spcAft>
-                <a:spcPts val="400"/>
+                <a:spcPts val="600"/>
               </a:spcAft>
               <a:buSzPct val="100000"/>
               <a:buChar char="•"/>
             </a:pPr>
             <a:r>
-              <a:rPr lang="en-US" sz="1300" dirty="0">
+              <a:rPr lang="en-US" sz="1800" dirty="0">
                 <a:solidFill>
                   <a:srgbClr val="334155"/>
                 </a:solidFill>
@@ -4166,7 +4166,7 @@
               </a:rPr>
               <a:t>Helps your supervisors notice rough weeks early.</a:t>
             </a:r>
-            <a:endParaRPr lang="en-US" sz="1300" dirty="0"/>
+            <a:endParaRPr lang="en-US" sz="1800" dirty="0"/>
           </a:p>
         </p:txBody>
       </p:sp>
@@ -4218,7 +4218,7 @@
               <a:buNone/>
             </a:pPr>
             <a:r>
-              <a:rPr lang="en-US" sz="1100" dirty="0">
+              <a:rPr lang="en-US" sz="1300" dirty="0">
                 <a:solidFill>
                   <a:srgbClr val="64748B"/>
                 </a:solidFill>
@@ -4228,7 +4228,7 @@
               </a:rPr>
               <a:t>PhDapp · for students</a:t>
             </a:r>
-            <a:endParaRPr lang="en-US" sz="1100" dirty="0"/>
+            <a:endParaRPr lang="en-US" sz="1300" dirty="0"/>
           </a:p>
         </p:txBody>
       </p:sp>
@@ -4257,7 +4257,7 @@
               <a:buNone/>
             </a:pPr>
             <a:r>
-              <a:rPr lang="en-US" sz="1100" dirty="0">
+              <a:rPr lang="en-US" sz="1300" dirty="0">
                 <a:solidFill>
                   <a:srgbClr val="64748B"/>
                 </a:solidFill>
@@ -4267,7 +4267,7 @@
               </a:rPr>
               <a:t>12 / 15</a:t>
             </a:r>
-            <a:endParaRPr lang="en-US" sz="1100" dirty="0"/>
+            <a:endParaRPr lang="en-US" sz="1300" dirty="0"/>
           </a:p>
         </p:txBody>
       </p:sp>
@@ -4397,7 +4397,7 @@
         <p:spPr>
           <a:xfrm>
             <a:off x="1261872" y="749808"/>
-            <a:ext cx="10381183" cy="640080"/>
+            <a:ext cx="10381183" cy="713232"/>
           </a:xfrm>
           <a:prstGeom prst="rect">
             <a:avLst/>
@@ -4413,7 +4413,7 @@
               <a:buNone/>
             </a:pPr>
             <a:r>
-              <a:rPr lang="en-US" sz="3600" b="1" dirty="0">
+              <a:rPr lang="en-US" sz="4000" b="1" dirty="0">
                 <a:solidFill>
                   <a:srgbClr val="0F172A"/>
                 </a:solidFill>
@@ -4423,7 +4423,7 @@
               </a:rPr>
               <a:t>Notifications · where things show up</a:t>
             </a:r>
-            <a:endParaRPr lang="en-US" sz="3600" dirty="0"/>
+            <a:endParaRPr lang="en-US" sz="4000" dirty="0"/>
           </a:p>
         </p:txBody>
       </p:sp>
@@ -4436,7 +4436,7 @@
         <p:spPr>
           <a:xfrm>
             <a:off x="548640" y="1920240"/>
-            <a:ext cx="2697480" cy="1874520"/>
+            <a:ext cx="2697480" cy="2057400"/>
           </a:xfrm>
           <a:prstGeom prst="rect">
             <a:avLst/>
@@ -4468,7 +4468,7 @@
         <p:spPr>
           <a:xfrm>
             <a:off x="548640" y="1920240"/>
-            <a:ext cx="73152" cy="1874520"/>
+            <a:ext cx="73152" cy="2057400"/>
           </a:xfrm>
           <a:prstGeom prst="rect">
             <a:avLst/>
@@ -4488,7 +4488,7 @@
         <p:spPr>
           <a:xfrm>
             <a:off x="749808" y="2084832"/>
-            <a:ext cx="2377440" cy="502920"/>
+            <a:ext cx="2377440" cy="594360"/>
           </a:xfrm>
           <a:prstGeom prst="rect">
             <a:avLst/>
@@ -4504,7 +4504,7 @@
               <a:buNone/>
             </a:pPr>
             <a:r>
-              <a:rPr lang="en-US" sz="1800" b="1" dirty="0">
+              <a:rPr lang="en-US" sz="2200" b="1" dirty="0">
                 <a:solidFill>
                   <a:srgbClr val="0F172A"/>
                 </a:solidFill>
@@ -4514,7 +4514,7 @@
               </a:rPr>
               <a:t>🔔 Bell</a:t>
             </a:r>
-            <a:endParaRPr lang="en-US" sz="1800" dirty="0"/>
+            <a:endParaRPr lang="en-US" sz="2200" dirty="0"/>
           </a:p>
         </p:txBody>
       </p:sp>
@@ -4526,8 +4526,8 @@
         </p:nvSpPr>
         <p:spPr>
           <a:xfrm>
-            <a:off x="749808" y="2468880"/>
-            <a:ext cx="2377440" cy="1188720"/>
+            <a:off x="749808" y="2788920"/>
+            <a:ext cx="2377440" cy="1024128"/>
           </a:xfrm>
           <a:prstGeom prst="rect">
             <a:avLst/>
@@ -4546,7 +4546,7 @@
               <a:buNone/>
             </a:pPr>
             <a:r>
-              <a:rPr lang="en-US" sz="1400" dirty="0">
+              <a:rPr lang="en-US" sz="1800" dirty="0">
                 <a:solidFill>
                   <a:srgbClr val="334155"/>
                 </a:solidFill>
@@ -4554,9 +4554,9 @@
                 <a:ea typeface="Inter" pitchFamily="34" charset="-122"/>
                 <a:cs typeface="Inter" pitchFamily="34" charset="-120"/>
               </a:rPr>
-              <a:t>Recent activity from your supervisors — comments, status changes, new readings, away periods.</a:t>
-            </a:r>
-            <a:endParaRPr lang="en-US" sz="1400" dirty="0"/>
+              <a:t>Supervisor comments, status changes, new readings, away periods.</a:t>
+            </a:r>
+            <a:endParaRPr lang="en-US" sz="1800" dirty="0"/>
           </a:p>
         </p:txBody>
       </p:sp>
@@ -4569,7 +4569,7 @@
         <p:spPr>
           <a:xfrm>
             <a:off x="3429000" y="1920240"/>
-            <a:ext cx="2697480" cy="1874520"/>
+            <a:ext cx="2697480" cy="2057400"/>
           </a:xfrm>
           <a:prstGeom prst="rect">
             <a:avLst/>
@@ -4601,7 +4601,7 @@
         <p:spPr>
           <a:xfrm>
             <a:off x="3429000" y="1920240"/>
-            <a:ext cx="73152" cy="1874520"/>
+            <a:ext cx="73152" cy="2057400"/>
           </a:xfrm>
           <a:prstGeom prst="rect">
             <a:avLst/>
@@ -4621,7 +4621,7 @@
         <p:spPr>
           <a:xfrm>
             <a:off x="3630168" y="2084832"/>
-            <a:ext cx="2377440" cy="502920"/>
+            <a:ext cx="2377440" cy="594360"/>
           </a:xfrm>
           <a:prstGeom prst="rect">
             <a:avLst/>
@@ -4637,7 +4637,7 @@
               <a:buNone/>
             </a:pPr>
             <a:r>
-              <a:rPr lang="en-US" sz="1800" b="1" dirty="0">
+              <a:rPr lang="en-US" sz="2200" b="1" dirty="0">
                 <a:solidFill>
                   <a:srgbClr val="0F172A"/>
                 </a:solidFill>
@@ -4647,7 +4647,7 @@
               </a:rPr>
               <a:t>Sidebar</a:t>
             </a:r>
-            <a:endParaRPr lang="en-US" sz="1800" dirty="0"/>
+            <a:endParaRPr lang="en-US" sz="2200" dirty="0"/>
           </a:p>
         </p:txBody>
       </p:sp>
@@ -4659,8 +4659,8 @@
         </p:nvSpPr>
         <p:spPr>
           <a:xfrm>
-            <a:off x="3630168" y="2468880"/>
-            <a:ext cx="2377440" cy="1188720"/>
+            <a:off x="3630168" y="2788920"/>
+            <a:ext cx="2377440" cy="1024128"/>
           </a:xfrm>
           <a:prstGeom prst="rect">
             <a:avLst/>
@@ -4679,7 +4679,7 @@
               <a:buNone/>
             </a:pPr>
             <a:r>
-              <a:rPr lang="en-US" sz="1400" dirty="0">
+              <a:rPr lang="en-US" sz="1800" dirty="0">
                 <a:solidFill>
                   <a:srgbClr val="334155"/>
                 </a:solidFill>
@@ -4687,9 +4687,9 @@
                 <a:ea typeface="Inter" pitchFamily="34" charset="-122"/>
                 <a:cs typeface="Inter" pitchFamily="34" charset="-120"/>
               </a:rPr>
-              <a:t>Pink dot on Chat (unread), orange on Tasks (new/updates), teal on Calendar.</a:t>
-            </a:r>
-            <a:endParaRPr lang="en-US" sz="1400" dirty="0"/>
+              <a:t>Pink dot on Chat, orange on Tasks, teal on Calendar.</a:t>
+            </a:r>
+            <a:endParaRPr lang="en-US" sz="1800" dirty="0"/>
           </a:p>
         </p:txBody>
       </p:sp>
@@ -4701,8 +4701,8 @@
         </p:nvSpPr>
         <p:spPr>
           <a:xfrm>
-            <a:off x="548640" y="4023360"/>
-            <a:ext cx="2697480" cy="1874520"/>
+            <a:off x="548640" y="4206240"/>
+            <a:ext cx="2697480" cy="2057400"/>
           </a:xfrm>
           <a:prstGeom prst="rect">
             <a:avLst/>
@@ -4733,8 +4733,8 @@
         </p:nvSpPr>
         <p:spPr>
           <a:xfrm>
-            <a:off x="548640" y="4023360"/>
-            <a:ext cx="73152" cy="1874520"/>
+            <a:off x="548640" y="4206240"/>
+            <a:ext cx="73152" cy="2057400"/>
           </a:xfrm>
           <a:prstGeom prst="rect">
             <a:avLst/>
@@ -4753,8 +4753,8 @@
         </p:nvSpPr>
         <p:spPr>
           <a:xfrm>
-            <a:off x="749808" y="4187952"/>
-            <a:ext cx="2377440" cy="502920"/>
+            <a:off x="749808" y="4370832"/>
+            <a:ext cx="2377440" cy="594360"/>
           </a:xfrm>
           <a:prstGeom prst="rect">
             <a:avLst/>
@@ -4770,7 +4770,7 @@
               <a:buNone/>
             </a:pPr>
             <a:r>
-              <a:rPr lang="en-US" sz="1800" b="1" dirty="0">
+              <a:rPr lang="en-US" sz="2200" b="1" dirty="0">
                 <a:solidFill>
                   <a:srgbClr val="0F172A"/>
                 </a:solidFill>
@@ -4780,7 +4780,7 @@
               </a:rPr>
               <a:t>Cards</a:t>
             </a:r>
-            <a:endParaRPr lang="en-US" sz="1800" dirty="0"/>
+            <a:endParaRPr lang="en-US" sz="2200" dirty="0"/>
           </a:p>
         </p:txBody>
       </p:sp>
@@ -4792,8 +4792,8 @@
         </p:nvSpPr>
         <p:spPr>
           <a:xfrm>
-            <a:off x="749808" y="4572000"/>
-            <a:ext cx="2377440" cy="1188720"/>
+            <a:off x="749808" y="5074920"/>
+            <a:ext cx="2377440" cy="1024128"/>
           </a:xfrm>
           <a:prstGeom prst="rect">
             <a:avLst/>
@@ -4812,7 +4812,7 @@
               <a:buNone/>
             </a:pPr>
             <a:r>
-              <a:rPr lang="en-US" sz="1400" dirty="0">
+              <a:rPr lang="en-US" sz="1800" dirty="0">
                 <a:solidFill>
                   <a:srgbClr val="334155"/>
                 </a:solidFill>
@@ -4820,9 +4820,9 @@
                 <a:ea typeface="Inter" pitchFamily="34" charset="-122"/>
                 <a:cs typeface="Inter" pitchFamily="34" charset="-120"/>
               </a:rPr>
-              <a:t>Tasks and events with new activity get a coloured banner / ring until you open them.</a:t>
-            </a:r>
-            <a:endParaRPr lang="en-US" sz="1400" dirty="0"/>
+              <a:t>Coloured banner / ring on tasks and events with new activity.</a:t>
+            </a:r>
+            <a:endParaRPr lang="en-US" sz="1800" dirty="0"/>
           </a:p>
         </p:txBody>
       </p:sp>
@@ -4834,8 +4834,8 @@
         </p:nvSpPr>
         <p:spPr>
           <a:xfrm>
-            <a:off x="3429000" y="4023360"/>
-            <a:ext cx="2697480" cy="1874520"/>
+            <a:off x="3429000" y="4206240"/>
+            <a:ext cx="2697480" cy="2057400"/>
           </a:xfrm>
           <a:prstGeom prst="rect">
             <a:avLst/>
@@ -4866,8 +4866,8 @@
         </p:nvSpPr>
         <p:spPr>
           <a:xfrm>
-            <a:off x="3429000" y="4023360"/>
-            <a:ext cx="73152" cy="1874520"/>
+            <a:off x="3429000" y="4206240"/>
+            <a:ext cx="73152" cy="2057400"/>
           </a:xfrm>
           <a:prstGeom prst="rect">
             <a:avLst/>
@@ -4886,8 +4886,8 @@
         </p:nvSpPr>
         <p:spPr>
           <a:xfrm>
-            <a:off x="3630168" y="4187952"/>
-            <a:ext cx="2377440" cy="502920"/>
+            <a:off x="3630168" y="4370832"/>
+            <a:ext cx="2377440" cy="594360"/>
           </a:xfrm>
           <a:prstGeom prst="rect">
             <a:avLst/>
@@ -4903,7 +4903,7 @@
               <a:buNone/>
             </a:pPr>
             <a:r>
-              <a:rPr lang="en-US" sz="1800" b="1" dirty="0">
+              <a:rPr lang="en-US" sz="2200" b="1" dirty="0">
                 <a:solidFill>
                   <a:srgbClr val="0F172A"/>
                 </a:solidFill>
@@ -4913,7 +4913,7 @@
               </a:rPr>
               <a:t>Tab title</a:t>
             </a:r>
-            <a:endParaRPr lang="en-US" sz="1800" dirty="0"/>
+            <a:endParaRPr lang="en-US" sz="2200" dirty="0"/>
           </a:p>
         </p:txBody>
       </p:sp>
@@ -4925,8 +4925,8 @@
         </p:nvSpPr>
         <p:spPr>
           <a:xfrm>
-            <a:off x="3630168" y="4572000"/>
-            <a:ext cx="2377440" cy="1188720"/>
+            <a:off x="3630168" y="5074920"/>
+            <a:ext cx="2377440" cy="1024128"/>
           </a:xfrm>
           <a:prstGeom prst="rect">
             <a:avLst/>
@@ -4945,7 +4945,7 @@
               <a:buNone/>
             </a:pPr>
             <a:r>
-              <a:rPr lang="en-US" sz="1400" dirty="0">
+              <a:rPr lang="en-US" sz="1800" dirty="0">
                 <a:solidFill>
                   <a:srgbClr val="334155"/>
                 </a:solidFill>
@@ -4953,9 +4953,9 @@
                 <a:ea typeface="Inter" pitchFamily="34" charset="-122"/>
                 <a:cs typeface="Inter" pitchFamily="34" charset="-120"/>
               </a:rPr>
-              <a:t>Browser tab + favicon update when chat is unread, even when the tab isn't focused.</a:t>
-            </a:r>
-            <a:endParaRPr lang="en-US" sz="1400" dirty="0"/>
+              <a:t>Tab title + favicon update when chat is unread.</a:t>
+            </a:r>
+            <a:endParaRPr lang="en-US" sz="1800" dirty="0"/>
           </a:p>
         </p:txBody>
       </p:sp>
@@ -4968,7 +4968,7 @@
         <p:spPr>
           <a:xfrm>
             <a:off x="6309360" y="1920240"/>
-            <a:ext cx="5333695" cy="3977640"/>
+            <a:ext cx="5333695" cy="4343400"/>
           </a:xfrm>
           <a:prstGeom prst="rect">
             <a:avLst/>
@@ -5000,7 +5000,7 @@
         <p:spPr>
           <a:xfrm>
             <a:off x="6309360" y="1920240"/>
-            <a:ext cx="73152" cy="3977640"/>
+            <a:ext cx="73152" cy="4343400"/>
           </a:xfrm>
           <a:prstGeom prst="rect">
             <a:avLst/>
@@ -5020,7 +5020,7 @@
         <p:spPr>
           <a:xfrm>
             <a:off x="6510528" y="2084832"/>
-            <a:ext cx="5013655" cy="502920"/>
+            <a:ext cx="5013655" cy="594360"/>
           </a:xfrm>
           <a:prstGeom prst="rect">
             <a:avLst/>
@@ -5036,7 +5036,7 @@
               <a:buNone/>
             </a:pPr>
             <a:r>
-              <a:rPr lang="en-US" sz="1800" b="1" dirty="0">
+              <a:rPr lang="en-US" sz="2200" b="1" dirty="0">
                 <a:solidFill>
                   <a:srgbClr val="0F172A"/>
                 </a:solidFill>
@@ -5044,9 +5044,9 @@
                 <a:ea typeface="Inter" pitchFamily="34" charset="-122"/>
                 <a:cs typeface="Inter" pitchFamily="34" charset="-120"/>
               </a:rPr>
-              <a:t>You're directly notified when a supervisor…</a:t>
-            </a:r>
-            <a:endParaRPr lang="en-US" sz="1800" dirty="0"/>
+              <a:t>When a supervisor…</a:t>
+            </a:r>
+            <a:endParaRPr lang="en-US" sz="2200" dirty="0"/>
           </a:p>
         </p:txBody>
       </p:sp>
@@ -5058,8 +5058,8 @@
         </p:nvSpPr>
         <p:spPr>
           <a:xfrm>
-            <a:off x="6510528" y="2560320"/>
-            <a:ext cx="5013655" cy="2926080"/>
+            <a:off x="6510528" y="2788920"/>
+            <a:ext cx="4967935" cy="2971800"/>
           </a:xfrm>
           <a:prstGeom prst="rect">
             <a:avLst/>
@@ -5073,13 +5073,13 @@
           <a:p>
             <a:pPr marL="342900" indent="-342900">
               <a:spcAft>
-                <a:spcPts val="400"/>
+                <a:spcPts val="600"/>
               </a:spcAft>
               <a:buSzPct val="100000"/>
               <a:buChar char="•"/>
             </a:pPr>
             <a:r>
-              <a:rPr lang="en-US" sz="1200" dirty="0">
+              <a:rPr lang="en-US" sz="1800" dirty="0">
                 <a:solidFill>
                   <a:srgbClr val="334155"/>
                 </a:solidFill>
@@ -5087,20 +5087,20 @@
                 <a:ea typeface="Inter" pitchFamily="34" charset="-122"/>
                 <a:cs typeface="Inter" pitchFamily="34" charset="-120"/>
               </a:rPr>
-              <a:t>comments on your task</a:t>
-            </a:r>
-            <a:endParaRPr lang="en-US" sz="1200" dirty="0"/>
+              <a:t>comments on your task,</a:t>
+            </a:r>
+            <a:endParaRPr lang="en-US" sz="1800" dirty="0"/>
           </a:p>
           <a:p>
             <a:pPr marL="342900" indent="-342900">
               <a:spcAft>
-                <a:spcPts val="400"/>
+                <a:spcPts val="600"/>
               </a:spcAft>
               <a:buSzPct val="100000"/>
               <a:buChar char="•"/>
             </a:pPr>
             <a:r>
-              <a:rPr lang="en-US" sz="1200" dirty="0">
+              <a:rPr lang="en-US" sz="1800" dirty="0">
                 <a:solidFill>
                   <a:srgbClr val="334155"/>
                 </a:solidFill>
@@ -5108,20 +5108,20 @@
                 <a:ea typeface="Inter" pitchFamily="34" charset="-122"/>
                 <a:cs typeface="Inter" pitchFamily="34" charset="-120"/>
               </a:rPr>
-              <a:t>changes its status (e.g. moves it to In progress, Review or Done)</a:t>
-            </a:r>
-            <a:endParaRPr lang="en-US" sz="1200" dirty="0"/>
+              <a:t>changes its status, priority, due date or assignee,</a:t>
+            </a:r>
+            <a:endParaRPr lang="en-US" sz="1800" dirty="0"/>
           </a:p>
           <a:p>
             <a:pPr marL="342900" indent="-342900">
               <a:spcAft>
-                <a:spcPts val="400"/>
+                <a:spcPts val="600"/>
               </a:spcAft>
               <a:buSzPct val="100000"/>
               <a:buChar char="•"/>
             </a:pPr>
             <a:r>
-              <a:rPr lang="en-US" sz="1200" dirty="0">
+              <a:rPr lang="en-US" sz="1800" dirty="0">
                 <a:solidFill>
                   <a:srgbClr val="334155"/>
                 </a:solidFill>
@@ -5129,20 +5129,20 @@
                 <a:ea typeface="Inter" pitchFamily="34" charset="-122"/>
                 <a:cs typeface="Inter" pitchFamily="34" charset="-120"/>
               </a:rPr>
-              <a:t>changes priority, assignee, due date or dependencies</a:t>
-            </a:r>
-            <a:endParaRPr lang="en-US" sz="1200" dirty="0"/>
+              <a:t>responds to your completion request,</a:t>
+            </a:r>
+            <a:endParaRPr lang="en-US" sz="1800" dirty="0"/>
           </a:p>
           <a:p>
             <a:pPr marL="342900" indent="-342900">
               <a:spcAft>
-                <a:spcPts val="400"/>
+                <a:spcPts val="600"/>
               </a:spcAft>
               <a:buSzPct val="100000"/>
               <a:buChar char="•"/>
             </a:pPr>
             <a:r>
-              <a:rPr lang="en-US" sz="1200" dirty="0">
+              <a:rPr lang="en-US" sz="1800" dirty="0">
                 <a:solidFill>
                   <a:srgbClr val="334155"/>
                 </a:solidFill>
@@ -5150,20 +5150,20 @@
                 <a:ea typeface="Inter" pitchFamily="34" charset="-122"/>
                 <a:cs typeface="Inter" pitchFamily="34" charset="-120"/>
               </a:rPr>
-              <a:t>responds to your completion request</a:t>
-            </a:r>
-            <a:endParaRPr lang="en-US" sz="1200" dirty="0"/>
+              <a:t>approves / rejects a paper you proposed,</a:t>
+            </a:r>
+            <a:endParaRPr lang="en-US" sz="1800" dirty="0"/>
           </a:p>
           <a:p>
             <a:pPr marL="342900" indent="-342900">
               <a:spcAft>
-                <a:spcPts val="400"/>
+                <a:spcPts val="600"/>
               </a:spcAft>
               <a:buSzPct val="100000"/>
               <a:buChar char="•"/>
             </a:pPr>
             <a:r>
-              <a:rPr lang="en-US" sz="1200" dirty="0">
+              <a:rPr lang="en-US" sz="1800" dirty="0">
                 <a:solidFill>
                   <a:srgbClr val="334155"/>
                 </a:solidFill>
@@ -5171,9 +5171,9 @@
                 <a:ea typeface="Inter" pitchFamily="34" charset="-122"/>
                 <a:cs typeface="Inter" pitchFamily="34" charset="-120"/>
               </a:rPr>
-              <a:t>approves / rejects a paper you proposed in Reading</a:t>
-            </a:r>
-            <a:endParaRPr lang="en-US" sz="1200" dirty="0"/>
+              <a:t>you get a 🔔 + email (if configured).</a:t>
+            </a:r>
+            <a:endParaRPr lang="en-US" sz="1800" dirty="0"/>
           </a:p>
         </p:txBody>
       </p:sp>
@@ -5185,8 +5185,8 @@
         </p:nvSpPr>
         <p:spPr>
           <a:xfrm>
-            <a:off x="6510528" y="5349240"/>
-            <a:ext cx="5013655" cy="502920"/>
+            <a:off x="6510528" y="5760720"/>
+            <a:ext cx="4967935" cy="457200"/>
           </a:xfrm>
           <a:prstGeom prst="rect">
             <a:avLst/>
@@ -5202,7 +5202,7 @@
               <a:buNone/>
             </a:pPr>
             <a:r>
-              <a:rPr lang="en-US" sz="1200" i="1" dirty="0">
+              <a:rPr lang="en-US" sz="1800" i="1" dirty="0">
                 <a:solidFill>
                   <a:srgbClr val="64748B"/>
                 </a:solidFill>
@@ -5210,9 +5210,9 @@
                 <a:ea typeface="Inter" pitchFamily="34" charset="-122"/>
                 <a:cs typeface="Inter" pitchFamily="34" charset="-120"/>
               </a:rPr>
-              <a:t>In-app + email (if Resend is configured). Minor text edits stay silent.</a:t>
-            </a:r>
-            <a:endParaRPr lang="en-US" sz="1200" dirty="0"/>
+              <a:t>Minor text edits stay silent.</a:t>
+            </a:r>
+            <a:endParaRPr lang="en-US" sz="1800" dirty="0"/>
           </a:p>
         </p:txBody>
       </p:sp>
@@ -5264,7 +5264,7 @@
               <a:buNone/>
             </a:pPr>
             <a:r>
-              <a:rPr lang="en-US" sz="1100" dirty="0">
+              <a:rPr lang="en-US" sz="1300" dirty="0">
                 <a:solidFill>
                   <a:srgbClr val="64748B"/>
                 </a:solidFill>
@@ -5274,7 +5274,7 @@
               </a:rPr>
               <a:t>PhDapp · for students</a:t>
             </a:r>
-            <a:endParaRPr lang="en-US" sz="1100" dirty="0"/>
+            <a:endParaRPr lang="en-US" sz="1300" dirty="0"/>
           </a:p>
         </p:txBody>
       </p:sp>
@@ -5303,7 +5303,7 @@
               <a:buNone/>
             </a:pPr>
             <a:r>
-              <a:rPr lang="en-US" sz="1100" dirty="0">
+              <a:rPr lang="en-US" sz="1300" dirty="0">
                 <a:solidFill>
                   <a:srgbClr val="64748B"/>
                 </a:solidFill>
@@ -5313,7 +5313,7 @@
               </a:rPr>
               <a:t>13 / 15</a:t>
             </a:r>
-            <a:endParaRPr lang="en-US" sz="1100" dirty="0"/>
+            <a:endParaRPr lang="en-US" sz="1300" dirty="0"/>
           </a:p>
         </p:txBody>
       </p:sp>
@@ -5443,7 +5443,7 @@
         <p:spPr>
           <a:xfrm>
             <a:off x="1261872" y="749808"/>
-            <a:ext cx="10381183" cy="640080"/>
+            <a:ext cx="10381183" cy="713232"/>
           </a:xfrm>
           <a:prstGeom prst="rect">
             <a:avLst/>
@@ -5459,7 +5459,7 @@
               <a:buNone/>
             </a:pPr>
             <a:r>
-              <a:rPr lang="en-US" sz="3600" b="1" dirty="0">
+              <a:rPr lang="en-US" sz="4000" b="1" dirty="0">
                 <a:solidFill>
                   <a:srgbClr val="0F172A"/>
                 </a:solidFill>
@@ -5469,7 +5469,7 @@
               </a:rPr>
               <a:t>Feedback to the admin</a:t>
             </a:r>
-            <a:endParaRPr lang="en-US" sz="3600" dirty="0"/>
+            <a:endParaRPr lang="en-US" sz="4000" dirty="0"/>
           </a:p>
         </p:txBody>
       </p:sp>
@@ -5482,7 +5482,7 @@
         <p:spPr>
           <a:xfrm>
             <a:off x="548640" y="1508760"/>
-            <a:ext cx="11094415" cy="731520"/>
+            <a:ext cx="11094415" cy="822960"/>
           </a:xfrm>
           <a:prstGeom prst="rect">
             <a:avLst/>
@@ -5498,7 +5498,7 @@
               <a:buNone/>
             </a:pPr>
             <a:r>
-              <a:rPr lang="en-US" sz="1600" i="1" dirty="0">
+              <a:rPr lang="en-US" sz="2000" i="1" dirty="0">
                 <a:solidFill>
                   <a:srgbClr val="334155"/>
                 </a:solidFill>
@@ -5508,7 +5508,7 @@
               </a:rPr>
               <a:t>Bug? Idea? Anything else? Send it directly — no email needed.</a:t>
             </a:r>
-            <a:endParaRPr lang="en-US" sz="1600" dirty="0"/>
+            <a:endParaRPr lang="en-US" sz="2000" dirty="0"/>
           </a:p>
         </p:txBody>
       </p:sp>
@@ -5521,7 +5521,7 @@
         <p:spPr>
           <a:xfrm>
             <a:off x="548640" y="1828800"/>
-            <a:ext cx="5486400" cy="3291840"/>
+            <a:ext cx="5486400" cy="3931920"/>
           </a:xfrm>
           <a:prstGeom prst="rect">
             <a:avLst/>
@@ -5553,7 +5553,7 @@
         <p:spPr>
           <a:xfrm>
             <a:off x="548640" y="1828800"/>
-            <a:ext cx="73152" cy="3291840"/>
+            <a:ext cx="73152" cy="3931920"/>
           </a:xfrm>
           <a:prstGeom prst="rect">
             <a:avLst/>
@@ -5573,7 +5573,7 @@
         <p:spPr>
           <a:xfrm>
             <a:off x="749808" y="1993392"/>
-            <a:ext cx="5166360" cy="502920"/>
+            <a:ext cx="5166360" cy="594360"/>
           </a:xfrm>
           <a:prstGeom prst="rect">
             <a:avLst/>
@@ -5589,7 +5589,7 @@
               <a:buNone/>
             </a:pPr>
             <a:r>
-              <a:rPr lang="en-US" sz="1800" b="1" dirty="0">
+              <a:rPr lang="en-US" sz="2200" b="1" dirty="0">
                 <a:solidFill>
                   <a:srgbClr val="0F172A"/>
                 </a:solidFill>
@@ -5599,7 +5599,7 @@
               </a:rPr>
               <a:t>Send a message</a:t>
             </a:r>
-            <a:endParaRPr lang="en-US" sz="1800" dirty="0"/>
+            <a:endParaRPr lang="en-US" sz="2200" dirty="0"/>
           </a:p>
         </p:txBody>
       </p:sp>
@@ -5611,8 +5611,8 @@
         </p:nvSpPr>
         <p:spPr>
           <a:xfrm>
-            <a:off x="777240" y="2377440"/>
-            <a:ext cx="5074920" cy="2651760"/>
+            <a:off x="777240" y="2697480"/>
+            <a:ext cx="5074920" cy="2926080"/>
           </a:xfrm>
           <a:prstGeom prst="rect">
             <a:avLst/>
@@ -5626,13 +5626,13 @@
           <a:p>
             <a:pPr marL="342900" indent="-342900">
               <a:spcAft>
-                <a:spcPts val="400"/>
+                <a:spcPts val="600"/>
               </a:spcAft>
               <a:buSzPct val="100000"/>
               <a:buChar char="•"/>
             </a:pPr>
             <a:r>
-              <a:rPr lang="en-US" sz="1300" dirty="0">
+              <a:rPr lang="en-US" sz="1800" dirty="0">
                 <a:solidFill>
                   <a:srgbClr val="334155"/>
                 </a:solidFill>
@@ -5642,18 +5642,18 @@
               </a:rPr>
               <a:t>Pick a type: Bug · Suggestion · Other.</a:t>
             </a:r>
-            <a:endParaRPr lang="en-US" sz="1300" dirty="0"/>
+            <a:endParaRPr lang="en-US" sz="1800" dirty="0"/>
           </a:p>
           <a:p>
             <a:pPr marL="342900" indent="-342900">
               <a:spcAft>
-                <a:spcPts val="400"/>
+                <a:spcPts val="600"/>
               </a:spcAft>
               <a:buSzPct val="100000"/>
               <a:buChar char="•"/>
             </a:pPr>
             <a:r>
-              <a:rPr lang="en-US" sz="1300" dirty="0">
+              <a:rPr lang="en-US" sz="1800" dirty="0">
                 <a:solidFill>
                   <a:srgbClr val="334155"/>
                 </a:solidFill>
@@ -5663,18 +5663,18 @@
               </a:rPr>
               <a:t>Add a subject and a message.</a:t>
             </a:r>
-            <a:endParaRPr lang="en-US" sz="1300" dirty="0"/>
+            <a:endParaRPr lang="en-US" sz="1800" dirty="0"/>
           </a:p>
           <a:p>
             <a:pPr marL="342900" indent="-342900">
               <a:spcAft>
-                <a:spcPts val="400"/>
+                <a:spcPts val="600"/>
               </a:spcAft>
               <a:buSzPct val="100000"/>
               <a:buChar char="•"/>
             </a:pPr>
             <a:r>
-              <a:rPr lang="en-US" sz="1300" dirty="0">
+              <a:rPr lang="en-US" sz="1800" dirty="0">
                 <a:solidFill>
                   <a:srgbClr val="334155"/>
                 </a:solidFill>
@@ -5684,18 +5684,18 @@
               </a:rPr>
               <a:t>Optionally attach a photo / screenshot.</a:t>
             </a:r>
-            <a:endParaRPr lang="en-US" sz="1300" dirty="0"/>
+            <a:endParaRPr lang="en-US" sz="1800" dirty="0"/>
           </a:p>
           <a:p>
             <a:pPr marL="342900" indent="-342900">
               <a:spcAft>
-                <a:spcPts val="400"/>
+                <a:spcPts val="600"/>
               </a:spcAft>
               <a:buSzPct val="100000"/>
               <a:buChar char="•"/>
             </a:pPr>
             <a:r>
-              <a:rPr lang="en-US" sz="1300" dirty="0">
+              <a:rPr lang="en-US" sz="1800" dirty="0">
                 <a:solidFill>
                   <a:srgbClr val="334155"/>
                 </a:solidFill>
@@ -5705,7 +5705,7 @@
               </a:rPr>
               <a:t>Send to admin — they're notified instantly.</a:t>
             </a:r>
-            <a:endParaRPr lang="en-US" sz="1300" dirty="0"/>
+            <a:endParaRPr lang="en-US" sz="1800" dirty="0"/>
           </a:p>
         </p:txBody>
       </p:sp>
@@ -5718,7 +5718,7 @@
         <p:spPr>
           <a:xfrm>
             <a:off x="6400800" y="1828800"/>
-            <a:ext cx="5242255" cy="3291840"/>
+            <a:ext cx="5242255" cy="3931920"/>
           </a:xfrm>
           <a:prstGeom prst="rect">
             <a:avLst/>
@@ -5750,7 +5750,7 @@
         <p:spPr>
           <a:xfrm>
             <a:off x="6400800" y="1828800"/>
-            <a:ext cx="73152" cy="3291840"/>
+            <a:ext cx="73152" cy="3931920"/>
           </a:xfrm>
           <a:prstGeom prst="rect">
             <a:avLst/>
@@ -5770,7 +5770,7 @@
         <p:spPr>
           <a:xfrm>
             <a:off x="6601968" y="1993392"/>
-            <a:ext cx="4922215" cy="502920"/>
+            <a:ext cx="4922215" cy="594360"/>
           </a:xfrm>
           <a:prstGeom prst="rect">
             <a:avLst/>
@@ -5786,7 +5786,7 @@
               <a:buNone/>
             </a:pPr>
             <a:r>
-              <a:rPr lang="en-US" sz="1800" b="1" dirty="0">
+              <a:rPr lang="en-US" sz="2200" b="1" dirty="0">
                 <a:solidFill>
                   <a:srgbClr val="0F172A"/>
                 </a:solidFill>
@@ -5796,7 +5796,7 @@
               </a:rPr>
               <a:t>Track responses</a:t>
             </a:r>
-            <a:endParaRPr lang="en-US" sz="1800" dirty="0"/>
+            <a:endParaRPr lang="en-US" sz="2200" dirty="0"/>
           </a:p>
         </p:txBody>
       </p:sp>
@@ -5808,8 +5808,8 @@
         </p:nvSpPr>
         <p:spPr>
           <a:xfrm>
-            <a:off x="6629400" y="2377440"/>
-            <a:ext cx="4876495" cy="2651760"/>
+            <a:off x="6629400" y="2697480"/>
+            <a:ext cx="4876495" cy="2926080"/>
           </a:xfrm>
           <a:prstGeom prst="rect">
             <a:avLst/>
@@ -5823,13 +5823,13 @@
           <a:p>
             <a:pPr marL="342900" indent="-342900">
               <a:spcAft>
-                <a:spcPts val="400"/>
+                <a:spcPts val="600"/>
               </a:spcAft>
               <a:buSzPct val="100000"/>
               <a:buChar char="•"/>
             </a:pPr>
             <a:r>
-              <a:rPr lang="en-US" sz="1300" dirty="0">
+              <a:rPr lang="en-US" sz="1800" dirty="0">
                 <a:solidFill>
                   <a:srgbClr val="334155"/>
                 </a:solidFill>
@@ -5839,18 +5839,18 @@
               </a:rPr>
               <a:t>Each item gets a status: Open / Planned / In progress / Done / Declined.</a:t>
             </a:r>
-            <a:endParaRPr lang="en-US" sz="1300" dirty="0"/>
+            <a:endParaRPr lang="en-US" sz="1800" dirty="0"/>
           </a:p>
           <a:p>
             <a:pPr marL="342900" indent="-342900">
               <a:spcAft>
-                <a:spcPts val="400"/>
+                <a:spcPts val="600"/>
               </a:spcAft>
               <a:buSzPct val="100000"/>
               <a:buChar char="•"/>
             </a:pPr>
             <a:r>
-              <a:rPr lang="en-US" sz="1300" dirty="0">
+              <a:rPr lang="en-US" sz="1800" dirty="0">
                 <a:solidFill>
                   <a:srgbClr val="334155"/>
                 </a:solidFill>
@@ -5860,18 +5860,18 @@
               </a:rPr>
               <a:t>The admin's reply shows under your message.</a:t>
             </a:r>
-            <a:endParaRPr lang="en-US" sz="1300" dirty="0"/>
+            <a:endParaRPr lang="en-US" sz="1800" dirty="0"/>
           </a:p>
           <a:p>
             <a:pPr marL="342900" indent="-342900">
               <a:spcAft>
-                <a:spcPts val="400"/>
+                <a:spcPts val="600"/>
               </a:spcAft>
               <a:buSzPct val="100000"/>
               <a:buChar char="•"/>
             </a:pPr>
             <a:r>
-              <a:rPr lang="en-US" sz="1300" dirty="0">
+              <a:rPr lang="en-US" sz="1800" dirty="0">
                 <a:solidFill>
                   <a:srgbClr val="334155"/>
                 </a:solidFill>
@@ -5881,18 +5881,18 @@
               </a:rPr>
               <a:t>You get a sidebar badge + email when they respond.</a:t>
             </a:r>
-            <a:endParaRPr lang="en-US" sz="1300" dirty="0"/>
+            <a:endParaRPr lang="en-US" sz="1800" dirty="0"/>
           </a:p>
           <a:p>
             <a:pPr marL="342900" indent="-342900">
               <a:spcAft>
-                <a:spcPts val="400"/>
+                <a:spcPts val="600"/>
               </a:spcAft>
               <a:buSzPct val="100000"/>
               <a:buChar char="•"/>
             </a:pPr>
             <a:r>
-              <a:rPr lang="en-US" sz="1300" dirty="0">
+              <a:rPr lang="en-US" sz="1800" dirty="0">
                 <a:solidFill>
                   <a:srgbClr val="334155"/>
                 </a:solidFill>
@@ -5902,7 +5902,7 @@
               </a:rPr>
               <a:t>Collapse old entries to keep the list tidy (it remembers across visits).</a:t>
             </a:r>
-            <a:endParaRPr lang="en-US" sz="1300" dirty="0"/>
+            <a:endParaRPr lang="en-US" sz="1800" dirty="0"/>
           </a:p>
         </p:txBody>
       </p:sp>
@@ -5954,7 +5954,7 @@
               <a:buNone/>
             </a:pPr>
             <a:r>
-              <a:rPr lang="en-US" sz="1100" dirty="0">
+              <a:rPr lang="en-US" sz="1300" dirty="0">
                 <a:solidFill>
                   <a:srgbClr val="64748B"/>
                 </a:solidFill>
@@ -5964,7 +5964,7 @@
               </a:rPr>
               <a:t>PhDapp · for students</a:t>
             </a:r>
-            <a:endParaRPr lang="en-US" sz="1100" dirty="0"/>
+            <a:endParaRPr lang="en-US" sz="1300" dirty="0"/>
           </a:p>
         </p:txBody>
       </p:sp>
@@ -5993,7 +5993,7 @@
               <a:buNone/>
             </a:pPr>
             <a:r>
-              <a:rPr lang="en-US" sz="1100" dirty="0">
+              <a:rPr lang="en-US" sz="1300" dirty="0">
                 <a:solidFill>
                   <a:srgbClr val="64748B"/>
                 </a:solidFill>
@@ -6003,7 +6003,7 @@
               </a:rPr>
               <a:t>14 / 15</a:t>
             </a:r>
-            <a:endParaRPr lang="en-US" sz="1100" dirty="0"/>
+            <a:endParaRPr lang="en-US" sz="1300" dirty="0"/>
           </a:p>
         </p:txBody>
       </p:sp>
@@ -6133,7 +6133,7 @@
         <p:spPr>
           <a:xfrm>
             <a:off x="1261872" y="749808"/>
-            <a:ext cx="10381183" cy="640080"/>
+            <a:ext cx="10381183" cy="713232"/>
           </a:xfrm>
           <a:prstGeom prst="rect">
             <a:avLst/>
@@ -6149,7 +6149,7 @@
               <a:buNone/>
             </a:pPr>
             <a:r>
-              <a:rPr lang="en-US" sz="3600" b="1" dirty="0">
+              <a:rPr lang="en-US" sz="4000" b="1" dirty="0">
                 <a:solidFill>
                   <a:srgbClr val="0F172A"/>
                 </a:solidFill>
@@ -6159,7 +6159,7 @@
               </a:rPr>
               <a:t>Tips · and if something breaks</a:t>
             </a:r>
-            <a:endParaRPr lang="en-US" sz="3600" dirty="0"/>
+            <a:endParaRPr lang="en-US" sz="4000" dirty="0"/>
           </a:p>
         </p:txBody>
       </p:sp>
@@ -6172,7 +6172,7 @@
         <p:spPr>
           <a:xfrm>
             <a:off x="548640" y="1828800"/>
-            <a:ext cx="5486400" cy="3291840"/>
+            <a:ext cx="5486400" cy="3931920"/>
           </a:xfrm>
           <a:prstGeom prst="rect">
             <a:avLst/>
@@ -6204,7 +6204,7 @@
         <p:spPr>
           <a:xfrm>
             <a:off x="548640" y="1828800"/>
-            <a:ext cx="73152" cy="3291840"/>
+            <a:ext cx="73152" cy="3931920"/>
           </a:xfrm>
           <a:prstGeom prst="rect">
             <a:avLst/>
@@ -6224,7 +6224,7 @@
         <p:spPr>
           <a:xfrm>
             <a:off x="749808" y="1993392"/>
-            <a:ext cx="5166360" cy="502920"/>
+            <a:ext cx="5166360" cy="594360"/>
           </a:xfrm>
           <a:prstGeom prst="rect">
             <a:avLst/>
@@ -6240,7 +6240,7 @@
               <a:buNone/>
             </a:pPr>
             <a:r>
-              <a:rPr lang="en-US" sz="1800" b="1" dirty="0">
+              <a:rPr lang="en-US" sz="2200" b="1" dirty="0">
                 <a:solidFill>
                   <a:srgbClr val="0F172A"/>
                 </a:solidFill>
@@ -6250,7 +6250,7 @@
               </a:rPr>
               <a:t>Tips</a:t>
             </a:r>
-            <a:endParaRPr lang="en-US" sz="1800" dirty="0"/>
+            <a:endParaRPr lang="en-US" sz="2200" dirty="0"/>
           </a:p>
         </p:txBody>
       </p:sp>
@@ -6262,8 +6262,8 @@
         </p:nvSpPr>
         <p:spPr>
           <a:xfrm>
-            <a:off x="777240" y="2377440"/>
-            <a:ext cx="5074920" cy="2651760"/>
+            <a:off x="777240" y="2697480"/>
+            <a:ext cx="5074920" cy="2926080"/>
           </a:xfrm>
           <a:prstGeom prst="rect">
             <a:avLst/>
@@ -6277,13 +6277,13 @@
           <a:p>
             <a:pPr marL="342900" indent="-342900">
               <a:spcAft>
-                <a:spcPts val="400"/>
+                <a:spcPts val="600"/>
               </a:spcAft>
               <a:buSzPct val="100000"/>
               <a:buChar char="•"/>
             </a:pPr>
             <a:r>
-              <a:rPr lang="en-US" sz="1300" dirty="0">
+              <a:rPr lang="en-US" sz="1800" dirty="0">
                 <a:solidFill>
                   <a:srgbClr val="334155"/>
                 </a:solidFill>
@@ -6291,20 +6291,20 @@
                 <a:ea typeface="Inter" pitchFamily="34" charset="-122"/>
                 <a:cs typeface="Inter" pitchFamily="34" charset="-120"/>
               </a:rPr>
-              <a:t>Keep the tab open while you work — fewer notifications missed.</a:t>
-            </a:r>
-            <a:endParaRPr lang="en-US" sz="1300" dirty="0"/>
+              <a:t>Keep the tab open — fewer missed alerts.</a:t>
+            </a:r>
+            <a:endParaRPr lang="en-US" sz="1800" dirty="0"/>
           </a:p>
           <a:p>
             <a:pPr marL="342900" indent="-342900">
               <a:spcAft>
-                <a:spcPts val="400"/>
+                <a:spcPts val="600"/>
               </a:spcAft>
               <a:buSzPct val="100000"/>
               <a:buChar char="•"/>
             </a:pPr>
             <a:r>
-              <a:rPr lang="en-US" sz="1300" dirty="0">
+              <a:rPr lang="en-US" sz="1800" dirty="0">
                 <a:solidFill>
                   <a:srgbClr val="334155"/>
                 </a:solidFill>
@@ -6312,20 +6312,20 @@
                 <a:ea typeface="Inter" pitchFamily="34" charset="-122"/>
                 <a:cs typeface="Inter" pitchFamily="34" charset="-120"/>
               </a:rPr>
-              <a:t>Use channels for back-and-forth; comments for task-specific points.</a:t>
-            </a:r>
-            <a:endParaRPr lang="en-US" sz="1300" dirty="0"/>
+              <a:t>Channels for back-and-forth; comments for tasks.</a:t>
+            </a:r>
+            <a:endParaRPr lang="en-US" sz="1800" dirty="0"/>
           </a:p>
           <a:p>
             <a:pPr marL="342900" indent="-342900">
               <a:spcAft>
-                <a:spcPts val="400"/>
+                <a:spcPts val="600"/>
               </a:spcAft>
               <a:buSzPct val="100000"/>
               <a:buChar char="•"/>
             </a:pPr>
             <a:r>
-              <a:rPr lang="en-US" sz="1300" dirty="0">
+              <a:rPr lang="en-US" sz="1800" dirty="0">
                 <a:solidFill>
                   <a:srgbClr val="334155"/>
                 </a:solidFill>
@@ -6333,20 +6333,20 @@
                 <a:ea typeface="Inter" pitchFamily="34" charset="-122"/>
                 <a:cs typeface="Inter" pitchFamily="34" charset="-120"/>
               </a:rPr>
-              <a:t>Always tag tasks with priority + due date — your dashboard and Gantt depend on it.</a:t>
-            </a:r>
-            <a:endParaRPr lang="en-US" sz="1300" dirty="0"/>
+              <a:t>Tag tasks with priority + due date.</a:t>
+            </a:r>
+            <a:endParaRPr lang="en-US" sz="1800" dirty="0"/>
           </a:p>
           <a:p>
             <a:pPr marL="342900" indent="-342900">
               <a:spcAft>
-                <a:spcPts val="400"/>
+                <a:spcPts val="600"/>
               </a:spcAft>
               <a:buSzPct val="100000"/>
               <a:buChar char="•"/>
             </a:pPr>
             <a:r>
-              <a:rPr lang="en-US" sz="1300" dirty="0">
+              <a:rPr lang="en-US" sz="1800" dirty="0">
                 <a:solidFill>
                   <a:srgbClr val="334155"/>
                 </a:solidFill>
@@ -6354,20 +6354,20 @@
                 <a:ea typeface="Inter" pitchFamily="34" charset="-122"/>
                 <a:cs typeface="Inter" pitchFamily="34" charset="-120"/>
               </a:rPr>
-              <a:t>Drop a weekly check-in even if the week was quiet.</a:t>
-            </a:r>
-            <a:endParaRPr lang="en-US" sz="1300" dirty="0"/>
+              <a:t>Drop a weekly check-in even if quiet.</a:t>
+            </a:r>
+            <a:endParaRPr lang="en-US" sz="1800" dirty="0"/>
           </a:p>
           <a:p>
             <a:pPr marL="342900" indent="-342900">
               <a:spcAft>
-                <a:spcPts val="400"/>
+                <a:spcPts val="600"/>
               </a:spcAft>
               <a:buSzPct val="100000"/>
               <a:buChar char="•"/>
             </a:pPr>
             <a:r>
-              <a:rPr lang="en-US" sz="1300" dirty="0">
+              <a:rPr lang="en-US" sz="1800" dirty="0">
                 <a:solidFill>
                   <a:srgbClr val="334155"/>
                 </a:solidFill>
@@ -6375,9 +6375,9 @@
                 <a:ea typeface="Inter" pitchFamily="34" charset="-122"/>
                 <a:cs typeface="Inter" pitchFamily="34" charset="-120"/>
               </a:rPr>
-              <a:t>Right-click events to add to your own Google Calendar / iCal.</a:t>
-            </a:r>
-            <a:endParaRPr lang="en-US" sz="1300" dirty="0"/>
+              <a:t>Right-click events → add to your iCal / Calendar.</a:t>
+            </a:r>
+            <a:endParaRPr lang="en-US" sz="1800" dirty="0"/>
           </a:p>
         </p:txBody>
       </p:sp>
@@ -6390,7 +6390,7 @@
         <p:spPr>
           <a:xfrm>
             <a:off x="6400800" y="1828800"/>
-            <a:ext cx="5242255" cy="3291840"/>
+            <a:ext cx="5242255" cy="3931920"/>
           </a:xfrm>
           <a:prstGeom prst="rect">
             <a:avLst/>
@@ -6422,7 +6422,7 @@
         <p:spPr>
           <a:xfrm>
             <a:off x="6400800" y="1828800"/>
-            <a:ext cx="73152" cy="3291840"/>
+            <a:ext cx="73152" cy="3931920"/>
           </a:xfrm>
           <a:prstGeom prst="rect">
             <a:avLst/>
@@ -6442,7 +6442,7 @@
         <p:spPr>
           <a:xfrm>
             <a:off x="6601968" y="1993392"/>
-            <a:ext cx="4922215" cy="502920"/>
+            <a:ext cx="4922215" cy="594360"/>
           </a:xfrm>
           <a:prstGeom prst="rect">
             <a:avLst/>
@@ -6458,7 +6458,7 @@
               <a:buNone/>
             </a:pPr>
             <a:r>
-              <a:rPr lang="en-US" sz="1800" b="1" dirty="0">
+              <a:rPr lang="en-US" sz="2200" b="1" dirty="0">
                 <a:solidFill>
                   <a:srgbClr val="0F172A"/>
                 </a:solidFill>
@@ -6468,7 +6468,7 @@
               </a:rPr>
               <a:t>If something breaks</a:t>
             </a:r>
-            <a:endParaRPr lang="en-US" sz="1800" dirty="0"/>
+            <a:endParaRPr lang="en-US" sz="2200" dirty="0"/>
           </a:p>
         </p:txBody>
       </p:sp>
@@ -6480,8 +6480,8 @@
         </p:nvSpPr>
         <p:spPr>
           <a:xfrm>
-            <a:off x="6629400" y="2377440"/>
-            <a:ext cx="4876495" cy="2651760"/>
+            <a:off x="6629400" y="2697480"/>
+            <a:ext cx="4876495" cy="2926080"/>
           </a:xfrm>
           <a:prstGeom prst="rect">
             <a:avLst/>
@@ -6495,13 +6495,13 @@
           <a:p>
             <a:pPr marL="342900" indent="-342900">
               <a:spcAft>
-                <a:spcPts val="400"/>
+                <a:spcPts val="600"/>
               </a:spcAft>
               <a:buSzPct val="100000"/>
               <a:buChar char="•"/>
             </a:pPr>
             <a:r>
-              <a:rPr lang="en-US" sz="1300" dirty="0">
+              <a:rPr lang="en-US" sz="1800" dirty="0">
                 <a:solidFill>
                   <a:srgbClr val="334155"/>
                 </a:solidFill>
@@ -6509,20 +6509,20 @@
                 <a:ea typeface="Inter" pitchFamily="34" charset="-122"/>
                 <a:cs typeface="Inter" pitchFamily="34" charset="-120"/>
               </a:rPr>
-              <a:t>‘Access blocked’ on sign-in → ask your supervisor to add you.</a:t>
-            </a:r>
-            <a:endParaRPr lang="en-US" sz="1300" dirty="0"/>
+              <a:t>‘Access blocked’ → ask your supervisor to add you.</a:t>
+            </a:r>
+            <a:endParaRPr lang="en-US" sz="1800" dirty="0"/>
           </a:p>
           <a:p>
             <a:pPr marL="342900" indent="-342900">
               <a:spcAft>
-                <a:spcPts val="400"/>
+                <a:spcPts val="600"/>
               </a:spcAft>
               <a:buSzPct val="100000"/>
               <a:buChar char="•"/>
             </a:pPr>
             <a:r>
-              <a:rPr lang="en-US" sz="1300" dirty="0">
+              <a:rPr lang="en-US" sz="1800" dirty="0">
                 <a:solidFill>
                   <a:srgbClr val="334155"/>
                 </a:solidFill>
@@ -6530,20 +6530,20 @@
                 <a:ea typeface="Inter" pitchFamily="34" charset="-122"/>
                 <a:cs typeface="Inter" pitchFamily="34" charset="-120"/>
               </a:rPr>
-              <a:t>Calendar/Drive missing → sign out &amp; back in to re-authorise.</a:t>
-            </a:r>
-            <a:endParaRPr lang="en-US" sz="1300" dirty="0"/>
+              <a:t>Calendar/Drive missing → sign out + back in.</a:t>
+            </a:r>
+            <a:endParaRPr lang="en-US" sz="1800" dirty="0"/>
           </a:p>
           <a:p>
             <a:pPr marL="342900" indent="-342900">
               <a:spcAft>
-                <a:spcPts val="400"/>
+                <a:spcPts val="600"/>
               </a:spcAft>
               <a:buSzPct val="100000"/>
               <a:buChar char="•"/>
             </a:pPr>
             <a:r>
-              <a:rPr lang="en-US" sz="1300" dirty="0">
+              <a:rPr lang="en-US" sz="1800" dirty="0">
                 <a:solidFill>
                   <a:srgbClr val="334155"/>
                 </a:solidFill>
@@ -6551,20 +6551,20 @@
                 <a:ea typeface="Inter" pitchFamily="34" charset="-122"/>
                 <a:cs typeface="Inter" pitchFamily="34" charset="-120"/>
               </a:rPr>
-              <a:t>Sync feels stale → reload the tab (background polls reconcile).</a:t>
-            </a:r>
-            <a:endParaRPr lang="en-US" sz="1300" dirty="0"/>
+              <a:t>Sync feels stale → reload the tab.</a:t>
+            </a:r>
+            <a:endParaRPr lang="en-US" sz="1800" dirty="0"/>
           </a:p>
           <a:p>
             <a:pPr marL="342900" indent="-342900">
               <a:spcAft>
-                <a:spcPts val="400"/>
+                <a:spcPts val="600"/>
               </a:spcAft>
               <a:buSzPct val="100000"/>
               <a:buChar char="•"/>
             </a:pPr>
             <a:r>
-              <a:rPr lang="en-US" sz="1300" dirty="0">
+              <a:rPr lang="en-US" sz="1800" dirty="0">
                 <a:solidFill>
                   <a:srgbClr val="334155"/>
                 </a:solidFill>
@@ -6572,20 +6572,20 @@
                 <a:ea typeface="Inter" pitchFamily="34" charset="-122"/>
                 <a:cs typeface="Inter" pitchFamily="34" charset="-120"/>
               </a:rPr>
-              <a:t>Event time looks off → check your browser's timezone; legacy events may need a one-time re-save.</a:t>
-            </a:r>
-            <a:endParaRPr lang="en-US" sz="1300" dirty="0"/>
+              <a:t>Event time looks off → check your timezone.</a:t>
+            </a:r>
+            <a:endParaRPr lang="en-US" sz="1800" dirty="0"/>
           </a:p>
           <a:p>
             <a:pPr marL="342900" indent="-342900">
               <a:spcAft>
-                <a:spcPts val="400"/>
+                <a:spcPts val="600"/>
               </a:spcAft>
               <a:buSzPct val="100000"/>
               <a:buChar char="•"/>
             </a:pPr>
             <a:r>
-              <a:rPr lang="en-US" sz="1300" dirty="0">
+              <a:rPr lang="en-US" sz="1800" dirty="0">
                 <a:solidFill>
                   <a:srgbClr val="334155"/>
                 </a:solidFill>
@@ -6593,9 +6593,9 @@
                 <a:ea typeface="Inter" pitchFamily="34" charset="-122"/>
                 <a:cs typeface="Inter" pitchFamily="34" charset="-120"/>
               </a:rPr>
-              <a:t>Anything else → Feedback module, type ‘Bug’.</a:t>
-            </a:r>
-            <a:endParaRPr lang="en-US" sz="1300" dirty="0"/>
+              <a:t>Anything else → Feedback, type ‘Bug’.</a:t>
+            </a:r>
+            <a:endParaRPr lang="en-US" sz="1800" dirty="0"/>
           </a:p>
         </p:txBody>
       </p:sp>
@@ -6647,7 +6647,7 @@
               <a:buNone/>
             </a:pPr>
             <a:r>
-              <a:rPr lang="en-US" sz="1100" dirty="0">
+              <a:rPr lang="en-US" sz="1300" dirty="0">
                 <a:solidFill>
                   <a:srgbClr val="64748B"/>
                 </a:solidFill>
@@ -6657,7 +6657,7 @@
               </a:rPr>
               <a:t>PhDapp · for students</a:t>
             </a:r>
-            <a:endParaRPr lang="en-US" sz="1100" dirty="0"/>
+            <a:endParaRPr lang="en-US" sz="1300" dirty="0"/>
           </a:p>
         </p:txBody>
       </p:sp>
@@ -6686,7 +6686,7 @@
               <a:buNone/>
             </a:pPr>
             <a:r>
-              <a:rPr lang="en-US" sz="1100" dirty="0">
+              <a:rPr lang="en-US" sz="1300" dirty="0">
                 <a:solidFill>
                   <a:srgbClr val="64748B"/>
                 </a:solidFill>
@@ -6696,7 +6696,7 @@
               </a:rPr>
               <a:t>15 / 15</a:t>
             </a:r>
-            <a:endParaRPr lang="en-US" sz="1100" dirty="0"/>
+            <a:endParaRPr lang="en-US" sz="1300" dirty="0"/>
           </a:p>
         </p:txBody>
       </p:sp>
@@ -6826,7 +6826,7 @@
         <p:spPr>
           <a:xfrm>
             <a:off x="1261872" y="749808"/>
-            <a:ext cx="10381183" cy="640080"/>
+            <a:ext cx="10381183" cy="713232"/>
           </a:xfrm>
           <a:prstGeom prst="rect">
             <a:avLst/>
@@ -6842,7 +6842,7 @@
               <a:buNone/>
             </a:pPr>
             <a:r>
-              <a:rPr lang="en-US" sz="3600" b="1" dirty="0">
+              <a:rPr lang="en-US" sz="4000" b="1" dirty="0">
                 <a:solidFill>
                   <a:srgbClr val="0F172A"/>
                 </a:solidFill>
@@ -6852,7 +6852,7 @@
               </a:rPr>
               <a:t>What is PhDapp?</a:t>
             </a:r>
-            <a:endParaRPr lang="en-US" sz="3600" dirty="0"/>
+            <a:endParaRPr lang="en-US" sz="4000" dirty="0"/>
           </a:p>
         </p:txBody>
       </p:sp>
@@ -6865,7 +6865,7 @@
         <p:spPr>
           <a:xfrm>
             <a:off x="548640" y="1508760"/>
-            <a:ext cx="11094415" cy="731520"/>
+            <a:ext cx="11094415" cy="822960"/>
           </a:xfrm>
           <a:prstGeom prst="rect">
             <a:avLst/>
@@ -6881,7 +6881,7 @@
               <a:buNone/>
             </a:pPr>
             <a:r>
-              <a:rPr lang="en-US" sz="1600" i="1" dirty="0">
+              <a:rPr lang="en-US" sz="2000" i="1" dirty="0">
                 <a:solidFill>
                   <a:srgbClr val="334155"/>
                 </a:solidFill>
@@ -6891,7 +6891,7 @@
               </a:rPr>
               <a:t>One single workspace for PhD-student supervision — connects everything you and your supervisors do day-to-day.</a:t>
             </a:r>
-            <a:endParaRPr lang="en-US" sz="1600" dirty="0"/>
+            <a:endParaRPr lang="en-US" sz="2000" dirty="0"/>
           </a:p>
         </p:txBody>
       </p:sp>
@@ -6903,8 +6903,8 @@
         </p:nvSpPr>
         <p:spPr>
           <a:xfrm>
-            <a:off x="548640" y="2194560"/>
-            <a:ext cx="2606040" cy="1783080"/>
+            <a:off x="548640" y="2468880"/>
+            <a:ext cx="2606040" cy="1691640"/>
           </a:xfrm>
           <a:prstGeom prst="rect">
             <a:avLst/>
@@ -6935,8 +6935,8 @@
         </p:nvSpPr>
         <p:spPr>
           <a:xfrm>
-            <a:off x="548640" y="2194560"/>
-            <a:ext cx="73152" cy="1783080"/>
+            <a:off x="548640" y="2468880"/>
+            <a:ext cx="73152" cy="1691640"/>
           </a:xfrm>
           <a:prstGeom prst="rect">
             <a:avLst/>
@@ -6955,8 +6955,8 @@
         </p:nvSpPr>
         <p:spPr>
           <a:xfrm>
-            <a:off x="749808" y="2359152"/>
-            <a:ext cx="2286000" cy="502920"/>
+            <a:off x="749808" y="2633472"/>
+            <a:ext cx="2286000" cy="594360"/>
           </a:xfrm>
           <a:prstGeom prst="rect">
             <a:avLst/>
@@ -6972,7 +6972,7 @@
               <a:buNone/>
             </a:pPr>
             <a:r>
-              <a:rPr lang="en-US" sz="1800" b="1" dirty="0">
+              <a:rPr lang="en-US" sz="2200" b="1" dirty="0">
                 <a:solidFill>
                   <a:srgbClr val="0F172A"/>
                 </a:solidFill>
@@ -6982,7 +6982,7 @@
               </a:rPr>
               <a:t>Tasks</a:t>
             </a:r>
-            <a:endParaRPr lang="en-US" sz="1800" dirty="0"/>
+            <a:endParaRPr lang="en-US" sz="2200" dirty="0"/>
           </a:p>
         </p:txBody>
       </p:sp>
@@ -6994,8 +6994,8 @@
         </p:nvSpPr>
         <p:spPr>
           <a:xfrm>
-            <a:off x="749808" y="2743200"/>
-            <a:ext cx="2286000" cy="1097280"/>
+            <a:off x="749808" y="3337560"/>
+            <a:ext cx="2286000" cy="658368"/>
           </a:xfrm>
           <a:prstGeom prst="rect">
             <a:avLst/>
@@ -7014,7 +7014,7 @@
               <a:buNone/>
             </a:pPr>
             <a:r>
-              <a:rPr lang="en-US" sz="1400" dirty="0">
+              <a:rPr lang="en-US" sz="1800" dirty="0">
                 <a:solidFill>
                   <a:srgbClr val="334155"/>
                 </a:solidFill>
@@ -7024,7 +7024,7 @@
               </a:rPr>
               <a:t>Board / List / Gantt — your work, status, deadlines.</a:t>
             </a:r>
-            <a:endParaRPr lang="en-US" sz="1400" dirty="0"/>
+            <a:endParaRPr lang="en-US" sz="1800" dirty="0"/>
           </a:p>
         </p:txBody>
       </p:sp>
@@ -7036,8 +7036,8 @@
         </p:nvSpPr>
         <p:spPr>
           <a:xfrm>
-            <a:off x="3383280" y="2194560"/>
-            <a:ext cx="2606040" cy="1783080"/>
+            <a:off x="3383280" y="2468880"/>
+            <a:ext cx="2606040" cy="1691640"/>
           </a:xfrm>
           <a:prstGeom prst="rect">
             <a:avLst/>
@@ -7068,8 +7068,8 @@
         </p:nvSpPr>
         <p:spPr>
           <a:xfrm>
-            <a:off x="3383280" y="2194560"/>
-            <a:ext cx="73152" cy="1783080"/>
+            <a:off x="3383280" y="2468880"/>
+            <a:ext cx="73152" cy="1691640"/>
           </a:xfrm>
           <a:prstGeom prst="rect">
             <a:avLst/>
@@ -7088,8 +7088,8 @@
         </p:nvSpPr>
         <p:spPr>
           <a:xfrm>
-            <a:off x="3584448" y="2359152"/>
-            <a:ext cx="2286000" cy="502920"/>
+            <a:off x="3584448" y="2633472"/>
+            <a:ext cx="2286000" cy="594360"/>
           </a:xfrm>
           <a:prstGeom prst="rect">
             <a:avLst/>
@@ -7105,7 +7105,7 @@
               <a:buNone/>
             </a:pPr>
             <a:r>
-              <a:rPr lang="en-US" sz="1800" b="1" dirty="0">
+              <a:rPr lang="en-US" sz="2200" b="1" dirty="0">
                 <a:solidFill>
                   <a:srgbClr val="0F172A"/>
                 </a:solidFill>
@@ -7115,7 +7115,7 @@
               </a:rPr>
               <a:t>Calendar</a:t>
             </a:r>
-            <a:endParaRPr lang="en-US" sz="1800" dirty="0"/>
+            <a:endParaRPr lang="en-US" sz="2200" dirty="0"/>
           </a:p>
         </p:txBody>
       </p:sp>
@@ -7127,8 +7127,8 @@
         </p:nvSpPr>
         <p:spPr>
           <a:xfrm>
-            <a:off x="3584448" y="2743200"/>
-            <a:ext cx="2286000" cy="1097280"/>
+            <a:off x="3584448" y="3337560"/>
+            <a:ext cx="2286000" cy="658368"/>
           </a:xfrm>
           <a:prstGeom prst="rect">
             <a:avLst/>
@@ -7147,7 +7147,7 @@
               <a:buNone/>
             </a:pPr>
             <a:r>
-              <a:rPr lang="en-US" sz="1400" dirty="0">
+              <a:rPr lang="en-US" sz="1800" dirty="0">
                 <a:solidFill>
                   <a:srgbClr val="334155"/>
                 </a:solidFill>
@@ -7155,9 +7155,9 @@
                 <a:ea typeface="Inter" pitchFamily="34" charset="-122"/>
                 <a:cs typeface="Inter" pitchFamily="34" charset="-120"/>
               </a:rPr>
-              <a:t>Events + auto task deadlines + your team's availability.</a:t>
-            </a:r>
-            <a:endParaRPr lang="en-US" sz="1400" dirty="0"/>
+              <a:t>Events, task deadlines, supervisors' availability.</a:t>
+            </a:r>
+            <a:endParaRPr lang="en-US" sz="1800" dirty="0"/>
           </a:p>
         </p:txBody>
       </p:sp>
@@ -7169,8 +7169,8 @@
         </p:nvSpPr>
         <p:spPr>
           <a:xfrm>
-            <a:off x="6217920" y="2194560"/>
-            <a:ext cx="2606040" cy="1783080"/>
+            <a:off x="6217920" y="2468880"/>
+            <a:ext cx="2606040" cy="1691640"/>
           </a:xfrm>
           <a:prstGeom prst="rect">
             <a:avLst/>
@@ -7201,8 +7201,8 @@
         </p:nvSpPr>
         <p:spPr>
           <a:xfrm>
-            <a:off x="6217920" y="2194560"/>
-            <a:ext cx="73152" cy="1783080"/>
+            <a:off x="6217920" y="2468880"/>
+            <a:ext cx="73152" cy="1691640"/>
           </a:xfrm>
           <a:prstGeom prst="rect">
             <a:avLst/>
@@ -7221,8 +7221,8 @@
         </p:nvSpPr>
         <p:spPr>
           <a:xfrm>
-            <a:off x="6419088" y="2359152"/>
-            <a:ext cx="2286000" cy="502920"/>
+            <a:off x="6419088" y="2633472"/>
+            <a:ext cx="2286000" cy="594360"/>
           </a:xfrm>
           <a:prstGeom prst="rect">
             <a:avLst/>
@@ -7238,7 +7238,7 @@
               <a:buNone/>
             </a:pPr>
             <a:r>
-              <a:rPr lang="en-US" sz="1800" b="1" dirty="0">
+              <a:rPr lang="en-US" sz="2200" b="1" dirty="0">
                 <a:solidFill>
                   <a:srgbClr val="0F172A"/>
                 </a:solidFill>
@@ -7248,7 +7248,7 @@
               </a:rPr>
               <a:t>Chat</a:t>
             </a:r>
-            <a:endParaRPr lang="en-US" sz="1800" dirty="0"/>
+            <a:endParaRPr lang="en-US" sz="2200" dirty="0"/>
           </a:p>
         </p:txBody>
       </p:sp>
@@ -7260,8 +7260,8 @@
         </p:nvSpPr>
         <p:spPr>
           <a:xfrm>
-            <a:off x="6419088" y="2743200"/>
-            <a:ext cx="2286000" cy="1097280"/>
+            <a:off x="6419088" y="3337560"/>
+            <a:ext cx="2286000" cy="658368"/>
           </a:xfrm>
           <a:prstGeom prst="rect">
             <a:avLst/>
@@ -7280,7 +7280,7 @@
               <a:buNone/>
             </a:pPr>
             <a:r>
-              <a:rPr lang="en-US" sz="1400" dirty="0">
+              <a:rPr lang="en-US" sz="1800" dirty="0">
                 <a:solidFill>
                   <a:srgbClr val="334155"/>
                 </a:solidFill>
@@ -7290,7 +7290,7 @@
               </a:rPr>
               <a:t>Channels with your team — replies, reactions, files.</a:t>
             </a:r>
-            <a:endParaRPr lang="en-US" sz="1400" dirty="0"/>
+            <a:endParaRPr lang="en-US" sz="1800" dirty="0"/>
           </a:p>
         </p:txBody>
       </p:sp>
@@ -7302,8 +7302,8 @@
         </p:nvSpPr>
         <p:spPr>
           <a:xfrm>
-            <a:off x="9052560" y="2194560"/>
-            <a:ext cx="2606040" cy="1783080"/>
+            <a:off x="9052560" y="2468880"/>
+            <a:ext cx="2606040" cy="1691640"/>
           </a:xfrm>
           <a:prstGeom prst="rect">
             <a:avLst/>
@@ -7334,8 +7334,8 @@
         </p:nvSpPr>
         <p:spPr>
           <a:xfrm>
-            <a:off x="9052560" y="2194560"/>
-            <a:ext cx="73152" cy="1783080"/>
+            <a:off x="9052560" y="2468880"/>
+            <a:ext cx="73152" cy="1691640"/>
           </a:xfrm>
           <a:prstGeom prst="rect">
             <a:avLst/>
@@ -7354,8 +7354,8 @@
         </p:nvSpPr>
         <p:spPr>
           <a:xfrm>
-            <a:off x="9253728" y="2359152"/>
-            <a:ext cx="2286000" cy="502920"/>
+            <a:off x="9253728" y="2633472"/>
+            <a:ext cx="2286000" cy="594360"/>
           </a:xfrm>
           <a:prstGeom prst="rect">
             <a:avLst/>
@@ -7371,7 +7371,7 @@
               <a:buNone/>
             </a:pPr>
             <a:r>
-              <a:rPr lang="en-US" sz="1800" b="1" dirty="0">
+              <a:rPr lang="en-US" sz="2200" b="1" dirty="0">
                 <a:solidFill>
                   <a:srgbClr val="0F172A"/>
                 </a:solidFill>
@@ -7381,7 +7381,7 @@
               </a:rPr>
               <a:t>Reading</a:t>
             </a:r>
-            <a:endParaRPr lang="en-US" sz="1800" dirty="0"/>
+            <a:endParaRPr lang="en-US" sz="2200" dirty="0"/>
           </a:p>
         </p:txBody>
       </p:sp>
@@ -7393,8 +7393,8 @@
         </p:nvSpPr>
         <p:spPr>
           <a:xfrm>
-            <a:off x="9253728" y="2743200"/>
-            <a:ext cx="2286000" cy="1097280"/>
+            <a:off x="9253728" y="3337560"/>
+            <a:ext cx="2286000" cy="658368"/>
           </a:xfrm>
           <a:prstGeom prst="rect">
             <a:avLst/>
@@ -7413,7 +7413,7 @@
               <a:buNone/>
             </a:pPr>
             <a:r>
-              <a:rPr lang="en-US" sz="1400" dirty="0">
+              <a:rPr lang="en-US" sz="1800" dirty="0">
                 <a:solidFill>
                   <a:srgbClr val="334155"/>
                 </a:solidFill>
@@ -7421,9 +7421,9 @@
                 <a:ea typeface="Inter" pitchFamily="34" charset="-122"/>
                 <a:cs typeface="Inter" pitchFamily="34" charset="-120"/>
               </a:rPr>
-              <a:t>Track papers and propose new ones for your supervisor.</a:t>
-            </a:r>
-            <a:endParaRPr lang="en-US" sz="1400" dirty="0"/>
+              <a:t>Track papers and propose new ones to read.</a:t>
+            </a:r>
+            <a:endParaRPr lang="en-US" sz="1800" dirty="0"/>
           </a:p>
         </p:txBody>
       </p:sp>
@@ -7435,8 +7435,8 @@
         </p:nvSpPr>
         <p:spPr>
           <a:xfrm>
-            <a:off x="548640" y="4251960"/>
-            <a:ext cx="2606040" cy="1783080"/>
+            <a:off x="548640" y="4434840"/>
+            <a:ext cx="2606040" cy="1691640"/>
           </a:xfrm>
           <a:prstGeom prst="rect">
             <a:avLst/>
@@ -7467,8 +7467,8 @@
         </p:nvSpPr>
         <p:spPr>
           <a:xfrm>
-            <a:off x="548640" y="4251960"/>
-            <a:ext cx="73152" cy="1783080"/>
+            <a:off x="548640" y="4434840"/>
+            <a:ext cx="73152" cy="1691640"/>
           </a:xfrm>
           <a:prstGeom prst="rect">
             <a:avLst/>
@@ -7487,8 +7487,8 @@
         </p:nvSpPr>
         <p:spPr>
           <a:xfrm>
-            <a:off x="749808" y="4416552"/>
-            <a:ext cx="2286000" cy="502920"/>
+            <a:off x="749808" y="4599432"/>
+            <a:ext cx="2286000" cy="594360"/>
           </a:xfrm>
           <a:prstGeom prst="rect">
             <a:avLst/>
@@ -7504,7 +7504,7 @@
               <a:buNone/>
             </a:pPr>
             <a:r>
-              <a:rPr lang="en-US" sz="1800" b="1" dirty="0">
+              <a:rPr lang="en-US" sz="2200" b="1" dirty="0">
                 <a:solidFill>
                   <a:srgbClr val="0F172A"/>
                 </a:solidFill>
@@ -7514,7 +7514,7 @@
               </a:rPr>
               <a:t>Thesis</a:t>
             </a:r>
-            <a:endParaRPr lang="en-US" sz="1800" dirty="0"/>
+            <a:endParaRPr lang="en-US" sz="2200" dirty="0"/>
           </a:p>
         </p:txBody>
       </p:sp>
@@ -7526,8 +7526,8 @@
         </p:nvSpPr>
         <p:spPr>
           <a:xfrm>
-            <a:off x="749808" y="4800600"/>
-            <a:ext cx="2286000" cy="1097280"/>
+            <a:off x="749808" y="5303520"/>
+            <a:ext cx="2286000" cy="658368"/>
           </a:xfrm>
           <a:prstGeom prst="rect">
             <a:avLst/>
@@ -7546,7 +7546,7 @@
               <a:buNone/>
             </a:pPr>
             <a:r>
-              <a:rPr lang="en-US" sz="1400" dirty="0">
+              <a:rPr lang="en-US" sz="1800" dirty="0">
                 <a:solidFill>
                   <a:srgbClr val="334155"/>
                 </a:solidFill>
@@ -7556,7 +7556,7 @@
               </a:rPr>
               <a:t>Chapters &amp; publications, with Drive links.</a:t>
             </a:r>
-            <a:endParaRPr lang="en-US" sz="1400" dirty="0"/>
+            <a:endParaRPr lang="en-US" sz="1800" dirty="0"/>
           </a:p>
         </p:txBody>
       </p:sp>
@@ -7568,8 +7568,8 @@
         </p:nvSpPr>
         <p:spPr>
           <a:xfrm>
-            <a:off x="3383280" y="4251960"/>
-            <a:ext cx="2606040" cy="1783080"/>
+            <a:off x="3383280" y="4434840"/>
+            <a:ext cx="2606040" cy="1691640"/>
           </a:xfrm>
           <a:prstGeom prst="rect">
             <a:avLst/>
@@ -7600,8 +7600,8 @@
         </p:nvSpPr>
         <p:spPr>
           <a:xfrm>
-            <a:off x="3383280" y="4251960"/>
-            <a:ext cx="73152" cy="1783080"/>
+            <a:off x="3383280" y="4434840"/>
+            <a:ext cx="73152" cy="1691640"/>
           </a:xfrm>
           <a:prstGeom prst="rect">
             <a:avLst/>
@@ -7620,8 +7620,8 @@
         </p:nvSpPr>
         <p:spPr>
           <a:xfrm>
-            <a:off x="3584448" y="4416552"/>
-            <a:ext cx="2286000" cy="502920"/>
+            <a:off x="3584448" y="4599432"/>
+            <a:ext cx="2286000" cy="594360"/>
           </a:xfrm>
           <a:prstGeom prst="rect">
             <a:avLst/>
@@ -7637,7 +7637,7 @@
               <a:buNone/>
             </a:pPr>
             <a:r>
-              <a:rPr lang="en-US" sz="1800" b="1" dirty="0">
+              <a:rPr lang="en-US" sz="2200" b="1" dirty="0">
                 <a:solidFill>
                   <a:srgbClr val="0F172A"/>
                 </a:solidFill>
@@ -7647,7 +7647,7 @@
               </a:rPr>
               <a:t>Files</a:t>
             </a:r>
-            <a:endParaRPr lang="en-US" sz="1800" dirty="0"/>
+            <a:endParaRPr lang="en-US" sz="2200" dirty="0"/>
           </a:p>
         </p:txBody>
       </p:sp>
@@ -7659,8 +7659,8 @@
         </p:nvSpPr>
         <p:spPr>
           <a:xfrm>
-            <a:off x="3584448" y="4800600"/>
-            <a:ext cx="2286000" cy="1097280"/>
+            <a:off x="3584448" y="5303520"/>
+            <a:ext cx="2286000" cy="658368"/>
           </a:xfrm>
           <a:prstGeom prst="rect">
             <a:avLst/>
@@ -7679,7 +7679,7 @@
               <a:buNone/>
             </a:pPr>
             <a:r>
-              <a:rPr lang="en-US" sz="1400" dirty="0">
+              <a:rPr lang="en-US" sz="1800" dirty="0">
                 <a:solidFill>
                   <a:srgbClr val="334155"/>
                 </a:solidFill>
@@ -7689,7 +7689,7 @@
               </a:rPr>
               <a:t>Your shared Google Drive folder.</a:t>
             </a:r>
-            <a:endParaRPr lang="en-US" sz="1400" dirty="0"/>
+            <a:endParaRPr lang="en-US" sz="1800" dirty="0"/>
           </a:p>
         </p:txBody>
       </p:sp>
@@ -7701,8 +7701,8 @@
         </p:nvSpPr>
         <p:spPr>
           <a:xfrm>
-            <a:off x="6217920" y="4251960"/>
-            <a:ext cx="2606040" cy="1783080"/>
+            <a:off x="6217920" y="4434840"/>
+            <a:ext cx="2606040" cy="1691640"/>
           </a:xfrm>
           <a:prstGeom prst="rect">
             <a:avLst/>
@@ -7733,8 +7733,8 @@
         </p:nvSpPr>
         <p:spPr>
           <a:xfrm>
-            <a:off x="6217920" y="4251960"/>
-            <a:ext cx="73152" cy="1783080"/>
+            <a:off x="6217920" y="4434840"/>
+            <a:ext cx="73152" cy="1691640"/>
           </a:xfrm>
           <a:prstGeom prst="rect">
             <a:avLst/>
@@ -7753,8 +7753,8 @@
         </p:nvSpPr>
         <p:spPr>
           <a:xfrm>
-            <a:off x="6419088" y="4416552"/>
-            <a:ext cx="2286000" cy="502920"/>
+            <a:off x="6419088" y="4599432"/>
+            <a:ext cx="2286000" cy="594360"/>
           </a:xfrm>
           <a:prstGeom prst="rect">
             <a:avLst/>
@@ -7770,7 +7770,7 @@
               <a:buNone/>
             </a:pPr>
             <a:r>
-              <a:rPr lang="en-US" sz="1800" b="1" dirty="0">
+              <a:rPr lang="en-US" sz="2200" b="1" dirty="0">
                 <a:solidFill>
                   <a:srgbClr val="0F172A"/>
                 </a:solidFill>
@@ -7780,7 +7780,7 @@
               </a:rPr>
               <a:t>Check-in</a:t>
             </a:r>
-            <a:endParaRPr lang="en-US" sz="1800" dirty="0"/>
+            <a:endParaRPr lang="en-US" sz="2200" dirty="0"/>
           </a:p>
         </p:txBody>
       </p:sp>
@@ -7792,8 +7792,8 @@
         </p:nvSpPr>
         <p:spPr>
           <a:xfrm>
-            <a:off x="6419088" y="4800600"/>
-            <a:ext cx="2286000" cy="1097280"/>
+            <a:off x="6419088" y="5303520"/>
+            <a:ext cx="2286000" cy="658368"/>
           </a:xfrm>
           <a:prstGeom prst="rect">
             <a:avLst/>
@@ -7812,7 +7812,7 @@
               <a:buNone/>
             </a:pPr>
             <a:r>
-              <a:rPr lang="en-US" sz="1400" dirty="0">
+              <a:rPr lang="en-US" sz="1800" dirty="0">
                 <a:solidFill>
                   <a:srgbClr val="334155"/>
                 </a:solidFill>
@@ -7820,9 +7820,9 @@
                 <a:ea typeface="Inter" pitchFamily="34" charset="-122"/>
                 <a:cs typeface="Inter" pitchFamily="34" charset="-120"/>
               </a:rPr>
-              <a:t>A weekly nudge: what you did, blockers, next.</a:t>
-            </a:r>
-            <a:endParaRPr lang="en-US" sz="1400" dirty="0"/>
+              <a:t>A weekly nudge: did, blockers, next.</a:t>
+            </a:r>
+            <a:endParaRPr lang="en-US" sz="1800" dirty="0"/>
           </a:p>
         </p:txBody>
       </p:sp>
@@ -7834,8 +7834,8 @@
         </p:nvSpPr>
         <p:spPr>
           <a:xfrm>
-            <a:off x="9052560" y="4251960"/>
-            <a:ext cx="2606040" cy="1783080"/>
+            <a:off x="9052560" y="4434840"/>
+            <a:ext cx="2606040" cy="1691640"/>
           </a:xfrm>
           <a:prstGeom prst="rect">
             <a:avLst/>
@@ -7866,8 +7866,8 @@
         </p:nvSpPr>
         <p:spPr>
           <a:xfrm>
-            <a:off x="9052560" y="4251960"/>
-            <a:ext cx="73152" cy="1783080"/>
+            <a:off x="9052560" y="4434840"/>
+            <a:ext cx="73152" cy="1691640"/>
           </a:xfrm>
           <a:prstGeom prst="rect">
             <a:avLst/>
@@ -7886,8 +7886,8 @@
         </p:nvSpPr>
         <p:spPr>
           <a:xfrm>
-            <a:off x="9253728" y="4416552"/>
-            <a:ext cx="2286000" cy="502920"/>
+            <a:off x="9253728" y="4599432"/>
+            <a:ext cx="2286000" cy="594360"/>
           </a:xfrm>
           <a:prstGeom prst="rect">
             <a:avLst/>
@@ -7903,7 +7903,7 @@
               <a:buNone/>
             </a:pPr>
             <a:r>
-              <a:rPr lang="en-US" sz="1800" b="1" dirty="0">
+              <a:rPr lang="en-US" sz="2200" b="1" dirty="0">
                 <a:solidFill>
                   <a:srgbClr val="0F172A"/>
                 </a:solidFill>
@@ -7913,7 +7913,7 @@
               </a:rPr>
               <a:t>Feedback</a:t>
             </a:r>
-            <a:endParaRPr lang="en-US" sz="1800" dirty="0"/>
+            <a:endParaRPr lang="en-US" sz="2200" dirty="0"/>
           </a:p>
         </p:txBody>
       </p:sp>
@@ -7925,8 +7925,8 @@
         </p:nvSpPr>
         <p:spPr>
           <a:xfrm>
-            <a:off x="9253728" y="4800600"/>
-            <a:ext cx="2286000" cy="1097280"/>
+            <a:off x="9253728" y="5303520"/>
+            <a:ext cx="2286000" cy="658368"/>
           </a:xfrm>
           <a:prstGeom prst="rect">
             <a:avLst/>
@@ -7945,7 +7945,7 @@
               <a:buNone/>
             </a:pPr>
             <a:r>
-              <a:rPr lang="en-US" sz="1400" dirty="0">
+              <a:rPr lang="en-US" sz="1800" dirty="0">
                 <a:solidFill>
                   <a:srgbClr val="334155"/>
                 </a:solidFill>
@@ -7953,9 +7953,9 @@
                 <a:ea typeface="Inter" pitchFamily="34" charset="-122"/>
                 <a:cs typeface="Inter" pitchFamily="34" charset="-120"/>
               </a:rPr>
-              <a:t>Send a bug or idea straight to the admin.</a:t>
-            </a:r>
-            <a:endParaRPr lang="en-US" sz="1400" dirty="0"/>
+              <a:t>Send a bug or idea to the admin.</a:t>
+            </a:r>
+            <a:endParaRPr lang="en-US" sz="1800" dirty="0"/>
           </a:p>
         </p:txBody>
       </p:sp>
@@ -8007,7 +8007,7 @@
               <a:buNone/>
             </a:pPr>
             <a:r>
-              <a:rPr lang="en-US" sz="1100" dirty="0">
+              <a:rPr lang="en-US" sz="1300" dirty="0">
                 <a:solidFill>
                   <a:srgbClr val="64748B"/>
                 </a:solidFill>
@@ -8017,7 +8017,7 @@
               </a:rPr>
               <a:t>PhDapp · for students</a:t>
             </a:r>
-            <a:endParaRPr lang="en-US" sz="1100" dirty="0"/>
+            <a:endParaRPr lang="en-US" sz="1300" dirty="0"/>
           </a:p>
         </p:txBody>
       </p:sp>
@@ -8046,7 +8046,7 @@
               <a:buNone/>
             </a:pPr>
             <a:r>
-              <a:rPr lang="en-US" sz="1100" dirty="0">
+              <a:rPr lang="en-US" sz="1300" dirty="0">
                 <a:solidFill>
                   <a:srgbClr val="64748B"/>
                 </a:solidFill>
@@ -8056,7 +8056,7 @@
               </a:rPr>
               <a:t>2 / 15</a:t>
             </a:r>
-            <a:endParaRPr lang="en-US" sz="1100" dirty="0"/>
+            <a:endParaRPr lang="en-US" sz="1300" dirty="0"/>
           </a:p>
         </p:txBody>
       </p:sp>
@@ -8186,7 +8186,7 @@
         <p:spPr>
           <a:xfrm>
             <a:off x="1261872" y="749808"/>
-            <a:ext cx="10381183" cy="640080"/>
+            <a:ext cx="10381183" cy="713232"/>
           </a:xfrm>
           <a:prstGeom prst="rect">
             <a:avLst/>
@@ -8202,7 +8202,7 @@
               <a:buNone/>
             </a:pPr>
             <a:r>
-              <a:rPr lang="en-US" sz="3600" b="1" dirty="0">
+              <a:rPr lang="en-US" sz="4000" b="1" dirty="0">
                 <a:solidFill>
                   <a:srgbClr val="0F172A"/>
                 </a:solidFill>
@@ -8212,7 +8212,7 @@
               </a:rPr>
               <a:t>Signing in</a:t>
             </a:r>
-            <a:endParaRPr lang="en-US" sz="3600" dirty="0"/>
+            <a:endParaRPr lang="en-US" sz="4000" dirty="0"/>
           </a:p>
         </p:txBody>
       </p:sp>
@@ -8225,7 +8225,7 @@
         <p:spPr>
           <a:xfrm>
             <a:off x="548640" y="1508760"/>
-            <a:ext cx="11094415" cy="731520"/>
+            <a:ext cx="11094415" cy="822960"/>
           </a:xfrm>
           <a:prstGeom prst="rect">
             <a:avLst/>
@@ -8241,7 +8241,7 @@
               <a:buNone/>
             </a:pPr>
             <a:r>
-              <a:rPr lang="en-US" sz="1600" i="1" dirty="0">
+              <a:rPr lang="en-US" sz="2000" i="1" dirty="0">
                 <a:solidFill>
                   <a:srgbClr val="334155"/>
                 </a:solidFill>
@@ -8251,7 +8251,7 @@
               </a:rPr>
               <a:t>Sign in with the Google account your supervisor added. One account, no separate password.</a:t>
             </a:r>
-            <a:endParaRPr lang="en-US" sz="1600" dirty="0"/>
+            <a:endParaRPr lang="en-US" sz="2000" dirty="0"/>
           </a:p>
         </p:txBody>
       </p:sp>
@@ -8316,7 +8316,7 @@
         <p:spPr>
           <a:xfrm>
             <a:off x="749808" y="2267712"/>
-            <a:ext cx="5257800" cy="502920"/>
+            <a:ext cx="5257800" cy="594360"/>
           </a:xfrm>
           <a:prstGeom prst="rect">
             <a:avLst/>
@@ -8332,7 +8332,7 @@
               <a:buNone/>
             </a:pPr>
             <a:r>
-              <a:rPr lang="en-US" sz="1800" b="1" dirty="0">
+              <a:rPr lang="en-US" sz="2200" b="1" dirty="0">
                 <a:solidFill>
                   <a:srgbClr val="0F172A"/>
                 </a:solidFill>
@@ -8342,7 +8342,7 @@
               </a:rPr>
               <a:t>How to sign in</a:t>
             </a:r>
-            <a:endParaRPr lang="en-US" sz="1800" dirty="0"/>
+            <a:endParaRPr lang="en-US" sz="2200" dirty="0"/>
           </a:p>
         </p:txBody>
       </p:sp>
@@ -8355,7 +8355,7 @@
         <p:spPr>
           <a:xfrm>
             <a:off x="777240" y="2697480"/>
-            <a:ext cx="5166360" cy="3291840"/>
+            <a:ext cx="5166360" cy="2377440"/>
           </a:xfrm>
           <a:prstGeom prst="rect">
             <a:avLst/>
@@ -8369,13 +8369,13 @@
           <a:p>
             <a:pPr marL="342900" indent="-342900">
               <a:spcAft>
-                <a:spcPts val="400"/>
+                <a:spcPts val="600"/>
               </a:spcAft>
               <a:buSzPct val="100000"/>
               <a:buChar char="•"/>
             </a:pPr>
             <a:r>
-              <a:rPr lang="en-US" sz="1300" dirty="0">
+              <a:rPr lang="en-US" sz="1800" dirty="0">
                 <a:solidFill>
                   <a:srgbClr val="334155"/>
                 </a:solidFill>
@@ -8383,20 +8383,20 @@
                 <a:ea typeface="Inter" pitchFamily="34" charset="-122"/>
                 <a:cs typeface="Inter" pitchFamily="34" charset="-120"/>
               </a:rPr>
-              <a:t>Open the app and click ‘Continue with Google’.</a:t>
-            </a:r>
-            <a:endParaRPr lang="en-US" sz="1300" dirty="0"/>
+              <a:t>Click ‘Continue with Google’.</a:t>
+            </a:r>
+            <a:endParaRPr lang="en-US" sz="1800" dirty="0"/>
           </a:p>
           <a:p>
             <a:pPr marL="342900" indent="-342900">
               <a:spcAft>
-                <a:spcPts val="400"/>
+                <a:spcPts val="600"/>
               </a:spcAft>
               <a:buSzPct val="100000"/>
               <a:buChar char="•"/>
             </a:pPr>
             <a:r>
-              <a:rPr lang="en-US" sz="1300" dirty="0">
+              <a:rPr lang="en-US" sz="1800" dirty="0">
                 <a:solidFill>
                   <a:srgbClr val="334155"/>
                 </a:solidFill>
@@ -8404,20 +8404,20 @@
                 <a:ea typeface="Inter" pitchFamily="34" charset="-122"/>
                 <a:cs typeface="Inter" pitchFamily="34" charset="-120"/>
               </a:rPr>
-              <a:t>Pick the Gmail account that's on your supervisor's list.</a:t>
-            </a:r>
-            <a:endParaRPr lang="en-US" sz="1300" dirty="0"/>
+              <a:t>Pick the Gmail account your supervisor added.</a:t>
+            </a:r>
+            <a:endParaRPr lang="en-US" sz="1800" dirty="0"/>
           </a:p>
           <a:p>
             <a:pPr marL="342900" indent="-342900">
               <a:spcAft>
-                <a:spcPts val="400"/>
+                <a:spcPts val="600"/>
               </a:spcAft>
               <a:buSzPct val="100000"/>
               <a:buChar char="•"/>
             </a:pPr>
             <a:r>
-              <a:rPr lang="en-US" sz="1300" dirty="0">
+              <a:rPr lang="en-US" sz="1800" dirty="0">
                 <a:solidFill>
                   <a:srgbClr val="334155"/>
                 </a:solidFill>
@@ -8425,20 +8425,20 @@
                 <a:ea typeface="Inter" pitchFamily="34" charset="-122"/>
                 <a:cs typeface="Inter" pitchFamily="34" charset="-120"/>
               </a:rPr>
-              <a:t>Grant Calendar + Drive access (read + write); the app uses your token to push events and read your shared Drive folder.</a:t>
-            </a:r>
-            <a:endParaRPr lang="en-US" sz="1300" dirty="0"/>
+              <a:t>Grant Calendar + Drive access (read + write).</a:t>
+            </a:r>
+            <a:endParaRPr lang="en-US" sz="1800" dirty="0"/>
           </a:p>
           <a:p>
             <a:pPr marL="342900" indent="-342900">
               <a:spcAft>
-                <a:spcPts val="400"/>
+                <a:spcPts val="600"/>
               </a:spcAft>
               <a:buSzPct val="100000"/>
               <a:buChar char="•"/>
             </a:pPr>
             <a:r>
-              <a:rPr lang="en-US" sz="1300" dirty="0">
+              <a:rPr lang="en-US" sz="1800" dirty="0">
                 <a:solidFill>
                   <a:srgbClr val="334155"/>
                 </a:solidFill>
@@ -8446,20 +8446,20 @@
                 <a:ea typeface="Inter" pitchFamily="34" charset="-122"/>
                 <a:cs typeface="Inter" pitchFamily="34" charset="-120"/>
               </a:rPr>
-              <a:t>If you see ‘Access blocked’, your email isn't on the test users yet — ask your supervisor.</a:t>
-            </a:r>
-            <a:endParaRPr lang="en-US" sz="1300" dirty="0"/>
+              <a:t>‘Access blocked’? Your email isn't on the test list yet.</a:t>
+            </a:r>
+            <a:endParaRPr lang="en-US" sz="1800" dirty="0"/>
           </a:p>
           <a:p>
             <a:pPr marL="342900" indent="-342900">
               <a:spcAft>
-                <a:spcPts val="400"/>
+                <a:spcPts val="600"/>
               </a:spcAft>
               <a:buSzPct val="100000"/>
               <a:buChar char="•"/>
             </a:pPr>
             <a:r>
-              <a:rPr lang="en-US" sz="1300" dirty="0">
+              <a:rPr lang="en-US" sz="1800" dirty="0">
                 <a:solidFill>
                   <a:srgbClr val="334155"/>
                 </a:solidFill>
@@ -8467,9 +8467,9 @@
                 <a:ea typeface="Inter" pitchFamily="34" charset="-122"/>
                 <a:cs typeface="Inter" pitchFamily="34" charset="-120"/>
               </a:rPr>
-              <a:t>Forgot to grant Calendar/Drive? Sign out and back in to re-authorise.</a:t>
-            </a:r>
-            <a:endParaRPr lang="en-US" sz="1300" dirty="0"/>
+              <a:t>Forgot a permission? Sign out + back in to re-authorise.</a:t>
+            </a:r>
+            <a:endParaRPr lang="en-US" sz="1800" dirty="0"/>
           </a:p>
         </p:txBody>
       </p:sp>
@@ -8534,7 +8534,7 @@
         <p:spPr>
           <a:xfrm>
             <a:off x="6693408" y="2267712"/>
-            <a:ext cx="4800600" cy="502920"/>
+            <a:ext cx="4800600" cy="594360"/>
           </a:xfrm>
           <a:prstGeom prst="rect">
             <a:avLst/>
@@ -8550,7 +8550,7 @@
               <a:buNone/>
             </a:pPr>
             <a:r>
-              <a:rPr lang="en-US" sz="1800" b="1" dirty="0">
+              <a:rPr lang="en-US" sz="2200" b="1" dirty="0">
                 <a:solidFill>
                   <a:srgbClr val="0F172A"/>
                 </a:solidFill>
@@ -8560,7 +8560,7 @@
               </a:rPr>
               <a:t>Your profile</a:t>
             </a:r>
-            <a:endParaRPr lang="en-US" sz="1800" dirty="0"/>
+            <a:endParaRPr lang="en-US" sz="2200" dirty="0"/>
           </a:p>
         </p:txBody>
       </p:sp>
@@ -8573,7 +8573,7 @@
         <p:spPr>
           <a:xfrm>
             <a:off x="6720840" y="2697480"/>
-            <a:ext cx="4709160" cy="3291840"/>
+            <a:ext cx="4709160" cy="2377440"/>
           </a:xfrm>
           <a:prstGeom prst="rect">
             <a:avLst/>
@@ -8587,13 +8587,13 @@
           <a:p>
             <a:pPr marL="342900" indent="-342900">
               <a:spcAft>
-                <a:spcPts val="400"/>
+                <a:spcPts val="600"/>
               </a:spcAft>
               <a:buSzPct val="100000"/>
               <a:buChar char="•"/>
             </a:pPr>
             <a:r>
-              <a:rPr lang="en-US" sz="1300" dirty="0">
+              <a:rPr lang="en-US" sz="1800" dirty="0">
                 <a:solidFill>
                   <a:srgbClr val="334155"/>
                 </a:solidFill>
@@ -8601,20 +8601,20 @@
                 <a:ea typeface="Inter" pitchFamily="34" charset="-122"/>
                 <a:cs typeface="Inter" pitchFamily="34" charset="-120"/>
               </a:rPr>
-              <a:t>Your name, alias, photo and accent colour — used across the app.</a:t>
-            </a:r>
-            <a:endParaRPr lang="en-US" sz="1300" dirty="0"/>
+              <a:t>Name, alias, photo and accent colour.</a:t>
+            </a:r>
+            <a:endParaRPr lang="en-US" sz="1800" dirty="0"/>
           </a:p>
           <a:p>
             <a:pPr marL="342900" indent="-342900">
               <a:spcAft>
-                <a:spcPts val="400"/>
+                <a:spcPts val="600"/>
               </a:spcAft>
               <a:buSzPct val="100000"/>
               <a:buChar char="•"/>
             </a:pPr>
             <a:r>
-              <a:rPr lang="en-US" sz="1300" dirty="0">
+              <a:rPr lang="en-US" sz="1800" dirty="0">
                 <a:solidFill>
                   <a:srgbClr val="334155"/>
                 </a:solidFill>
@@ -8624,18 +8624,18 @@
               </a:rPr>
               <a:t>Programme year, status, expected end, thesis title.</a:t>
             </a:r>
-            <a:endParaRPr lang="en-US" sz="1300" dirty="0"/>
+            <a:endParaRPr lang="en-US" sz="1800" dirty="0"/>
           </a:p>
           <a:p>
             <a:pPr marL="342900" indent="-342900">
               <a:spcAft>
-                <a:spcPts val="400"/>
+                <a:spcPts val="600"/>
               </a:spcAft>
               <a:buSzPct val="100000"/>
               <a:buChar char="•"/>
             </a:pPr>
             <a:r>
-              <a:rPr lang="en-US" sz="1300" dirty="0">
+              <a:rPr lang="en-US" sz="1800" dirty="0">
                 <a:solidFill>
                   <a:srgbClr val="334155"/>
                 </a:solidFill>
@@ -8643,20 +8643,20 @@
                 <a:ea typeface="Inter" pitchFamily="34" charset="-122"/>
                 <a:cs typeface="Inter" pitchFamily="34" charset="-120"/>
               </a:rPr>
-              <a:t>Optional links: LinkedIn, ORCID, personal website.</a:t>
-            </a:r>
-            <a:endParaRPr lang="en-US" sz="1300" dirty="0"/>
+              <a:t>Profile links: LinkedIn · ORCID · Google Scholar · Website — shown as small icons on your profile header and team views.</a:t>
+            </a:r>
+            <a:endParaRPr lang="en-US" sz="1800" dirty="0"/>
           </a:p>
           <a:p>
             <a:pPr marL="342900" indent="-342900">
               <a:spcAft>
-                <a:spcPts val="400"/>
+                <a:spcPts val="600"/>
               </a:spcAft>
               <a:buSzPct val="100000"/>
               <a:buChar char="•"/>
             </a:pPr>
             <a:r>
-              <a:rPr lang="en-US" sz="1300" dirty="0">
+              <a:rPr lang="en-US" sz="1800" dirty="0">
                 <a:solidFill>
                   <a:srgbClr val="334155"/>
                 </a:solidFill>
@@ -8666,7 +8666,7 @@
               </a:rPr>
               <a:t>Only supervisors / admin can edit your profile.</a:t>
             </a:r>
-            <a:endParaRPr lang="en-US" sz="1300" dirty="0"/>
+            <a:endParaRPr lang="en-US" sz="1800" dirty="0"/>
           </a:p>
         </p:txBody>
       </p:sp>
@@ -8718,7 +8718,7 @@
               <a:buNone/>
             </a:pPr>
             <a:r>
-              <a:rPr lang="en-US" sz="1100" dirty="0">
+              <a:rPr lang="en-US" sz="1300" dirty="0">
                 <a:solidFill>
                   <a:srgbClr val="64748B"/>
                 </a:solidFill>
@@ -8728,7 +8728,7 @@
               </a:rPr>
               <a:t>PhDapp · for students</a:t>
             </a:r>
-            <a:endParaRPr lang="en-US" sz="1100" dirty="0"/>
+            <a:endParaRPr lang="en-US" sz="1300" dirty="0"/>
           </a:p>
         </p:txBody>
       </p:sp>
@@ -8757,7 +8757,7 @@
               <a:buNone/>
             </a:pPr>
             <a:r>
-              <a:rPr lang="en-US" sz="1100" dirty="0">
+              <a:rPr lang="en-US" sz="1300" dirty="0">
                 <a:solidFill>
                   <a:srgbClr val="64748B"/>
                 </a:solidFill>
@@ -8767,7 +8767,7 @@
               </a:rPr>
               <a:t>3 / 15</a:t>
             </a:r>
-            <a:endParaRPr lang="en-US" sz="1100" dirty="0"/>
+            <a:endParaRPr lang="en-US" sz="1300" dirty="0"/>
           </a:p>
         </p:txBody>
       </p:sp>
@@ -8897,7 +8897,7 @@
         <p:spPr>
           <a:xfrm>
             <a:off x="1261872" y="749808"/>
-            <a:ext cx="10381183" cy="640080"/>
+            <a:ext cx="10381183" cy="713232"/>
           </a:xfrm>
           <a:prstGeom prst="rect">
             <a:avLst/>
@@ -8913,7 +8913,7 @@
               <a:buNone/>
             </a:pPr>
             <a:r>
-              <a:rPr lang="en-US" sz="3600" b="1" dirty="0">
+              <a:rPr lang="en-US" sz="4000" b="1" dirty="0">
                 <a:solidFill>
                   <a:srgbClr val="0F172A"/>
                 </a:solidFill>
@@ -8923,7 +8923,7 @@
               </a:rPr>
               <a:t>Your dashboard</a:t>
             </a:r>
-            <a:endParaRPr lang="en-US" sz="3600" dirty="0"/>
+            <a:endParaRPr lang="en-US" sz="4000" dirty="0"/>
           </a:p>
         </p:txBody>
       </p:sp>
@@ -8936,7 +8936,7 @@
         <p:spPr>
           <a:xfrm>
             <a:off x="548640" y="1508760"/>
-            <a:ext cx="11094415" cy="731520"/>
+            <a:ext cx="11094415" cy="822960"/>
           </a:xfrm>
           <a:prstGeom prst="rect">
             <a:avLst/>
@@ -8952,7 +8952,7 @@
               <a:buNone/>
             </a:pPr>
             <a:r>
-              <a:rPr lang="en-US" sz="1600" i="1" dirty="0">
+              <a:rPr lang="en-US" sz="2000" i="1" dirty="0">
                 <a:solidFill>
                   <a:srgbClr val="334155"/>
                 </a:solidFill>
@@ -8962,7 +8962,7 @@
               </a:rPr>
               <a:t>A snapshot of where you are right now. The first thing you see when you sign in.</a:t>
             </a:r>
-            <a:endParaRPr lang="en-US" sz="1600" dirty="0"/>
+            <a:endParaRPr lang="en-US" sz="2000" dirty="0"/>
           </a:p>
         </p:txBody>
       </p:sp>
@@ -8975,7 +8975,7 @@
         <p:spPr>
           <a:xfrm>
             <a:off x="548640" y="2011680"/>
-            <a:ext cx="2194560" cy="777240"/>
+            <a:ext cx="2697480" cy="914400"/>
           </a:xfrm>
           <a:prstGeom prst="rect">
             <a:avLst/>
@@ -9000,7 +9000,7 @@
         <p:spPr>
           <a:xfrm>
             <a:off x="548640" y="2011680"/>
-            <a:ext cx="64008" cy="777240"/>
+            <a:ext cx="73152" cy="914400"/>
           </a:xfrm>
           <a:prstGeom prst="rect">
             <a:avLst/>
@@ -9019,17 +9019,17 @@
         </p:nvSpPr>
         <p:spPr>
           <a:xfrm>
-            <a:off x="731520" y="2066544"/>
-            <a:ext cx="2011680" cy="384048"/>
-          </a:xfrm>
-          <a:prstGeom prst="rect">
-            <a:avLst/>
-          </a:prstGeom>
-          <a:noFill/>
-          <a:ln/>
-        </p:spPr>
-        <p:txBody>
-          <a:bodyPr wrap="square" lIns="0" tIns="0" rIns="0" bIns="0" rtlCol="0" anchor="ctr"/>
+            <a:off x="749808" y="2103120"/>
+            <a:ext cx="2468880" cy="457200"/>
+          </a:xfrm>
+          <a:prstGeom prst="rect">
+            <a:avLst/>
+          </a:prstGeom>
+          <a:noFill/>
+          <a:ln/>
+        </p:spPr>
+        <p:txBody>
+          <a:bodyPr wrap="square" lIns="0" tIns="0" rIns="0" bIns="0" rtlCol="0" anchor="t"/>
           <a:lstStyle/>
           <a:p>
             <a:pPr indent="0" marL="0">
@@ -9058,8 +9058,8 @@
         </p:nvSpPr>
         <p:spPr>
           <a:xfrm>
-            <a:off x="731520" y="2432304"/>
-            <a:ext cx="2011680" cy="320040"/>
+            <a:off x="749808" y="2560320"/>
+            <a:ext cx="2468880" cy="320040"/>
           </a:xfrm>
           <a:prstGeom prst="rect">
             <a:avLst/>
@@ -9075,7 +9075,7 @@
               <a:buNone/>
             </a:pPr>
             <a:r>
-              <a:rPr lang="en-US" sz="1200" dirty="0">
+              <a:rPr lang="en-US" sz="1400" dirty="0">
                 <a:solidFill>
                   <a:srgbClr val="64748B"/>
                 </a:solidFill>
@@ -9085,7 +9085,7 @@
               </a:rPr>
               <a:t>Due this week</a:t>
             </a:r>
-            <a:endParaRPr lang="en-US" sz="1200" dirty="0"/>
+            <a:endParaRPr lang="en-US" sz="1400" dirty="0"/>
           </a:p>
         </p:txBody>
       </p:sp>
@@ -9097,8 +9097,8 @@
         </p:nvSpPr>
         <p:spPr>
           <a:xfrm>
-            <a:off x="2880360" y="2011680"/>
-            <a:ext cx="2194560" cy="777240"/>
+            <a:off x="3337560" y="2011680"/>
+            <a:ext cx="2697480" cy="914400"/>
           </a:xfrm>
           <a:prstGeom prst="rect">
             <a:avLst/>
@@ -9122,8 +9122,8 @@
         </p:nvSpPr>
         <p:spPr>
           <a:xfrm>
-            <a:off x="2880360" y="2011680"/>
-            <a:ext cx="64008" cy="777240"/>
+            <a:off x="3337560" y="2011680"/>
+            <a:ext cx="73152" cy="914400"/>
           </a:xfrm>
           <a:prstGeom prst="rect">
             <a:avLst/>
@@ -9142,17 +9142,17 @@
         </p:nvSpPr>
         <p:spPr>
           <a:xfrm>
-            <a:off x="3063240" y="2066544"/>
-            <a:ext cx="2011680" cy="384048"/>
-          </a:xfrm>
-          <a:prstGeom prst="rect">
-            <a:avLst/>
-          </a:prstGeom>
-          <a:noFill/>
-          <a:ln/>
-        </p:spPr>
-        <p:txBody>
-          <a:bodyPr wrap="square" lIns="0" tIns="0" rIns="0" bIns="0" rtlCol="0" anchor="ctr"/>
+            <a:off x="3538728" y="2103120"/>
+            <a:ext cx="2468880" cy="457200"/>
+          </a:xfrm>
+          <a:prstGeom prst="rect">
+            <a:avLst/>
+          </a:prstGeom>
+          <a:noFill/>
+          <a:ln/>
+        </p:spPr>
+        <p:txBody>
+          <a:bodyPr wrap="square" lIns="0" tIns="0" rIns="0" bIns="0" rtlCol="0" anchor="t"/>
           <a:lstStyle/>
           <a:p>
             <a:pPr indent="0" marL="0">
@@ -9181,8 +9181,8 @@
         </p:nvSpPr>
         <p:spPr>
           <a:xfrm>
-            <a:off x="3063240" y="2432304"/>
-            <a:ext cx="2011680" cy="320040"/>
+            <a:off x="3538728" y="2560320"/>
+            <a:ext cx="2468880" cy="320040"/>
           </a:xfrm>
           <a:prstGeom prst="rect">
             <a:avLst/>
@@ -9198,7 +9198,7 @@
               <a:buNone/>
             </a:pPr>
             <a:r>
-              <a:rPr lang="en-US" sz="1200" dirty="0">
+              <a:rPr lang="en-US" sz="1400" dirty="0">
                 <a:solidFill>
                   <a:srgbClr val="64748B"/>
                 </a:solidFill>
@@ -9208,7 +9208,7 @@
               </a:rPr>
               <a:t>Next 7 days</a:t>
             </a:r>
-            <a:endParaRPr lang="en-US" sz="1200" dirty="0"/>
+            <a:endParaRPr lang="en-US" sz="1400" dirty="0"/>
           </a:p>
         </p:txBody>
       </p:sp>
@@ -9220,8 +9220,8 @@
         </p:nvSpPr>
         <p:spPr>
           <a:xfrm>
-            <a:off x="5212080" y="2011680"/>
-            <a:ext cx="2194560" cy="777240"/>
+            <a:off x="6126480" y="2011680"/>
+            <a:ext cx="2697480" cy="914400"/>
           </a:xfrm>
           <a:prstGeom prst="rect">
             <a:avLst/>
@@ -9245,8 +9245,8 @@
         </p:nvSpPr>
         <p:spPr>
           <a:xfrm>
-            <a:off x="5212080" y="2011680"/>
-            <a:ext cx="64008" cy="777240"/>
+            <a:off x="6126480" y="2011680"/>
+            <a:ext cx="73152" cy="914400"/>
           </a:xfrm>
           <a:prstGeom prst="rect">
             <a:avLst/>
@@ -9265,17 +9265,17 @@
         </p:nvSpPr>
         <p:spPr>
           <a:xfrm>
-            <a:off x="5394960" y="2066544"/>
-            <a:ext cx="2011680" cy="384048"/>
-          </a:xfrm>
-          <a:prstGeom prst="rect">
-            <a:avLst/>
-          </a:prstGeom>
-          <a:noFill/>
-          <a:ln/>
-        </p:spPr>
-        <p:txBody>
-          <a:bodyPr wrap="square" lIns="0" tIns="0" rIns="0" bIns="0" rtlCol="0" anchor="ctr"/>
+            <a:off x="6327648" y="2103120"/>
+            <a:ext cx="2468880" cy="457200"/>
+          </a:xfrm>
+          <a:prstGeom prst="rect">
+            <a:avLst/>
+          </a:prstGeom>
+          <a:noFill/>
+          <a:ln/>
+        </p:spPr>
+        <p:txBody>
+          <a:bodyPr wrap="square" lIns="0" tIns="0" rIns="0" bIns="0" rtlCol="0" anchor="t"/>
           <a:lstStyle/>
           <a:p>
             <a:pPr indent="0" marL="0">
@@ -9304,8 +9304,8 @@
         </p:nvSpPr>
         <p:spPr>
           <a:xfrm>
-            <a:off x="5394960" y="2432304"/>
-            <a:ext cx="2011680" cy="320040"/>
+            <a:off x="6327648" y="2560320"/>
+            <a:ext cx="2468880" cy="320040"/>
           </a:xfrm>
           <a:prstGeom prst="rect">
             <a:avLst/>
@@ -9321,7 +9321,7 @@
               <a:buNone/>
             </a:pPr>
             <a:r>
-              <a:rPr lang="en-US" sz="1200" dirty="0">
+              <a:rPr lang="en-US" sz="1400" dirty="0">
                 <a:solidFill>
                   <a:srgbClr val="64748B"/>
                 </a:solidFill>
@@ -9331,7 +9331,7 @@
               </a:rPr>
               <a:t>Unread</a:t>
             </a:r>
-            <a:endParaRPr lang="en-US" sz="1200" dirty="0"/>
+            <a:endParaRPr lang="en-US" sz="1400" dirty="0"/>
           </a:p>
         </p:txBody>
       </p:sp>
@@ -9343,8 +9343,8 @@
         </p:nvSpPr>
         <p:spPr>
           <a:xfrm>
-            <a:off x="7543800" y="2011680"/>
-            <a:ext cx="2194560" cy="777240"/>
+            <a:off x="8915400" y="2011680"/>
+            <a:ext cx="2697480" cy="914400"/>
           </a:xfrm>
           <a:prstGeom prst="rect">
             <a:avLst/>
@@ -9368,8 +9368,8 @@
         </p:nvSpPr>
         <p:spPr>
           <a:xfrm>
-            <a:off x="7543800" y="2011680"/>
-            <a:ext cx="64008" cy="777240"/>
+            <a:off x="8915400" y="2011680"/>
+            <a:ext cx="73152" cy="914400"/>
           </a:xfrm>
           <a:prstGeom prst="rect">
             <a:avLst/>
@@ -9388,17 +9388,17 @@
         </p:nvSpPr>
         <p:spPr>
           <a:xfrm>
-            <a:off x="7726680" y="2066544"/>
-            <a:ext cx="2011680" cy="384048"/>
-          </a:xfrm>
-          <a:prstGeom prst="rect">
-            <a:avLst/>
-          </a:prstGeom>
-          <a:noFill/>
-          <a:ln/>
-        </p:spPr>
-        <p:txBody>
-          <a:bodyPr wrap="square" lIns="0" tIns="0" rIns="0" bIns="0" rtlCol="0" anchor="ctr"/>
+            <a:off x="9116568" y="2103120"/>
+            <a:ext cx="2468880" cy="457200"/>
+          </a:xfrm>
+          <a:prstGeom prst="rect">
+            <a:avLst/>
+          </a:prstGeom>
+          <a:noFill/>
+          <a:ln/>
+        </p:spPr>
+        <p:txBody>
+          <a:bodyPr wrap="square" lIns="0" tIns="0" rIns="0" bIns="0" rtlCol="0" anchor="t"/>
           <a:lstStyle/>
           <a:p>
             <a:pPr indent="0" marL="0">
@@ -9427,8 +9427,8 @@
         </p:nvSpPr>
         <p:spPr>
           <a:xfrm>
-            <a:off x="7726680" y="2432304"/>
-            <a:ext cx="2011680" cy="320040"/>
+            <a:off x="9116568" y="2560320"/>
+            <a:ext cx="2468880" cy="320040"/>
           </a:xfrm>
           <a:prstGeom prst="rect">
             <a:avLst/>
@@ -9444,7 +9444,7 @@
               <a:buNone/>
             </a:pPr>
             <a:r>
-              <a:rPr lang="en-US" sz="1200" dirty="0">
+              <a:rPr lang="en-US" sz="1400" dirty="0">
                 <a:solidFill>
                   <a:srgbClr val="64748B"/>
                 </a:solidFill>
@@ -9454,7 +9454,7 @@
               </a:rPr>
               <a:t>New</a:t>
             </a:r>
-            <a:endParaRPr lang="en-US" sz="1200" dirty="0"/>
+            <a:endParaRPr lang="en-US" sz="1400" dirty="0"/>
           </a:p>
         </p:txBody>
       </p:sp>
@@ -9467,7 +9467,7 @@
         <p:spPr>
           <a:xfrm>
             <a:off x="548640" y="3108960"/>
-            <a:ext cx="11094415" cy="3017520"/>
+            <a:ext cx="11094415" cy="3108960"/>
           </a:xfrm>
           <a:prstGeom prst="rect">
             <a:avLst/>
@@ -9499,7 +9499,7 @@
         <p:spPr>
           <a:xfrm>
             <a:off x="548640" y="3108960"/>
-            <a:ext cx="73152" cy="3017520"/>
+            <a:ext cx="73152" cy="3108960"/>
           </a:xfrm>
           <a:prstGeom prst="rect">
             <a:avLst/>
@@ -9519,7 +9519,7 @@
         <p:spPr>
           <a:xfrm>
             <a:off x="749808" y="3273552"/>
-            <a:ext cx="10774375" cy="502920"/>
+            <a:ext cx="10774375" cy="594360"/>
           </a:xfrm>
           <a:prstGeom prst="rect">
             <a:avLst/>
@@ -9535,7 +9535,7 @@
               <a:buNone/>
             </a:pPr>
             <a:r>
-              <a:rPr lang="en-US" sz="1800" b="1" dirty="0">
+              <a:rPr lang="en-US" sz="2200" b="1" dirty="0">
                 <a:solidFill>
                   <a:srgbClr val="0F172A"/>
                 </a:solidFill>
@@ -9545,7 +9545,7 @@
               </a:rPr>
               <a:t>What's on it</a:t>
             </a:r>
-            <a:endParaRPr lang="en-US" sz="1800" dirty="0"/>
+            <a:endParaRPr lang="en-US" sz="2200" dirty="0"/>
           </a:p>
         </p:txBody>
       </p:sp>
@@ -9557,8 +9557,8 @@
         </p:nvSpPr>
         <p:spPr>
           <a:xfrm>
-            <a:off x="777240" y="3657600"/>
-            <a:ext cx="10637215" cy="2377440"/>
+            <a:off x="777240" y="3977640"/>
+            <a:ext cx="10637215" cy="2011680"/>
           </a:xfrm>
           <a:prstGeom prst="rect">
             <a:avLst/>
@@ -9572,13 +9572,13 @@
           <a:p>
             <a:pPr marL="342900" indent="-342900">
               <a:spcAft>
-                <a:spcPts val="400"/>
+                <a:spcPts val="600"/>
               </a:spcAft>
               <a:buSzPct val="100000"/>
               <a:buChar char="•"/>
             </a:pPr>
             <a:r>
-              <a:rPr lang="en-US" sz="1300" dirty="0">
+              <a:rPr lang="en-US" sz="1800" dirty="0">
                 <a:solidFill>
                   <a:srgbClr val="334155"/>
                 </a:solidFill>
@@ -9588,18 +9588,18 @@
               </a:rPr>
               <a:t>‘Due soon’ tasks (overdue first), with priority chips.</a:t>
             </a:r>
-            <a:endParaRPr lang="en-US" sz="1300" dirty="0"/>
+            <a:endParaRPr lang="en-US" sz="1800" dirty="0"/>
           </a:p>
           <a:p>
             <a:pPr marL="342900" indent="-342900">
               <a:spcAft>
-                <a:spcPts val="400"/>
+                <a:spcPts val="600"/>
               </a:spcAft>
               <a:buSzPct val="100000"/>
               <a:buChar char="•"/>
             </a:pPr>
             <a:r>
-              <a:rPr lang="en-US" sz="1300" dirty="0">
+              <a:rPr lang="en-US" sz="1800" dirty="0">
                 <a:solidFill>
                   <a:srgbClr val="334155"/>
                 </a:solidFill>
@@ -9609,18 +9609,18 @@
               </a:rPr>
               <a:t>Upcoming events and meetings, with the next ones at the top.</a:t>
             </a:r>
-            <a:endParaRPr lang="en-US" sz="1300" dirty="0"/>
+            <a:endParaRPr lang="en-US" sz="1800" dirty="0"/>
           </a:p>
           <a:p>
             <a:pPr marL="342900" indent="-342900">
               <a:spcAft>
-                <a:spcPts val="400"/>
+                <a:spcPts val="600"/>
               </a:spcAft>
               <a:buSzPct val="100000"/>
               <a:buChar char="•"/>
             </a:pPr>
             <a:r>
-              <a:rPr lang="en-US" sz="1300" dirty="0">
+              <a:rPr lang="en-US" sz="1800" dirty="0">
                 <a:solidFill>
                   <a:srgbClr val="334155"/>
                 </a:solidFill>
@@ -9630,18 +9630,18 @@
               </a:rPr>
               <a:t>Last activity from your supervisors — comments, status changes.</a:t>
             </a:r>
-            <a:endParaRPr lang="en-US" sz="1300" dirty="0"/>
+            <a:endParaRPr lang="en-US" sz="1800" dirty="0"/>
           </a:p>
           <a:p>
             <a:pPr marL="342900" indent="-342900">
               <a:spcAft>
-                <a:spcPts val="400"/>
+                <a:spcPts val="600"/>
               </a:spcAft>
               <a:buSzPct val="100000"/>
               <a:buChar char="•"/>
             </a:pPr>
             <a:r>
-              <a:rPr lang="en-US" sz="1300" dirty="0">
+              <a:rPr lang="en-US" sz="1800" dirty="0">
                 <a:solidFill>
                   <a:srgbClr val="334155"/>
                 </a:solidFill>
@@ -9651,18 +9651,18 @@
               </a:rPr>
               <a:t>Pending check-in reminder when the week ticks over.</a:t>
             </a:r>
-            <a:endParaRPr lang="en-US" sz="1300" dirty="0"/>
+            <a:endParaRPr lang="en-US" sz="1800" dirty="0"/>
           </a:p>
           <a:p>
             <a:pPr marL="342900" indent="-342900">
               <a:spcAft>
-                <a:spcPts val="400"/>
+                <a:spcPts val="600"/>
               </a:spcAft>
               <a:buSzPct val="100000"/>
               <a:buChar char="•"/>
             </a:pPr>
             <a:r>
-              <a:rPr lang="en-US" sz="1300" dirty="0">
+              <a:rPr lang="en-US" sz="1800" dirty="0">
                 <a:solidFill>
                   <a:srgbClr val="334155"/>
                 </a:solidFill>
@@ -9670,9 +9670,9 @@
                 <a:ea typeface="Inter" pitchFamily="34" charset="-122"/>
                 <a:cs typeface="Inter" pitchFamily="34" charset="-120"/>
               </a:rPr>
-              <a:t>Sidebar badges mirror these counts so you can see them from any module.</a:t>
-            </a:r>
-            <a:endParaRPr lang="en-US" sz="1300" dirty="0"/>
+              <a:t>Sidebar badges mirror these counts — visible from every module.</a:t>
+            </a:r>
+            <a:endParaRPr lang="en-US" sz="1800" dirty="0"/>
           </a:p>
         </p:txBody>
       </p:sp>
@@ -9724,7 +9724,7 @@
               <a:buNone/>
             </a:pPr>
             <a:r>
-              <a:rPr lang="en-US" sz="1100" dirty="0">
+              <a:rPr lang="en-US" sz="1300" dirty="0">
                 <a:solidFill>
                   <a:srgbClr val="64748B"/>
                 </a:solidFill>
@@ -9734,7 +9734,7 @@
               </a:rPr>
               <a:t>PhDapp · for students</a:t>
             </a:r>
-            <a:endParaRPr lang="en-US" sz="1100" dirty="0"/>
+            <a:endParaRPr lang="en-US" sz="1300" dirty="0"/>
           </a:p>
         </p:txBody>
       </p:sp>
@@ -9763,7 +9763,7 @@
               <a:buNone/>
             </a:pPr>
             <a:r>
-              <a:rPr lang="en-US" sz="1100" dirty="0">
+              <a:rPr lang="en-US" sz="1300" dirty="0">
                 <a:solidFill>
                   <a:srgbClr val="64748B"/>
                 </a:solidFill>
@@ -9773,7 +9773,7 @@
               </a:rPr>
               <a:t>4 / 15</a:t>
             </a:r>
-            <a:endParaRPr lang="en-US" sz="1100" dirty="0"/>
+            <a:endParaRPr lang="en-US" sz="1300" dirty="0"/>
           </a:p>
         </p:txBody>
       </p:sp>
@@ -9903,7 +9903,7 @@
         <p:spPr>
           <a:xfrm>
             <a:off x="1261872" y="749808"/>
-            <a:ext cx="10381183" cy="640080"/>
+            <a:ext cx="10381183" cy="713232"/>
           </a:xfrm>
           <a:prstGeom prst="rect">
             <a:avLst/>
@@ -9919,7 +9919,7 @@
               <a:buNone/>
             </a:pPr>
             <a:r>
-              <a:rPr lang="en-US" sz="3600" b="1" dirty="0">
+              <a:rPr lang="en-US" sz="4000" b="1" dirty="0">
                 <a:solidFill>
                   <a:srgbClr val="0F172A"/>
                 </a:solidFill>
@@ -9929,7 +9929,7 @@
               </a:rPr>
               <a:t>Tasks · three ways to see them</a:t>
             </a:r>
-            <a:endParaRPr lang="en-US" sz="3600" dirty="0"/>
+            <a:endParaRPr lang="en-US" sz="4000" dirty="0"/>
           </a:p>
         </p:txBody>
       </p:sp>
@@ -9942,7 +9942,7 @@
         <p:spPr>
           <a:xfrm>
             <a:off x="548640" y="1508760"/>
-            <a:ext cx="11094415" cy="731520"/>
+            <a:ext cx="11094415" cy="822960"/>
           </a:xfrm>
           <a:prstGeom prst="rect">
             <a:avLst/>
@@ -9958,7 +9958,7 @@
               <a:buNone/>
             </a:pPr>
             <a:r>
-              <a:rPr lang="en-US" sz="1600" i="1" dirty="0">
+              <a:rPr lang="en-US" sz="2000" i="1" dirty="0">
                 <a:solidFill>
                   <a:srgbClr val="334155"/>
                 </a:solidFill>
@@ -9968,7 +9968,7 @@
               </a:rPr>
               <a:t>Same tasks, three layouts — pick what fits the moment.</a:t>
             </a:r>
-            <a:endParaRPr lang="en-US" sz="1600" dirty="0"/>
+            <a:endParaRPr lang="en-US" sz="2000" dirty="0"/>
           </a:p>
         </p:txBody>
       </p:sp>
@@ -9980,8 +9980,8 @@
         </p:nvSpPr>
         <p:spPr>
           <a:xfrm>
-            <a:off x="548640" y="2103120"/>
-            <a:ext cx="3611880" cy="3749040"/>
+            <a:off x="548640" y="2423160"/>
+            <a:ext cx="3611880" cy="4023360"/>
           </a:xfrm>
           <a:prstGeom prst="rect">
             <a:avLst/>
@@ -10012,8 +10012,8 @@
         </p:nvSpPr>
         <p:spPr>
           <a:xfrm>
-            <a:off x="548640" y="2103120"/>
-            <a:ext cx="73152" cy="3749040"/>
+            <a:off x="548640" y="2423160"/>
+            <a:ext cx="73152" cy="4023360"/>
           </a:xfrm>
           <a:prstGeom prst="rect">
             <a:avLst/>
@@ -10032,8 +10032,8 @@
         </p:nvSpPr>
         <p:spPr>
           <a:xfrm>
-            <a:off x="749808" y="2267712"/>
-            <a:ext cx="3291840" cy="502920"/>
+            <a:off x="749808" y="2587752"/>
+            <a:ext cx="3291840" cy="594360"/>
           </a:xfrm>
           <a:prstGeom prst="rect">
             <a:avLst/>
@@ -10049,7 +10049,7 @@
               <a:buNone/>
             </a:pPr>
             <a:r>
-              <a:rPr lang="en-US" sz="1800" b="1" dirty="0">
+              <a:rPr lang="en-US" sz="2200" b="1" dirty="0">
                 <a:solidFill>
                   <a:srgbClr val="0F172A"/>
                 </a:solidFill>
@@ -10059,7 +10059,7 @@
               </a:rPr>
               <a:t>Board</a:t>
             </a:r>
-            <a:endParaRPr lang="en-US" sz="1800" dirty="0"/>
+            <a:endParaRPr lang="en-US" sz="2200" dirty="0"/>
           </a:p>
         </p:txBody>
       </p:sp>
@@ -10071,8 +10071,8 @@
         </p:nvSpPr>
         <p:spPr>
           <a:xfrm>
-            <a:off x="749808" y="2651760"/>
-            <a:ext cx="3291840" cy="3063240"/>
+            <a:off x="749808" y="3291840"/>
+            <a:ext cx="3291840" cy="2990088"/>
           </a:xfrm>
           <a:prstGeom prst="rect">
             <a:avLst/>
@@ -10091,7 +10091,7 @@
               <a:buNone/>
             </a:pPr>
             <a:r>
-              <a:rPr lang="en-US" sz="1400" dirty="0">
+              <a:rPr lang="en-US" sz="1800" dirty="0">
                 <a:solidFill>
                   <a:srgbClr val="334155"/>
                 </a:solidFill>
@@ -10099,9 +10099,9 @@
                 <a:ea typeface="Inter" pitchFamily="34" charset="-122"/>
                 <a:cs typeface="Inter" pitchFamily="34" charset="-120"/>
               </a:rPr>
-              <a:t>Kanban columns from Backlog → To do → In progress → Review → Blocked → Done.</a:t>
-            </a:r>
-            <a:endParaRPr lang="en-US" sz="1400" dirty="0"/>
+              <a:t>Kanban Backlog → Done.</a:t>
+            </a:r>
+            <a:endParaRPr lang="en-US" sz="1800" dirty="0"/>
           </a:p>
         </p:txBody>
       </p:sp>
@@ -10113,7 +10113,7 @@
         </p:nvSpPr>
         <p:spPr>
           <a:xfrm>
-            <a:off x="749808" y="3520440"/>
+            <a:off x="749808" y="4114800"/>
             <a:ext cx="3291840" cy="2240280"/>
           </a:xfrm>
           <a:prstGeom prst="rect">
@@ -10128,13 +10128,13 @@
           <a:p>
             <a:pPr marL="342900" indent="-342900">
               <a:spcAft>
-                <a:spcPts val="400"/>
+                <a:spcPts val="600"/>
               </a:spcAft>
               <a:buSzPct val="100000"/>
               <a:buChar char="•"/>
             </a:pPr>
             <a:r>
-              <a:rPr lang="en-US" sz="1400" dirty="0">
+              <a:rPr lang="en-US" sz="1800" dirty="0">
                 <a:solidFill>
                   <a:srgbClr val="334155"/>
                 </a:solidFill>
@@ -10142,20 +10142,20 @@
                 <a:ea typeface="Inter" pitchFamily="34" charset="-122"/>
                 <a:cs typeface="Inter" pitchFamily="34" charset="-120"/>
               </a:rPr>
-              <a:t>Drag cards to change status</a:t>
-            </a:r>
-            <a:endParaRPr lang="en-US" sz="1400" dirty="0"/>
+              <a:t>Drag cards to change status.</a:t>
+            </a:r>
+            <a:endParaRPr lang="en-US" sz="1800" dirty="0"/>
           </a:p>
           <a:p>
             <a:pPr marL="342900" indent="-342900">
               <a:spcAft>
-                <a:spcPts val="400"/>
+                <a:spcPts val="600"/>
               </a:spcAft>
               <a:buSzPct val="100000"/>
               <a:buChar char="•"/>
             </a:pPr>
             <a:r>
-              <a:rPr lang="en-US" sz="1400" dirty="0">
+              <a:rPr lang="en-US" sz="1800" dirty="0">
                 <a:solidFill>
                   <a:srgbClr val="334155"/>
                 </a:solidFill>
@@ -10163,20 +10163,20 @@
                 <a:ea typeface="Inter" pitchFamily="34" charset="-122"/>
                 <a:cs typeface="Inter" pitchFamily="34" charset="-120"/>
               </a:rPr>
-              <a:t>Highlight banners on new / updated</a:t>
-            </a:r>
-            <a:endParaRPr lang="en-US" sz="1400" dirty="0"/>
+              <a:t>Banners on new / updated.</a:t>
+            </a:r>
+            <a:endParaRPr lang="en-US" sz="1800" dirty="0"/>
           </a:p>
           <a:p>
             <a:pPr marL="342900" indent="-342900">
               <a:spcAft>
-                <a:spcPts val="400"/>
+                <a:spcPts val="600"/>
               </a:spcAft>
               <a:buSzPct val="100000"/>
               <a:buChar char="•"/>
             </a:pPr>
             <a:r>
-              <a:rPr lang="en-US" sz="1400" dirty="0">
+              <a:rPr lang="en-US" sz="1800" dirty="0">
                 <a:solidFill>
                   <a:srgbClr val="334155"/>
                 </a:solidFill>
@@ -10184,9 +10184,9 @@
                 <a:ea typeface="Inter" pitchFamily="34" charset="-122"/>
                 <a:cs typeface="Inter" pitchFamily="34" charset="-120"/>
               </a:rPr>
-              <a:t>Best for the daily ‘what to do next’</a:t>
-            </a:r>
-            <a:endParaRPr lang="en-US" sz="1400" dirty="0"/>
+              <a:t>Best for daily focus.</a:t>
+            </a:r>
+            <a:endParaRPr lang="en-US" sz="1800" dirty="0"/>
           </a:p>
         </p:txBody>
       </p:sp>
@@ -10198,8 +10198,8 @@
         </p:nvSpPr>
         <p:spPr>
           <a:xfrm>
-            <a:off x="4343400" y="2103120"/>
-            <a:ext cx="3611880" cy="3749040"/>
+            <a:off x="4343400" y="2423160"/>
+            <a:ext cx="3611880" cy="4023360"/>
           </a:xfrm>
           <a:prstGeom prst="rect">
             <a:avLst/>
@@ -10230,8 +10230,8 @@
         </p:nvSpPr>
         <p:spPr>
           <a:xfrm>
-            <a:off x="4343400" y="2103120"/>
-            <a:ext cx="73152" cy="3749040"/>
+            <a:off x="4343400" y="2423160"/>
+            <a:ext cx="73152" cy="4023360"/>
           </a:xfrm>
           <a:prstGeom prst="rect">
             <a:avLst/>
@@ -10250,8 +10250,8 @@
         </p:nvSpPr>
         <p:spPr>
           <a:xfrm>
-            <a:off x="4544568" y="2267712"/>
-            <a:ext cx="3291840" cy="502920"/>
+            <a:off x="4544568" y="2587752"/>
+            <a:ext cx="3291840" cy="594360"/>
           </a:xfrm>
           <a:prstGeom prst="rect">
             <a:avLst/>
@@ -10267,7 +10267,7 @@
               <a:buNone/>
             </a:pPr>
             <a:r>
-              <a:rPr lang="en-US" sz="1800" b="1" dirty="0">
+              <a:rPr lang="en-US" sz="2200" b="1" dirty="0">
                 <a:solidFill>
                   <a:srgbClr val="0F172A"/>
                 </a:solidFill>
@@ -10277,7 +10277,7 @@
               </a:rPr>
               <a:t>List</a:t>
             </a:r>
-            <a:endParaRPr lang="en-US" sz="1800" dirty="0"/>
+            <a:endParaRPr lang="en-US" sz="2200" dirty="0"/>
           </a:p>
         </p:txBody>
       </p:sp>
@@ -10289,8 +10289,8 @@
         </p:nvSpPr>
         <p:spPr>
           <a:xfrm>
-            <a:off x="4544568" y="2651760"/>
-            <a:ext cx="3291840" cy="3063240"/>
+            <a:off x="4544568" y="3291840"/>
+            <a:ext cx="3291840" cy="2990088"/>
           </a:xfrm>
           <a:prstGeom prst="rect">
             <a:avLst/>
@@ -10309,7 +10309,7 @@
               <a:buNone/>
             </a:pPr>
             <a:r>
-              <a:rPr lang="en-US" sz="1400" dirty="0">
+              <a:rPr lang="en-US" sz="1800" dirty="0">
                 <a:solidFill>
                   <a:srgbClr val="334155"/>
                 </a:solidFill>
@@ -10317,9 +10317,9 @@
                 <a:ea typeface="Inter" pitchFamily="34" charset="-122"/>
                 <a:cs typeface="Inter" pitchFamily="34" charset="-120"/>
               </a:rPr>
-              <a:t>Table per student with full Group → Task → Sub-task hierarchy.</a:t>
-            </a:r>
-            <a:endParaRPr lang="en-US" sz="1400" dirty="0"/>
+              <a:t>Table with the full hierarchy.</a:t>
+            </a:r>
+            <a:endParaRPr lang="en-US" sz="1800" dirty="0"/>
           </a:p>
         </p:txBody>
       </p:sp>
@@ -10331,7 +10331,7 @@
         </p:nvSpPr>
         <p:spPr>
           <a:xfrm>
-            <a:off x="4544568" y="3520440"/>
+            <a:off x="4544568" y="4114800"/>
             <a:ext cx="3291840" cy="2240280"/>
           </a:xfrm>
           <a:prstGeom prst="rect">
@@ -10346,13 +10346,13 @@
           <a:p>
             <a:pPr marL="342900" indent="-342900">
               <a:spcAft>
-                <a:spcPts val="400"/>
+                <a:spcPts val="600"/>
               </a:spcAft>
               <a:buSzPct val="100000"/>
               <a:buChar char="•"/>
             </a:pPr>
             <a:r>
-              <a:rPr lang="en-US" sz="1400" dirty="0">
+              <a:rPr lang="en-US" sz="1800" dirty="0">
                 <a:solidFill>
                   <a:srgbClr val="334155"/>
                 </a:solidFill>
@@ -10360,20 +10360,20 @@
                 <a:ea typeface="Inter" pitchFamily="34" charset="-122"/>
                 <a:cs typeface="Inter" pitchFamily="34" charset="-120"/>
               </a:rPr>
-              <a:t>Group related tasks under a name</a:t>
-            </a:r>
-            <a:endParaRPr lang="en-US" sz="1400" dirty="0"/>
+              <a:t>Group tasks under a name.</a:t>
+            </a:r>
+            <a:endParaRPr lang="en-US" sz="1800" dirty="0"/>
           </a:p>
           <a:p>
             <a:pPr marL="342900" indent="-342900">
               <a:spcAft>
-                <a:spcPts val="400"/>
+                <a:spcPts val="600"/>
               </a:spcAft>
               <a:buSzPct val="100000"/>
               <a:buChar char="•"/>
             </a:pPr>
             <a:r>
-              <a:rPr lang="en-US" sz="1400" dirty="0">
+              <a:rPr lang="en-US" sz="1800" dirty="0">
                 <a:solidFill>
                   <a:srgbClr val="334155"/>
                 </a:solidFill>
@@ -10381,20 +10381,20 @@
                 <a:ea typeface="Inter" pitchFamily="34" charset="-122"/>
                 <a:cs typeface="Inter" pitchFamily="34" charset="-120"/>
               </a:rPr>
-              <a:t>Multi-select to bulk-group / add</a:t>
-            </a:r>
-            <a:endParaRPr lang="en-US" sz="1400" dirty="0"/>
+              <a:t>Multi-select to bulk edit.</a:t>
+            </a:r>
+            <a:endParaRPr lang="en-US" sz="1800" dirty="0"/>
           </a:p>
           <a:p>
             <a:pPr marL="342900" indent="-342900">
               <a:spcAft>
-                <a:spcPts val="400"/>
+                <a:spcPts val="600"/>
               </a:spcAft>
               <a:buSzPct val="100000"/>
               <a:buChar char="•"/>
             </a:pPr>
             <a:r>
-              <a:rPr lang="en-US" sz="1400" dirty="0">
+              <a:rPr lang="en-US" sz="1800" dirty="0">
                 <a:solidFill>
                   <a:srgbClr val="334155"/>
                 </a:solidFill>
@@ -10402,9 +10402,9 @@
                 <a:ea typeface="Inter" pitchFamily="34" charset="-122"/>
                 <a:cs typeface="Inter" pitchFamily="34" charset="-120"/>
               </a:rPr>
-              <a:t>Filter by group or Individual only</a:t>
-            </a:r>
-            <a:endParaRPr lang="en-US" sz="1400" dirty="0"/>
+              <a:t>Filter by group / Individual.</a:t>
+            </a:r>
+            <a:endParaRPr lang="en-US" sz="1800" dirty="0"/>
           </a:p>
         </p:txBody>
       </p:sp>
@@ -10416,8 +10416,8 @@
         </p:nvSpPr>
         <p:spPr>
           <a:xfrm>
-            <a:off x="8138160" y="2103120"/>
-            <a:ext cx="3611880" cy="3749040"/>
+            <a:off x="8138160" y="2423160"/>
+            <a:ext cx="3611880" cy="4023360"/>
           </a:xfrm>
           <a:prstGeom prst="rect">
             <a:avLst/>
@@ -10448,8 +10448,8 @@
         </p:nvSpPr>
         <p:spPr>
           <a:xfrm>
-            <a:off x="8138160" y="2103120"/>
-            <a:ext cx="73152" cy="3749040"/>
+            <a:off x="8138160" y="2423160"/>
+            <a:ext cx="73152" cy="4023360"/>
           </a:xfrm>
           <a:prstGeom prst="rect">
             <a:avLst/>
@@ -10468,8 +10468,8 @@
         </p:nvSpPr>
         <p:spPr>
           <a:xfrm>
-            <a:off x="8339328" y="2267712"/>
-            <a:ext cx="3291840" cy="502920"/>
+            <a:off x="8339328" y="2587752"/>
+            <a:ext cx="3291840" cy="594360"/>
           </a:xfrm>
           <a:prstGeom prst="rect">
             <a:avLst/>
@@ -10485,7 +10485,7 @@
               <a:buNone/>
             </a:pPr>
             <a:r>
-              <a:rPr lang="en-US" sz="1800" b="1" dirty="0">
+              <a:rPr lang="en-US" sz="2200" b="1" dirty="0">
                 <a:solidFill>
                   <a:srgbClr val="0F172A"/>
                 </a:solidFill>
@@ -10495,7 +10495,7 @@
               </a:rPr>
               <a:t>Gantt</a:t>
             </a:r>
-            <a:endParaRPr lang="en-US" sz="1800" dirty="0"/>
+            <a:endParaRPr lang="en-US" sz="2200" dirty="0"/>
           </a:p>
         </p:txBody>
       </p:sp>
@@ -10507,8 +10507,8 @@
         </p:nvSpPr>
         <p:spPr>
           <a:xfrm>
-            <a:off x="8339328" y="2651760"/>
-            <a:ext cx="3291840" cy="3063240"/>
+            <a:off x="8339328" y="3291840"/>
+            <a:ext cx="3291840" cy="2990088"/>
           </a:xfrm>
           <a:prstGeom prst="rect">
             <a:avLst/>
@@ -10527,7 +10527,7 @@
               <a:buNone/>
             </a:pPr>
             <a:r>
-              <a:rPr lang="en-US" sz="1400" dirty="0">
+              <a:rPr lang="en-US" sz="1800" dirty="0">
                 <a:solidFill>
                   <a:srgbClr val="334155"/>
                 </a:solidFill>
@@ -10535,9 +10535,9 @@
                 <a:ea typeface="Inter" pitchFamily="34" charset="-122"/>
                 <a:cs typeface="Inter" pitchFamily="34" charset="-120"/>
               </a:rPr>
-              <a:t>Timeline grouped by student with weekly gridlines and a dashed today line.</a:t>
-            </a:r>
-            <a:endParaRPr lang="en-US" sz="1400" dirty="0"/>
+              <a:t>Timeline grouped by student.</a:t>
+            </a:r>
+            <a:endParaRPr lang="en-US" sz="1800" dirty="0"/>
           </a:p>
         </p:txBody>
       </p:sp>
@@ -10549,7 +10549,7 @@
         </p:nvSpPr>
         <p:spPr>
           <a:xfrm>
-            <a:off x="8339328" y="3520440"/>
+            <a:off x="8339328" y="4114800"/>
             <a:ext cx="3291840" cy="2240280"/>
           </a:xfrm>
           <a:prstGeom prst="rect">
@@ -10564,13 +10564,13 @@
           <a:p>
             <a:pPr marL="342900" indent="-342900">
               <a:spcAft>
-                <a:spcPts val="400"/>
+                <a:spcPts val="600"/>
               </a:spcAft>
               <a:buSzPct val="100000"/>
               <a:buChar char="•"/>
             </a:pPr>
             <a:r>
-              <a:rPr lang="en-US" sz="1400" dirty="0">
+              <a:rPr lang="en-US" sz="1800" dirty="0">
                 <a:solidFill>
                   <a:srgbClr val="334155"/>
                 </a:solidFill>
@@ -10578,20 +10578,20 @@
                 <a:ea typeface="Inter" pitchFamily="34" charset="-122"/>
                 <a:cs typeface="Inter" pitchFamily="34" charset="-120"/>
               </a:rPr>
-              <a:t>Bars: each task; ◆ each sub-task deadline</a:t>
-            </a:r>
-            <a:endParaRPr lang="en-US" sz="1400" dirty="0"/>
+              <a:t>Bars = tasks; ◆ = sub-tasks.</a:t>
+            </a:r>
+            <a:endParaRPr lang="en-US" sz="1800" dirty="0"/>
           </a:p>
           <a:p>
             <a:pPr marL="342900" indent="-342900">
               <a:spcAft>
-                <a:spcPts val="400"/>
+                <a:spcPts val="600"/>
               </a:spcAft>
               <a:buSzPct val="100000"/>
               <a:buChar char="•"/>
             </a:pPr>
             <a:r>
-              <a:rPr lang="en-US" sz="1400" dirty="0">
+              <a:rPr lang="en-US" sz="1800" dirty="0">
                 <a:solidFill>
                   <a:srgbClr val="334155"/>
                 </a:solidFill>
@@ -10599,20 +10599,20 @@
                 <a:ea typeface="Inter" pitchFamily="34" charset="-122"/>
                 <a:cs typeface="Inter" pitchFamily="34" charset="-120"/>
               </a:rPr>
-              <a:t>Click a task to show / hide its sub-tasks</a:t>
-            </a:r>
-            <a:endParaRPr lang="en-US" sz="1400" dirty="0"/>
+              <a:t>Expand a task to see sub-tasks.</a:t>
+            </a:r>
+            <a:endParaRPr lang="en-US" sz="1800" dirty="0"/>
           </a:p>
           <a:p>
             <a:pPr marL="342900" indent="-342900">
               <a:spcAft>
-                <a:spcPts val="400"/>
+                <a:spcPts val="600"/>
               </a:spcAft>
               <a:buSzPct val="100000"/>
               <a:buChar char="•"/>
             </a:pPr>
             <a:r>
-              <a:rPr lang="en-US" sz="1400" dirty="0">
+              <a:rPr lang="en-US" sz="1800" dirty="0">
                 <a:solidFill>
                   <a:srgbClr val="334155"/>
                 </a:solidFill>
@@ -10620,9 +10620,9 @@
                 <a:ea typeface="Inter" pitchFamily="34" charset="-122"/>
                 <a:cs typeface="Inter" pitchFamily="34" charset="-120"/>
               </a:rPr>
-              <a:t>Dependents are indented under parents</a:t>
-            </a:r>
-            <a:endParaRPr lang="en-US" sz="1400" dirty="0"/>
+              <a:t>Dependents indented under parent.</a:t>
+            </a:r>
+            <a:endParaRPr lang="en-US" sz="1800" dirty="0"/>
           </a:p>
         </p:txBody>
       </p:sp>
@@ -10674,7 +10674,7 @@
               <a:buNone/>
             </a:pPr>
             <a:r>
-              <a:rPr lang="en-US" sz="1100" dirty="0">
+              <a:rPr lang="en-US" sz="1300" dirty="0">
                 <a:solidFill>
                   <a:srgbClr val="64748B"/>
                 </a:solidFill>
@@ -10684,7 +10684,7 @@
               </a:rPr>
               <a:t>PhDapp · for students</a:t>
             </a:r>
-            <a:endParaRPr lang="en-US" sz="1100" dirty="0"/>
+            <a:endParaRPr lang="en-US" sz="1300" dirty="0"/>
           </a:p>
         </p:txBody>
       </p:sp>
@@ -10713,7 +10713,7 @@
               <a:buNone/>
             </a:pPr>
             <a:r>
-              <a:rPr lang="en-US" sz="1100" dirty="0">
+              <a:rPr lang="en-US" sz="1300" dirty="0">
                 <a:solidFill>
                   <a:srgbClr val="64748B"/>
                 </a:solidFill>
@@ -10723,7 +10723,7 @@
               </a:rPr>
               <a:t>5 / 15</a:t>
             </a:r>
-            <a:endParaRPr lang="en-US" sz="1100" dirty="0"/>
+            <a:endParaRPr lang="en-US" sz="1300" dirty="0"/>
           </a:p>
         </p:txBody>
       </p:sp>
@@ -10853,7 +10853,7 @@
         <p:spPr>
           <a:xfrm>
             <a:off x="1261872" y="749808"/>
-            <a:ext cx="10381183" cy="640080"/>
+            <a:ext cx="10381183" cy="713232"/>
           </a:xfrm>
           <a:prstGeom prst="rect">
             <a:avLst/>
@@ -10869,7 +10869,7 @@
               <a:buNone/>
             </a:pPr>
             <a:r>
-              <a:rPr lang="en-US" sz="3600" b="1" dirty="0">
+              <a:rPr lang="en-US" sz="4000" b="1" dirty="0">
                 <a:solidFill>
                   <a:srgbClr val="0F172A"/>
                 </a:solidFill>
@@ -10879,7 +10879,7 @@
               </a:rPr>
               <a:t>Tasks · the anatomy of a task</a:t>
             </a:r>
-            <a:endParaRPr lang="en-US" sz="3600" dirty="0"/>
+            <a:endParaRPr lang="en-US" sz="4000" dirty="0"/>
           </a:p>
         </p:txBody>
       </p:sp>
@@ -10892,7 +10892,7 @@
         <p:spPr>
           <a:xfrm>
             <a:off x="548640" y="1828800"/>
-            <a:ext cx="5486400" cy="3291840"/>
+            <a:ext cx="5486400" cy="3931920"/>
           </a:xfrm>
           <a:prstGeom prst="rect">
             <a:avLst/>
@@ -10924,7 +10924,7 @@
         <p:spPr>
           <a:xfrm>
             <a:off x="548640" y="1828800"/>
-            <a:ext cx="73152" cy="3291840"/>
+            <a:ext cx="73152" cy="3931920"/>
           </a:xfrm>
           <a:prstGeom prst="rect">
             <a:avLst/>
@@ -10944,7 +10944,7 @@
         <p:spPr>
           <a:xfrm>
             <a:off x="749808" y="1993392"/>
-            <a:ext cx="5166360" cy="502920"/>
+            <a:ext cx="5166360" cy="594360"/>
           </a:xfrm>
           <a:prstGeom prst="rect">
             <a:avLst/>
@@ -10960,7 +10960,7 @@
               <a:buNone/>
             </a:pPr>
             <a:r>
-              <a:rPr lang="en-US" sz="1800" b="1" dirty="0">
+              <a:rPr lang="en-US" sz="2200" b="1" dirty="0">
                 <a:solidFill>
                   <a:srgbClr val="0F172A"/>
                 </a:solidFill>
@@ -10970,7 +10970,7 @@
               </a:rPr>
               <a:t>Fields &amp; states</a:t>
             </a:r>
-            <a:endParaRPr lang="en-US" sz="1800" dirty="0"/>
+            <a:endParaRPr lang="en-US" sz="2200" dirty="0"/>
           </a:p>
         </p:txBody>
       </p:sp>
@@ -10982,8 +10982,8 @@
         </p:nvSpPr>
         <p:spPr>
           <a:xfrm>
-            <a:off x="777240" y="2377440"/>
-            <a:ext cx="5074920" cy="2651760"/>
+            <a:off x="777240" y="2697480"/>
+            <a:ext cx="5074920" cy="2926080"/>
           </a:xfrm>
           <a:prstGeom prst="rect">
             <a:avLst/>
@@ -10997,13 +10997,13 @@
           <a:p>
             <a:pPr marL="342900" indent="-342900">
               <a:spcAft>
-                <a:spcPts val="400"/>
+                <a:spcPts val="600"/>
               </a:spcAft>
               <a:buSzPct val="100000"/>
               <a:buChar char="•"/>
             </a:pPr>
             <a:r>
-              <a:rPr lang="en-US" sz="1300" dirty="0">
+              <a:rPr lang="en-US" sz="1800" dirty="0">
                 <a:solidFill>
                   <a:srgbClr val="334155"/>
                 </a:solidFill>
@@ -11011,20 +11011,20 @@
                 <a:ea typeface="Inter" pitchFamily="34" charset="-122"/>
                 <a:cs typeface="Inter" pitchFamily="34" charset="-120"/>
               </a:rPr>
-              <a:t>Status: Backlog → To do → In progress → Review → Blocked → Done (only supervisors set Done).</a:t>
-            </a:r>
-            <a:endParaRPr lang="en-US" sz="1300" dirty="0"/>
+              <a:t>Status: Backlog → To do → In progress → Review → Blocked → Done.</a:t>
+            </a:r>
+            <a:endParaRPr lang="en-US" sz="1800" dirty="0"/>
           </a:p>
           <a:p>
             <a:pPr marL="342900" indent="-342900">
               <a:spcAft>
-                <a:spcPts val="400"/>
+                <a:spcPts val="600"/>
               </a:spcAft>
               <a:buSzPct val="100000"/>
               <a:buChar char="•"/>
             </a:pPr>
             <a:r>
-              <a:rPr lang="en-US" sz="1300" dirty="0">
+              <a:rPr lang="en-US" sz="1800" dirty="0">
                 <a:solidFill>
                   <a:srgbClr val="334155"/>
                 </a:solidFill>
@@ -11032,20 +11032,20 @@
                 <a:ea typeface="Inter" pitchFamily="34" charset="-122"/>
                 <a:cs typeface="Inter" pitchFamily="34" charset="-120"/>
               </a:rPr>
-              <a:t>Priority L/M/H/U and category (Research, Writing, Lab work, Coding, Reading…).</a:t>
-            </a:r>
-            <a:endParaRPr lang="en-US" sz="1300" dirty="0"/>
+              <a:t>Priority L/M/H/U + category (Research, Writing, Lab, Reading…).</a:t>
+            </a:r>
+            <a:endParaRPr lang="en-US" sz="1800" dirty="0"/>
           </a:p>
           <a:p>
             <a:pPr marL="342900" indent="-342900">
               <a:spcAft>
-                <a:spcPts val="400"/>
+                <a:spcPts val="600"/>
               </a:spcAft>
               <a:buSzPct val="100000"/>
               <a:buChar char="•"/>
             </a:pPr>
             <a:r>
-              <a:rPr lang="en-US" sz="1300" dirty="0">
+              <a:rPr lang="en-US" sz="1800" dirty="0">
                 <a:solidFill>
                   <a:srgbClr val="334155"/>
                 </a:solidFill>
@@ -11053,20 +11053,20 @@
                 <a:ea typeface="Inter" pitchFamily="34" charset="-122"/>
                 <a:cs typeface="Inter" pitchFamily="34" charset="-120"/>
               </a:rPr>
-              <a:t>Due date — auto-creates a calendar event.</a:t>
-            </a:r>
-            <a:endParaRPr lang="en-US" sz="1300" dirty="0"/>
+              <a:t>Due date auto-creates a calendar event.</a:t>
+            </a:r>
+            <a:endParaRPr lang="en-US" sz="1800" dirty="0"/>
           </a:p>
           <a:p>
             <a:pPr marL="342900" indent="-342900">
               <a:spcAft>
-                <a:spcPts val="400"/>
+                <a:spcPts val="600"/>
               </a:spcAft>
               <a:buSzPct val="100000"/>
               <a:buChar char="•"/>
             </a:pPr>
             <a:r>
-              <a:rPr lang="en-US" sz="1300" dirty="0">
+              <a:rPr lang="en-US" sz="1800" dirty="0">
                 <a:solidFill>
                   <a:srgbClr val="334155"/>
                 </a:solidFill>
@@ -11074,20 +11074,20 @@
                 <a:ea typeface="Inter" pitchFamily="34" charset="-122"/>
                 <a:cs typeface="Inter" pitchFamily="34" charset="-120"/>
               </a:rPr>
-              <a:t>Sub-tasks (checklist) with optional deadlines.</a:t>
-            </a:r>
-            <a:endParaRPr lang="en-US" sz="1300" dirty="0"/>
+              <a:t>Sub-tasks with optional deadlines.</a:t>
+            </a:r>
+            <a:endParaRPr lang="en-US" sz="1800" dirty="0"/>
           </a:p>
           <a:p>
             <a:pPr marL="342900" indent="-342900">
               <a:spcAft>
-                <a:spcPts val="400"/>
+                <a:spcPts val="600"/>
               </a:spcAft>
               <a:buSzPct val="100000"/>
               <a:buChar char="•"/>
             </a:pPr>
             <a:r>
-              <a:rPr lang="en-US" sz="1300" dirty="0">
+              <a:rPr lang="en-US" sz="1800" dirty="0">
                 <a:solidFill>
                   <a:srgbClr val="334155"/>
                 </a:solidFill>
@@ -11095,20 +11095,20 @@
                 <a:ea typeface="Inter" pitchFamily="34" charset="-122"/>
                 <a:cs typeface="Inter" pitchFamily="34" charset="-120"/>
               </a:rPr>
-              <a:t>Drive folder via the picker; click ‘Open Drive folder’.</a:t>
-            </a:r>
-            <a:endParaRPr lang="en-US" sz="1300" dirty="0"/>
+              <a:t>Drive folder via picker; ‘Open Drive folder’.</a:t>
+            </a:r>
+            <a:endParaRPr lang="en-US" sz="1800" dirty="0"/>
           </a:p>
           <a:p>
             <a:pPr marL="342900" indent="-342900">
               <a:spcAft>
-                <a:spcPts val="400"/>
+                <a:spcPts val="600"/>
               </a:spcAft>
               <a:buSzPct val="100000"/>
               <a:buChar char="•"/>
             </a:pPr>
             <a:r>
-              <a:rPr lang="en-US" sz="1300" dirty="0">
+              <a:rPr lang="en-US" sz="1800" dirty="0">
                 <a:solidFill>
                   <a:srgbClr val="334155"/>
                 </a:solidFill>
@@ -11116,9 +11116,9 @@
                 <a:ea typeface="Inter" pitchFamily="34" charset="-122"/>
                 <a:cs typeface="Inter" pitchFamily="34" charset="-120"/>
               </a:rPr>
-              <a:t>Comments — discuss + edit/delete your own; marked (edited).</a:t>
-            </a:r>
-            <a:endParaRPr lang="en-US" sz="1300" dirty="0"/>
+              <a:t>Comments with edit / delete; marked (edited).</a:t>
+            </a:r>
+            <a:endParaRPr lang="en-US" sz="1800" dirty="0"/>
           </a:p>
         </p:txBody>
       </p:sp>
@@ -11131,7 +11131,7 @@
         <p:spPr>
           <a:xfrm>
             <a:off x="6400800" y="1828800"/>
-            <a:ext cx="5242255" cy="3291840"/>
+            <a:ext cx="5242255" cy="3931920"/>
           </a:xfrm>
           <a:prstGeom prst="rect">
             <a:avLst/>
@@ -11163,7 +11163,7 @@
         <p:spPr>
           <a:xfrm>
             <a:off x="6400800" y="1828800"/>
-            <a:ext cx="73152" cy="3291840"/>
+            <a:ext cx="73152" cy="3931920"/>
           </a:xfrm>
           <a:prstGeom prst="rect">
             <a:avLst/>
@@ -11183,7 +11183,7 @@
         <p:spPr>
           <a:xfrm>
             <a:off x="6601968" y="1993392"/>
-            <a:ext cx="4922215" cy="502920"/>
+            <a:ext cx="4922215" cy="594360"/>
           </a:xfrm>
           <a:prstGeom prst="rect">
             <a:avLst/>
@@ -11199,7 +11199,7 @@
               <a:buNone/>
             </a:pPr>
             <a:r>
-              <a:rPr lang="en-US" sz="1800" b="1" dirty="0">
+              <a:rPr lang="en-US" sz="2200" b="1" dirty="0">
                 <a:solidFill>
                   <a:srgbClr val="0F172A"/>
                 </a:solidFill>
@@ -11209,7 +11209,7 @@
               </a:rPr>
               <a:t>Dependencies (auto-blocked)</a:t>
             </a:r>
-            <a:endParaRPr lang="en-US" sz="1800" dirty="0"/>
+            <a:endParaRPr lang="en-US" sz="2200" dirty="0"/>
           </a:p>
         </p:txBody>
       </p:sp>
@@ -11221,8 +11221,8 @@
         </p:nvSpPr>
         <p:spPr>
           <a:xfrm>
-            <a:off x="6629400" y="2377440"/>
-            <a:ext cx="4876495" cy="2651760"/>
+            <a:off x="6629400" y="2697480"/>
+            <a:ext cx="4876495" cy="2926080"/>
           </a:xfrm>
           <a:prstGeom prst="rect">
             <a:avLst/>
@@ -11236,13 +11236,13 @@
           <a:p>
             <a:pPr marL="342900" indent="-342900">
               <a:spcAft>
-                <a:spcPts val="400"/>
+                <a:spcPts val="600"/>
               </a:spcAft>
               <a:buSzPct val="100000"/>
               <a:buChar char="•"/>
             </a:pPr>
             <a:r>
-              <a:rPr lang="en-US" sz="1300" dirty="0">
+              <a:rPr lang="en-US" sz="1800" dirty="0">
                 <a:solidFill>
                   <a:srgbClr val="334155"/>
                 </a:solidFill>
@@ -11252,18 +11252,18 @@
               </a:rPr>
               <a:t>Pick one or more ‘parent’ tasks in the Depends on selector.</a:t>
             </a:r>
-            <a:endParaRPr lang="en-US" sz="1300" dirty="0"/>
+            <a:endParaRPr lang="en-US" sz="1800" dirty="0"/>
           </a:p>
           <a:p>
             <a:pPr marL="342900" indent="-342900">
               <a:spcAft>
-                <a:spcPts val="400"/>
+                <a:spcPts val="600"/>
               </a:spcAft>
               <a:buSzPct val="100000"/>
               <a:buChar char="•"/>
             </a:pPr>
             <a:r>
-              <a:rPr lang="en-US" sz="1300" dirty="0">
+              <a:rPr lang="en-US" sz="1800" dirty="0">
                 <a:solidFill>
                   <a:srgbClr val="334155"/>
                 </a:solidFill>
@@ -11273,18 +11273,18 @@
               </a:rPr>
               <a:t>The task automatically becomes Blocked until every parent is Done.</a:t>
             </a:r>
-            <a:endParaRPr lang="en-US" sz="1300" dirty="0"/>
+            <a:endParaRPr lang="en-US" sz="1800" dirty="0"/>
           </a:p>
           <a:p>
             <a:pPr marL="342900" indent="-342900">
               <a:spcAft>
-                <a:spcPts val="400"/>
+                <a:spcPts val="600"/>
               </a:spcAft>
               <a:buSzPct val="100000"/>
               <a:buChar char="•"/>
             </a:pPr>
             <a:r>
-              <a:rPr lang="en-US" sz="1300" dirty="0">
+              <a:rPr lang="en-US" sz="1800" dirty="0">
                 <a:solidFill>
                   <a:srgbClr val="334155"/>
                 </a:solidFill>
@@ -11294,18 +11294,18 @@
               </a:rPr>
               <a:t>When the last parent is Done, it auto-moves to To do.</a:t>
             </a:r>
-            <a:endParaRPr lang="en-US" sz="1300" dirty="0"/>
+            <a:endParaRPr lang="en-US" sz="1800" dirty="0"/>
           </a:p>
           <a:p>
             <a:pPr marL="342900" indent="-342900">
               <a:spcAft>
-                <a:spcPts val="400"/>
+                <a:spcPts val="600"/>
               </a:spcAft>
               <a:buSzPct val="100000"/>
               <a:buChar char="•"/>
             </a:pPr>
             <a:r>
-              <a:rPr lang="en-US" sz="1300" dirty="0">
+              <a:rPr lang="en-US" sz="1800" dirty="0">
                 <a:solidFill>
                   <a:srgbClr val="334155"/>
                 </a:solidFill>
@@ -11315,18 +11315,18 @@
               </a:rPr>
               <a:t>Re-opening a parent re-blocks its dependents.</a:t>
             </a:r>
-            <a:endParaRPr lang="en-US" sz="1300" dirty="0"/>
+            <a:endParaRPr lang="en-US" sz="1800" dirty="0"/>
           </a:p>
           <a:p>
             <a:pPr marL="342900" indent="-342900">
               <a:spcAft>
-                <a:spcPts val="400"/>
+                <a:spcPts val="600"/>
               </a:spcAft>
               <a:buSzPct val="100000"/>
               <a:buChar char="•"/>
             </a:pPr>
             <a:r>
-              <a:rPr lang="en-US" sz="1300" dirty="0">
+              <a:rPr lang="en-US" sz="1800" dirty="0">
                 <a:solidFill>
                   <a:srgbClr val="334155"/>
                 </a:solidFill>
@@ -11336,7 +11336,7 @@
               </a:rPr>
               <a:t>Cycles and cross-student dependencies are rejected.</a:t>
             </a:r>
-            <a:endParaRPr lang="en-US" sz="1300" dirty="0"/>
+            <a:endParaRPr lang="en-US" sz="1800" dirty="0"/>
           </a:p>
         </p:txBody>
       </p:sp>
@@ -11388,7 +11388,7 @@
               <a:buNone/>
             </a:pPr>
             <a:r>
-              <a:rPr lang="en-US" sz="1100" dirty="0">
+              <a:rPr lang="en-US" sz="1300" dirty="0">
                 <a:solidFill>
                   <a:srgbClr val="64748B"/>
                 </a:solidFill>
@@ -11398,7 +11398,7 @@
               </a:rPr>
               <a:t>PhDapp · for students</a:t>
             </a:r>
-            <a:endParaRPr lang="en-US" sz="1100" dirty="0"/>
+            <a:endParaRPr lang="en-US" sz="1300" dirty="0"/>
           </a:p>
         </p:txBody>
       </p:sp>
@@ -11427,7 +11427,7 @@
               <a:buNone/>
             </a:pPr>
             <a:r>
-              <a:rPr lang="en-US" sz="1100" dirty="0">
+              <a:rPr lang="en-US" sz="1300" dirty="0">
                 <a:solidFill>
                   <a:srgbClr val="64748B"/>
                 </a:solidFill>
@@ -11437,7 +11437,7 @@
               </a:rPr>
               <a:t>6 / 15</a:t>
             </a:r>
-            <a:endParaRPr lang="en-US" sz="1100" dirty="0"/>
+            <a:endParaRPr lang="en-US" sz="1300" dirty="0"/>
           </a:p>
         </p:txBody>
       </p:sp>
@@ -11567,7 +11567,7 @@
         <p:spPr>
           <a:xfrm>
             <a:off x="1261872" y="749808"/>
-            <a:ext cx="10381183" cy="640080"/>
+            <a:ext cx="10381183" cy="713232"/>
           </a:xfrm>
           <a:prstGeom prst="rect">
             <a:avLst/>
@@ -11583,7 +11583,7 @@
               <a:buNone/>
             </a:pPr>
             <a:r>
-              <a:rPr lang="en-US" sz="3600" b="1" dirty="0">
+              <a:rPr lang="en-US" sz="4000" b="1" dirty="0">
                 <a:solidFill>
                   <a:srgbClr val="0F172A"/>
                 </a:solidFill>
@@ -11593,7 +11593,7 @@
               </a:rPr>
               <a:t>Tasks · completing &amp; groups</a:t>
             </a:r>
-            <a:endParaRPr lang="en-US" sz="3600" dirty="0"/>
+            <a:endParaRPr lang="en-US" sz="4000" dirty="0"/>
           </a:p>
         </p:txBody>
       </p:sp>
@@ -11606,7 +11606,7 @@
         <p:spPr>
           <a:xfrm>
             <a:off x="548640" y="1828800"/>
-            <a:ext cx="5486400" cy="3291840"/>
+            <a:ext cx="5486400" cy="3931920"/>
           </a:xfrm>
           <a:prstGeom prst="rect">
             <a:avLst/>
@@ -11638,7 +11638,7 @@
         <p:spPr>
           <a:xfrm>
             <a:off x="548640" y="1828800"/>
-            <a:ext cx="73152" cy="3291840"/>
+            <a:ext cx="73152" cy="3931920"/>
           </a:xfrm>
           <a:prstGeom prst="rect">
             <a:avLst/>
@@ -11658,7 +11658,7 @@
         <p:spPr>
           <a:xfrm>
             <a:off x="749808" y="1993392"/>
-            <a:ext cx="5166360" cy="502920"/>
+            <a:ext cx="5166360" cy="594360"/>
           </a:xfrm>
           <a:prstGeom prst="rect">
             <a:avLst/>
@@ -11674,7 +11674,7 @@
               <a:buNone/>
             </a:pPr>
             <a:r>
-              <a:rPr lang="en-US" sz="1800" b="1" dirty="0">
+              <a:rPr lang="en-US" sz="2200" b="1" dirty="0">
                 <a:solidFill>
                   <a:srgbClr val="0F172A"/>
                 </a:solidFill>
@@ -11684,7 +11684,7 @@
               </a:rPr>
               <a:t>Marking a task completed</a:t>
             </a:r>
-            <a:endParaRPr lang="en-US" sz="1800" dirty="0"/>
+            <a:endParaRPr lang="en-US" sz="2200" dirty="0"/>
           </a:p>
         </p:txBody>
       </p:sp>
@@ -11696,8 +11696,8 @@
         </p:nvSpPr>
         <p:spPr>
           <a:xfrm>
-            <a:off x="777240" y="2377440"/>
-            <a:ext cx="5074920" cy="2651760"/>
+            <a:off x="777240" y="2697480"/>
+            <a:ext cx="5074920" cy="2926080"/>
           </a:xfrm>
           <a:prstGeom prst="rect">
             <a:avLst/>
@@ -11711,13 +11711,13 @@
           <a:p>
             <a:pPr marL="342900" indent="-342900">
               <a:spcAft>
-                <a:spcPts val="400"/>
+                <a:spcPts val="600"/>
               </a:spcAft>
               <a:buSzPct val="100000"/>
               <a:buChar char="•"/>
             </a:pPr>
             <a:r>
-              <a:rPr lang="en-US" sz="1300" dirty="0">
+              <a:rPr lang="en-US" sz="1800" dirty="0">
                 <a:solidFill>
                   <a:srgbClr val="334155"/>
                 </a:solidFill>
@@ -11727,18 +11727,18 @@
               </a:rPr>
               <a:t>You don't set Done — a supervisor does.</a:t>
             </a:r>
-            <a:endParaRPr lang="en-US" sz="1300" dirty="0"/>
+            <a:endParaRPr lang="en-US" sz="1800" dirty="0"/>
           </a:p>
           <a:p>
             <a:pPr marL="342900" indent="-342900">
               <a:spcAft>
-                <a:spcPts val="400"/>
+                <a:spcPts val="600"/>
               </a:spcAft>
               <a:buSzPct val="100000"/>
               <a:buChar char="•"/>
             </a:pPr>
             <a:r>
-              <a:rPr lang="en-US" sz="1300" dirty="0">
+              <a:rPr lang="en-US" sz="1800" dirty="0">
                 <a:solidFill>
                   <a:srgbClr val="334155"/>
                 </a:solidFill>
@@ -11748,18 +11748,18 @@
               </a:rPr>
               <a:t>Click ‘Mark as completed’ (or drag to Done).</a:t>
             </a:r>
-            <a:endParaRPr lang="en-US" sz="1300" dirty="0"/>
+            <a:endParaRPr lang="en-US" sz="1800" dirty="0"/>
           </a:p>
           <a:p>
             <a:pPr marL="342900" indent="-342900">
               <a:spcAft>
-                <a:spcPts val="400"/>
+                <a:spcPts val="600"/>
               </a:spcAft>
               <a:buSzPct val="100000"/>
               <a:buChar char="•"/>
             </a:pPr>
             <a:r>
-              <a:rPr lang="en-US" sz="1300" dirty="0">
+              <a:rPr lang="en-US" sz="1800" dirty="0">
                 <a:solidFill>
                   <a:srgbClr val="334155"/>
                 </a:solidFill>
@@ -11769,18 +11769,18 @@
               </a:rPr>
               <a:t>A ✓ completion-requested badge appears; your supervisors get a bell + email.</a:t>
             </a:r>
-            <a:endParaRPr lang="en-US" sz="1300" dirty="0"/>
+            <a:endParaRPr lang="en-US" sz="1800" dirty="0"/>
           </a:p>
           <a:p>
             <a:pPr marL="342900" indent="-342900">
               <a:spcAft>
-                <a:spcPts val="400"/>
+                <a:spcPts val="600"/>
               </a:spcAft>
               <a:buSzPct val="100000"/>
               <a:buChar char="•"/>
             </a:pPr>
             <a:r>
-              <a:rPr lang="en-US" sz="1300" dirty="0">
+              <a:rPr lang="en-US" sz="1800" dirty="0">
                 <a:solidFill>
                   <a:srgbClr val="334155"/>
                 </a:solidFill>
@@ -11790,18 +11790,18 @@
               </a:rPr>
               <a:t>A supervisor reviews and moves it to Done.</a:t>
             </a:r>
-            <a:endParaRPr lang="en-US" sz="1300" dirty="0"/>
+            <a:endParaRPr lang="en-US" sz="1800" dirty="0"/>
           </a:p>
           <a:p>
             <a:pPr marL="342900" indent="-342900">
               <a:spcAft>
-                <a:spcPts val="400"/>
+                <a:spcPts val="600"/>
               </a:spcAft>
               <a:buSzPct val="100000"/>
               <a:buChar char="•"/>
             </a:pPr>
             <a:r>
-              <a:rPr lang="en-US" sz="1300" dirty="0">
+              <a:rPr lang="en-US" sz="1800" dirty="0">
                 <a:solidFill>
                   <a:srgbClr val="334155"/>
                 </a:solidFill>
@@ -11811,7 +11811,7 @@
               </a:rPr>
               <a:t>All your status changes also show in your supervisors' bell.</a:t>
             </a:r>
-            <a:endParaRPr lang="en-US" sz="1300" dirty="0"/>
+            <a:endParaRPr lang="en-US" sz="1800" dirty="0"/>
           </a:p>
         </p:txBody>
       </p:sp>
@@ -11824,7 +11824,7 @@
         <p:spPr>
           <a:xfrm>
             <a:off x="6400800" y="1828800"/>
-            <a:ext cx="5242255" cy="2606040"/>
+            <a:ext cx="5242255" cy="3931920"/>
           </a:xfrm>
           <a:prstGeom prst="rect">
             <a:avLst/>
@@ -11856,7 +11856,7 @@
         <p:spPr>
           <a:xfrm>
             <a:off x="6400800" y="1828800"/>
-            <a:ext cx="73152" cy="2606040"/>
+            <a:ext cx="73152" cy="3931920"/>
           </a:xfrm>
           <a:prstGeom prst="rect">
             <a:avLst/>
@@ -11876,7 +11876,7 @@
         <p:spPr>
           <a:xfrm>
             <a:off x="6601968" y="1993392"/>
-            <a:ext cx="4922215" cy="502920"/>
+            <a:ext cx="4922215" cy="594360"/>
           </a:xfrm>
           <a:prstGeom prst="rect">
             <a:avLst/>
@@ -11892,7 +11892,7 @@
               <a:buNone/>
             </a:pPr>
             <a:r>
-              <a:rPr lang="en-US" sz="1800" b="1" dirty="0">
+              <a:rPr lang="en-US" sz="2200" b="1" dirty="0">
                 <a:solidFill>
                   <a:srgbClr val="0F172A"/>
                 </a:solidFill>
@@ -11902,7 +11902,7 @@
               </a:rPr>
               <a:t>Groups &amp; filters</a:t>
             </a:r>
-            <a:endParaRPr lang="en-US" sz="1800" dirty="0"/>
+            <a:endParaRPr lang="en-US" sz="2200" dirty="0"/>
           </a:p>
         </p:txBody>
       </p:sp>
@@ -11914,8 +11914,8 @@
         </p:nvSpPr>
         <p:spPr>
           <a:xfrm>
-            <a:off x="6629400" y="2377440"/>
-            <a:ext cx="4876495" cy="2651760"/>
+            <a:off x="6629400" y="2697480"/>
+            <a:ext cx="4876495" cy="2926080"/>
           </a:xfrm>
           <a:prstGeom prst="rect">
             <a:avLst/>
@@ -11929,13 +11929,13 @@
           <a:p>
             <a:pPr marL="342900" indent="-342900">
               <a:spcAft>
-                <a:spcPts val="400"/>
+                <a:spcPts val="600"/>
               </a:spcAft>
               <a:buSzPct val="100000"/>
               <a:buChar char="•"/>
             </a:pPr>
             <a:r>
-              <a:rPr lang="en-US" sz="1300" dirty="0">
+              <a:rPr lang="en-US" sz="1800" dirty="0">
                 <a:solidFill>
                   <a:srgbClr val="334155"/>
                 </a:solidFill>
@@ -11945,18 +11945,18 @@
               </a:rPr>
               <a:t>Tick tasks in List view → name → Create group.</a:t>
             </a:r>
-            <a:endParaRPr lang="en-US" sz="1300" dirty="0"/>
+            <a:endParaRPr lang="en-US" sz="1800" dirty="0"/>
           </a:p>
           <a:p>
             <a:pPr marL="342900" indent="-342900">
               <a:spcAft>
-                <a:spcPts val="400"/>
+                <a:spcPts val="600"/>
               </a:spcAft>
               <a:buSzPct val="100000"/>
               <a:buChar char="•"/>
             </a:pPr>
             <a:r>
-              <a:rPr lang="en-US" sz="1300" dirty="0">
+              <a:rPr lang="en-US" sz="1800" dirty="0">
                 <a:solidFill>
                   <a:srgbClr val="334155"/>
                 </a:solidFill>
@@ -11966,18 +11966,18 @@
               </a:rPr>
               <a:t>Or set a group from a task's detail panel.</a:t>
             </a:r>
-            <a:endParaRPr lang="en-US" sz="1300" dirty="0"/>
+            <a:endParaRPr lang="en-US" sz="1800" dirty="0"/>
           </a:p>
           <a:p>
             <a:pPr marL="342900" indent="-342900">
               <a:spcAft>
-                <a:spcPts val="400"/>
+                <a:spcPts val="600"/>
               </a:spcAft>
               <a:buSzPct val="100000"/>
               <a:buChar char="•"/>
             </a:pPr>
             <a:r>
-              <a:rPr lang="en-US" sz="1300" dirty="0">
+              <a:rPr lang="en-US" sz="1800" dirty="0">
                 <a:solidFill>
                   <a:srgbClr val="334155"/>
                 </a:solidFill>
@@ -11987,18 +11987,18 @@
               </a:rPr>
               <a:t>Grouped rows carry a coloured left bar; ungrouped sit under ‘Individual tasks’.</a:t>
             </a:r>
-            <a:endParaRPr lang="en-US" sz="1300" dirty="0"/>
+            <a:endParaRPr lang="en-US" sz="1800" dirty="0"/>
           </a:p>
           <a:p>
             <a:pPr marL="342900" indent="-342900">
               <a:spcAft>
-                <a:spcPts val="400"/>
+                <a:spcPts val="600"/>
               </a:spcAft>
               <a:buSzPct val="100000"/>
               <a:buChar char="•"/>
             </a:pPr>
             <a:r>
-              <a:rPr lang="en-US" sz="1300" dirty="0">
+              <a:rPr lang="en-US" sz="1800" dirty="0">
                 <a:solidFill>
                   <a:srgbClr val="334155"/>
                 </a:solidFill>
@@ -12008,7 +12008,7 @@
               </a:rPr>
               <a:t>Toolbar filters: priority, category, group (or Individual only), search.</a:t>
             </a:r>
-            <a:endParaRPr lang="en-US" sz="1300" dirty="0"/>
+            <a:endParaRPr lang="en-US" sz="1800" dirty="0"/>
           </a:p>
         </p:txBody>
       </p:sp>
@@ -12060,7 +12060,7 @@
               <a:buNone/>
             </a:pPr>
             <a:r>
-              <a:rPr lang="en-US" sz="1100" dirty="0">
+              <a:rPr lang="en-US" sz="1300" dirty="0">
                 <a:solidFill>
                   <a:srgbClr val="64748B"/>
                 </a:solidFill>
@@ -12070,7 +12070,7 @@
               </a:rPr>
               <a:t>PhDapp · for students</a:t>
             </a:r>
-            <a:endParaRPr lang="en-US" sz="1100" dirty="0"/>
+            <a:endParaRPr lang="en-US" sz="1300" dirty="0"/>
           </a:p>
         </p:txBody>
       </p:sp>
@@ -12099,7 +12099,7 @@
               <a:buNone/>
             </a:pPr>
             <a:r>
-              <a:rPr lang="en-US" sz="1100" dirty="0">
+              <a:rPr lang="en-US" sz="1300" dirty="0">
                 <a:solidFill>
                   <a:srgbClr val="64748B"/>
                 </a:solidFill>
@@ -12109,7 +12109,7 @@
               </a:rPr>
               <a:t>7 / 15</a:t>
             </a:r>
-            <a:endParaRPr lang="en-US" sz="1100" dirty="0"/>
+            <a:endParaRPr lang="en-US" sz="1300" dirty="0"/>
           </a:p>
         </p:txBody>
       </p:sp>
@@ -12239,7 +12239,7 @@
         <p:spPr>
           <a:xfrm>
             <a:off x="1261872" y="749808"/>
-            <a:ext cx="10381183" cy="640080"/>
+            <a:ext cx="10381183" cy="713232"/>
           </a:xfrm>
           <a:prstGeom prst="rect">
             <a:avLst/>
@@ -12255,7 +12255,7 @@
               <a:buNone/>
             </a:pPr>
             <a:r>
-              <a:rPr lang="en-US" sz="3600" b="1" dirty="0">
+              <a:rPr lang="en-US" sz="4000" b="1" dirty="0">
                 <a:solidFill>
                   <a:srgbClr val="0F172A"/>
                 </a:solidFill>
@@ -12265,7 +12265,7 @@
               </a:rPr>
               <a:t>Calendar</a:t>
             </a:r>
-            <a:endParaRPr lang="en-US" sz="3600" dirty="0"/>
+            <a:endParaRPr lang="en-US" sz="4000" dirty="0"/>
           </a:p>
         </p:txBody>
       </p:sp>
@@ -12278,7 +12278,7 @@
         <p:spPr>
           <a:xfrm>
             <a:off x="548640" y="1508760"/>
-            <a:ext cx="11094415" cy="731520"/>
+            <a:ext cx="11094415" cy="822960"/>
           </a:xfrm>
           <a:prstGeom prst="rect">
             <a:avLst/>
@@ -12294,7 +12294,7 @@
               <a:buNone/>
             </a:pPr>
             <a:r>
-              <a:rPr lang="en-US" sz="1600" i="1" dirty="0">
+              <a:rPr lang="en-US" sz="2000" i="1" dirty="0">
                 <a:solidFill>
                   <a:srgbClr val="334155"/>
                 </a:solidFill>
@@ -12304,7 +12304,7 @@
               </a:rPr>
               <a:t>Real meetings, task deadlines, and your supervisors' availability — together.</a:t>
             </a:r>
-            <a:endParaRPr lang="en-US" sz="1600" dirty="0"/>
+            <a:endParaRPr lang="en-US" sz="2000" dirty="0"/>
           </a:p>
         </p:txBody>
       </p:sp>
@@ -12317,7 +12317,7 @@
         <p:spPr>
           <a:xfrm>
             <a:off x="548640" y="1828800"/>
-            <a:ext cx="5486400" cy="3291840"/>
+            <a:ext cx="5486400" cy="3931920"/>
           </a:xfrm>
           <a:prstGeom prst="rect">
             <a:avLst/>
@@ -12349,7 +12349,7 @@
         <p:spPr>
           <a:xfrm>
             <a:off x="548640" y="1828800"/>
-            <a:ext cx="73152" cy="3291840"/>
+            <a:ext cx="73152" cy="3931920"/>
           </a:xfrm>
           <a:prstGeom prst="rect">
             <a:avLst/>
@@ -12369,7 +12369,7 @@
         <p:spPr>
           <a:xfrm>
             <a:off x="749808" y="1993392"/>
-            <a:ext cx="5166360" cy="502920"/>
+            <a:ext cx="5166360" cy="594360"/>
           </a:xfrm>
           <a:prstGeom prst="rect">
             <a:avLst/>
@@ -12385,7 +12385,7 @@
               <a:buNone/>
             </a:pPr>
             <a:r>
-              <a:rPr lang="en-US" sz="1800" b="1" dirty="0">
+              <a:rPr lang="en-US" sz="2200" b="1" dirty="0">
                 <a:solidFill>
                   <a:srgbClr val="0F172A"/>
                 </a:solidFill>
@@ -12395,7 +12395,7 @@
               </a:rPr>
               <a:t>What you see</a:t>
             </a:r>
-            <a:endParaRPr lang="en-US" sz="1800" dirty="0"/>
+            <a:endParaRPr lang="en-US" sz="2200" dirty="0"/>
           </a:p>
         </p:txBody>
       </p:sp>
@@ -12407,8 +12407,8 @@
         </p:nvSpPr>
         <p:spPr>
           <a:xfrm>
-            <a:off x="777240" y="2377440"/>
-            <a:ext cx="5074920" cy="2651760"/>
+            <a:off x="777240" y="2697480"/>
+            <a:ext cx="5074920" cy="2926080"/>
           </a:xfrm>
           <a:prstGeom prst="rect">
             <a:avLst/>
@@ -12422,13 +12422,13 @@
           <a:p>
             <a:pPr marL="342900" indent="-342900">
               <a:spcAft>
-                <a:spcPts val="400"/>
+                <a:spcPts val="600"/>
               </a:spcAft>
               <a:buSzPct val="100000"/>
               <a:buChar char="•"/>
             </a:pPr>
             <a:r>
-              <a:rPr lang="en-US" sz="1300" dirty="0">
+              <a:rPr lang="en-US" sz="1800" dirty="0">
                 <a:solidFill>
                   <a:srgbClr val="334155"/>
                 </a:solidFill>
@@ -12436,20 +12436,20 @@
                 <a:ea typeface="Inter" pitchFamily="34" charset="-122"/>
                 <a:cs typeface="Inter" pitchFamily="34" charset="-120"/>
               </a:rPr>
-              <a:t>Real events (Push to Google Calendar) — solid chips.</a:t>
-            </a:r>
-            <a:endParaRPr lang="en-US" sz="1300" dirty="0"/>
+              <a:t>Real events (pushed to Google Calendar) — solid chips.</a:t>
+            </a:r>
+            <a:endParaRPr lang="en-US" sz="1800" dirty="0"/>
           </a:p>
           <a:p>
             <a:pPr marL="342900" indent="-342900">
               <a:spcAft>
-                <a:spcPts val="400"/>
+                <a:spcPts val="600"/>
               </a:spcAft>
               <a:buSzPct val="100000"/>
               <a:buChar char="•"/>
             </a:pPr>
             <a:r>
-              <a:rPr lang="en-US" sz="1300" dirty="0">
+              <a:rPr lang="en-US" sz="1800" dirty="0">
                 <a:solidFill>
                   <a:srgbClr val="334155"/>
                 </a:solidFill>
@@ -12457,20 +12457,20 @@
                 <a:ea typeface="Inter" pitchFamily="34" charset="-122"/>
                 <a:cs typeface="Inter" pitchFamily="34" charset="-120"/>
               </a:rPr>
-              <a:t>[Task]_… / [Sub-task]_… — auto entries for task &amp; sub-task deadlines (click → peek the task in place).</a:t>
-            </a:r>
-            <a:endParaRPr lang="en-US" sz="1300" dirty="0"/>
+              <a:t>[Task]_… / [Sub-task]_… — auto deadline entries.</a:t>
+            </a:r>
+            <a:endParaRPr lang="en-US" sz="1800" dirty="0"/>
           </a:p>
           <a:p>
             <a:pPr marL="342900" indent="-342900">
               <a:spcAft>
-                <a:spcPts val="400"/>
+                <a:spcPts val="600"/>
               </a:spcAft>
               <a:buSzPct val="100000"/>
               <a:buChar char="•"/>
             </a:pPr>
             <a:r>
-              <a:rPr lang="en-US" sz="1300" dirty="0">
+              <a:rPr lang="en-US" sz="1800" dirty="0">
                 <a:solidFill>
                   <a:srgbClr val="334155"/>
                 </a:solidFill>
@@ -12478,20 +12478,20 @@
                 <a:ea typeface="Inter" pitchFamily="34" charset="-122"/>
                 <a:cs typeface="Inter" pitchFamily="34" charset="-120"/>
               </a:rPr>
-              <a:t>Recurring events: weekly/monthly with a Stop-repeating action.</a:t>
-            </a:r>
-            <a:endParaRPr lang="en-US" sz="1300" dirty="0"/>
+              <a:t>Recurring events weekly/monthly with a Stop action.</a:t>
+            </a:r>
+            <a:endParaRPr lang="en-US" sz="1800" dirty="0"/>
           </a:p>
           <a:p>
             <a:pPr marL="342900" indent="-342900">
               <a:spcAft>
-                <a:spcPts val="400"/>
+                <a:spcPts val="600"/>
               </a:spcAft>
               <a:buSzPct val="100000"/>
               <a:buChar char="•"/>
             </a:pPr>
             <a:r>
-              <a:rPr lang="en-US" sz="1300" dirty="0">
+              <a:rPr lang="en-US" sz="1800" dirty="0">
                 <a:solidFill>
                   <a:srgbClr val="334155"/>
                 </a:solidFill>
@@ -12499,20 +12499,20 @@
                 <a:ea typeface="Inter" pitchFamily="34" charset="-122"/>
                 <a:cs typeface="Inter" pitchFamily="34" charset="-120"/>
               </a:rPr>
-              <a:t>Supervisors' away periods show as ⊘ Unavailable (no reason visible).</a:t>
-            </a:r>
-            <a:endParaRPr lang="en-US" sz="1300" dirty="0"/>
+              <a:t>Supervisors' away periods show as ⊘ Unavailable.</a:t>
+            </a:r>
+            <a:endParaRPr lang="en-US" sz="1800" dirty="0"/>
           </a:p>
           <a:p>
             <a:pPr marL="342900" indent="-342900">
               <a:spcAft>
-                <a:spcPts val="400"/>
+                <a:spcPts val="600"/>
               </a:spcAft>
               <a:buSzPct val="100000"/>
               <a:buChar char="•"/>
             </a:pPr>
             <a:r>
-              <a:rPr lang="en-US" sz="1300" dirty="0">
+              <a:rPr lang="en-US" sz="1800" dirty="0">
                 <a:solidFill>
                   <a:srgbClr val="334155"/>
                 </a:solidFill>
@@ -12520,9 +12520,9 @@
                 <a:ea typeface="Inter" pitchFamily="34" charset="-122"/>
                 <a:cs typeface="Inter" pitchFamily="34" charset="-120"/>
               </a:rPr>
-              <a:t>Tab title + favicon update when you have unread chat — works even when the tab isn't focused.</a:t>
-            </a:r>
-            <a:endParaRPr lang="en-US" sz="1300" dirty="0"/>
+              <a:t>Tab title + favicon update when chat is unread.</a:t>
+            </a:r>
+            <a:endParaRPr lang="en-US" sz="1800" dirty="0"/>
           </a:p>
         </p:txBody>
       </p:sp>
@@ -12535,7 +12535,7 @@
         <p:spPr>
           <a:xfrm>
             <a:off x="6400800" y="1828800"/>
-            <a:ext cx="5242255" cy="3291840"/>
+            <a:ext cx="5242255" cy="3931920"/>
           </a:xfrm>
           <a:prstGeom prst="rect">
             <a:avLst/>
@@ -12567,7 +12567,7 @@
         <p:spPr>
           <a:xfrm>
             <a:off x="6400800" y="1828800"/>
-            <a:ext cx="73152" cy="3291840"/>
+            <a:ext cx="73152" cy="3931920"/>
           </a:xfrm>
           <a:prstGeom prst="rect">
             <a:avLst/>
@@ -12587,7 +12587,7 @@
         <p:spPr>
           <a:xfrm>
             <a:off x="6601968" y="1993392"/>
-            <a:ext cx="4922215" cy="502920"/>
+            <a:ext cx="4922215" cy="594360"/>
           </a:xfrm>
           <a:prstGeom prst="rect">
             <a:avLst/>
@@ -12603,7 +12603,7 @@
               <a:buNone/>
             </a:pPr>
             <a:r>
-              <a:rPr lang="en-US" sz="1800" b="1" dirty="0">
+              <a:rPr lang="en-US" sz="2200" b="1" dirty="0">
                 <a:solidFill>
                   <a:srgbClr val="0F172A"/>
                 </a:solidFill>
@@ -12613,7 +12613,7 @@
               </a:rPr>
               <a:t>Four views</a:t>
             </a:r>
-            <a:endParaRPr lang="en-US" sz="1800" dirty="0"/>
+            <a:endParaRPr lang="en-US" sz="2200" dirty="0"/>
           </a:p>
         </p:txBody>
       </p:sp>
@@ -12625,8 +12625,8 @@
         </p:nvSpPr>
         <p:spPr>
           <a:xfrm>
-            <a:off x="6629400" y="2377440"/>
-            <a:ext cx="4876495" cy="2651760"/>
+            <a:off x="6629400" y="2697480"/>
+            <a:ext cx="4876495" cy="2926080"/>
           </a:xfrm>
           <a:prstGeom prst="rect">
             <a:avLst/>
@@ -12640,13 +12640,13 @@
           <a:p>
             <a:pPr marL="342900" indent="-342900">
               <a:spcAft>
-                <a:spcPts val="400"/>
+                <a:spcPts val="600"/>
               </a:spcAft>
               <a:buSzPct val="100000"/>
               <a:buChar char="•"/>
             </a:pPr>
             <a:r>
-              <a:rPr lang="en-US" sz="1300" dirty="0">
+              <a:rPr lang="en-US" sz="1800" dirty="0">
                 <a:solidFill>
                   <a:srgbClr val="334155"/>
                 </a:solidFill>
@@ -12656,18 +12656,18 @@
               </a:rPr>
               <a:t>Year — 12 mini-months for big-picture planning.</a:t>
             </a:r>
-            <a:endParaRPr lang="en-US" sz="1300" dirty="0"/>
+            <a:endParaRPr lang="en-US" sz="1800" dirty="0"/>
           </a:p>
           <a:p>
             <a:pPr marL="342900" indent="-342900">
               <a:spcAft>
-                <a:spcPts val="400"/>
+                <a:spcPts val="600"/>
               </a:spcAft>
               <a:buSzPct val="100000"/>
               <a:buChar char="•"/>
             </a:pPr>
             <a:r>
-              <a:rPr lang="en-US" sz="1300" dirty="0">
+              <a:rPr lang="en-US" sz="1800" dirty="0">
                 <a:solidFill>
                   <a:srgbClr val="334155"/>
                 </a:solidFill>
@@ -12677,18 +12677,18 @@
               </a:rPr>
               <a:t>Month — standard grid; ‘+N more’ jumps to that day.</a:t>
             </a:r>
-            <a:endParaRPr lang="en-US" sz="1300" dirty="0"/>
+            <a:endParaRPr lang="en-US" sz="1800" dirty="0"/>
           </a:p>
           <a:p>
             <a:pPr marL="342900" indent="-342900">
               <a:spcAft>
-                <a:spcPts val="400"/>
+                <a:spcPts val="600"/>
               </a:spcAft>
               <a:buSzPct val="100000"/>
               <a:buChar char="•"/>
             </a:pPr>
             <a:r>
-              <a:rPr lang="en-US" sz="1300" dirty="0">
+              <a:rPr lang="en-US" sz="1800" dirty="0">
                 <a:solidFill>
                   <a:srgbClr val="334155"/>
                 </a:solidFill>
@@ -12698,18 +12698,18 @@
               </a:rPr>
               <a:t>Week / Day — hour-by-hour timetable. Overlapping events sit side-by-side, not stacked.</a:t>
             </a:r>
-            <a:endParaRPr lang="en-US" sz="1300" dirty="0"/>
+            <a:endParaRPr lang="en-US" sz="1800" dirty="0"/>
           </a:p>
           <a:p>
             <a:pPr marL="342900" indent="-342900">
               <a:spcAft>
-                <a:spcPts val="400"/>
+                <a:spcPts val="600"/>
               </a:spcAft>
               <a:buSzPct val="100000"/>
               <a:buChar char="•"/>
             </a:pPr>
             <a:r>
-              <a:rPr lang="en-US" sz="1300" dirty="0">
+              <a:rPr lang="en-US" sz="1800" dirty="0">
                 <a:solidFill>
                   <a:srgbClr val="334155"/>
                 </a:solidFill>
@@ -12719,7 +12719,7 @@
               </a:rPr>
               <a:t>Times always render in your browser's timezone.</a:t>
             </a:r>
-            <a:endParaRPr lang="en-US" sz="1300" dirty="0"/>
+            <a:endParaRPr lang="en-US" sz="1800" dirty="0"/>
           </a:p>
         </p:txBody>
       </p:sp>
@@ -12771,7 +12771,7 @@
               <a:buNone/>
             </a:pPr>
             <a:r>
-              <a:rPr lang="en-US" sz="1100" dirty="0">
+              <a:rPr lang="en-US" sz="1300" dirty="0">
                 <a:solidFill>
                   <a:srgbClr val="64748B"/>
                 </a:solidFill>
@@ -12781,7 +12781,7 @@
               </a:rPr>
               <a:t>PhDapp · for students</a:t>
             </a:r>
-            <a:endParaRPr lang="en-US" sz="1100" dirty="0"/>
+            <a:endParaRPr lang="en-US" sz="1300" dirty="0"/>
           </a:p>
         </p:txBody>
       </p:sp>
@@ -12810,7 +12810,7 @@
               <a:buNone/>
             </a:pPr>
             <a:r>
-              <a:rPr lang="en-US" sz="1100" dirty="0">
+              <a:rPr lang="en-US" sz="1300" dirty="0">
                 <a:solidFill>
                   <a:srgbClr val="64748B"/>
                 </a:solidFill>
@@ -12820,7 +12820,7 @@
               </a:rPr>
               <a:t>8 / 15</a:t>
             </a:r>
-            <a:endParaRPr lang="en-US" sz="1100" dirty="0"/>
+            <a:endParaRPr lang="en-US" sz="1300" dirty="0"/>
           </a:p>
         </p:txBody>
       </p:sp>
@@ -12950,7 +12950,7 @@
         <p:spPr>
           <a:xfrm>
             <a:off x="1261872" y="749808"/>
-            <a:ext cx="10381183" cy="640080"/>
+            <a:ext cx="10381183" cy="713232"/>
           </a:xfrm>
           <a:prstGeom prst="rect">
             <a:avLst/>
@@ -12966,7 +12966,7 @@
               <a:buNone/>
             </a:pPr>
             <a:r>
-              <a:rPr lang="en-US" sz="3600" b="1" dirty="0">
+              <a:rPr lang="en-US" sz="4000" b="1" dirty="0">
                 <a:solidFill>
                   <a:srgbClr val="0F172A"/>
                 </a:solidFill>
@@ -12976,7 +12976,7 @@
               </a:rPr>
               <a:t>Chat</a:t>
             </a:r>
-            <a:endParaRPr lang="en-US" sz="3600" dirty="0"/>
+            <a:endParaRPr lang="en-US" sz="4000" dirty="0"/>
           </a:p>
         </p:txBody>
       </p:sp>
@@ -12989,7 +12989,7 @@
         <p:spPr>
           <a:xfrm>
             <a:off x="548640" y="1508760"/>
-            <a:ext cx="11094415" cy="731520"/>
+            <a:ext cx="11094415" cy="822960"/>
           </a:xfrm>
           <a:prstGeom prst="rect">
             <a:avLst/>
@@ -13005,7 +13005,7 @@
               <a:buNone/>
             </a:pPr>
             <a:r>
-              <a:rPr lang="en-US" sz="1600" i="1" dirty="0">
+              <a:rPr lang="en-US" sz="2000" i="1" dirty="0">
                 <a:solidFill>
                   <a:srgbClr val="334155"/>
                 </a:solidFill>
@@ -13015,7 +13015,7 @@
               </a:rPr>
               <a:t>Channels with your team — and a default ‘Team’ channel each student gets automatically.</a:t>
             </a:r>
-            <a:endParaRPr lang="en-US" sz="1600" dirty="0"/>
+            <a:endParaRPr lang="en-US" sz="2000" dirty="0"/>
           </a:p>
         </p:txBody>
       </p:sp>
@@ -13028,7 +13028,7 @@
         <p:spPr>
           <a:xfrm>
             <a:off x="548640" y="1828800"/>
-            <a:ext cx="5486400" cy="3291840"/>
+            <a:ext cx="5486400" cy="3931920"/>
           </a:xfrm>
           <a:prstGeom prst="rect">
             <a:avLst/>
@@ -13060,7 +13060,7 @@
         <p:spPr>
           <a:xfrm>
             <a:off x="548640" y="1828800"/>
-            <a:ext cx="73152" cy="3291840"/>
+            <a:ext cx="73152" cy="3931920"/>
           </a:xfrm>
           <a:prstGeom prst="rect">
             <a:avLst/>
@@ -13080,7 +13080,7 @@
         <p:spPr>
           <a:xfrm>
             <a:off x="749808" y="1993392"/>
-            <a:ext cx="5166360" cy="502920"/>
+            <a:ext cx="5166360" cy="594360"/>
           </a:xfrm>
           <a:prstGeom prst="rect">
             <a:avLst/>
@@ -13096,7 +13096,7 @@
               <a:buNone/>
             </a:pPr>
             <a:r>
-              <a:rPr lang="en-US" sz="1800" b="1" dirty="0">
+              <a:rPr lang="en-US" sz="2200" b="1" dirty="0">
                 <a:solidFill>
                   <a:srgbClr val="0F172A"/>
                 </a:solidFill>
@@ -13106,7 +13106,7 @@
               </a:rPr>
               <a:t>Writing &amp; reading</a:t>
             </a:r>
-            <a:endParaRPr lang="en-US" sz="1800" dirty="0"/>
+            <a:endParaRPr lang="en-US" sz="2200" dirty="0"/>
           </a:p>
         </p:txBody>
       </p:sp>
@@ -13118,8 +13118,8 @@
         </p:nvSpPr>
         <p:spPr>
           <a:xfrm>
-            <a:off x="777240" y="2377440"/>
-            <a:ext cx="5074920" cy="2651760"/>
+            <a:off x="777240" y="2697480"/>
+            <a:ext cx="5074920" cy="2926080"/>
           </a:xfrm>
           <a:prstGeom prst="rect">
             <a:avLst/>
@@ -13133,13 +13133,13 @@
           <a:p>
             <a:pPr marL="342900" indent="-342900">
               <a:spcAft>
-                <a:spcPts val="400"/>
+                <a:spcPts val="600"/>
               </a:spcAft>
               <a:buSzPct val="100000"/>
               <a:buChar char="•"/>
             </a:pPr>
             <a:r>
-              <a:rPr lang="en-US" sz="1300" dirty="0">
+              <a:rPr lang="en-US" sz="1800" dirty="0">
                 <a:solidFill>
                   <a:srgbClr val="334155"/>
                 </a:solidFill>
@@ -13147,20 +13147,20 @@
                 <a:ea typeface="Inter" pitchFamily="34" charset="-122"/>
                 <a:cs typeface="Inter" pitchFamily="34" charset="-120"/>
               </a:rPr>
-              <a:t>Type, Enter to send. Edit / delete your own; ‘(edited)’ mark.</a:t>
-            </a:r>
-            <a:endParaRPr lang="en-US" sz="1300" dirty="0"/>
+              <a:t>Type, Enter to send; edit/delete your own.</a:t>
+            </a:r>
+            <a:endParaRPr lang="en-US" sz="1800" dirty="0"/>
           </a:p>
           <a:p>
             <a:pPr marL="342900" indent="-342900">
               <a:spcAft>
-                <a:spcPts val="400"/>
+                <a:spcPts val="600"/>
               </a:spcAft>
               <a:buSzPct val="100000"/>
               <a:buChar char="•"/>
             </a:pPr>
             <a:r>
-              <a:rPr lang="en-US" sz="1300" dirty="0">
+              <a:rPr lang="en-US" sz="1800" dirty="0">
                 <a:solidFill>
                   <a:srgbClr val="334155"/>
                 </a:solidFill>
@@ -13168,20 +13168,20 @@
                 <a:ea typeface="Inter" pitchFamily="34" charset="-122"/>
                 <a:cs typeface="Inter" pitchFamily="34" charset="-120"/>
               </a:rPr>
-              <a:t>Reply to a specific message — quoted snippet appears in the thread.</a:t>
-            </a:r>
-            <a:endParaRPr lang="en-US" sz="1300" dirty="0"/>
+              <a:t>Reply to a message — quoted snippet appears.</a:t>
+            </a:r>
+            <a:endParaRPr lang="en-US" sz="1800" dirty="0"/>
           </a:p>
           <a:p>
             <a:pPr marL="342900" indent="-342900">
               <a:spcAft>
-                <a:spcPts val="400"/>
+                <a:spcPts val="600"/>
               </a:spcAft>
               <a:buSzPct val="100000"/>
               <a:buChar char="•"/>
             </a:pPr>
             <a:r>
-              <a:rPr lang="en-US" sz="1300" dirty="0">
+              <a:rPr lang="en-US" sz="1800" dirty="0">
                 <a:solidFill>
                   <a:srgbClr val="334155"/>
                 </a:solidFill>
@@ -13189,20 +13189,20 @@
                 <a:ea typeface="Inter" pitchFamily="34" charset="-122"/>
                 <a:cs typeface="Inter" pitchFamily="34" charset="-120"/>
               </a:rPr>
-              <a:t>Drag-and-drop files; Ctrl/⌘+V to paste a screenshot.</a:t>
-            </a:r>
-            <a:endParaRPr lang="en-US" sz="1300" dirty="0"/>
+              <a:t>Drag-and-drop files; ⌘V to paste a screenshot.</a:t>
+            </a:r>
+            <a:endParaRPr lang="en-US" sz="1800" dirty="0"/>
           </a:p>
           <a:p>
             <a:pPr marL="342900" indent="-342900">
               <a:spcAft>
-                <a:spcPts val="400"/>
+                <a:spcPts val="600"/>
               </a:spcAft>
               <a:buSzPct val="100000"/>
               <a:buChar char="•"/>
             </a:pPr>
             <a:r>
-              <a:rPr lang="en-US" sz="1300" dirty="0">
+              <a:rPr lang="en-US" sz="1800" dirty="0">
                 <a:solidFill>
                   <a:srgbClr val="334155"/>
                 </a:solidFill>
@@ -13210,20 +13210,20 @@
                 <a:ea typeface="Inter" pitchFamily="34" charset="-122"/>
                 <a:cs typeface="Inter" pitchFamily="34" charset="-120"/>
               </a:rPr>
-              <a:t>Delivery ticks: ✓ sent · ✓✓ delivered · ✓✓ blue when seen.</a:t>
-            </a:r>
-            <a:endParaRPr lang="en-US" sz="1300" dirty="0"/>
+              <a:t>Delivery ticks: ✓ sent · ✓✓ delivered · blue when seen.</a:t>
+            </a:r>
+            <a:endParaRPr lang="en-US" sz="1800" dirty="0"/>
           </a:p>
           <a:p>
             <a:pPr marL="342900" indent="-342900">
               <a:spcAft>
-                <a:spcPts val="400"/>
+                <a:spcPts val="600"/>
               </a:spcAft>
               <a:buSzPct val="100000"/>
               <a:buChar char="•"/>
             </a:pPr>
             <a:r>
-              <a:rPr lang="en-US" sz="1300" dirty="0">
+              <a:rPr lang="en-US" sz="1800" dirty="0">
                 <a:solidFill>
                   <a:srgbClr val="334155"/>
                 </a:solidFill>
@@ -13231,9 +13231,9 @@
                 <a:ea typeface="Inter" pitchFamily="34" charset="-122"/>
                 <a:cs typeface="Inter" pitchFamily="34" charset="-120"/>
               </a:rPr>
-              <a:t>Notification settings — sound type + volume per device.</a:t>
-            </a:r>
-            <a:endParaRPr lang="en-US" sz="1300" dirty="0"/>
+              <a:t>Per-device sound + volume settings.</a:t>
+            </a:r>
+            <a:endParaRPr lang="en-US" sz="1800" dirty="0"/>
           </a:p>
         </p:txBody>
       </p:sp>
@@ -13246,7 +13246,7 @@
         <p:spPr>
           <a:xfrm>
             <a:off x="6400800" y="1828800"/>
-            <a:ext cx="5242255" cy="3291840"/>
+            <a:ext cx="5242255" cy="3931920"/>
           </a:xfrm>
           <a:prstGeom prst="rect">
             <a:avLst/>
@@ -13278,7 +13278,7 @@
         <p:spPr>
           <a:xfrm>
             <a:off x="6400800" y="1828800"/>
-            <a:ext cx="73152" cy="3291840"/>
+            <a:ext cx="73152" cy="3931920"/>
           </a:xfrm>
           <a:prstGeom prst="rect">
             <a:avLst/>
@@ -13298,7 +13298,7 @@
         <p:spPr>
           <a:xfrm>
             <a:off x="6601968" y="1993392"/>
-            <a:ext cx="4922215" cy="502920"/>
+            <a:ext cx="4922215" cy="594360"/>
           </a:xfrm>
           <a:prstGeom prst="rect">
             <a:avLst/>
@@ -13314,7 +13314,7 @@
               <a:buNone/>
             </a:pPr>
             <a:r>
-              <a:rPr lang="en-US" sz="1800" b="1" dirty="0">
+              <a:rPr lang="en-US" sz="2200" b="1" dirty="0">
                 <a:solidFill>
                   <a:srgbClr val="0F172A"/>
                 </a:solidFill>
@@ -13324,7 +13324,7 @@
               </a:rPr>
               <a:t>Channels &amp; alerts</a:t>
             </a:r>
-            <a:endParaRPr lang="en-US" sz="1800" dirty="0"/>
+            <a:endParaRPr lang="en-US" sz="2200" dirty="0"/>
           </a:p>
         </p:txBody>
       </p:sp>
@@ -13336,8 +13336,8 @@
         </p:nvSpPr>
         <p:spPr>
           <a:xfrm>
-            <a:off x="6629400" y="2377440"/>
-            <a:ext cx="4876495" cy="2651760"/>
+            <a:off x="6629400" y="2697480"/>
+            <a:ext cx="4876495" cy="2926080"/>
           </a:xfrm>
           <a:prstGeom prst="rect">
             <a:avLst/>
@@ -13351,13 +13351,13 @@
           <a:p>
             <a:pPr marL="342900" indent="-342900">
               <a:spcAft>
-                <a:spcPts val="400"/>
+                <a:spcPts val="600"/>
               </a:spcAft>
               <a:buSzPct val="100000"/>
               <a:buChar char="•"/>
             </a:pPr>
             <a:r>
-              <a:rPr lang="en-US" sz="1300" dirty="0">
+              <a:rPr lang="en-US" sz="1800" dirty="0">
                 <a:solidFill>
                   <a:srgbClr val="334155"/>
                 </a:solidFill>
@@ -13365,20 +13365,20 @@
                 <a:ea typeface="Inter" pitchFamily="34" charset="-122"/>
                 <a:cs typeface="Inter" pitchFamily="34" charset="-120"/>
               </a:rPr>
-              <a:t>Your auto ‘Team · …’ channel includes the full supervision team.</a:t>
-            </a:r>
-            <a:endParaRPr lang="en-US" sz="1300" dirty="0"/>
+              <a:t>Auto ‘Team · …’ channel for each student.</a:t>
+            </a:r>
+            <a:endParaRPr lang="en-US" sz="1800" dirty="0"/>
           </a:p>
           <a:p>
             <a:pPr marL="342900" indent="-342900">
               <a:spcAft>
-                <a:spcPts val="400"/>
+                <a:spcPts val="600"/>
               </a:spcAft>
               <a:buSzPct val="100000"/>
               <a:buChar char="•"/>
             </a:pPr>
             <a:r>
-              <a:rPr lang="en-US" sz="1300" dirty="0">
+              <a:rPr lang="en-US" sz="1800" dirty="0">
                 <a:solidFill>
                   <a:srgbClr val="334155"/>
                 </a:solidFill>
@@ -13386,20 +13386,20 @@
                 <a:ea typeface="Inter" pitchFamily="34" charset="-122"/>
                 <a:cs typeface="Inter" pitchFamily="34" charset="-120"/>
               </a:rPr>
-              <a:t>Start more channels with the + (only with your own supervisors).</a:t>
-            </a:r>
-            <a:endParaRPr lang="en-US" sz="1300" dirty="0"/>
+              <a:t>Start more channels with + (with your supervisors).</a:t>
+            </a:r>
+            <a:endParaRPr lang="en-US" sz="1800" dirty="0"/>
           </a:p>
           <a:p>
             <a:pPr marL="342900" indent="-342900">
               <a:spcAft>
-                <a:spcPts val="400"/>
+                <a:spcPts val="600"/>
               </a:spcAft>
               <a:buSzPct val="100000"/>
               <a:buChar char="•"/>
             </a:pPr>
             <a:r>
-              <a:rPr lang="en-US" sz="1300" dirty="0">
+              <a:rPr lang="en-US" sz="1800" dirty="0">
                 <a:solidFill>
                   <a:srgbClr val="334155"/>
                 </a:solidFill>
@@ -13407,20 +13407,20 @@
                 <a:ea typeface="Inter" pitchFamily="34" charset="-122"/>
                 <a:cs typeface="Inter" pitchFamily="34" charset="-120"/>
               </a:rPr>
-              <a:t>Browser tab title shows ‘(N) X messaged you’ when unread.</a:t>
-            </a:r>
-            <a:endParaRPr lang="en-US" sz="1300" dirty="0"/>
+              <a:t>Tab title: ‘(N) X messaged you’ when unread.</a:t>
+            </a:r>
+            <a:endParaRPr lang="en-US" sz="1800" dirty="0"/>
           </a:p>
           <a:p>
             <a:pPr marL="342900" indent="-342900">
               <a:spcAft>
-                <a:spcPts val="400"/>
+                <a:spcPts val="600"/>
               </a:spcAft>
               <a:buSzPct val="100000"/>
               <a:buChar char="•"/>
             </a:pPr>
             <a:r>
-              <a:rPr lang="en-US" sz="1300" dirty="0">
+              <a:rPr lang="en-US" sz="1800" dirty="0">
                 <a:solidFill>
                   <a:srgbClr val="334155"/>
                 </a:solidFill>
@@ -13428,20 +13428,20 @@
                 <a:ea typeface="Inter" pitchFamily="34" charset="-122"/>
                 <a:cs typeface="Inter" pitchFamily="34" charset="-120"/>
               </a:rPr>
-              <a:t>Favicon shows a red count badge until you read them.</a:t>
-            </a:r>
-            <a:endParaRPr lang="en-US" sz="1300" dirty="0"/>
+              <a:t>Favicon shows a red count badge.</a:t>
+            </a:r>
+            <a:endParaRPr lang="en-US" sz="1800" dirty="0"/>
           </a:p>
           <a:p>
             <a:pPr marL="342900" indent="-342900">
               <a:spcAft>
-                <a:spcPts val="400"/>
+                <a:spcPts val="600"/>
               </a:spcAft>
               <a:buSzPct val="100000"/>
               <a:buChar char="•"/>
             </a:pPr>
             <a:r>
-              <a:rPr lang="en-US" sz="1300" dirty="0">
+              <a:rPr lang="en-US" sz="1800" dirty="0">
                 <a:solidFill>
                   <a:srgbClr val="334155"/>
                 </a:solidFill>
@@ -13449,9 +13449,9 @@
                 <a:ea typeface="Inter" pitchFamily="34" charset="-122"/>
                 <a:cs typeface="Inter" pitchFamily="34" charset="-120"/>
               </a:rPr>
-              <a:t>Sound config in the channel ⋮ menu (Chime/Ding/Pop/None).</a:t>
-            </a:r>
-            <a:endParaRPr lang="en-US" sz="1300" dirty="0"/>
+              <a:t>Sound config in the channel ⋮ menu.</a:t>
+            </a:r>
+            <a:endParaRPr lang="en-US" sz="1800" dirty="0"/>
           </a:p>
         </p:txBody>
       </p:sp>
@@ -13503,7 +13503,7 @@
               <a:buNone/>
             </a:pPr>
             <a:r>
-              <a:rPr lang="en-US" sz="1100" dirty="0">
+              <a:rPr lang="en-US" sz="1300" dirty="0">
                 <a:solidFill>
                   <a:srgbClr val="64748B"/>
                 </a:solidFill>
@@ -13513,7 +13513,7 @@
               </a:rPr>
               <a:t>PhDapp · for students</a:t>
             </a:r>
-            <a:endParaRPr lang="en-US" sz="1100" dirty="0"/>
+            <a:endParaRPr lang="en-US" sz="1300" dirty="0"/>
           </a:p>
         </p:txBody>
       </p:sp>
@@ -13542,7 +13542,7 @@
               <a:buNone/>
             </a:pPr>
             <a:r>
-              <a:rPr lang="en-US" sz="1100" dirty="0">
+              <a:rPr lang="en-US" sz="1300" dirty="0">
                 <a:solidFill>
                   <a:srgbClr val="64748B"/>
                 </a:solidFill>
@@ -13552,7 +13552,7 @@
               </a:rPr>
               <a:t>9 / 15</a:t>
             </a:r>
-            <a:endParaRPr lang="en-US" sz="1100" dirty="0"/>
+            <a:endParaRPr lang="en-US" sz="1300" dirty="0"/>
           </a:p>
         </p:txBody>
       </p:sp>

--- a/docs/PhDapp_Student_Overview.pptx
+++ b/docs/PhDapp_Student_Overview.pptx
@@ -20,9 +20,10 @@
     <p:sldId id="268" r:id="rId14"/>
     <p:sldId id="269" r:id="rId15"/>
     <p:sldId id="270" r:id="rId16"/>
+    <p:sldId id="271" r:id="rId17"/>
   </p:sldIdLst>
   <p:notesMasterIdLst>
-    <p:notesMasterId r:id="rId17"/>
+    <p:notesMasterId r:id="rId18"/>
   </p:notesMasterIdLst>
   <p:sldSz cx="12192000" cy="6858000"/>
   <p:notesSz cx="6858000" cy="12192000"/>
@@ -1068,6 +1069,94 @@
             <a:fld id="{F7021451-1387-4CA6-816F-3879F97B5CBC}" type="slidenum">
               <a:rPr lang="en-US"/>
               <a:t>15</a:t>
+            </a:fld>
+            <a:endParaRPr lang="en-US"/>
+          </a:p>
+        </p:txBody>
+      </p:sp>
+    </p:spTree>
+    <p:extLst>
+      <p:ext uri="{BB962C8B-B14F-4D97-AF65-F5344CB8AC3E}">
+        <p14:creationId xmlns:p14="http://schemas.microsoft.com/office/powerpoint/2010/main" val="1024086991"/>
+      </p:ext>
+    </p:extLst>
+  </p:cSld>
+  <p:clrMapOvr>
+    <a:masterClrMapping/>
+  </p:clrMapOvr>
+</p:notes>
+</file>
+
+<file path=ppt/notesSlides/notesSlide16.xml><?xml version="1.0" encoding="utf-8"?>
+<p:notes xmlns:a="http://schemas.openxmlformats.org/drawingml/2006/main" xmlns:r="http://schemas.openxmlformats.org/officeDocument/2006/relationships" xmlns:p="http://schemas.openxmlformats.org/presentationml/2006/main">
+  <p:cSld>
+    <p:spTree>
+      <p:nvGrpSpPr>
+        <p:cNvPr id="1" name=""/>
+        <p:cNvGrpSpPr/>
+        <p:nvPr/>
+      </p:nvGrpSpPr>
+      <p:grpSpPr>
+        <a:xfrm>
+          <a:off x="0" y="0"/>
+          <a:ext cx="0" cy="0"/>
+          <a:chOff x="0" y="0"/>
+          <a:chExt cx="0" cy="0"/>
+        </a:xfrm>
+      </p:grpSpPr>
+      <p:sp>
+        <p:nvSpPr>
+          <p:cNvPr id="2" name="Slide Image Placeholder 1"/>
+          <p:cNvSpPr>
+            <a:spLocks noGrp="1" noRot="1" noChangeAspect="1"/>
+          </p:cNvSpPr>
+          <p:nvPr>
+            <p:ph type="sldImg"/>
+          </p:nvPr>
+        </p:nvSpPr>
+        <p:spPr/>
+      </p:sp>
+      <p:sp>
+        <p:nvSpPr>
+          <p:cNvPr id="3" name="Notes Placeholder 2"/>
+          <p:cNvSpPr>
+            <a:spLocks noGrp="1"/>
+          </p:cNvSpPr>
+          <p:nvPr>
+            <p:ph type="body" idx="1"/>
+          </p:nvPr>
+        </p:nvSpPr>
+        <p:spPr/>
+        <p:txBody>
+          <a:bodyPr/>
+          <a:lstStyle/>
+          <a:p>
+            <a:r>
+              <a:rPr lang="en-US" dirty="0"/>
+              <a:t/>
+            </a:r>
+            <a:endParaRPr lang="en-US" dirty="0"/>
+          </a:p>
+        </p:txBody>
+      </p:sp>
+      <p:sp>
+        <p:nvSpPr>
+          <p:cNvPr id="4" name="Slide Number Placeholder 3"/>
+          <p:cNvSpPr>
+            <a:spLocks noGrp="1"/>
+          </p:cNvSpPr>
+          <p:nvPr>
+            <p:ph type="sldNum" sz="quarter" idx="10"/>
+          </p:nvPr>
+        </p:nvSpPr>
+        <p:spPr/>
+        <p:txBody>
+          <a:bodyPr/>
+          <a:lstStyle/>
+          <a:p>
+            <a:fld id="{F7021451-1387-4CA6-816F-3879F97B5CBC}" type="slidenum">
+              <a:rPr lang="en-US"/>
+              <a:t>16</a:t>
             </a:fld>
             <a:endParaRPr lang="en-US"/>
           </a:p>
@@ -2927,7 +3016,7 @@
                 <a:ea typeface="Inter" pitchFamily="34" charset="-122"/>
                 <a:cs typeface="Inter" pitchFamily="34" charset="-120"/>
               </a:rPr>
-              <a:t>10 / 15</a:t>
+              <a:t>10 / 16</a:t>
             </a:r>
             <a:endParaRPr lang="en-US" sz="1300" dirty="0"/>
           </a:p>
@@ -3596,7 +3685,7 @@
                 <a:ea typeface="Inter" pitchFamily="34" charset="-122"/>
                 <a:cs typeface="Inter" pitchFamily="34" charset="-120"/>
               </a:rPr>
-              <a:t>11 / 15</a:t>
+              <a:t>11 / 16</a:t>
             </a:r>
             <a:endParaRPr lang="en-US" sz="1300" dirty="0"/>
           </a:p>
@@ -4265,7 +4354,7 @@
                 <a:ea typeface="Inter" pitchFamily="34" charset="-122"/>
                 <a:cs typeface="Inter" pitchFamily="34" charset="-120"/>
               </a:rPr>
-              <a:t>12 / 15</a:t>
+              <a:t>12 / 16</a:t>
             </a:r>
             <a:endParaRPr lang="en-US" sz="1300" dirty="0"/>
           </a:p>
@@ -5311,7 +5400,7 @@
                 <a:ea typeface="Inter" pitchFamily="34" charset="-122"/>
                 <a:cs typeface="Inter" pitchFamily="34" charset="-120"/>
               </a:rPr>
-              <a:t>13 / 15</a:t>
+              <a:t>13 / 16</a:t>
             </a:r>
             <a:endParaRPr lang="en-US" sz="1300" dirty="0"/>
           </a:p>
@@ -6001,7 +6090,7 @@
                 <a:ea typeface="Inter" pitchFamily="34" charset="-122"/>
                 <a:cs typeface="Inter" pitchFamily="34" charset="-120"/>
               </a:rPr>
-              <a:t>14 / 15</a:t>
+              <a:t>14 / 16</a:t>
             </a:r>
             <a:endParaRPr lang="en-US" sz="1300" dirty="0"/>
           </a:p>
@@ -6056,7 +6145,7 @@
             </a:avLst>
           </a:prstGeom>
           <a:solidFill>
-            <a:srgbClr val="2196F3"/>
+            <a:srgbClr val="6F4CFF"/>
           </a:solidFill>
           <a:ln/>
         </p:spPr>
@@ -6112,13 +6201,13 @@
             <a:r>
               <a:rPr lang="en-US" sz="1400" b="1" spc="400" kern="0" dirty="0">
                 <a:solidFill>
-                  <a:srgbClr val="2196F3"/>
-                </a:solidFill>
-                <a:latin typeface="Inter" pitchFamily="34" charset="0"/>
-                <a:ea typeface="Inter" pitchFamily="34" charset="-122"/>
-                <a:cs typeface="Inter" pitchFamily="34" charset="-120"/>
-              </a:rPr>
-              <a:t>TIPS</a:t>
+                  <a:srgbClr val="6F4CFF"/>
+                </a:solidFill>
+                <a:latin typeface="Inter" pitchFamily="34" charset="0"/>
+                <a:ea typeface="Inter" pitchFamily="34" charset="-122"/>
+                <a:cs typeface="Inter" pitchFamily="34" charset="-120"/>
+              </a:rPr>
+              <a:t>DASHBOARD</a:t>
             </a:r>
             <a:endParaRPr lang="en-US" sz="1400" dirty="0"/>
           </a:p>
@@ -6157,7 +6246,7 @@
                 <a:ea typeface="Inter" pitchFamily="34" charset="-122"/>
                 <a:cs typeface="Inter" pitchFamily="34" charset="-120"/>
               </a:rPr>
-              <a:t>Tips · and if something breaks</a:t>
+              <a:t>A day with PhDapp</a:t>
             </a:r>
             <a:endParaRPr lang="en-US" sz="4000" dirty="0"/>
           </a:p>
@@ -6165,14 +6254,53 @@
       </p:sp>
       <p:sp>
         <p:nvSpPr>
-          <p:cNvPr id="6" name="Shape 3"/>
-          <p:cNvSpPr/>
-          <p:nvPr/>
-        </p:nvSpPr>
-        <p:spPr>
-          <a:xfrm>
-            <a:off x="548640" y="1828800"/>
-            <a:ext cx="5486400" cy="3931920"/>
+          <p:cNvPr id="6" name="Text 3"/>
+          <p:cNvSpPr/>
+          <p:nvPr/>
+        </p:nvSpPr>
+        <p:spPr>
+          <a:xfrm>
+            <a:off x="548640" y="1508760"/>
+            <a:ext cx="11094415" cy="822960"/>
+          </a:xfrm>
+          <a:prstGeom prst="rect">
+            <a:avLst/>
+          </a:prstGeom>
+          <a:noFill/>
+          <a:ln/>
+        </p:spPr>
+        <p:txBody>
+          <a:bodyPr wrap="square" lIns="0" tIns="0" rIns="0" bIns="0" rtlCol="0" anchor="t"/>
+          <a:lstStyle/>
+          <a:p>
+            <a:pPr indent="0" marL="0">
+              <a:buNone/>
+            </a:pPr>
+            <a:r>
+              <a:rPr lang="en-US" sz="2000" i="1" dirty="0">
+                <a:solidFill>
+                  <a:srgbClr val="334155"/>
+                </a:solidFill>
+                <a:latin typeface="Inter" pitchFamily="34" charset="0"/>
+                <a:ea typeface="Inter" pitchFamily="34" charset="-122"/>
+                <a:cs typeface="Inter" pitchFamily="34" charset="-120"/>
+              </a:rPr>
+              <a:t>Six moments a typical day — from morning standup to Friday wrap-up.</a:t>
+            </a:r>
+            <a:endParaRPr lang="en-US" sz="2000" dirty="0"/>
+          </a:p>
+        </p:txBody>
+      </p:sp>
+      <p:sp>
+        <p:nvSpPr>
+          <p:cNvPr id="7" name="Shape 4"/>
+          <p:cNvSpPr/>
+          <p:nvPr/>
+        </p:nvSpPr>
+        <p:spPr>
+          <a:xfrm>
+            <a:off x="548640" y="2286000"/>
+            <a:ext cx="3611880" cy="1783080"/>
           </a:xfrm>
           <a:prstGeom prst="rect">
             <a:avLst/>
@@ -6197,34 +6325,34 @@
       </p:sp>
       <p:sp>
         <p:nvSpPr>
-          <p:cNvPr id="7" name="Shape 4"/>
-          <p:cNvSpPr/>
-          <p:nvPr/>
-        </p:nvSpPr>
-        <p:spPr>
-          <a:xfrm>
-            <a:off x="548640" y="1828800"/>
-            <a:ext cx="73152" cy="3931920"/>
-          </a:xfrm>
-          <a:prstGeom prst="rect">
+          <p:cNvPr id="8" name="Shape 5"/>
+          <p:cNvSpPr/>
+          <p:nvPr/>
+        </p:nvSpPr>
+        <p:spPr>
+          <a:xfrm>
+            <a:off x="749808" y="2487168"/>
+            <a:ext cx="502920" cy="502920"/>
+          </a:xfrm>
+          <a:prstGeom prst="ellipse">
             <a:avLst/>
           </a:prstGeom>
           <a:solidFill>
-            <a:srgbClr val="2196F3"/>
+            <a:srgbClr val="6F4CFF"/>
           </a:solidFill>
           <a:ln/>
         </p:spPr>
       </p:sp>
       <p:sp>
         <p:nvSpPr>
-          <p:cNvPr id="8" name="Text 5"/>
-          <p:cNvSpPr/>
-          <p:nvPr/>
-        </p:nvSpPr>
-        <p:spPr>
-          <a:xfrm>
-            <a:off x="749808" y="1993392"/>
-            <a:ext cx="5166360" cy="594360"/>
+          <p:cNvPr id="9" name="Text 6"/>
+          <p:cNvSpPr/>
+          <p:nvPr/>
+        </p:nvSpPr>
+        <p:spPr>
+          <a:xfrm>
+            <a:off x="749808" y="2487168"/>
+            <a:ext cx="502920" cy="502920"/>
           </a:xfrm>
           <a:prstGeom prst="rect">
             <a:avLst/>
@@ -6236,6 +6364,45 @@
           <a:bodyPr wrap="square" lIns="0" tIns="0" rIns="0" bIns="0" rtlCol="0" anchor="ctr"/>
           <a:lstStyle/>
           <a:p>
+            <a:pPr algn="ctr" indent="0" marL="0">
+              <a:buNone/>
+            </a:pPr>
+            <a:r>
+              <a:rPr lang="en-US" sz="2200" b="1" dirty="0">
+                <a:solidFill>
+                  <a:srgbClr val="FFFFFF"/>
+                </a:solidFill>
+                <a:latin typeface="Inter" pitchFamily="34" charset="0"/>
+                <a:ea typeface="Inter" pitchFamily="34" charset="-122"/>
+                <a:cs typeface="Inter" pitchFamily="34" charset="-120"/>
+              </a:rPr>
+              <a:t>1</a:t>
+            </a:r>
+            <a:endParaRPr lang="en-US" sz="2200" dirty="0"/>
+          </a:p>
+        </p:txBody>
+      </p:sp>
+      <p:sp>
+        <p:nvSpPr>
+          <p:cNvPr id="10" name="Text 7"/>
+          <p:cNvSpPr/>
+          <p:nvPr/>
+        </p:nvSpPr>
+        <p:spPr>
+          <a:xfrm>
+            <a:off x="1417320" y="2532888"/>
+            <a:ext cx="2542032" cy="411480"/>
+          </a:xfrm>
+          <a:prstGeom prst="rect">
+            <a:avLst/>
+          </a:prstGeom>
+          <a:noFill/>
+          <a:ln/>
+        </p:spPr>
+        <p:txBody>
+          <a:bodyPr wrap="square" lIns="0" tIns="0" rIns="0" bIns="0" rtlCol="0" anchor="ctr"/>
+          <a:lstStyle/>
+          <a:p>
             <a:pPr indent="0" marL="0">
               <a:buNone/>
             </a:pPr>
@@ -6248,7 +6415,7 @@
                 <a:ea typeface="Inter" pitchFamily="34" charset="-122"/>
                 <a:cs typeface="Inter" pitchFamily="34" charset="-120"/>
               </a:rPr>
-              <a:t>Tips</a:t>
+              <a:t>Morning</a:t>
             </a:r>
             <a:endParaRPr lang="en-US" sz="2200" dirty="0"/>
           </a:p>
@@ -6256,14 +6423,14 @@
       </p:sp>
       <p:sp>
         <p:nvSpPr>
-          <p:cNvPr id="9" name="Text 6"/>
-          <p:cNvSpPr/>
-          <p:nvPr/>
-        </p:nvSpPr>
-        <p:spPr>
-          <a:xfrm>
-            <a:off x="777240" y="2697480"/>
-            <a:ext cx="5074920" cy="2926080"/>
+          <p:cNvPr id="11" name="Text 8"/>
+          <p:cNvSpPr/>
+          <p:nvPr/>
+        </p:nvSpPr>
+        <p:spPr>
+          <a:xfrm>
+            <a:off x="749808" y="3154680"/>
+            <a:ext cx="3246120" cy="777240"/>
           </a:xfrm>
           <a:prstGeom prst="rect">
             <a:avLst/>
@@ -6275,12 +6442,8 @@
           <a:bodyPr wrap="square" lIns="0" tIns="0" rIns="0" bIns="0" rtlCol="0" anchor="t"/>
           <a:lstStyle/>
           <a:p>
-            <a:pPr marL="342900" indent="-342900">
-              <a:spcAft>
-                <a:spcPts val="600"/>
-              </a:spcAft>
-              <a:buSzPct val="100000"/>
-              <a:buChar char="•"/>
+            <a:pPr indent="0" marL="0">
+              <a:buNone/>
             </a:pPr>
             <a:r>
               <a:rPr lang="en-US" sz="1800" dirty="0">
@@ -6291,106 +6454,22 @@
                 <a:ea typeface="Inter" pitchFamily="34" charset="-122"/>
                 <a:cs typeface="Inter" pitchFamily="34" charset="-120"/>
               </a:rPr>
-              <a:t>Keep the tab open — fewer missed alerts.</a:t>
+              <a:t>Open Dashboard — Due this week + next 7 days.</a:t>
             </a:r>
             <a:endParaRPr lang="en-US" sz="1800" dirty="0"/>
           </a:p>
-          <a:p>
-            <a:pPr marL="342900" indent="-342900">
-              <a:spcAft>
-                <a:spcPts val="600"/>
-              </a:spcAft>
-              <a:buSzPct val="100000"/>
-              <a:buChar char="•"/>
-            </a:pPr>
-            <a:r>
-              <a:rPr lang="en-US" sz="1800" dirty="0">
-                <a:solidFill>
-                  <a:srgbClr val="334155"/>
-                </a:solidFill>
-                <a:latin typeface="Inter" pitchFamily="34" charset="0"/>
-                <a:ea typeface="Inter" pitchFamily="34" charset="-122"/>
-                <a:cs typeface="Inter" pitchFamily="34" charset="-120"/>
-              </a:rPr>
-              <a:t>Channels for back-and-forth; comments for tasks.</a:t>
-            </a:r>
-            <a:endParaRPr lang="en-US" sz="1800" dirty="0"/>
-          </a:p>
-          <a:p>
-            <a:pPr marL="342900" indent="-342900">
-              <a:spcAft>
-                <a:spcPts val="600"/>
-              </a:spcAft>
-              <a:buSzPct val="100000"/>
-              <a:buChar char="•"/>
-            </a:pPr>
-            <a:r>
-              <a:rPr lang="en-US" sz="1800" dirty="0">
-                <a:solidFill>
-                  <a:srgbClr val="334155"/>
-                </a:solidFill>
-                <a:latin typeface="Inter" pitchFamily="34" charset="0"/>
-                <a:ea typeface="Inter" pitchFamily="34" charset="-122"/>
-                <a:cs typeface="Inter" pitchFamily="34" charset="-120"/>
-              </a:rPr>
-              <a:t>Tag tasks with priority + due date.</a:t>
-            </a:r>
-            <a:endParaRPr lang="en-US" sz="1800" dirty="0"/>
-          </a:p>
-          <a:p>
-            <a:pPr marL="342900" indent="-342900">
-              <a:spcAft>
-                <a:spcPts val="600"/>
-              </a:spcAft>
-              <a:buSzPct val="100000"/>
-              <a:buChar char="•"/>
-            </a:pPr>
-            <a:r>
-              <a:rPr lang="en-US" sz="1800" dirty="0">
-                <a:solidFill>
-                  <a:srgbClr val="334155"/>
-                </a:solidFill>
-                <a:latin typeface="Inter" pitchFamily="34" charset="0"/>
-                <a:ea typeface="Inter" pitchFamily="34" charset="-122"/>
-                <a:cs typeface="Inter" pitchFamily="34" charset="-120"/>
-              </a:rPr>
-              <a:t>Drop a weekly check-in even if quiet.</a:t>
-            </a:r>
-            <a:endParaRPr lang="en-US" sz="1800" dirty="0"/>
-          </a:p>
-          <a:p>
-            <a:pPr marL="342900" indent="-342900">
-              <a:spcAft>
-                <a:spcPts val="600"/>
-              </a:spcAft>
-              <a:buSzPct val="100000"/>
-              <a:buChar char="•"/>
-            </a:pPr>
-            <a:r>
-              <a:rPr lang="en-US" sz="1800" dirty="0">
-                <a:solidFill>
-                  <a:srgbClr val="334155"/>
-                </a:solidFill>
-                <a:latin typeface="Inter" pitchFamily="34" charset="0"/>
-                <a:ea typeface="Inter" pitchFamily="34" charset="-122"/>
-                <a:cs typeface="Inter" pitchFamily="34" charset="-120"/>
-              </a:rPr>
-              <a:t>Right-click events → add to your iCal / Calendar.</a:t>
-            </a:r>
-            <a:endParaRPr lang="en-US" sz="1800" dirty="0"/>
-          </a:p>
-        </p:txBody>
-      </p:sp>
-      <p:sp>
-        <p:nvSpPr>
-          <p:cNvPr id="10" name="Shape 7"/>
-          <p:cNvSpPr/>
-          <p:nvPr/>
-        </p:nvSpPr>
-        <p:spPr>
-          <a:xfrm>
-            <a:off x="6400800" y="1828800"/>
-            <a:ext cx="5242255" cy="3931920"/>
+        </p:txBody>
+      </p:sp>
+      <p:sp>
+        <p:nvSpPr>
+          <p:cNvPr id="12" name="Shape 9"/>
+          <p:cNvSpPr/>
+          <p:nvPr/>
+        </p:nvSpPr>
+        <p:spPr>
+          <a:xfrm>
+            <a:off x="4343400" y="2286000"/>
+            <a:ext cx="3611880" cy="1783080"/>
           </a:xfrm>
           <a:prstGeom prst="rect">
             <a:avLst/>
@@ -6415,34 +6494,1136 @@
       </p:sp>
       <p:sp>
         <p:nvSpPr>
-          <p:cNvPr id="11" name="Shape 8"/>
-          <p:cNvSpPr/>
-          <p:nvPr/>
-        </p:nvSpPr>
-        <p:spPr>
-          <a:xfrm>
-            <a:off x="6400800" y="1828800"/>
+          <p:cNvPr id="13" name="Shape 10"/>
+          <p:cNvSpPr/>
+          <p:nvPr/>
+        </p:nvSpPr>
+        <p:spPr>
+          <a:xfrm>
+            <a:off x="4544568" y="2487168"/>
+            <a:ext cx="502920" cy="502920"/>
+          </a:xfrm>
+          <a:prstGeom prst="ellipse">
+            <a:avLst/>
+          </a:prstGeom>
+          <a:solidFill>
+            <a:srgbClr val="FF3D8B"/>
+          </a:solidFill>
+          <a:ln/>
+        </p:spPr>
+      </p:sp>
+      <p:sp>
+        <p:nvSpPr>
+          <p:cNvPr id="14" name="Text 11"/>
+          <p:cNvSpPr/>
+          <p:nvPr/>
+        </p:nvSpPr>
+        <p:spPr>
+          <a:xfrm>
+            <a:off x="4544568" y="2487168"/>
+            <a:ext cx="502920" cy="502920"/>
+          </a:xfrm>
+          <a:prstGeom prst="rect">
+            <a:avLst/>
+          </a:prstGeom>
+          <a:noFill/>
+          <a:ln/>
+        </p:spPr>
+        <p:txBody>
+          <a:bodyPr wrap="square" lIns="0" tIns="0" rIns="0" bIns="0" rtlCol="0" anchor="ctr"/>
+          <a:lstStyle/>
+          <a:p>
+            <a:pPr algn="ctr" indent="0" marL="0">
+              <a:buNone/>
+            </a:pPr>
+            <a:r>
+              <a:rPr lang="en-US" sz="2200" b="1" dirty="0">
+                <a:solidFill>
+                  <a:srgbClr val="FFFFFF"/>
+                </a:solidFill>
+                <a:latin typeface="Inter" pitchFamily="34" charset="0"/>
+                <a:ea typeface="Inter" pitchFamily="34" charset="-122"/>
+                <a:cs typeface="Inter" pitchFamily="34" charset="-120"/>
+              </a:rPr>
+              <a:t>2</a:t>
+            </a:r>
+            <a:endParaRPr lang="en-US" sz="2200" dirty="0"/>
+          </a:p>
+        </p:txBody>
+      </p:sp>
+      <p:sp>
+        <p:nvSpPr>
+          <p:cNvPr id="15" name="Text 12"/>
+          <p:cNvSpPr/>
+          <p:nvPr/>
+        </p:nvSpPr>
+        <p:spPr>
+          <a:xfrm>
+            <a:off x="5212080" y="2532888"/>
+            <a:ext cx="2542032" cy="411480"/>
+          </a:xfrm>
+          <a:prstGeom prst="rect">
+            <a:avLst/>
+          </a:prstGeom>
+          <a:noFill/>
+          <a:ln/>
+        </p:spPr>
+        <p:txBody>
+          <a:bodyPr wrap="square" lIns="0" tIns="0" rIns="0" bIns="0" rtlCol="0" anchor="ctr"/>
+          <a:lstStyle/>
+          <a:p>
+            <a:pPr indent="0" marL="0">
+              <a:buNone/>
+            </a:pPr>
+            <a:r>
+              <a:rPr lang="en-US" sz="2200" b="1" dirty="0">
+                <a:solidFill>
+                  <a:srgbClr val="0F172A"/>
+                </a:solidFill>
+                <a:latin typeface="Inter" pitchFamily="34" charset="0"/>
+                <a:ea typeface="Inter" pitchFamily="34" charset="-122"/>
+                <a:cs typeface="Inter" pitchFamily="34" charset="-120"/>
+              </a:rPr>
+              <a:t>🔔 Bell</a:t>
+            </a:r>
+            <a:endParaRPr lang="en-US" sz="2200" dirty="0"/>
+          </a:p>
+        </p:txBody>
+      </p:sp>
+      <p:sp>
+        <p:nvSpPr>
+          <p:cNvPr id="16" name="Text 13"/>
+          <p:cNvSpPr/>
+          <p:nvPr/>
+        </p:nvSpPr>
+        <p:spPr>
+          <a:xfrm>
+            <a:off x="4544568" y="3154680"/>
+            <a:ext cx="3246120" cy="777240"/>
+          </a:xfrm>
+          <a:prstGeom prst="rect">
+            <a:avLst/>
+          </a:prstGeom>
+          <a:noFill/>
+          <a:ln/>
+        </p:spPr>
+        <p:txBody>
+          <a:bodyPr wrap="square" lIns="0" tIns="0" rIns="0" bIns="0" rtlCol="0" anchor="t"/>
+          <a:lstStyle/>
+          <a:p>
+            <a:pPr indent="0" marL="0">
+              <a:buNone/>
+            </a:pPr>
+            <a:r>
+              <a:rPr lang="en-US" sz="1800" dirty="0">
+                <a:solidFill>
+                  <a:srgbClr val="334155"/>
+                </a:solidFill>
+                <a:latin typeface="Inter" pitchFamily="34" charset="0"/>
+                <a:ea typeface="Inter" pitchFamily="34" charset="-122"/>
+                <a:cs typeface="Inter" pitchFamily="34" charset="-120"/>
+              </a:rPr>
+              <a:t>Skim what supervisors changed since yesterday.</a:t>
+            </a:r>
+            <a:endParaRPr lang="en-US" sz="1800" dirty="0"/>
+          </a:p>
+        </p:txBody>
+      </p:sp>
+      <p:sp>
+        <p:nvSpPr>
+          <p:cNvPr id="17" name="Shape 14"/>
+          <p:cNvSpPr/>
+          <p:nvPr/>
+        </p:nvSpPr>
+        <p:spPr>
+          <a:xfrm>
+            <a:off x="8138160" y="2286000"/>
+            <a:ext cx="3611880" cy="1783080"/>
+          </a:xfrm>
+          <a:prstGeom prst="rect">
+            <a:avLst/>
+          </a:prstGeom>
+          <a:solidFill>
+            <a:srgbClr val="FFFFFF"/>
+          </a:solidFill>
+          <a:ln w="9525">
+            <a:solidFill>
+              <a:srgbClr val="E2E8F0"/>
+            </a:solidFill>
+            <a:prstDash val="solid"/>
+          </a:ln>
+          <a:effectLst>
+            <a:outerShdw sx="100000" sy="100000" kx="0" ky="0" algn="bl" rotWithShape="0" blurRad="76200" dist="12700" dir="5400000">
+              <a:srgbClr val="94A3B8">
+                <a:alpha val="12000"/>
+              </a:srgbClr>
+            </a:outerShdw>
+          </a:effectLst>
+        </p:spPr>
+      </p:sp>
+      <p:sp>
+        <p:nvSpPr>
+          <p:cNvPr id="18" name="Shape 15"/>
+          <p:cNvSpPr/>
+          <p:nvPr/>
+        </p:nvSpPr>
+        <p:spPr>
+          <a:xfrm>
+            <a:off x="8339328" y="2487168"/>
+            <a:ext cx="502920" cy="502920"/>
+          </a:xfrm>
+          <a:prstGeom prst="ellipse">
+            <a:avLst/>
+          </a:prstGeom>
+          <a:solidFill>
+            <a:srgbClr val="FF7A45"/>
+          </a:solidFill>
+          <a:ln/>
+        </p:spPr>
+      </p:sp>
+      <p:sp>
+        <p:nvSpPr>
+          <p:cNvPr id="19" name="Text 16"/>
+          <p:cNvSpPr/>
+          <p:nvPr/>
+        </p:nvSpPr>
+        <p:spPr>
+          <a:xfrm>
+            <a:off x="8339328" y="2487168"/>
+            <a:ext cx="502920" cy="502920"/>
+          </a:xfrm>
+          <a:prstGeom prst="rect">
+            <a:avLst/>
+          </a:prstGeom>
+          <a:noFill/>
+          <a:ln/>
+        </p:spPr>
+        <p:txBody>
+          <a:bodyPr wrap="square" lIns="0" tIns="0" rIns="0" bIns="0" rtlCol="0" anchor="ctr"/>
+          <a:lstStyle/>
+          <a:p>
+            <a:pPr algn="ctr" indent="0" marL="0">
+              <a:buNone/>
+            </a:pPr>
+            <a:r>
+              <a:rPr lang="en-US" sz="2200" b="1" dirty="0">
+                <a:solidFill>
+                  <a:srgbClr val="FFFFFF"/>
+                </a:solidFill>
+                <a:latin typeface="Inter" pitchFamily="34" charset="0"/>
+                <a:ea typeface="Inter" pitchFamily="34" charset="-122"/>
+                <a:cs typeface="Inter" pitchFamily="34" charset="-120"/>
+              </a:rPr>
+              <a:t>3</a:t>
+            </a:r>
+            <a:endParaRPr lang="en-US" sz="2200" dirty="0"/>
+          </a:p>
+        </p:txBody>
+      </p:sp>
+      <p:sp>
+        <p:nvSpPr>
+          <p:cNvPr id="20" name="Text 17"/>
+          <p:cNvSpPr/>
+          <p:nvPr/>
+        </p:nvSpPr>
+        <p:spPr>
+          <a:xfrm>
+            <a:off x="9006840" y="2532888"/>
+            <a:ext cx="2542032" cy="411480"/>
+          </a:xfrm>
+          <a:prstGeom prst="rect">
+            <a:avLst/>
+          </a:prstGeom>
+          <a:noFill/>
+          <a:ln/>
+        </p:spPr>
+        <p:txBody>
+          <a:bodyPr wrap="square" lIns="0" tIns="0" rIns="0" bIns="0" rtlCol="0" anchor="ctr"/>
+          <a:lstStyle/>
+          <a:p>
+            <a:pPr indent="0" marL="0">
+              <a:buNone/>
+            </a:pPr>
+            <a:r>
+              <a:rPr lang="en-US" sz="2200" b="1" dirty="0">
+                <a:solidFill>
+                  <a:srgbClr val="0F172A"/>
+                </a:solidFill>
+                <a:latin typeface="Inter" pitchFamily="34" charset="0"/>
+                <a:ea typeface="Inter" pitchFamily="34" charset="-122"/>
+                <a:cs typeface="Inter" pitchFamily="34" charset="-120"/>
+              </a:rPr>
+              <a:t>Tasks</a:t>
+            </a:r>
+            <a:endParaRPr lang="en-US" sz="2200" dirty="0"/>
+          </a:p>
+        </p:txBody>
+      </p:sp>
+      <p:sp>
+        <p:nvSpPr>
+          <p:cNvPr id="21" name="Text 18"/>
+          <p:cNvSpPr/>
+          <p:nvPr/>
+        </p:nvSpPr>
+        <p:spPr>
+          <a:xfrm>
+            <a:off x="8339328" y="3154680"/>
+            <a:ext cx="3246120" cy="777240"/>
+          </a:xfrm>
+          <a:prstGeom prst="rect">
+            <a:avLst/>
+          </a:prstGeom>
+          <a:noFill/>
+          <a:ln/>
+        </p:spPr>
+        <p:txBody>
+          <a:bodyPr wrap="square" lIns="0" tIns="0" rIns="0" bIns="0" rtlCol="0" anchor="t"/>
+          <a:lstStyle/>
+          <a:p>
+            <a:pPr indent="0" marL="0">
+              <a:buNone/>
+            </a:pPr>
+            <a:r>
+              <a:rPr lang="en-US" sz="1800" dirty="0">
+                <a:solidFill>
+                  <a:srgbClr val="334155"/>
+                </a:solidFill>
+                <a:latin typeface="Inter" pitchFamily="34" charset="0"/>
+                <a:ea typeface="Inter" pitchFamily="34" charset="-122"/>
+                <a:cs typeface="Inter" pitchFamily="34" charset="-120"/>
+              </a:rPr>
+              <a:t>Drag through statuses; Mark as completed when done.</a:t>
+            </a:r>
+            <a:endParaRPr lang="en-US" sz="1800" dirty="0"/>
+          </a:p>
+        </p:txBody>
+      </p:sp>
+      <p:sp>
+        <p:nvSpPr>
+          <p:cNvPr id="22" name="Shape 19"/>
+          <p:cNvSpPr/>
+          <p:nvPr/>
+        </p:nvSpPr>
+        <p:spPr>
+          <a:xfrm>
+            <a:off x="548640" y="4297680"/>
+            <a:ext cx="3611880" cy="1783080"/>
+          </a:xfrm>
+          <a:prstGeom prst="rect">
+            <a:avLst/>
+          </a:prstGeom>
+          <a:solidFill>
+            <a:srgbClr val="FFFFFF"/>
+          </a:solidFill>
+          <a:ln w="9525">
+            <a:solidFill>
+              <a:srgbClr val="E2E8F0"/>
+            </a:solidFill>
+            <a:prstDash val="solid"/>
+          </a:ln>
+          <a:effectLst>
+            <a:outerShdw sx="100000" sy="100000" kx="0" ky="0" algn="bl" rotWithShape="0" blurRad="76200" dist="12700" dir="5400000">
+              <a:srgbClr val="94A3B8">
+                <a:alpha val="12000"/>
+              </a:srgbClr>
+            </a:outerShdw>
+          </a:effectLst>
+        </p:spPr>
+      </p:sp>
+      <p:sp>
+        <p:nvSpPr>
+          <p:cNvPr id="23" name="Shape 20"/>
+          <p:cNvSpPr/>
+          <p:nvPr/>
+        </p:nvSpPr>
+        <p:spPr>
+          <a:xfrm>
+            <a:off x="749808" y="4498848"/>
+            <a:ext cx="502920" cy="502920"/>
+          </a:xfrm>
+          <a:prstGeom prst="ellipse">
+            <a:avLst/>
+          </a:prstGeom>
+          <a:solidFill>
+            <a:srgbClr val="00D1C1"/>
+          </a:solidFill>
+          <a:ln/>
+        </p:spPr>
+      </p:sp>
+      <p:sp>
+        <p:nvSpPr>
+          <p:cNvPr id="24" name="Text 21"/>
+          <p:cNvSpPr/>
+          <p:nvPr/>
+        </p:nvSpPr>
+        <p:spPr>
+          <a:xfrm>
+            <a:off x="749808" y="4498848"/>
+            <a:ext cx="502920" cy="502920"/>
+          </a:xfrm>
+          <a:prstGeom prst="rect">
+            <a:avLst/>
+          </a:prstGeom>
+          <a:noFill/>
+          <a:ln/>
+        </p:spPr>
+        <p:txBody>
+          <a:bodyPr wrap="square" lIns="0" tIns="0" rIns="0" bIns="0" rtlCol="0" anchor="ctr"/>
+          <a:lstStyle/>
+          <a:p>
+            <a:pPr algn="ctr" indent="0" marL="0">
+              <a:buNone/>
+            </a:pPr>
+            <a:r>
+              <a:rPr lang="en-US" sz="2200" b="1" dirty="0">
+                <a:solidFill>
+                  <a:srgbClr val="FFFFFF"/>
+                </a:solidFill>
+                <a:latin typeface="Inter" pitchFamily="34" charset="0"/>
+                <a:ea typeface="Inter" pitchFamily="34" charset="-122"/>
+                <a:cs typeface="Inter" pitchFamily="34" charset="-120"/>
+              </a:rPr>
+              <a:t>4</a:t>
+            </a:r>
+            <a:endParaRPr lang="en-US" sz="2200" dirty="0"/>
+          </a:p>
+        </p:txBody>
+      </p:sp>
+      <p:sp>
+        <p:nvSpPr>
+          <p:cNvPr id="25" name="Text 22"/>
+          <p:cNvSpPr/>
+          <p:nvPr/>
+        </p:nvSpPr>
+        <p:spPr>
+          <a:xfrm>
+            <a:off x="1417320" y="4544568"/>
+            <a:ext cx="2542032" cy="411480"/>
+          </a:xfrm>
+          <a:prstGeom prst="rect">
+            <a:avLst/>
+          </a:prstGeom>
+          <a:noFill/>
+          <a:ln/>
+        </p:spPr>
+        <p:txBody>
+          <a:bodyPr wrap="square" lIns="0" tIns="0" rIns="0" bIns="0" rtlCol="0" anchor="ctr"/>
+          <a:lstStyle/>
+          <a:p>
+            <a:pPr indent="0" marL="0">
+              <a:buNone/>
+            </a:pPr>
+            <a:r>
+              <a:rPr lang="en-US" sz="2200" b="1" dirty="0">
+                <a:solidFill>
+                  <a:srgbClr val="0F172A"/>
+                </a:solidFill>
+                <a:latin typeface="Inter" pitchFamily="34" charset="0"/>
+                <a:ea typeface="Inter" pitchFamily="34" charset="-122"/>
+                <a:cs typeface="Inter" pitchFamily="34" charset="-120"/>
+              </a:rPr>
+              <a:t>Meetings</a:t>
+            </a:r>
+            <a:endParaRPr lang="en-US" sz="2200" dirty="0"/>
+          </a:p>
+        </p:txBody>
+      </p:sp>
+      <p:sp>
+        <p:nvSpPr>
+          <p:cNvPr id="26" name="Text 23"/>
+          <p:cNvSpPr/>
+          <p:nvPr/>
+        </p:nvSpPr>
+        <p:spPr>
+          <a:xfrm>
+            <a:off x="749808" y="5166360"/>
+            <a:ext cx="3246120" cy="777240"/>
+          </a:xfrm>
+          <a:prstGeom prst="rect">
+            <a:avLst/>
+          </a:prstGeom>
+          <a:noFill/>
+          <a:ln/>
+        </p:spPr>
+        <p:txBody>
+          <a:bodyPr wrap="square" lIns="0" tIns="0" rIns="0" bIns="0" rtlCol="0" anchor="t"/>
+          <a:lstStyle/>
+          <a:p>
+            <a:pPr indent="0" marL="0">
+              <a:buNone/>
+            </a:pPr>
+            <a:r>
+              <a:rPr lang="en-US" sz="1800" dirty="0">
+                <a:solidFill>
+                  <a:srgbClr val="334155"/>
+                </a:solidFill>
+                <a:latin typeface="Inter" pitchFamily="34" charset="0"/>
+                <a:ea typeface="Inter" pitchFamily="34" charset="-122"/>
+                <a:cs typeface="Inter" pitchFamily="34" charset="-120"/>
+              </a:rPr>
+              <a:t>Open Calendar — today's 1:1s; add agenda points.</a:t>
+            </a:r>
+            <a:endParaRPr lang="en-US" sz="1800" dirty="0"/>
+          </a:p>
+        </p:txBody>
+      </p:sp>
+      <p:sp>
+        <p:nvSpPr>
+          <p:cNvPr id="27" name="Shape 24"/>
+          <p:cNvSpPr/>
+          <p:nvPr/>
+        </p:nvSpPr>
+        <p:spPr>
+          <a:xfrm>
+            <a:off x="4343400" y="4297680"/>
+            <a:ext cx="3611880" cy="1783080"/>
+          </a:xfrm>
+          <a:prstGeom prst="rect">
+            <a:avLst/>
+          </a:prstGeom>
+          <a:solidFill>
+            <a:srgbClr val="FFFFFF"/>
+          </a:solidFill>
+          <a:ln w="9525">
+            <a:solidFill>
+              <a:srgbClr val="E2E8F0"/>
+            </a:solidFill>
+            <a:prstDash val="solid"/>
+          </a:ln>
+          <a:effectLst>
+            <a:outerShdw sx="100000" sy="100000" kx="0" ky="0" algn="bl" rotWithShape="0" blurRad="76200" dist="12700" dir="5400000">
+              <a:srgbClr val="94A3B8">
+                <a:alpha val="12000"/>
+              </a:srgbClr>
+            </a:outerShdw>
+          </a:effectLst>
+        </p:spPr>
+      </p:sp>
+      <p:sp>
+        <p:nvSpPr>
+          <p:cNvPr id="28" name="Shape 25"/>
+          <p:cNvSpPr/>
+          <p:nvPr/>
+        </p:nvSpPr>
+        <p:spPr>
+          <a:xfrm>
+            <a:off x="4544568" y="4498848"/>
+            <a:ext cx="502920" cy="502920"/>
+          </a:xfrm>
+          <a:prstGeom prst="ellipse">
+            <a:avLst/>
+          </a:prstGeom>
+          <a:solidFill>
+            <a:srgbClr val="00CA72"/>
+          </a:solidFill>
+          <a:ln/>
+        </p:spPr>
+      </p:sp>
+      <p:sp>
+        <p:nvSpPr>
+          <p:cNvPr id="29" name="Text 26"/>
+          <p:cNvSpPr/>
+          <p:nvPr/>
+        </p:nvSpPr>
+        <p:spPr>
+          <a:xfrm>
+            <a:off x="4544568" y="4498848"/>
+            <a:ext cx="502920" cy="502920"/>
+          </a:xfrm>
+          <a:prstGeom prst="rect">
+            <a:avLst/>
+          </a:prstGeom>
+          <a:noFill/>
+          <a:ln/>
+        </p:spPr>
+        <p:txBody>
+          <a:bodyPr wrap="square" lIns="0" tIns="0" rIns="0" bIns="0" rtlCol="0" anchor="ctr"/>
+          <a:lstStyle/>
+          <a:p>
+            <a:pPr algn="ctr" indent="0" marL="0">
+              <a:buNone/>
+            </a:pPr>
+            <a:r>
+              <a:rPr lang="en-US" sz="2200" b="1" dirty="0">
+                <a:solidFill>
+                  <a:srgbClr val="FFFFFF"/>
+                </a:solidFill>
+                <a:latin typeface="Inter" pitchFamily="34" charset="0"/>
+                <a:ea typeface="Inter" pitchFamily="34" charset="-122"/>
+                <a:cs typeface="Inter" pitchFamily="34" charset="-120"/>
+              </a:rPr>
+              <a:t>5</a:t>
+            </a:r>
+            <a:endParaRPr lang="en-US" sz="2200" dirty="0"/>
+          </a:p>
+        </p:txBody>
+      </p:sp>
+      <p:sp>
+        <p:nvSpPr>
+          <p:cNvPr id="30" name="Text 27"/>
+          <p:cNvSpPr/>
+          <p:nvPr/>
+        </p:nvSpPr>
+        <p:spPr>
+          <a:xfrm>
+            <a:off x="5212080" y="4544568"/>
+            <a:ext cx="2542032" cy="411480"/>
+          </a:xfrm>
+          <a:prstGeom prst="rect">
+            <a:avLst/>
+          </a:prstGeom>
+          <a:noFill/>
+          <a:ln/>
+        </p:spPr>
+        <p:txBody>
+          <a:bodyPr wrap="square" lIns="0" tIns="0" rIns="0" bIns="0" rtlCol="0" anchor="ctr"/>
+          <a:lstStyle/>
+          <a:p>
+            <a:pPr indent="0" marL="0">
+              <a:buNone/>
+            </a:pPr>
+            <a:r>
+              <a:rPr lang="en-US" sz="2200" b="1" dirty="0">
+                <a:solidFill>
+                  <a:srgbClr val="0F172A"/>
+                </a:solidFill>
+                <a:latin typeface="Inter" pitchFamily="34" charset="0"/>
+                <a:ea typeface="Inter" pitchFamily="34" charset="-122"/>
+                <a:cs typeface="Inter" pitchFamily="34" charset="-120"/>
+              </a:rPr>
+              <a:t>Chat &amp; files</a:t>
+            </a:r>
+            <a:endParaRPr lang="en-US" sz="2200" dirty="0"/>
+          </a:p>
+        </p:txBody>
+      </p:sp>
+      <p:sp>
+        <p:nvSpPr>
+          <p:cNvPr id="31" name="Text 28"/>
+          <p:cNvSpPr/>
+          <p:nvPr/>
+        </p:nvSpPr>
+        <p:spPr>
+          <a:xfrm>
+            <a:off x="4544568" y="5166360"/>
+            <a:ext cx="3246120" cy="777240"/>
+          </a:xfrm>
+          <a:prstGeom prst="rect">
+            <a:avLst/>
+          </a:prstGeom>
+          <a:noFill/>
+          <a:ln/>
+        </p:spPr>
+        <p:txBody>
+          <a:bodyPr wrap="square" lIns="0" tIns="0" rIns="0" bIns="0" rtlCol="0" anchor="t"/>
+          <a:lstStyle/>
+          <a:p>
+            <a:pPr indent="0" marL="0">
+              <a:buNone/>
+            </a:pPr>
+            <a:r>
+              <a:rPr lang="en-US" sz="1800" dirty="0">
+                <a:solidFill>
+                  <a:srgbClr val="334155"/>
+                </a:solidFill>
+                <a:latin typeface="Inter" pitchFamily="34" charset="0"/>
+                <a:ea typeface="Inter" pitchFamily="34" charset="-122"/>
+                <a:cs typeface="Inter" pitchFamily="34" charset="-120"/>
+              </a:rPr>
+              <a:t>Reply in your Team channel; drag files, ⌘V screenshots.</a:t>
+            </a:r>
+            <a:endParaRPr lang="en-US" sz="1800" dirty="0"/>
+          </a:p>
+        </p:txBody>
+      </p:sp>
+      <p:sp>
+        <p:nvSpPr>
+          <p:cNvPr id="32" name="Shape 29"/>
+          <p:cNvSpPr/>
+          <p:nvPr/>
+        </p:nvSpPr>
+        <p:spPr>
+          <a:xfrm>
+            <a:off x="8138160" y="4297680"/>
+            <a:ext cx="3611880" cy="1783080"/>
+          </a:xfrm>
+          <a:prstGeom prst="rect">
+            <a:avLst/>
+          </a:prstGeom>
+          <a:solidFill>
+            <a:srgbClr val="FFFFFF"/>
+          </a:solidFill>
+          <a:ln w="9525">
+            <a:solidFill>
+              <a:srgbClr val="E2E8F0"/>
+            </a:solidFill>
+            <a:prstDash val="solid"/>
+          </a:ln>
+          <a:effectLst>
+            <a:outerShdw sx="100000" sy="100000" kx="0" ky="0" algn="bl" rotWithShape="0" blurRad="76200" dist="12700" dir="5400000">
+              <a:srgbClr val="94A3B8">
+                <a:alpha val="12000"/>
+              </a:srgbClr>
+            </a:outerShdw>
+          </a:effectLst>
+        </p:spPr>
+      </p:sp>
+      <p:sp>
+        <p:nvSpPr>
+          <p:cNvPr id="33" name="Shape 30"/>
+          <p:cNvSpPr/>
+          <p:nvPr/>
+        </p:nvSpPr>
+        <p:spPr>
+          <a:xfrm>
+            <a:off x="8339328" y="4498848"/>
+            <a:ext cx="502920" cy="502920"/>
+          </a:xfrm>
+          <a:prstGeom prst="ellipse">
+            <a:avLst/>
+          </a:prstGeom>
+          <a:solidFill>
+            <a:srgbClr val="6F4CFF"/>
+          </a:solidFill>
+          <a:ln/>
+        </p:spPr>
+      </p:sp>
+      <p:sp>
+        <p:nvSpPr>
+          <p:cNvPr id="34" name="Text 31"/>
+          <p:cNvSpPr/>
+          <p:nvPr/>
+        </p:nvSpPr>
+        <p:spPr>
+          <a:xfrm>
+            <a:off x="8339328" y="4498848"/>
+            <a:ext cx="502920" cy="502920"/>
+          </a:xfrm>
+          <a:prstGeom prst="rect">
+            <a:avLst/>
+          </a:prstGeom>
+          <a:noFill/>
+          <a:ln/>
+        </p:spPr>
+        <p:txBody>
+          <a:bodyPr wrap="square" lIns="0" tIns="0" rIns="0" bIns="0" rtlCol="0" anchor="ctr"/>
+          <a:lstStyle/>
+          <a:p>
+            <a:pPr algn="ctr" indent="0" marL="0">
+              <a:buNone/>
+            </a:pPr>
+            <a:r>
+              <a:rPr lang="en-US" sz="2200" b="1" dirty="0">
+                <a:solidFill>
+                  <a:srgbClr val="FFFFFF"/>
+                </a:solidFill>
+                <a:latin typeface="Inter" pitchFamily="34" charset="0"/>
+                <a:ea typeface="Inter" pitchFamily="34" charset="-122"/>
+                <a:cs typeface="Inter" pitchFamily="34" charset="-120"/>
+              </a:rPr>
+              <a:t>6</a:t>
+            </a:r>
+            <a:endParaRPr lang="en-US" sz="2200" dirty="0"/>
+          </a:p>
+        </p:txBody>
+      </p:sp>
+      <p:sp>
+        <p:nvSpPr>
+          <p:cNvPr id="35" name="Text 32"/>
+          <p:cNvSpPr/>
+          <p:nvPr/>
+        </p:nvSpPr>
+        <p:spPr>
+          <a:xfrm>
+            <a:off x="9006840" y="4544568"/>
+            <a:ext cx="2542032" cy="411480"/>
+          </a:xfrm>
+          <a:prstGeom prst="rect">
+            <a:avLst/>
+          </a:prstGeom>
+          <a:noFill/>
+          <a:ln/>
+        </p:spPr>
+        <p:txBody>
+          <a:bodyPr wrap="square" lIns="0" tIns="0" rIns="0" bIns="0" rtlCol="0" anchor="ctr"/>
+          <a:lstStyle/>
+          <a:p>
+            <a:pPr indent="0" marL="0">
+              <a:buNone/>
+            </a:pPr>
+            <a:r>
+              <a:rPr lang="en-US" sz="2200" b="1" dirty="0">
+                <a:solidFill>
+                  <a:srgbClr val="0F172A"/>
+                </a:solidFill>
+                <a:latin typeface="Inter" pitchFamily="34" charset="0"/>
+                <a:ea typeface="Inter" pitchFamily="34" charset="-122"/>
+                <a:cs typeface="Inter" pitchFamily="34" charset="-120"/>
+              </a:rPr>
+              <a:t>Friday</a:t>
+            </a:r>
+            <a:endParaRPr lang="en-US" sz="2200" dirty="0"/>
+          </a:p>
+        </p:txBody>
+      </p:sp>
+      <p:sp>
+        <p:nvSpPr>
+          <p:cNvPr id="36" name="Text 33"/>
+          <p:cNvSpPr/>
+          <p:nvPr/>
+        </p:nvSpPr>
+        <p:spPr>
+          <a:xfrm>
+            <a:off x="8339328" y="5166360"/>
+            <a:ext cx="3246120" cy="777240"/>
+          </a:xfrm>
+          <a:prstGeom prst="rect">
+            <a:avLst/>
+          </a:prstGeom>
+          <a:noFill/>
+          <a:ln/>
+        </p:spPr>
+        <p:txBody>
+          <a:bodyPr wrap="square" lIns="0" tIns="0" rIns="0" bIns="0" rtlCol="0" anchor="t"/>
+          <a:lstStyle/>
+          <a:p>
+            <a:pPr indent="0" marL="0">
+              <a:buNone/>
+            </a:pPr>
+            <a:r>
+              <a:rPr lang="en-US" sz="1800" dirty="0">
+                <a:solidFill>
+                  <a:srgbClr val="334155"/>
+                </a:solidFill>
+                <a:latin typeface="Inter" pitchFamily="34" charset="0"/>
+                <a:ea typeface="Inter" pitchFamily="34" charset="-122"/>
+                <a:cs typeface="Inter" pitchFamily="34" charset="-120"/>
+              </a:rPr>
+              <a:t>Weekly check-in — Did / Blockers / Next + wellbeing.</a:t>
+            </a:r>
+            <a:endParaRPr lang="en-US" sz="1800" dirty="0"/>
+          </a:p>
+        </p:txBody>
+      </p:sp>
+      <p:sp>
+        <p:nvSpPr>
+          <p:cNvPr id="37" name="Shape 34"/>
+          <p:cNvSpPr/>
+          <p:nvPr/>
+        </p:nvSpPr>
+        <p:spPr>
+          <a:xfrm>
+            <a:off x="548640" y="6355080"/>
+            <a:ext cx="11094415" cy="0"/>
+          </a:xfrm>
+          <a:prstGeom prst="line">
+            <a:avLst/>
+          </a:prstGeom>
+          <a:noFill/>
+          <a:ln w="9525">
+            <a:solidFill>
+              <a:srgbClr val="E2E8F0"/>
+            </a:solidFill>
+            <a:prstDash val="solid"/>
+          </a:ln>
+        </p:spPr>
+      </p:sp>
+      <p:sp>
+        <p:nvSpPr>
+          <p:cNvPr id="38" name="Text 35"/>
+          <p:cNvSpPr/>
+          <p:nvPr/>
+        </p:nvSpPr>
+        <p:spPr>
+          <a:xfrm>
+            <a:off x="548640" y="6446520"/>
+            <a:ext cx="5486400" cy="274320"/>
+          </a:xfrm>
+          <a:prstGeom prst="rect">
+            <a:avLst/>
+          </a:prstGeom>
+          <a:noFill/>
+          <a:ln/>
+        </p:spPr>
+        <p:txBody>
+          <a:bodyPr wrap="square" lIns="0" tIns="0" rIns="0" bIns="0" rtlCol="0" anchor="ctr"/>
+          <a:lstStyle/>
+          <a:p>
+            <a:pPr indent="0" marL="0">
+              <a:buNone/>
+            </a:pPr>
+            <a:r>
+              <a:rPr lang="en-US" sz="1300" dirty="0">
+                <a:solidFill>
+                  <a:srgbClr val="64748B"/>
+                </a:solidFill>
+                <a:latin typeface="Inter" pitchFamily="34" charset="0"/>
+                <a:ea typeface="Inter" pitchFamily="34" charset="-122"/>
+                <a:cs typeface="Inter" pitchFamily="34" charset="-120"/>
+              </a:rPr>
+              <a:t>PhDapp · for students</a:t>
+            </a:r>
+            <a:endParaRPr lang="en-US" sz="1300" dirty="0"/>
+          </a:p>
+        </p:txBody>
+      </p:sp>
+      <p:sp>
+        <p:nvSpPr>
+          <p:cNvPr id="39" name="Text 36"/>
+          <p:cNvSpPr/>
+          <p:nvPr/>
+        </p:nvSpPr>
+        <p:spPr>
+          <a:xfrm>
+            <a:off x="9814255" y="6446520"/>
+            <a:ext cx="1828800" cy="274320"/>
+          </a:xfrm>
+          <a:prstGeom prst="rect">
+            <a:avLst/>
+          </a:prstGeom>
+          <a:noFill/>
+          <a:ln/>
+        </p:spPr>
+        <p:txBody>
+          <a:bodyPr wrap="square" lIns="0" tIns="0" rIns="0" bIns="0" rtlCol="0" anchor="ctr"/>
+          <a:lstStyle/>
+          <a:p>
+            <a:pPr algn="r" indent="0" marL="0">
+              <a:buNone/>
+            </a:pPr>
+            <a:r>
+              <a:rPr lang="en-US" sz="1300" dirty="0">
+                <a:solidFill>
+                  <a:srgbClr val="64748B"/>
+                </a:solidFill>
+                <a:latin typeface="Inter" pitchFamily="34" charset="0"/>
+                <a:ea typeface="Inter" pitchFamily="34" charset="-122"/>
+                <a:cs typeface="Inter" pitchFamily="34" charset="-120"/>
+              </a:rPr>
+              <a:t>15 / 16</a:t>
+            </a:r>
+            <a:endParaRPr lang="en-US" sz="1300" dirty="0"/>
+          </a:p>
+        </p:txBody>
+      </p:sp>
+    </p:spTree>
+  </p:cSld>
+  <p:clrMapOvr>
+    <a:masterClrMapping/>
+  </p:clrMapOvr>
+</p:sld>
+</file>
+
+<file path=ppt/slides/slide16.xml><?xml version="1.0" encoding="utf-8"?>
+<p:sld xmlns:a="http://schemas.openxmlformats.org/drawingml/2006/main" xmlns:r="http://schemas.openxmlformats.org/officeDocument/2006/relationships" xmlns:p="http://schemas.openxmlformats.org/presentationml/2006/main">
+  <p:cSld name="Slide 16">
+    <p:bg>
+      <p:bgPr>
+        <a:solidFill>
+          <a:srgbClr val="FFFFFF"/>
+        </a:solidFill>
+      </p:bgPr>
+    </p:bg>
+    <p:spTree>
+      <p:nvGrpSpPr>
+        <p:cNvPr id="1" name=""/>
+        <p:cNvGrpSpPr/>
+        <p:nvPr/>
+      </p:nvGrpSpPr>
+      <p:grpSpPr>
+        <a:xfrm>
+          <a:off x="0" y="0"/>
+          <a:ext cx="0" cy="0"/>
+          <a:chOff x="0" y="0"/>
+          <a:chExt cx="0" cy="0"/>
+        </a:xfrm>
+      </p:grpSpPr>
+      <p:sp>
+        <p:nvSpPr>
+          <p:cNvPr id="2" name="Shape 0"/>
+          <p:cNvSpPr/>
+          <p:nvPr/>
+        </p:nvSpPr>
+        <p:spPr>
+          <a:xfrm>
+            <a:off x="548640" y="548640"/>
+            <a:ext cx="548640" cy="548640"/>
+          </a:xfrm>
+          <a:prstGeom prst="roundRect">
+            <a:avLst>
+              <a:gd name="adj" fmla="val 20000"/>
+            </a:avLst>
+          </a:prstGeom>
+          <a:solidFill>
+            <a:srgbClr val="2196F3"/>
+          </a:solidFill>
+          <a:ln/>
+        </p:spPr>
+      </p:sp>
+      <p:pic>
+        <p:nvPicPr>
+          <p:cNvPr id="3" name="Image 0" descr="preencoded.png">    </p:cNvPr>
+          <p:cNvPicPr>
+            <a:picLocks noChangeAspect="1"/>
+          </p:cNvPicPr>
+          <p:nvPr/>
+        </p:nvPicPr>
+        <p:blipFill>
+          <a:blip r:embed="rId1"/>
+          <a:stretch>
+            <a:fillRect/>
+          </a:stretch>
+        </p:blipFill>
+        <p:spPr>
+          <a:xfrm>
+            <a:off x="667512" y="667512"/>
+            <a:ext cx="310896" cy="310896"/>
+          </a:xfrm>
+          <a:prstGeom prst="rect">
+            <a:avLst/>
+          </a:prstGeom>
+        </p:spPr>
+      </p:pic>
+      <p:sp>
+        <p:nvSpPr>
+          <p:cNvPr id="4" name="Text 1"/>
+          <p:cNvSpPr/>
+          <p:nvPr/>
+        </p:nvSpPr>
+        <p:spPr>
+          <a:xfrm>
+            <a:off x="1261872" y="530352"/>
+            <a:ext cx="3657600" cy="292608"/>
+          </a:xfrm>
+          <a:prstGeom prst="rect">
+            <a:avLst/>
+          </a:prstGeom>
+          <a:noFill/>
+          <a:ln/>
+        </p:spPr>
+        <p:txBody>
+          <a:bodyPr wrap="square" lIns="0" tIns="0" rIns="0" bIns="0" rtlCol="0" anchor="ctr"/>
+          <a:lstStyle/>
+          <a:p>
+            <a:pPr indent="0" marL="0">
+              <a:buNone/>
+            </a:pPr>
+            <a:r>
+              <a:rPr lang="en-US" sz="1400" b="1" spc="400" kern="0" dirty="0">
+                <a:solidFill>
+                  <a:srgbClr val="2196F3"/>
+                </a:solidFill>
+                <a:latin typeface="Inter" pitchFamily="34" charset="0"/>
+                <a:ea typeface="Inter" pitchFamily="34" charset="-122"/>
+                <a:cs typeface="Inter" pitchFamily="34" charset="-120"/>
+              </a:rPr>
+              <a:t>TIPS</a:t>
+            </a:r>
+            <a:endParaRPr lang="en-US" sz="1400" dirty="0"/>
+          </a:p>
+        </p:txBody>
+      </p:sp>
+      <p:sp>
+        <p:nvSpPr>
+          <p:cNvPr id="5" name="Text 2"/>
+          <p:cNvSpPr/>
+          <p:nvPr/>
+        </p:nvSpPr>
+        <p:spPr>
+          <a:xfrm>
+            <a:off x="1261872" y="749808"/>
+            <a:ext cx="10381183" cy="713232"/>
+          </a:xfrm>
+          <a:prstGeom prst="rect">
+            <a:avLst/>
+          </a:prstGeom>
+          <a:noFill/>
+          <a:ln/>
+        </p:spPr>
+        <p:txBody>
+          <a:bodyPr wrap="square" lIns="0" tIns="0" rIns="0" bIns="0" rtlCol="0" anchor="ctr"/>
+          <a:lstStyle/>
+          <a:p>
+            <a:pPr indent="0" marL="0">
+              <a:buNone/>
+            </a:pPr>
+            <a:r>
+              <a:rPr lang="en-US" sz="4000" b="1" dirty="0">
+                <a:solidFill>
+                  <a:srgbClr val="0F172A"/>
+                </a:solidFill>
+                <a:latin typeface="Inter" pitchFamily="34" charset="0"/>
+                <a:ea typeface="Inter" pitchFamily="34" charset="-122"/>
+                <a:cs typeface="Inter" pitchFamily="34" charset="-120"/>
+              </a:rPr>
+              <a:t>Tips · and if something breaks</a:t>
+            </a:r>
+            <a:endParaRPr lang="en-US" sz="4000" dirty="0"/>
+          </a:p>
+        </p:txBody>
+      </p:sp>
+      <p:sp>
+        <p:nvSpPr>
+          <p:cNvPr id="6" name="Shape 3"/>
+          <p:cNvSpPr/>
+          <p:nvPr/>
+        </p:nvSpPr>
+        <p:spPr>
+          <a:xfrm>
+            <a:off x="548640" y="1828800"/>
+            <a:ext cx="5486400" cy="3931920"/>
+          </a:xfrm>
+          <a:prstGeom prst="rect">
+            <a:avLst/>
+          </a:prstGeom>
+          <a:solidFill>
+            <a:srgbClr val="FFFFFF"/>
+          </a:solidFill>
+          <a:ln w="9525">
+            <a:solidFill>
+              <a:srgbClr val="E2E8F0"/>
+            </a:solidFill>
+            <a:prstDash val="solid"/>
+          </a:ln>
+          <a:effectLst>
+            <a:outerShdw sx="100000" sy="100000" kx="0" ky="0" algn="bl" rotWithShape="0" blurRad="76200" dist="12700" dir="5400000">
+              <a:srgbClr val="94A3B8">
+                <a:alpha val="12000"/>
+              </a:srgbClr>
+            </a:outerShdw>
+          </a:effectLst>
+        </p:spPr>
+      </p:sp>
+      <p:sp>
+        <p:nvSpPr>
+          <p:cNvPr id="7" name="Shape 4"/>
+          <p:cNvSpPr/>
+          <p:nvPr/>
+        </p:nvSpPr>
+        <p:spPr>
+          <a:xfrm>
+            <a:off x="548640" y="1828800"/>
             <a:ext cx="73152" cy="3931920"/>
           </a:xfrm>
           <a:prstGeom prst="rect">
             <a:avLst/>
           </a:prstGeom>
           <a:solidFill>
-            <a:srgbClr val="E2445C"/>
+            <a:srgbClr val="2196F3"/>
           </a:solidFill>
           <a:ln/>
         </p:spPr>
       </p:sp>
       <p:sp>
         <p:nvSpPr>
-          <p:cNvPr id="12" name="Text 9"/>
-          <p:cNvSpPr/>
-          <p:nvPr/>
-        </p:nvSpPr>
-        <p:spPr>
-          <a:xfrm>
-            <a:off x="6601968" y="1993392"/>
-            <a:ext cx="4922215" cy="594360"/>
+          <p:cNvPr id="8" name="Text 5"/>
+          <p:cNvSpPr/>
+          <p:nvPr/>
+        </p:nvSpPr>
+        <p:spPr>
+          <a:xfrm>
+            <a:off x="749808" y="1993392"/>
+            <a:ext cx="5166360" cy="594360"/>
           </a:xfrm>
           <a:prstGeom prst="rect">
             <a:avLst/>
@@ -6466,7 +7647,7 @@
                 <a:ea typeface="Inter" pitchFamily="34" charset="-122"/>
                 <a:cs typeface="Inter" pitchFamily="34" charset="-120"/>
               </a:rPr>
-              <a:t>If something breaks</a:t>
+              <a:t>Tips</a:t>
             </a:r>
             <a:endParaRPr lang="en-US" sz="2200" dirty="0"/>
           </a:p>
@@ -6474,14 +7655,14 @@
       </p:sp>
       <p:sp>
         <p:nvSpPr>
-          <p:cNvPr id="13" name="Text 10"/>
-          <p:cNvSpPr/>
-          <p:nvPr/>
-        </p:nvSpPr>
-        <p:spPr>
-          <a:xfrm>
-            <a:off x="6629400" y="2697480"/>
-            <a:ext cx="4876495" cy="2926080"/>
+          <p:cNvPr id="9" name="Text 6"/>
+          <p:cNvSpPr/>
+          <p:nvPr/>
+        </p:nvSpPr>
+        <p:spPr>
+          <a:xfrm>
+            <a:off x="777240" y="2697480"/>
+            <a:ext cx="5074920" cy="2926080"/>
           </a:xfrm>
           <a:prstGeom prst="rect">
             <a:avLst/>
@@ -6509,7 +7690,7 @@
                 <a:ea typeface="Inter" pitchFamily="34" charset="-122"/>
                 <a:cs typeface="Inter" pitchFamily="34" charset="-120"/>
               </a:rPr>
-              <a:t>‘Access blocked’ → ask your supervisor to add you.</a:t>
+              <a:t>Keep the tab open — fewer missed alerts.</a:t>
             </a:r>
             <a:endParaRPr lang="en-US" sz="1800" dirty="0"/>
           </a:p>
@@ -6530,7 +7711,7 @@
                 <a:ea typeface="Inter" pitchFamily="34" charset="-122"/>
                 <a:cs typeface="Inter" pitchFamily="34" charset="-120"/>
               </a:rPr>
-              <a:t>Calendar/Drive missing → sign out + back in.</a:t>
+              <a:t>Channels for back-and-forth; comments for tasks.</a:t>
             </a:r>
             <a:endParaRPr lang="en-US" sz="1800" dirty="0"/>
           </a:p>
@@ -6551,7 +7732,7 @@
                 <a:ea typeface="Inter" pitchFamily="34" charset="-122"/>
                 <a:cs typeface="Inter" pitchFamily="34" charset="-120"/>
               </a:rPr>
-              <a:t>Sync feels stale → reload the tab.</a:t>
+              <a:t>Tag tasks with priority + due date.</a:t>
             </a:r>
             <a:endParaRPr lang="en-US" sz="1800" dirty="0"/>
           </a:p>
@@ -6572,7 +7753,7 @@
                 <a:ea typeface="Inter" pitchFamily="34" charset="-122"/>
                 <a:cs typeface="Inter" pitchFamily="34" charset="-120"/>
               </a:rPr>
-              <a:t>Event time looks off → check your timezone.</a:t>
+              <a:t>Drop a weekly check-in even if quiet.</a:t>
             </a:r>
             <a:endParaRPr lang="en-US" sz="1800" dirty="0"/>
           </a:p>
@@ -6593,7 +7774,7 @@
                 <a:ea typeface="Inter" pitchFamily="34" charset="-122"/>
                 <a:cs typeface="Inter" pitchFamily="34" charset="-120"/>
               </a:rPr>
-              <a:t>Anything else → Feedback, type ‘Bug’.</a:t>
+              <a:t>Right-click events → add to your iCal / Calendar.</a:t>
             </a:r>
             <a:endParaRPr lang="en-US" sz="1800" dirty="0"/>
           </a:p>
@@ -6601,25 +7782,243 @@
       </p:sp>
       <p:sp>
         <p:nvSpPr>
-          <p:cNvPr id="14" name="Shape 11"/>
-          <p:cNvSpPr/>
-          <p:nvPr/>
-        </p:nvSpPr>
-        <p:spPr>
-          <a:xfrm>
-            <a:off x="548640" y="6355080"/>
-            <a:ext cx="11094415" cy="0"/>
-          </a:xfrm>
-          <a:prstGeom prst="line">
-            <a:avLst/>
-          </a:prstGeom>
-          <a:noFill/>
+          <p:cNvPr id="10" name="Shape 7"/>
+          <p:cNvSpPr/>
+          <p:nvPr/>
+        </p:nvSpPr>
+        <p:spPr>
+          <a:xfrm>
+            <a:off x="6400800" y="1828800"/>
+            <a:ext cx="5242255" cy="3931920"/>
+          </a:xfrm>
+          <a:prstGeom prst="rect">
+            <a:avLst/>
+          </a:prstGeom>
+          <a:solidFill>
+            <a:srgbClr val="FFFFFF"/>
+          </a:solidFill>
           <a:ln w="9525">
             <a:solidFill>
               <a:srgbClr val="E2E8F0"/>
             </a:solidFill>
             <a:prstDash val="solid"/>
           </a:ln>
+          <a:effectLst>
+            <a:outerShdw sx="100000" sy="100000" kx="0" ky="0" algn="bl" rotWithShape="0" blurRad="76200" dist="12700" dir="5400000">
+              <a:srgbClr val="94A3B8">
+                <a:alpha val="12000"/>
+              </a:srgbClr>
+            </a:outerShdw>
+          </a:effectLst>
+        </p:spPr>
+      </p:sp>
+      <p:sp>
+        <p:nvSpPr>
+          <p:cNvPr id="11" name="Shape 8"/>
+          <p:cNvSpPr/>
+          <p:nvPr/>
+        </p:nvSpPr>
+        <p:spPr>
+          <a:xfrm>
+            <a:off x="6400800" y="1828800"/>
+            <a:ext cx="73152" cy="3931920"/>
+          </a:xfrm>
+          <a:prstGeom prst="rect">
+            <a:avLst/>
+          </a:prstGeom>
+          <a:solidFill>
+            <a:srgbClr val="E2445C"/>
+          </a:solidFill>
+          <a:ln/>
+        </p:spPr>
+      </p:sp>
+      <p:sp>
+        <p:nvSpPr>
+          <p:cNvPr id="12" name="Text 9"/>
+          <p:cNvSpPr/>
+          <p:nvPr/>
+        </p:nvSpPr>
+        <p:spPr>
+          <a:xfrm>
+            <a:off x="6601968" y="1993392"/>
+            <a:ext cx="4922215" cy="594360"/>
+          </a:xfrm>
+          <a:prstGeom prst="rect">
+            <a:avLst/>
+          </a:prstGeom>
+          <a:noFill/>
+          <a:ln/>
+        </p:spPr>
+        <p:txBody>
+          <a:bodyPr wrap="square" lIns="0" tIns="0" rIns="0" bIns="0" rtlCol="0" anchor="ctr"/>
+          <a:lstStyle/>
+          <a:p>
+            <a:pPr indent="0" marL="0">
+              <a:buNone/>
+            </a:pPr>
+            <a:r>
+              <a:rPr lang="en-US" sz="2200" b="1" dirty="0">
+                <a:solidFill>
+                  <a:srgbClr val="0F172A"/>
+                </a:solidFill>
+                <a:latin typeface="Inter" pitchFamily="34" charset="0"/>
+                <a:ea typeface="Inter" pitchFamily="34" charset="-122"/>
+                <a:cs typeface="Inter" pitchFamily="34" charset="-120"/>
+              </a:rPr>
+              <a:t>If something breaks</a:t>
+            </a:r>
+            <a:endParaRPr lang="en-US" sz="2200" dirty="0"/>
+          </a:p>
+        </p:txBody>
+      </p:sp>
+      <p:sp>
+        <p:nvSpPr>
+          <p:cNvPr id="13" name="Text 10"/>
+          <p:cNvSpPr/>
+          <p:nvPr/>
+        </p:nvSpPr>
+        <p:spPr>
+          <a:xfrm>
+            <a:off x="6629400" y="2697480"/>
+            <a:ext cx="4876495" cy="2926080"/>
+          </a:xfrm>
+          <a:prstGeom prst="rect">
+            <a:avLst/>
+          </a:prstGeom>
+          <a:noFill/>
+          <a:ln/>
+        </p:spPr>
+        <p:txBody>
+          <a:bodyPr wrap="square" lIns="0" tIns="0" rIns="0" bIns="0" rtlCol="0" anchor="t"/>
+          <a:lstStyle/>
+          <a:p>
+            <a:pPr marL="342900" indent="-342900">
+              <a:spcAft>
+                <a:spcPts val="600"/>
+              </a:spcAft>
+              <a:buSzPct val="100000"/>
+              <a:buChar char="•"/>
+            </a:pPr>
+            <a:r>
+              <a:rPr lang="en-US" sz="1800" dirty="0">
+                <a:solidFill>
+                  <a:srgbClr val="334155"/>
+                </a:solidFill>
+                <a:latin typeface="Inter" pitchFamily="34" charset="0"/>
+                <a:ea typeface="Inter" pitchFamily="34" charset="-122"/>
+                <a:cs typeface="Inter" pitchFamily="34" charset="-120"/>
+              </a:rPr>
+              <a:t>‘Access blocked’ → ask your supervisor to add you.</a:t>
+            </a:r>
+            <a:endParaRPr lang="en-US" sz="1800" dirty="0"/>
+          </a:p>
+          <a:p>
+            <a:pPr marL="342900" indent="-342900">
+              <a:spcAft>
+                <a:spcPts val="600"/>
+              </a:spcAft>
+              <a:buSzPct val="100000"/>
+              <a:buChar char="•"/>
+            </a:pPr>
+            <a:r>
+              <a:rPr lang="en-US" sz="1800" dirty="0">
+                <a:solidFill>
+                  <a:srgbClr val="334155"/>
+                </a:solidFill>
+                <a:latin typeface="Inter" pitchFamily="34" charset="0"/>
+                <a:ea typeface="Inter" pitchFamily="34" charset="-122"/>
+                <a:cs typeface="Inter" pitchFamily="34" charset="-120"/>
+              </a:rPr>
+              <a:t>Calendar/Drive missing → sign out + back in.</a:t>
+            </a:r>
+            <a:endParaRPr lang="en-US" sz="1800" dirty="0"/>
+          </a:p>
+          <a:p>
+            <a:pPr marL="342900" indent="-342900">
+              <a:spcAft>
+                <a:spcPts val="600"/>
+              </a:spcAft>
+              <a:buSzPct val="100000"/>
+              <a:buChar char="•"/>
+            </a:pPr>
+            <a:r>
+              <a:rPr lang="en-US" sz="1800" dirty="0">
+                <a:solidFill>
+                  <a:srgbClr val="334155"/>
+                </a:solidFill>
+                <a:latin typeface="Inter" pitchFamily="34" charset="0"/>
+                <a:ea typeface="Inter" pitchFamily="34" charset="-122"/>
+                <a:cs typeface="Inter" pitchFamily="34" charset="-120"/>
+              </a:rPr>
+              <a:t>Sync feels stale → reload the tab.</a:t>
+            </a:r>
+            <a:endParaRPr lang="en-US" sz="1800" dirty="0"/>
+          </a:p>
+          <a:p>
+            <a:pPr marL="342900" indent="-342900">
+              <a:spcAft>
+                <a:spcPts val="600"/>
+              </a:spcAft>
+              <a:buSzPct val="100000"/>
+              <a:buChar char="•"/>
+            </a:pPr>
+            <a:r>
+              <a:rPr lang="en-US" sz="1800" dirty="0">
+                <a:solidFill>
+                  <a:srgbClr val="334155"/>
+                </a:solidFill>
+                <a:latin typeface="Inter" pitchFamily="34" charset="0"/>
+                <a:ea typeface="Inter" pitchFamily="34" charset="-122"/>
+                <a:cs typeface="Inter" pitchFamily="34" charset="-120"/>
+              </a:rPr>
+              <a:t>Event time looks off → check your timezone.</a:t>
+            </a:r>
+            <a:endParaRPr lang="en-US" sz="1800" dirty="0"/>
+          </a:p>
+          <a:p>
+            <a:pPr marL="342900" indent="-342900">
+              <a:spcAft>
+                <a:spcPts val="600"/>
+              </a:spcAft>
+              <a:buSzPct val="100000"/>
+              <a:buChar char="•"/>
+            </a:pPr>
+            <a:r>
+              <a:rPr lang="en-US" sz="1800" dirty="0">
+                <a:solidFill>
+                  <a:srgbClr val="334155"/>
+                </a:solidFill>
+                <a:latin typeface="Inter" pitchFamily="34" charset="0"/>
+                <a:ea typeface="Inter" pitchFamily="34" charset="-122"/>
+                <a:cs typeface="Inter" pitchFamily="34" charset="-120"/>
+              </a:rPr>
+              <a:t>Anything else → Feedback, type ‘Bug’.</a:t>
+            </a:r>
+            <a:endParaRPr lang="en-US" sz="1800" dirty="0"/>
+          </a:p>
+        </p:txBody>
+      </p:sp>
+      <p:sp>
+        <p:nvSpPr>
+          <p:cNvPr id="14" name="Shape 11"/>
+          <p:cNvSpPr/>
+          <p:nvPr/>
+        </p:nvSpPr>
+        <p:spPr>
+          <a:xfrm>
+            <a:off x="548640" y="6355080"/>
+            <a:ext cx="11094415" cy="0"/>
+          </a:xfrm>
+          <a:prstGeom prst="line">
+            <a:avLst/>
+          </a:prstGeom>
+          <a:noFill/>
+          <a:ln w="9525">
+            <a:solidFill>
+              <a:srgbClr val="E2E8F0"/>
+            </a:solidFill>
+            <a:prstDash val="solid"/>
+          </a:ln>
         </p:spPr>
       </p:sp>
       <p:sp>
@@ -6694,7 +8093,7 @@
                 <a:ea typeface="Inter" pitchFamily="34" charset="-122"/>
                 <a:cs typeface="Inter" pitchFamily="34" charset="-120"/>
               </a:rPr>
-              <a:t>15 / 15</a:t>
+              <a:t>16 / 16</a:t>
             </a:r>
             <a:endParaRPr lang="en-US" sz="1300" dirty="0"/>
           </a:p>
@@ -8054,7 +9453,7 @@
                 <a:ea typeface="Inter" pitchFamily="34" charset="-122"/>
                 <a:cs typeface="Inter" pitchFamily="34" charset="-120"/>
               </a:rPr>
-              <a:t>2 / 15</a:t>
+              <a:t>2 / 16</a:t>
             </a:r>
             <a:endParaRPr lang="en-US" sz="1300" dirty="0"/>
           </a:p>
@@ -8765,7 +10164,7 @@
                 <a:ea typeface="Inter" pitchFamily="34" charset="-122"/>
                 <a:cs typeface="Inter" pitchFamily="34" charset="-120"/>
               </a:rPr>
-              <a:t>3 / 15</a:t>
+              <a:t>3 / 16</a:t>
             </a:r>
             <a:endParaRPr lang="en-US" sz="1300" dirty="0"/>
           </a:p>
@@ -9771,7 +11170,7 @@
                 <a:ea typeface="Inter" pitchFamily="34" charset="-122"/>
                 <a:cs typeface="Inter" pitchFamily="34" charset="-120"/>
               </a:rPr>
-              <a:t>4 / 15</a:t>
+              <a:t>4 / 16</a:t>
             </a:r>
             <a:endParaRPr lang="en-US" sz="1300" dirty="0"/>
           </a:p>
@@ -10721,7 +12120,7 @@
                 <a:ea typeface="Inter" pitchFamily="34" charset="-122"/>
                 <a:cs typeface="Inter" pitchFamily="34" charset="-120"/>
               </a:rPr>
-              <a:t>5 / 15</a:t>
+              <a:t>5 / 16</a:t>
             </a:r>
             <a:endParaRPr lang="en-US" sz="1300" dirty="0"/>
           </a:p>
@@ -11435,7 +12834,7 @@
                 <a:ea typeface="Inter" pitchFamily="34" charset="-122"/>
                 <a:cs typeface="Inter" pitchFamily="34" charset="-120"/>
               </a:rPr>
-              <a:t>6 / 15</a:t>
+              <a:t>6 / 16</a:t>
             </a:r>
             <a:endParaRPr lang="en-US" sz="1300" dirty="0"/>
           </a:p>
@@ -12107,7 +13506,7 @@
                 <a:ea typeface="Inter" pitchFamily="34" charset="-122"/>
                 <a:cs typeface="Inter" pitchFamily="34" charset="-120"/>
               </a:rPr>
-              <a:t>7 / 15</a:t>
+              <a:t>7 / 16</a:t>
             </a:r>
             <a:endParaRPr lang="en-US" sz="1300" dirty="0"/>
           </a:p>
@@ -12818,7 +14217,7 @@
                 <a:ea typeface="Inter" pitchFamily="34" charset="-122"/>
                 <a:cs typeface="Inter" pitchFamily="34" charset="-120"/>
               </a:rPr>
-              <a:t>8 / 15</a:t>
+              <a:t>8 / 16</a:t>
             </a:r>
             <a:endParaRPr lang="en-US" sz="1300" dirty="0"/>
           </a:p>
@@ -13550,7 +14949,7 @@
                 <a:ea typeface="Inter" pitchFamily="34" charset="-122"/>
                 <a:cs typeface="Inter" pitchFamily="34" charset="-120"/>
               </a:rPr>
-              <a:t>9 / 15</a:t>
+              <a:t>9 / 16</a:t>
             </a:r>
             <a:endParaRPr lang="en-US" sz="1300" dirty="0"/>
           </a:p>

--- a/docs/PhDapp_Student_Overview.pptx
+++ b/docs/PhDapp_Student_Overview.pptx
@@ -2518,16 +2518,16 @@
         <p:spPr>
           <a:xfrm>
             <a:off x="1261872" y="749808"/>
-            <a:ext cx="10381183" cy="713232"/>
-          </a:xfrm>
-          <a:prstGeom prst="rect">
-            <a:avLst/>
-          </a:prstGeom>
-          <a:noFill/>
-          <a:ln/>
-        </p:spPr>
-        <p:txBody>
-          <a:bodyPr wrap="square" lIns="0" tIns="0" rIns="0" bIns="0" rtlCol="0" anchor="ctr"/>
+            <a:ext cx="10381183" cy="777240"/>
+          </a:xfrm>
+          <a:prstGeom prst="rect">
+            <a:avLst/>
+          </a:prstGeom>
+          <a:noFill/>
+          <a:ln/>
+        </p:spPr>
+        <p:txBody>
+          <a:bodyPr wrap="square" lIns="0" tIns="0" rIns="0" bIns="0" rtlCol="0" anchor="t"/>
           <a:lstStyle/>
           <a:p>
             <a:pPr indent="0" marL="0">
@@ -3148,16 +3148,16 @@
         <p:spPr>
           <a:xfrm>
             <a:off x="1261872" y="749808"/>
-            <a:ext cx="10381183" cy="713232"/>
-          </a:xfrm>
-          <a:prstGeom prst="rect">
-            <a:avLst/>
-          </a:prstGeom>
-          <a:noFill/>
-          <a:ln/>
-        </p:spPr>
-        <p:txBody>
-          <a:bodyPr wrap="square" lIns="0" tIns="0" rIns="0" bIns="0" rtlCol="0" anchor="ctr"/>
+            <a:ext cx="10381183" cy="777240"/>
+          </a:xfrm>
+          <a:prstGeom prst="rect">
+            <a:avLst/>
+          </a:prstGeom>
+          <a:noFill/>
+          <a:ln/>
+        </p:spPr>
+        <p:txBody>
+          <a:bodyPr wrap="square" lIns="0" tIns="0" rIns="0" bIns="0" rtlCol="0" anchor="t"/>
           <a:lstStyle/>
           <a:p>
             <a:pPr indent="0" marL="0">
@@ -3817,16 +3817,16 @@
         <p:spPr>
           <a:xfrm>
             <a:off x="1261872" y="749808"/>
-            <a:ext cx="10381183" cy="713232"/>
-          </a:xfrm>
-          <a:prstGeom prst="rect">
-            <a:avLst/>
-          </a:prstGeom>
-          <a:noFill/>
-          <a:ln/>
-        </p:spPr>
-        <p:txBody>
-          <a:bodyPr wrap="square" lIns="0" tIns="0" rIns="0" bIns="0" rtlCol="0" anchor="ctr"/>
+            <a:ext cx="10381183" cy="777240"/>
+          </a:xfrm>
+          <a:prstGeom prst="rect">
+            <a:avLst/>
+          </a:prstGeom>
+          <a:noFill/>
+          <a:ln/>
+        </p:spPr>
+        <p:txBody>
+          <a:bodyPr wrap="square" lIns="0" tIns="0" rIns="0" bIns="0" rtlCol="0" anchor="t"/>
           <a:lstStyle/>
           <a:p>
             <a:pPr indent="0" marL="0">
@@ -4486,16 +4486,16 @@
         <p:spPr>
           <a:xfrm>
             <a:off x="1261872" y="749808"/>
-            <a:ext cx="10381183" cy="713232"/>
-          </a:xfrm>
-          <a:prstGeom prst="rect">
-            <a:avLst/>
-          </a:prstGeom>
-          <a:noFill/>
-          <a:ln/>
-        </p:spPr>
-        <p:txBody>
-          <a:bodyPr wrap="square" lIns="0" tIns="0" rIns="0" bIns="0" rtlCol="0" anchor="ctr"/>
+            <a:ext cx="10381183" cy="777240"/>
+          </a:xfrm>
+          <a:prstGeom prst="rect">
+            <a:avLst/>
+          </a:prstGeom>
+          <a:noFill/>
+          <a:ln/>
+        </p:spPr>
+        <p:txBody>
+          <a:bodyPr wrap="square" lIns="0" tIns="0" rIns="0" bIns="0" rtlCol="0" anchor="t"/>
           <a:lstStyle/>
           <a:p>
             <a:pPr indent="0" marL="0">
@@ -5532,16 +5532,16 @@
         <p:spPr>
           <a:xfrm>
             <a:off x="1261872" y="749808"/>
-            <a:ext cx="10381183" cy="713232"/>
-          </a:xfrm>
-          <a:prstGeom prst="rect">
-            <a:avLst/>
-          </a:prstGeom>
-          <a:noFill/>
-          <a:ln/>
-        </p:spPr>
-        <p:txBody>
-          <a:bodyPr wrap="square" lIns="0" tIns="0" rIns="0" bIns="0" rtlCol="0" anchor="ctr"/>
+            <a:ext cx="10381183" cy="777240"/>
+          </a:xfrm>
+          <a:prstGeom prst="rect">
+            <a:avLst/>
+          </a:prstGeom>
+          <a:noFill/>
+          <a:ln/>
+        </p:spPr>
+        <p:txBody>
+          <a:bodyPr wrap="square" lIns="0" tIns="0" rIns="0" bIns="0" rtlCol="0" anchor="t"/>
           <a:lstStyle/>
           <a:p>
             <a:pPr indent="0" marL="0">
@@ -6222,16 +6222,16 @@
         <p:spPr>
           <a:xfrm>
             <a:off x="1261872" y="749808"/>
-            <a:ext cx="10381183" cy="713232"/>
-          </a:xfrm>
-          <a:prstGeom prst="rect">
-            <a:avLst/>
-          </a:prstGeom>
-          <a:noFill/>
-          <a:ln/>
-        </p:spPr>
-        <p:txBody>
-          <a:bodyPr wrap="square" lIns="0" tIns="0" rIns="0" bIns="0" rtlCol="0" anchor="ctr"/>
+            <a:ext cx="10381183" cy="777240"/>
+          </a:xfrm>
+          <a:prstGeom prst="rect">
+            <a:avLst/>
+          </a:prstGeom>
+          <a:noFill/>
+          <a:ln/>
+        </p:spPr>
+        <p:txBody>
+          <a:bodyPr wrap="square" lIns="0" tIns="0" rIns="0" bIns="0" rtlCol="0" anchor="t"/>
           <a:lstStyle/>
           <a:p>
             <a:pPr indent="0" marL="0">
@@ -7532,16 +7532,16 @@
         <p:spPr>
           <a:xfrm>
             <a:off x="1261872" y="749808"/>
-            <a:ext cx="10381183" cy="713232"/>
-          </a:xfrm>
-          <a:prstGeom prst="rect">
-            <a:avLst/>
-          </a:prstGeom>
-          <a:noFill/>
-          <a:ln/>
-        </p:spPr>
-        <p:txBody>
-          <a:bodyPr wrap="square" lIns="0" tIns="0" rIns="0" bIns="0" rtlCol="0" anchor="ctr"/>
+            <a:ext cx="10381183" cy="777240"/>
+          </a:xfrm>
+          <a:prstGeom prst="rect">
+            <a:avLst/>
+          </a:prstGeom>
+          <a:noFill/>
+          <a:ln/>
+        </p:spPr>
+        <p:txBody>
+          <a:bodyPr wrap="square" lIns="0" tIns="0" rIns="0" bIns="0" rtlCol="0" anchor="t"/>
           <a:lstStyle/>
           <a:p>
             <a:pPr indent="0" marL="0">
@@ -8225,16 +8225,16 @@
         <p:spPr>
           <a:xfrm>
             <a:off x="1261872" y="749808"/>
-            <a:ext cx="10381183" cy="713232"/>
-          </a:xfrm>
-          <a:prstGeom prst="rect">
-            <a:avLst/>
-          </a:prstGeom>
-          <a:noFill/>
-          <a:ln/>
-        </p:spPr>
-        <p:txBody>
-          <a:bodyPr wrap="square" lIns="0" tIns="0" rIns="0" bIns="0" rtlCol="0" anchor="ctr"/>
+            <a:ext cx="10381183" cy="777240"/>
+          </a:xfrm>
+          <a:prstGeom prst="rect">
+            <a:avLst/>
+          </a:prstGeom>
+          <a:noFill/>
+          <a:ln/>
+        </p:spPr>
+        <p:txBody>
+          <a:bodyPr wrap="square" lIns="0" tIns="0" rIns="0" bIns="0" rtlCol="0" anchor="t"/>
           <a:lstStyle/>
           <a:p>
             <a:pPr indent="0" marL="0">
@@ -9585,16 +9585,16 @@
         <p:spPr>
           <a:xfrm>
             <a:off x="1261872" y="749808"/>
-            <a:ext cx="10381183" cy="713232"/>
-          </a:xfrm>
-          <a:prstGeom prst="rect">
-            <a:avLst/>
-          </a:prstGeom>
-          <a:noFill/>
-          <a:ln/>
-        </p:spPr>
-        <p:txBody>
-          <a:bodyPr wrap="square" lIns="0" tIns="0" rIns="0" bIns="0" rtlCol="0" anchor="ctr"/>
+            <a:ext cx="10381183" cy="777240"/>
+          </a:xfrm>
+          <a:prstGeom prst="rect">
+            <a:avLst/>
+          </a:prstGeom>
+          <a:noFill/>
+          <a:ln/>
+        </p:spPr>
+        <p:txBody>
+          <a:bodyPr wrap="square" lIns="0" tIns="0" rIns="0" bIns="0" rtlCol="0" anchor="t"/>
           <a:lstStyle/>
           <a:p>
             <a:pPr indent="0" marL="0">
@@ -10296,16 +10296,16 @@
         <p:spPr>
           <a:xfrm>
             <a:off x="1261872" y="749808"/>
-            <a:ext cx="10381183" cy="713232"/>
-          </a:xfrm>
-          <a:prstGeom prst="rect">
-            <a:avLst/>
-          </a:prstGeom>
-          <a:noFill/>
-          <a:ln/>
-        </p:spPr>
-        <p:txBody>
-          <a:bodyPr wrap="square" lIns="0" tIns="0" rIns="0" bIns="0" rtlCol="0" anchor="ctr"/>
+            <a:ext cx="10381183" cy="777240"/>
+          </a:xfrm>
+          <a:prstGeom prst="rect">
+            <a:avLst/>
+          </a:prstGeom>
+          <a:noFill/>
+          <a:ln/>
+        </p:spPr>
+        <p:txBody>
+          <a:bodyPr wrap="square" lIns="0" tIns="0" rIns="0" bIns="0" rtlCol="0" anchor="t"/>
           <a:lstStyle/>
           <a:p>
             <a:pPr indent="0" marL="0">
@@ -11302,16 +11302,16 @@
         <p:spPr>
           <a:xfrm>
             <a:off x="1261872" y="749808"/>
-            <a:ext cx="10381183" cy="713232"/>
-          </a:xfrm>
-          <a:prstGeom prst="rect">
-            <a:avLst/>
-          </a:prstGeom>
-          <a:noFill/>
-          <a:ln/>
-        </p:spPr>
-        <p:txBody>
-          <a:bodyPr wrap="square" lIns="0" tIns="0" rIns="0" bIns="0" rtlCol="0" anchor="ctr"/>
+            <a:ext cx="10381183" cy="777240"/>
+          </a:xfrm>
+          <a:prstGeom prst="rect">
+            <a:avLst/>
+          </a:prstGeom>
+          <a:noFill/>
+          <a:ln/>
+        </p:spPr>
+        <p:txBody>
+          <a:bodyPr wrap="square" lIns="0" tIns="0" rIns="0" bIns="0" rtlCol="0" anchor="t"/>
           <a:lstStyle/>
           <a:p>
             <a:pPr indent="0" marL="0">
@@ -12252,16 +12252,16 @@
         <p:spPr>
           <a:xfrm>
             <a:off x="1261872" y="749808"/>
-            <a:ext cx="10381183" cy="713232"/>
-          </a:xfrm>
-          <a:prstGeom prst="rect">
-            <a:avLst/>
-          </a:prstGeom>
-          <a:noFill/>
-          <a:ln/>
-        </p:spPr>
-        <p:txBody>
-          <a:bodyPr wrap="square" lIns="0" tIns="0" rIns="0" bIns="0" rtlCol="0" anchor="ctr"/>
+            <a:ext cx="10381183" cy="777240"/>
+          </a:xfrm>
+          <a:prstGeom prst="rect">
+            <a:avLst/>
+          </a:prstGeom>
+          <a:noFill/>
+          <a:ln/>
+        </p:spPr>
+        <p:txBody>
+          <a:bodyPr wrap="square" lIns="0" tIns="0" rIns="0" bIns="0" rtlCol="0" anchor="t"/>
           <a:lstStyle/>
           <a:p>
             <a:pPr indent="0" marL="0">
@@ -12431,7 +12431,7 @@
                 <a:ea typeface="Inter" pitchFamily="34" charset="-122"/>
                 <a:cs typeface="Inter" pitchFamily="34" charset="-120"/>
               </a:rPr>
-              <a:t>Priority L/M/H/U + category (Research, Writing, Lab, Reading…).</a:t>
+              <a:t>Priority L/M/H/U + category (Research, Writing, Lab…).</a:t>
             </a:r>
             <a:endParaRPr lang="en-US" sz="1800" dirty="0"/>
           </a:p>
@@ -12494,7 +12494,7 @@
                 <a:ea typeface="Inter" pitchFamily="34" charset="-122"/>
                 <a:cs typeface="Inter" pitchFamily="34" charset="-120"/>
               </a:rPr>
-              <a:t>Drive folder via picker; ‘Open Drive folder’.</a:t>
+              <a:t>Threaded comments — reply, edit, delete; marked (edited).</a:t>
             </a:r>
             <a:endParaRPr lang="en-US" sz="1800" dirty="0"/>
           </a:p>
@@ -12515,7 +12515,7 @@
                 <a:ea typeface="Inter" pitchFamily="34" charset="-122"/>
                 <a:cs typeface="Inter" pitchFamily="34" charset="-120"/>
               </a:rPr>
-              <a:t>Comments with edit / delete; marked (edited).</a:t>
+              <a:t>📅 badge: count of Calendar events linked to this task.</a:t>
             </a:r>
             <a:endParaRPr lang="en-US" sz="1800" dirty="0"/>
           </a:p>
@@ -12966,16 +12966,16 @@
         <p:spPr>
           <a:xfrm>
             <a:off x="1261872" y="749808"/>
-            <a:ext cx="10381183" cy="713232"/>
-          </a:xfrm>
-          <a:prstGeom prst="rect">
-            <a:avLst/>
-          </a:prstGeom>
-          <a:noFill/>
-          <a:ln/>
-        </p:spPr>
-        <p:txBody>
-          <a:bodyPr wrap="square" lIns="0" tIns="0" rIns="0" bIns="0" rtlCol="0" anchor="ctr"/>
+            <a:ext cx="10381183" cy="777240"/>
+          </a:xfrm>
+          <a:prstGeom prst="rect">
+            <a:avLst/>
+          </a:prstGeom>
+          <a:noFill/>
+          <a:ln/>
+        </p:spPr>
+        <p:txBody>
+          <a:bodyPr wrap="square" lIns="0" tIns="0" rIns="0" bIns="0" rtlCol="0" anchor="t"/>
           <a:lstStyle/>
           <a:p>
             <a:pPr indent="0" marL="0">
@@ -13638,16 +13638,16 @@
         <p:spPr>
           <a:xfrm>
             <a:off x="1261872" y="749808"/>
-            <a:ext cx="10381183" cy="713232"/>
-          </a:xfrm>
-          <a:prstGeom prst="rect">
-            <a:avLst/>
-          </a:prstGeom>
-          <a:noFill/>
-          <a:ln/>
-        </p:spPr>
-        <p:txBody>
-          <a:bodyPr wrap="square" lIns="0" tIns="0" rIns="0" bIns="0" rtlCol="0" anchor="ctr"/>
+            <a:ext cx="10381183" cy="777240"/>
+          </a:xfrm>
+          <a:prstGeom prst="rect">
+            <a:avLst/>
+          </a:prstGeom>
+          <a:noFill/>
+          <a:ln/>
+        </p:spPr>
+        <p:txBody>
+          <a:bodyPr wrap="square" lIns="0" tIns="0" rIns="0" bIns="0" rtlCol="0" anchor="t"/>
           <a:lstStyle/>
           <a:p>
             <a:pPr indent="0" marL="0">
@@ -14010,7 +14010,7 @@
                 <a:ea typeface="Inter" pitchFamily="34" charset="-122"/>
                 <a:cs typeface="Inter" pitchFamily="34" charset="-120"/>
               </a:rPr>
-              <a:t>Four views</a:t>
+              <a:t>Four views + comments</a:t>
             </a:r>
             <a:endParaRPr lang="en-US" sz="2200" dirty="0"/>
           </a:p>
@@ -14053,7 +14053,7 @@
                 <a:ea typeface="Inter" pitchFamily="34" charset="-122"/>
                 <a:cs typeface="Inter" pitchFamily="34" charset="-120"/>
               </a:rPr>
-              <a:t>Year — 12 mini-months for big-picture planning.</a:t>
+              <a:t>Year / Month / Week / Day views.</a:t>
             </a:r>
             <a:endParaRPr lang="en-US" sz="1800" dirty="0"/>
           </a:p>
@@ -14074,7 +14074,7 @@
                 <a:ea typeface="Inter" pitchFamily="34" charset="-122"/>
                 <a:cs typeface="Inter" pitchFamily="34" charset="-120"/>
               </a:rPr>
-              <a:t>Month — standard grid; ‘+N more’ jumps to that day.</a:t>
+              <a:t>‘+N more’ on Month jumps to that Day.</a:t>
             </a:r>
             <a:endParaRPr lang="en-US" sz="1800" dirty="0"/>
           </a:p>
@@ -14095,7 +14095,28 @@
                 <a:ea typeface="Inter" pitchFamily="34" charset="-122"/>
                 <a:cs typeface="Inter" pitchFamily="34" charset="-120"/>
               </a:rPr>
-              <a:t>Week / Day — hour-by-hour timetable. Overlapping events sit side-by-side, not stacked.</a:t>
+              <a:t>Threaded comments on every event (open → scroll).</a:t>
+            </a:r>
+            <a:endParaRPr lang="en-US" sz="1800" dirty="0"/>
+          </a:p>
+          <a:p>
+            <a:pPr marL="342900" indent="-342900">
+              <a:spcAft>
+                <a:spcPts val="600"/>
+              </a:spcAft>
+              <a:buSzPct val="100000"/>
+              <a:buChar char="•"/>
+            </a:pPr>
+            <a:r>
+              <a:rPr lang="en-US" sz="1800" dirty="0">
+                <a:solidFill>
+                  <a:srgbClr val="334155"/>
+                </a:solidFill>
+                <a:latin typeface="Inter" pitchFamily="34" charset="0"/>
+                <a:ea typeface="Inter" pitchFamily="34" charset="-122"/>
+                <a:cs typeface="Inter" pitchFamily="34" charset="-120"/>
+              </a:rPr>
+              <a:t>Link an event to a Task — shows on the task too.</a:t>
             </a:r>
             <a:endParaRPr lang="en-US" sz="1800" dirty="0"/>
           </a:p>
@@ -14349,16 +14370,16 @@
         <p:spPr>
           <a:xfrm>
             <a:off x="1261872" y="749808"/>
-            <a:ext cx="10381183" cy="713232"/>
-          </a:xfrm>
-          <a:prstGeom prst="rect">
-            <a:avLst/>
-          </a:prstGeom>
-          <a:noFill/>
-          <a:ln/>
-        </p:spPr>
-        <p:txBody>
-          <a:bodyPr wrap="square" lIns="0" tIns="0" rIns="0" bIns="0" rtlCol="0" anchor="ctr"/>
+            <a:ext cx="10381183" cy="777240"/>
+          </a:xfrm>
+          <a:prstGeom prst="rect">
+            <a:avLst/>
+          </a:prstGeom>
+          <a:noFill/>
+          <a:ln/>
+        </p:spPr>
+        <p:txBody>
+          <a:bodyPr wrap="square" lIns="0" tIns="0" rIns="0" bIns="0" rtlCol="0" anchor="t"/>
           <a:lstStyle/>
           <a:p>
             <a:pPr indent="0" marL="0">

--- a/docs/PhDapp_Student_Overview.pptx
+++ b/docs/PhDapp_Student_Overview.pptx
@@ -5926,7 +5926,7 @@
                 <a:ea typeface="Inter" pitchFamily="34" charset="-122"/>
                 <a:cs typeface="Inter" pitchFamily="34" charset="-120"/>
               </a:rPr>
-              <a:t>Each item gets a status: Open / Planned / In progress / Done / Declined.</a:t>
+              <a:t>Status: Open / Planned / In progress / Done / Declined.</a:t>
             </a:r>
             <a:endParaRPr lang="en-US" sz="1800" dirty="0"/>
           </a:p>
@@ -5947,7 +5947,7 @@
                 <a:ea typeface="Inter" pitchFamily="34" charset="-122"/>
                 <a:cs typeface="Inter" pitchFamily="34" charset="-120"/>
               </a:rPr>
-              <a:t>The admin's reply shows under your message.</a:t>
+              <a:t>Back-and-forth thread — reply to the admin's reply.</a:t>
             </a:r>
             <a:endParaRPr lang="en-US" sz="1800" dirty="0"/>
           </a:p>
@@ -5968,7 +5968,7 @@
                 <a:ea typeface="Inter" pitchFamily="34" charset="-122"/>
                 <a:cs typeface="Inter" pitchFamily="34" charset="-120"/>
               </a:rPr>
-              <a:t>You get a sidebar badge + email when they respond.</a:t>
+              <a:t>Sidebar badge + email when anyone posts in your thread.</a:t>
             </a:r>
             <a:endParaRPr lang="en-US" sz="1800" dirty="0"/>
           </a:p>
@@ -5989,7 +5989,7 @@
                 <a:ea typeface="Inter" pitchFamily="34" charset="-122"/>
                 <a:cs typeface="Inter" pitchFamily="34" charset="-120"/>
               </a:rPr>
-              <a:t>Collapse old entries to keep the list tidy (it remembers across visits).</a:t>
+              <a:t>Collapse old entries to keep the list tidy (remembered).</a:t>
             </a:r>
             <a:endParaRPr lang="en-US" sz="1800" dirty="0"/>
           </a:p>
@@ -12431,7 +12431,7 @@
                 <a:ea typeface="Inter" pitchFamily="34" charset="-122"/>
                 <a:cs typeface="Inter" pitchFamily="34" charset="-120"/>
               </a:rPr>
-              <a:t>Priority L/M/H/U + category (Research, Writing, Lab…).</a:t>
+              <a:t>Priority L/M/H/U + category, due date, sub-tasks.</a:t>
             </a:r>
             <a:endParaRPr lang="en-US" sz="1800" dirty="0"/>
           </a:p>
@@ -12452,28 +12452,7 @@
                 <a:ea typeface="Inter" pitchFamily="34" charset="-122"/>
                 <a:cs typeface="Inter" pitchFamily="34" charset="-120"/>
               </a:rPr>
-              <a:t>Due date auto-creates a calendar event.</a:t>
-            </a:r>
-            <a:endParaRPr lang="en-US" sz="1800" dirty="0"/>
-          </a:p>
-          <a:p>
-            <a:pPr marL="342900" indent="-342900">
-              <a:spcAft>
-                <a:spcPts val="600"/>
-              </a:spcAft>
-              <a:buSzPct val="100000"/>
-              <a:buChar char="•"/>
-            </a:pPr>
-            <a:r>
-              <a:rPr lang="en-US" sz="1800" dirty="0">
-                <a:solidFill>
-                  <a:srgbClr val="334155"/>
-                </a:solidFill>
-                <a:latin typeface="Inter" pitchFamily="34" charset="0"/>
-                <a:ea typeface="Inter" pitchFamily="34" charset="-122"/>
-                <a:cs typeface="Inter" pitchFamily="34" charset="-120"/>
-              </a:rPr>
-              <a:t>Sub-tasks with optional deadlines.</a:t>
+              <a:t>Drive folder (single) + Links list (papers, websites, repos).</a:t>
             </a:r>
             <a:endParaRPr lang="en-US" sz="1800" dirty="0"/>
           </a:p>
@@ -14010,7 +13989,7 @@
                 <a:ea typeface="Inter" pitchFamily="34" charset="-122"/>
                 <a:cs typeface="Inter" pitchFamily="34" charset="-120"/>
               </a:rPr>
-              <a:t>Four views + comments</a:t>
+              <a:t>Open an event</a:t>
             </a:r>
             <a:endParaRPr lang="en-US" sz="2200" dirty="0"/>
           </a:p>
@@ -14074,7 +14053,7 @@
                 <a:ea typeface="Inter" pitchFamily="34" charset="-122"/>
                 <a:cs typeface="Inter" pitchFamily="34" charset="-120"/>
               </a:rPr>
-              <a:t>‘+N more’ on Month jumps to that Day.</a:t>
+              <a:t>Threaded comments — reply, edit, delete.</a:t>
             </a:r>
             <a:endParaRPr lang="en-US" sz="1800" dirty="0"/>
           </a:p>
@@ -14095,7 +14074,7 @@
                 <a:ea typeface="Inter" pitchFamily="34" charset="-122"/>
                 <a:cs typeface="Inter" pitchFamily="34" charset="-120"/>
               </a:rPr>
-              <a:t>Threaded comments on every event (open → scroll).</a:t>
+              <a:t>Links list (Overleaf docs, references, websites).</a:t>
             </a:r>
             <a:endParaRPr lang="en-US" sz="1800" dirty="0"/>
           </a:p>

--- a/docs/PhDapp_Student_Overview.pptx
+++ b/docs/PhDapp_Student_Overview.pptx
@@ -10000,7 +10000,7 @@
                 <a:ea typeface="Inter" pitchFamily="34" charset="-122"/>
                 <a:cs typeface="Inter" pitchFamily="34" charset="-120"/>
               </a:rPr>
-              <a:t>Name, alias, photo and accent colour.</a:t>
+              <a:t>Name, alias, photo, accent colour.</a:t>
             </a:r>
             <a:endParaRPr lang="en-US" sz="1800" dirty="0"/>
           </a:p>
@@ -10021,7 +10021,7 @@
                 <a:ea typeface="Inter" pitchFamily="34" charset="-122"/>
                 <a:cs typeface="Inter" pitchFamily="34" charset="-120"/>
               </a:rPr>
-              <a:t>Programme year, status, expected end, thesis title.</a:t>
+              <a:t>Profile links: LinkedIn · ORCID · Scholar · Website.</a:t>
             </a:r>
             <a:endParaRPr lang="en-US" sz="1800" dirty="0"/>
           </a:p>
@@ -10042,7 +10042,7 @@
                 <a:ea typeface="Inter" pitchFamily="34" charset="-122"/>
                 <a:cs typeface="Inter" pitchFamily="34" charset="-120"/>
               </a:rPr>
-              <a:t>Profile links: LinkedIn · ORCID · Google Scholar · Website — shown as small icons on your profile header and team views.</a:t>
+              <a:t>Alternate emails — informational list (institutional + personal).</a:t>
             </a:r>
             <a:endParaRPr lang="en-US" sz="1800" dirty="0"/>
           </a:p>

--- a/docs/PhDapp_Student_Overview.pptx
+++ b/docs/PhDapp_Student_Overview.pptx
@@ -13835,7 +13835,7 @@
                 <a:ea typeface="Inter" pitchFamily="34" charset="-122"/>
                 <a:cs typeface="Inter" pitchFamily="34" charset="-120"/>
               </a:rPr>
-              <a:t>[Task]_… / [Sub-task]_… — auto deadline entries.</a:t>
+              <a:t>[Task]_… / [Sub-task]_… — all-day deadline entries, also synced to Google.</a:t>
             </a:r>
             <a:endParaRPr lang="en-US" sz="1800" dirty="0"/>
           </a:p>
@@ -14032,7 +14032,7 @@
                 <a:ea typeface="Inter" pitchFamily="34" charset="-122"/>
                 <a:cs typeface="Inter" pitchFamily="34" charset="-120"/>
               </a:rPr>
-              <a:t>Year / Month / Week / Day views.</a:t>
+              <a:t>Year / Month / Week / Day — Week/Day cover 24h and auto-scroll to the current hour.</a:t>
             </a:r>
             <a:endParaRPr lang="en-US" sz="1800" dirty="0"/>
           </a:p>
@@ -14053,7 +14053,7 @@
                 <a:ea typeface="Inter" pitchFamily="34" charset="-122"/>
                 <a:cs typeface="Inter" pitchFamily="34" charset="-120"/>
               </a:rPr>
-              <a:t>Threaded comments — reply, edit, delete.</a:t>
+              <a:t>All-day items show in a dedicated strip above the hour grid.</a:t>
             </a:r>
             <a:endParaRPr lang="en-US" sz="1800" dirty="0"/>
           </a:p>
@@ -14074,7 +14074,7 @@
                 <a:ea typeface="Inter" pitchFamily="34" charset="-122"/>
                 <a:cs typeface="Inter" pitchFamily="34" charset="-120"/>
               </a:rPr>
-              <a:t>Links list (Overleaf docs, references, websites).</a:t>
+              <a:t>Threaded comments — reply, edit, delete.</a:t>
             </a:r>
             <a:endParaRPr lang="en-US" sz="1800" dirty="0"/>
           </a:p>
@@ -14095,7 +14095,7 @@
                 <a:ea typeface="Inter" pitchFamily="34" charset="-122"/>
                 <a:cs typeface="Inter" pitchFamily="34" charset="-120"/>
               </a:rPr>
-              <a:t>Link an event to a Task — shows on the task too.</a:t>
+              <a:t>Links list (Overleaf docs, references, websites).</a:t>
             </a:r>
             <a:endParaRPr lang="en-US" sz="1800" dirty="0"/>
           </a:p>
@@ -14116,7 +14116,7 @@
                 <a:ea typeface="Inter" pitchFamily="34" charset="-122"/>
                 <a:cs typeface="Inter" pitchFamily="34" charset="-120"/>
               </a:rPr>
-              <a:t>Times always render in your browser's timezone.</a:t>
+              <a:t>Link an event to a Task — shows on the task too.</a:t>
             </a:r>
             <a:endParaRPr lang="en-US" sz="1800" dirty="0"/>
           </a:p>

--- a/docs/PhDapp_Student_Overview.pptx
+++ b/docs/PhDapp_Student_Overview.pptx
@@ -2676,7 +2676,7 @@
                 <a:ea typeface="Inter" pitchFamily="34" charset="-122"/>
                 <a:cs typeface="Inter" pitchFamily="34" charset="-120"/>
               </a:rPr>
-              <a:t>Your shared Drive folder lives on your supervisor's Google.</a:t>
+              <a:t>Auto-shared with you, your supervisors, and any team advisor. External advisors and committee aren't in this folder. Your shared Drive folder lives on your supervisor's Google.</a:t>
             </a:r>
             <a:endParaRPr lang="en-US" sz="1800" dirty="0"/>
           </a:p>

--- a/docs/PhDapp_Student_Overview.pptx
+++ b/docs/PhDapp_Student_Overview.pptx
@@ -13877,28 +13877,7 @@
                 <a:ea typeface="Inter" pitchFamily="34" charset="-122"/>
                 <a:cs typeface="Inter" pitchFamily="34" charset="-120"/>
               </a:rPr>
-              <a:t>Supervisors' away periods show as ⊘ Unavailable.</a:t>
-            </a:r>
-            <a:endParaRPr lang="en-US" sz="1800" dirty="0"/>
-          </a:p>
-          <a:p>
-            <a:pPr marL="342900" indent="-342900">
-              <a:spcAft>
-                <a:spcPts val="600"/>
-              </a:spcAft>
-              <a:buSzPct val="100000"/>
-              <a:buChar char="•"/>
-            </a:pPr>
-            <a:r>
-              <a:rPr lang="en-US" sz="1800" dirty="0">
-                <a:solidFill>
-                  <a:srgbClr val="334155"/>
-                </a:solidFill>
-                <a:latin typeface="Inter" pitchFamily="34" charset="0"/>
-                <a:ea typeface="Inter" pitchFamily="34" charset="-122"/>
-                <a:cs typeface="Inter" pitchFamily="34" charset="-120"/>
-              </a:rPr>
-              <a:t>Tab title + favicon update when chat is unread.</a:t>
+              <a:t>Supervisors' away periods show as ⊘ Unavailable. 🎉 Sevilla public holidays marked on every view (incl. Corpus Christi).</a:t>
             </a:r>
             <a:endParaRPr lang="en-US" sz="1800" dirty="0"/>
           </a:p>
@@ -14848,7 +14827,7 @@
                 <a:ea typeface="Inter" pitchFamily="34" charset="-122"/>
                 <a:cs typeface="Inter" pitchFamily="34" charset="-120"/>
               </a:rPr>
-              <a:t>Sound config in the channel ⋮ menu.</a:t>
+              <a:t>Sound config in the channel ⋮ menu. 📊 Polls (button next to paperclip) — question + 2-10 options, single/multi-vote, optional close date; you see who voted what. URLs auto-link.</a:t>
             </a:r>
             <a:endParaRPr lang="en-US" sz="1800" dirty="0"/>
           </a:p>

--- a/docs/PhDapp_Student_Overview.pptx
+++ b/docs/PhDapp_Student_Overview.pptx
@@ -13877,7 +13877,7 @@
                 <a:ea typeface="Inter" pitchFamily="34" charset="-122"/>
                 <a:cs typeface="Inter" pitchFamily="34" charset="-120"/>
               </a:rPr>
-              <a:t>Supervisors' away periods show as ⊘ Unavailable. 🎉 Sevilla public holidays marked on every view (incl. Corpus Christi).</a:t>
+              <a:t>Anyone marks ⊘ availability (you, supervisors) — optional time range, optional public reason; timed blocks draw as striped bands in Week/Day. 🎉 Sevilla holidays marked on every view.</a:t>
             </a:r>
             <a:endParaRPr lang="en-US" sz="1800" dirty="0"/>
           </a:p>

--- a/docs/PhDapp_Student_Overview.pptx
+++ b/docs/PhDapp_Student_Overview.pptx
@@ -13877,7 +13877,7 @@
                 <a:ea typeface="Inter" pitchFamily="34" charset="-122"/>
                 <a:cs typeface="Inter" pitchFamily="34" charset="-120"/>
               </a:rPr>
-              <a:t>Anyone marks ⊘ availability (you, supervisors) — optional time range, optional public reason; timed blocks draw as striped bands in Week/Day. 🎉 Sevilla holidays marked on every view.</a:t>
+              <a:t>Anyone marks ⊘ availability or 🏠 Remote work (green) — optional time range and public reason; striped bands in Week/Day. Click a chip → trash icon on your rows deletes inline. 🎉 Sevilla holidays marked on every view.</a:t>
             </a:r>
             <a:endParaRPr lang="en-US" sz="1800" dirty="0"/>
           </a:p>

--- a/docs/PhDapp_Student_Overview.pptx
+++ b/docs/PhDapp_Student_Overview.pptx
@@ -14,6 +14,7 @@
     <p:sldId id="262" r:id="rId8"/>
     <p:sldId id="263" r:id="rId9"/>
     <p:sldId id="264" r:id="rId10"/>
+    <p:sldId id="272" r:id="rId23"/>
     <p:sldId id="265" r:id="rId11"/>
     <p:sldId id="266" r:id="rId12"/>
     <p:sldId id="267" r:id="rId13"/>
@@ -3016,7 +3017,7 @@
                 <a:ea typeface="Inter" pitchFamily="34" charset="-122"/>
                 <a:cs typeface="Inter" pitchFamily="34" charset="-120"/>
               </a:rPr>
-              <a:t>10 / 16</a:t>
+              <a:t>11 / 17</a:t>
             </a:r>
             <a:endParaRPr lang="en-US" sz="1300" dirty="0"/>
           </a:p>
@@ -3685,7 +3686,7 @@
                 <a:ea typeface="Inter" pitchFamily="34" charset="-122"/>
                 <a:cs typeface="Inter" pitchFamily="34" charset="-120"/>
               </a:rPr>
-              <a:t>11 / 16</a:t>
+              <a:t>12 / 17</a:t>
             </a:r>
             <a:endParaRPr lang="en-US" sz="1300" dirty="0"/>
           </a:p>
@@ -4354,7 +4355,7 @@
                 <a:ea typeface="Inter" pitchFamily="34" charset="-122"/>
                 <a:cs typeface="Inter" pitchFamily="34" charset="-120"/>
               </a:rPr>
-              <a:t>12 / 16</a:t>
+              <a:t>13 / 17</a:t>
             </a:r>
             <a:endParaRPr lang="en-US" sz="1300" dirty="0"/>
           </a:p>
@@ -5400,7 +5401,7 @@
                 <a:ea typeface="Inter" pitchFamily="34" charset="-122"/>
                 <a:cs typeface="Inter" pitchFamily="34" charset="-120"/>
               </a:rPr>
-              <a:t>13 / 16</a:t>
+              <a:t>14 / 17</a:t>
             </a:r>
             <a:endParaRPr lang="en-US" sz="1300" dirty="0"/>
           </a:p>
@@ -6090,7 +6091,7 @@
                 <a:ea typeface="Inter" pitchFamily="34" charset="-122"/>
                 <a:cs typeface="Inter" pitchFamily="34" charset="-120"/>
               </a:rPr>
-              <a:t>14 / 16</a:t>
+              <a:t>15 / 17</a:t>
             </a:r>
             <a:endParaRPr lang="en-US" sz="1300" dirty="0"/>
           </a:p>
@@ -7400,7 +7401,7 @@
                 <a:ea typeface="Inter" pitchFamily="34" charset="-122"/>
                 <a:cs typeface="Inter" pitchFamily="34" charset="-120"/>
               </a:rPr>
-              <a:t>15 / 16</a:t>
+              <a:t>16 / 17</a:t>
             </a:r>
             <a:endParaRPr lang="en-US" sz="1300" dirty="0"/>
           </a:p>
@@ -8093,7 +8094,751 @@
                 <a:ea typeface="Inter" pitchFamily="34" charset="-122"/>
                 <a:cs typeface="Inter" pitchFamily="34" charset="-120"/>
               </a:rPr>
-              <a:t>16 / 16</a:t>
+              <a:t>17 / 17</a:t>
+            </a:r>
+            <a:endParaRPr lang="en-US" sz="1300" dirty="0"/>
+          </a:p>
+        </p:txBody>
+      </p:sp>
+    </p:spTree>
+  </p:cSld>
+  <p:clrMapOvr>
+    <a:masterClrMapping/>
+  </p:clrMapOvr>
+</p:sld>
+</file>
+
+<file path=ppt/slides/slide17.xml><?xml version="1.0" encoding="utf-8"?>
+<p:sld xmlns:a="http://schemas.openxmlformats.org/drawingml/2006/main" xmlns:r="http://schemas.openxmlformats.org/officeDocument/2006/relationships" xmlns:p="http://schemas.openxmlformats.org/presentationml/2006/main">
+  <p:cSld name="Slide 9">
+    <p:bg>
+      <p:bgPr>
+        <a:solidFill>
+          <a:srgbClr val="FFFFFF"/>
+        </a:solidFill>
+      </p:bgPr>
+    </p:bg>
+    <p:spTree>
+      <p:nvGrpSpPr>
+        <p:cNvPr id="1" name=""/>
+        <p:cNvGrpSpPr/>
+        <p:nvPr/>
+      </p:nvGrpSpPr>
+      <p:grpSpPr>
+        <a:xfrm>
+          <a:off x="0" y="0"/>
+          <a:ext cx="0" cy="0"/>
+          <a:chOff x="0" y="0"/>
+          <a:chExt cx="0" cy="0"/>
+        </a:xfrm>
+      </p:grpSpPr>
+      <p:sp>
+        <p:nvSpPr>
+          <p:cNvPr id="2" name="Shape 0"/>
+          <p:cNvSpPr/>
+          <p:nvPr/>
+        </p:nvSpPr>
+        <p:spPr>
+          <a:xfrm>
+            <a:off x="548640" y="548640"/>
+            <a:ext cx="548640" cy="548640"/>
+          </a:xfrm>
+          <a:prstGeom prst="roundRect">
+            <a:avLst>
+              <a:gd name="adj" fmla="val 20000"/>
+            </a:avLst>
+          </a:prstGeom>
+          <a:solidFill>
+            <a:srgbClr val="6F4CFF"/>
+          </a:solidFill>
+          <a:ln/>
+        </p:spPr>
+      </p:sp>
+      <p:sp>
+        <p:nvSpPr>
+          <p:cNvPr id="3" name="Icon glyph"/>
+          <p:cNvSpPr/>
+          <p:nvPr/>
+        </p:nvSpPr>
+        <p:spPr>
+          <a:xfrm>
+            <a:off x="548640" y="548640"/>
+            <a:ext cx="548640" cy="548640"/>
+          </a:xfrm>
+          <a:prstGeom prst="rect">
+            <a:avLst/>
+          </a:prstGeom>
+          <a:noFill/>
+          <a:ln/>
+        </p:spPr>
+        <p:txBody>
+          <a:bodyPr wrap="square" lIns="0" tIns="0" rIns="0" bIns="0" rtlCol="0" anchor="ctr"/>
+          <a:lstStyle/>
+          <a:p>
+            <a:pPr algn="ctr" indent="0" marL="0">
+              <a:buNone/>
+            </a:pPr>
+            <a:r>
+              <a:rPr lang="en-US" sz="2400" b="1" dirty="0">
+                <a:solidFill>
+                  <a:srgbClr val="FFFFFF"/>
+                </a:solidFill>
+                <a:latin typeface="Inter" pitchFamily="34" charset="0"/>
+              </a:rPr>
+              <a:t>💡</a:t>
+            </a:r>
+          </a:p>
+        </p:txBody>
+      </p:sp>
+      <p:sp>
+        <p:nvSpPr>
+          <p:cNvPr id="4" name="Text 1"/>
+          <p:cNvSpPr/>
+          <p:nvPr/>
+        </p:nvSpPr>
+        <p:spPr>
+          <a:xfrm>
+            <a:off x="1261872" y="530352"/>
+            <a:ext cx="3657600" cy="292608"/>
+          </a:xfrm>
+          <a:prstGeom prst="rect">
+            <a:avLst/>
+          </a:prstGeom>
+          <a:noFill/>
+          <a:ln/>
+        </p:spPr>
+        <p:txBody>
+          <a:bodyPr wrap="square" lIns="0" tIns="0" rIns="0" bIns="0" rtlCol="0" anchor="ctr"/>
+          <a:lstStyle/>
+          <a:p>
+            <a:pPr indent="0" marL="0">
+              <a:buNone/>
+            </a:pPr>
+            <a:r>
+              <a:rPr lang="en-US" sz="1400" b="1" spc="400" kern="0" dirty="0">
+                <a:solidFill>
+                  <a:srgbClr val="6F4CFF"/>
+                </a:solidFill>
+                <a:latin typeface="Inter" pitchFamily="34" charset="0"/>
+                <a:ea typeface="Inter" pitchFamily="34" charset="-122"/>
+                <a:cs typeface="Inter" pitchFamily="34" charset="-120"/>
+              </a:rPr>
+              <a:t>DISCUSSIONS</a:t>
+            </a:r>
+            <a:endParaRPr lang="en-US" sz="1400" dirty="0"/>
+          </a:p>
+        </p:txBody>
+      </p:sp>
+      <p:sp>
+        <p:nvSpPr>
+          <p:cNvPr id="5" name="Text 2"/>
+          <p:cNvSpPr/>
+          <p:nvPr/>
+        </p:nvSpPr>
+        <p:spPr>
+          <a:xfrm>
+            <a:off x="1261872" y="749808"/>
+            <a:ext cx="10381183" cy="777240"/>
+          </a:xfrm>
+          <a:prstGeom prst="rect">
+            <a:avLst/>
+          </a:prstGeom>
+          <a:noFill/>
+          <a:ln/>
+        </p:spPr>
+        <p:txBody>
+          <a:bodyPr wrap="square" lIns="0" tIns="0" rIns="0" bIns="0" rtlCol="0" anchor="t"/>
+          <a:lstStyle/>
+          <a:p>
+            <a:pPr indent="0" marL="0">
+              <a:buNone/>
+            </a:pPr>
+            <a:r>
+              <a:rPr lang="en-US" sz="4000" b="1" dirty="0">
+                <a:solidFill>
+                  <a:srgbClr val="0F172A"/>
+                </a:solidFill>
+                <a:latin typeface="Inter" pitchFamily="34" charset="0"/>
+                <a:ea typeface="Inter" pitchFamily="34" charset="-122"/>
+                <a:cs typeface="Inter" pitchFamily="34" charset="-120"/>
+              </a:rPr>
+              <a:t>Discussions</a:t>
+            </a:r>
+            <a:endParaRPr lang="en-US" sz="4000" dirty="0"/>
+          </a:p>
+        </p:txBody>
+      </p:sp>
+      <p:sp>
+        <p:nvSpPr>
+          <p:cNvPr id="6" name="Text 3"/>
+          <p:cNvSpPr/>
+          <p:nvPr/>
+        </p:nvSpPr>
+        <p:spPr>
+          <a:xfrm>
+            <a:off x="548640" y="1508760"/>
+            <a:ext cx="11094415" cy="822960"/>
+          </a:xfrm>
+          <a:prstGeom prst="rect">
+            <a:avLst/>
+          </a:prstGeom>
+          <a:noFill/>
+          <a:ln/>
+        </p:spPr>
+        <p:txBody>
+          <a:bodyPr wrap="square" lIns="0" tIns="0" rIns="0" bIns="0" rtlCol="0" anchor="t"/>
+          <a:lstStyle/>
+          <a:p>
+            <a:pPr indent="0" marL="0">
+              <a:buNone/>
+            </a:pPr>
+            <a:r>
+              <a:rPr lang="en-US" sz="2000" i="1" dirty="0">
+                <a:solidFill>
+                  <a:srgbClr val="334155"/>
+                </a:solidFill>
+                <a:latin typeface="Inter" pitchFamily="34" charset="0"/>
+                <a:ea typeface="Inter" pitchFamily="34" charset="-122"/>
+                <a:cs typeface="Inter" pitchFamily="34" charset="-120"/>
+              </a:rPr>
+              <a:t>Topic threads your supervisors open up to the whole team — persistent, unlike chat.</a:t>
+            </a:r>
+            <a:endParaRPr lang="en-US" sz="2000" dirty="0"/>
+          </a:p>
+        </p:txBody>
+      </p:sp>
+      <p:sp>
+        <p:nvSpPr>
+          <p:cNvPr id="7" name="Shape 4"/>
+          <p:cNvSpPr/>
+          <p:nvPr/>
+        </p:nvSpPr>
+        <p:spPr>
+          <a:xfrm>
+            <a:off x="548640" y="1828800"/>
+            <a:ext cx="5486400" cy="3931920"/>
+          </a:xfrm>
+          <a:prstGeom prst="rect">
+            <a:avLst/>
+          </a:prstGeom>
+          <a:solidFill>
+            <a:srgbClr val="FFFFFF"/>
+          </a:solidFill>
+          <a:ln w="9525">
+            <a:solidFill>
+              <a:srgbClr val="E2E8F0"/>
+            </a:solidFill>
+            <a:prstDash val="solid"/>
+          </a:ln>
+          <a:effectLst>
+            <a:outerShdw sx="100000" sy="100000" kx="0" ky="0" algn="bl" rotWithShape="0" blurRad="76200" dist="12700" dir="5400000">
+              <a:srgbClr val="94A3B8">
+                <a:alpha val="12000"/>
+              </a:srgbClr>
+            </a:outerShdw>
+          </a:effectLst>
+        </p:spPr>
+      </p:sp>
+      <p:sp>
+        <p:nvSpPr>
+          <p:cNvPr id="8" name="Shape 5"/>
+          <p:cNvSpPr/>
+          <p:nvPr/>
+        </p:nvSpPr>
+        <p:spPr>
+          <a:xfrm>
+            <a:off x="548640" y="1828800"/>
+            <a:ext cx="73152" cy="3931920"/>
+          </a:xfrm>
+          <a:prstGeom prst="rect">
+            <a:avLst/>
+          </a:prstGeom>
+          <a:solidFill>
+            <a:srgbClr val="6F4CFF"/>
+          </a:solidFill>
+          <a:ln/>
+        </p:spPr>
+      </p:sp>
+      <p:sp>
+        <p:nvSpPr>
+          <p:cNvPr id="9" name="Text 6"/>
+          <p:cNvSpPr/>
+          <p:nvPr/>
+        </p:nvSpPr>
+        <p:spPr>
+          <a:xfrm>
+            <a:off x="749808" y="1993392"/>
+            <a:ext cx="5166360" cy="594360"/>
+          </a:xfrm>
+          <a:prstGeom prst="rect">
+            <a:avLst/>
+          </a:prstGeom>
+          <a:noFill/>
+          <a:ln/>
+        </p:spPr>
+        <p:txBody>
+          <a:bodyPr wrap="square" lIns="0" tIns="0" rIns="0" bIns="0" rtlCol="0" anchor="ctr"/>
+          <a:lstStyle/>
+          <a:p>
+            <a:pPr indent="0" marL="0">
+              <a:buNone/>
+            </a:pPr>
+            <a:r>
+              <a:rPr lang="en-US" sz="2200" b="1" dirty="0">
+                <a:solidFill>
+                  <a:srgbClr val="0F172A"/>
+                </a:solidFill>
+                <a:latin typeface="Inter" pitchFamily="34" charset="0"/>
+                <a:ea typeface="Inter" pitchFamily="34" charset="-122"/>
+                <a:cs typeface="Inter" pitchFamily="34" charset="-120"/>
+              </a:rPr>
+              <a:t>What you'll see</a:t>
+            </a:r>
+            <a:endParaRPr lang="en-US" sz="2200" dirty="0"/>
+          </a:p>
+        </p:txBody>
+      </p:sp>
+      <p:sp>
+        <p:nvSpPr>
+          <p:cNvPr id="10" name="Text 7"/>
+          <p:cNvSpPr/>
+          <p:nvPr/>
+        </p:nvSpPr>
+        <p:spPr>
+          <a:xfrm>
+            <a:off x="777240" y="2697480"/>
+            <a:ext cx="5074920" cy="2926080"/>
+          </a:xfrm>
+          <a:prstGeom prst="rect">
+            <a:avLst/>
+          </a:prstGeom>
+          <a:noFill/>
+          <a:ln/>
+        </p:spPr>
+        <p:txBody>
+          <a:bodyPr wrap="square" lIns="0" tIns="0" rIns="0" bIns="0" rtlCol="0" anchor="t"/>
+          <a:lstStyle/>
+          <a:p>
+            <a:pPr marL="342900" indent="-342900">
+              <a:spcAft>
+                <a:spcPts val="600"/>
+              </a:spcAft>
+              <a:buSzPct val="100000"/>
+              <a:buChar char="•"/>
+            </a:pPr>
+            <a:r>
+              <a:rPr lang="en-US" sz="1800" dirty="0">
+                <a:solidFill>
+                  <a:srgbClr val="334155"/>
+                </a:solidFill>
+                <a:latin typeface="Inter" pitchFamily="34" charset="0"/>
+                <a:ea typeface="Inter" pitchFamily="34" charset="-122"/>
+                <a:cs typeface="Inter" pitchFamily="34" charset="-120"/>
+              </a:rPr>
+              <a:t>Topics a supervisor marks ‘Whole team’ show up here.</a:t>
+            </a:r>
+            <a:endParaRPr lang="en-US" sz="1800" dirty="0"/>
+          </a:p>
+          <a:p>
+            <a:pPr marL="342900" indent="-342900">
+              <a:spcAft>
+                <a:spcPts val="600"/>
+              </a:spcAft>
+              <a:buSzPct val="100000"/>
+              <a:buChar char="•"/>
+            </a:pPr>
+            <a:r>
+              <a:rPr lang="en-US" sz="1800" dirty="0">
+                <a:solidFill>
+                  <a:srgbClr val="334155"/>
+                </a:solidFill>
+                <a:latin typeface="Inter" pitchFamily="34" charset="0"/>
+                <a:ea typeface="Inter" pitchFamily="34" charset="-122"/>
+                <a:cs typeface="Inter" pitchFamily="34" charset="-120"/>
+              </a:rPr>
+              <a:t>‘Supervisors only’ topics stay hidden from students.</a:t>
+            </a:r>
+            <a:endParaRPr lang="en-US" sz="1800" dirty="0"/>
+          </a:p>
+          <a:p>
+            <a:pPr marL="342900" indent="-342900">
+              <a:spcAft>
+                <a:spcPts val="600"/>
+              </a:spcAft>
+              <a:buSzPct val="100000"/>
+              <a:buChar char="•"/>
+            </a:pPr>
+            <a:r>
+              <a:rPr lang="en-US" sz="1800" dirty="0">
+                <a:solidFill>
+                  <a:srgbClr val="334155"/>
+                </a:solidFill>
+                <a:latin typeface="Inter" pitchFamily="34" charset="0"/>
+                <a:ea typeface="Inter" pitchFamily="34" charset="-122"/>
+                <a:cs typeface="Inter" pitchFamily="34" charset="-120"/>
+              </a:rPr>
+              <a:t>You can’t start a topic — but you can fully join in.</a:t>
+            </a:r>
+            <a:endParaRPr lang="en-US" sz="1800" dirty="0"/>
+          </a:p>
+          <a:p>
+            <a:pPr marL="342900" indent="-342900">
+              <a:spcAft>
+                <a:spcPts val="600"/>
+              </a:spcAft>
+              <a:buSzPct val="100000"/>
+              <a:buChar char="•"/>
+            </a:pPr>
+            <a:r>
+              <a:rPr lang="en-US" sz="1800" dirty="0">
+                <a:solidFill>
+                  <a:srgbClr val="334155"/>
+                </a:solidFill>
+                <a:latin typeface="Inter" pitchFamily="34" charset="0"/>
+                <a:ea typeface="Inter" pitchFamily="34" charset="-122"/>
+                <a:cs typeface="Inter" pitchFamily="34" charset="-120"/>
+              </a:rPr>
+              <a:t>Each topic keeps its links and documents permanently.</a:t>
+            </a:r>
+            <a:endParaRPr lang="en-US" sz="1800" dirty="0"/>
+          </a:p>
+          <a:p>
+            <a:pPr marL="342900" indent="-342900">
+              <a:spcAft>
+                <a:spcPts val="600"/>
+              </a:spcAft>
+              <a:buSzPct val="100000"/>
+              <a:buChar char="•"/>
+            </a:pPr>
+            <a:r>
+              <a:rPr lang="en-US" sz="1800" dirty="0">
+                <a:solidFill>
+                  <a:srgbClr val="334155"/>
+                </a:solidFill>
+                <a:latin typeface="Inter" pitchFamily="34" charset="0"/>
+                <a:ea typeface="Inter" pitchFamily="34" charset="-122"/>
+                <a:cs typeface="Inter" pitchFamily="34" charset="-120"/>
+              </a:rPr>
+              <a:t>A violet sidebar dot flags new topics or comments.</a:t>
+            </a:r>
+            <a:endParaRPr lang="en-US" sz="1800" dirty="0"/>
+          </a:p>
+        </p:txBody>
+      </p:sp>
+      <p:sp>
+        <p:nvSpPr>
+          <p:cNvPr id="11" name="Shape 8"/>
+          <p:cNvSpPr/>
+          <p:nvPr/>
+        </p:nvSpPr>
+        <p:spPr>
+          <a:xfrm>
+            <a:off x="6400800" y="1828800"/>
+            <a:ext cx="5242255" cy="3931920"/>
+          </a:xfrm>
+          <a:prstGeom prst="rect">
+            <a:avLst/>
+          </a:prstGeom>
+          <a:solidFill>
+            <a:srgbClr val="FFFFFF"/>
+          </a:solidFill>
+          <a:ln w="9525">
+            <a:solidFill>
+              <a:srgbClr val="E2E8F0"/>
+            </a:solidFill>
+            <a:prstDash val="solid"/>
+          </a:ln>
+          <a:effectLst>
+            <a:outerShdw sx="100000" sy="100000" kx="0" ky="0" algn="bl" rotWithShape="0" blurRad="76200" dist="12700" dir="5400000">
+              <a:srgbClr val="94A3B8">
+                <a:alpha val="12000"/>
+              </a:srgbClr>
+            </a:outerShdw>
+          </a:effectLst>
+        </p:spPr>
+      </p:sp>
+      <p:sp>
+        <p:nvSpPr>
+          <p:cNvPr id="12" name="Shape 9"/>
+          <p:cNvSpPr/>
+          <p:nvPr/>
+        </p:nvSpPr>
+        <p:spPr>
+          <a:xfrm>
+            <a:off x="6400800" y="1828800"/>
+            <a:ext cx="73152" cy="3931920"/>
+          </a:xfrm>
+          <a:prstGeom prst="rect">
+            <a:avLst/>
+          </a:prstGeom>
+          <a:solidFill>
+            <a:srgbClr val="6F4CFF"/>
+          </a:solidFill>
+          <a:ln/>
+        </p:spPr>
+      </p:sp>
+      <p:sp>
+        <p:nvSpPr>
+          <p:cNvPr id="13" name="Text 10"/>
+          <p:cNvSpPr/>
+          <p:nvPr/>
+        </p:nvSpPr>
+        <p:spPr>
+          <a:xfrm>
+            <a:off x="6601968" y="1993392"/>
+            <a:ext cx="4922215" cy="594360"/>
+          </a:xfrm>
+          <a:prstGeom prst="rect">
+            <a:avLst/>
+          </a:prstGeom>
+          <a:noFill/>
+          <a:ln/>
+        </p:spPr>
+        <p:txBody>
+          <a:bodyPr wrap="square" lIns="0" tIns="0" rIns="0" bIns="0" rtlCol="0" anchor="ctr"/>
+          <a:lstStyle/>
+          <a:p>
+            <a:pPr indent="0" marL="0">
+              <a:buNone/>
+            </a:pPr>
+            <a:r>
+              <a:rPr lang="en-US" sz="2200" b="1" dirty="0">
+                <a:solidFill>
+                  <a:srgbClr val="0F172A"/>
+                </a:solidFill>
+                <a:latin typeface="Inter" pitchFamily="34" charset="0"/>
+                <a:ea typeface="Inter" pitchFamily="34" charset="-122"/>
+                <a:cs typeface="Inter" pitchFamily="34" charset="-120"/>
+              </a:rPr>
+              <a:t>Email-style comments</a:t>
+            </a:r>
+            <a:endParaRPr lang="en-US" sz="2200" dirty="0"/>
+          </a:p>
+        </p:txBody>
+      </p:sp>
+      <p:sp>
+        <p:nvSpPr>
+          <p:cNvPr id="14" name="Text 11"/>
+          <p:cNvSpPr/>
+          <p:nvPr/>
+        </p:nvSpPr>
+        <p:spPr>
+          <a:xfrm>
+            <a:off x="6629400" y="2697480"/>
+            <a:ext cx="4876495" cy="2926080"/>
+          </a:xfrm>
+          <a:prstGeom prst="rect">
+            <a:avLst/>
+          </a:prstGeom>
+          <a:noFill/>
+          <a:ln/>
+        </p:spPr>
+        <p:txBody>
+          <a:bodyPr wrap="square" lIns="0" tIns="0" rIns="0" bIns="0" rtlCol="0" anchor="t"/>
+          <a:lstStyle/>
+          <a:p>
+            <a:pPr marL="342900" indent="-342900">
+              <a:spcAft>
+                <a:spcPts val="600"/>
+              </a:spcAft>
+              <a:buSzPct val="100000"/>
+              <a:buChar char="•"/>
+            </a:pPr>
+            <a:r>
+              <a:rPr lang="en-US" sz="1800" dirty="0">
+                <a:solidFill>
+                  <a:srgbClr val="334155"/>
+                </a:solidFill>
+                <a:latin typeface="Inter" pitchFamily="34" charset="0"/>
+                <a:ea typeface="Inter" pitchFamily="34" charset="-122"/>
+                <a:cs typeface="Inter" pitchFamily="34" charset="-120"/>
+              </a:rPr>
+              <a:t>Write text plus images plus documents — like an email.</a:t>
+            </a:r>
+            <a:endParaRPr lang="en-US" sz="1800" dirty="0"/>
+          </a:p>
+          <a:p>
+            <a:pPr marL="342900" indent="-342900">
+              <a:spcAft>
+                <a:spcPts val="600"/>
+              </a:spcAft>
+              <a:buSzPct val="100000"/>
+              <a:buChar char="•"/>
+            </a:pPr>
+            <a:r>
+              <a:rPr lang="en-US" sz="1800" dirty="0">
+                <a:solidFill>
+                  <a:srgbClr val="334155"/>
+                </a:solidFill>
+                <a:latin typeface="Inter" pitchFamily="34" charset="0"/>
+                <a:ea typeface="Inter" pitchFamily="34" charset="-122"/>
+                <a:cs typeface="Inter" pitchFamily="34" charset="-120"/>
+              </a:rPr>
+              <a:t>Attach files or drag-and-drop (up to 25 MB each).</a:t>
+            </a:r>
+            <a:endParaRPr lang="en-US" sz="1800" dirty="0"/>
+          </a:p>
+          <a:p>
+            <a:pPr marL="342900" indent="-342900">
+              <a:spcAft>
+                <a:spcPts val="600"/>
+              </a:spcAft>
+              <a:buSzPct val="100000"/>
+              <a:buChar char="•"/>
+            </a:pPr>
+            <a:r>
+              <a:rPr lang="en-US" sz="1800" dirty="0">
+                <a:solidFill>
+                  <a:srgbClr val="334155"/>
+                </a:solidFill>
+                <a:latin typeface="Inter" pitchFamily="34" charset="0"/>
+                <a:ea typeface="Inter" pitchFamily="34" charset="-122"/>
+                <a:cs typeface="Inter" pitchFamily="34" charset="-120"/>
+              </a:rPr>
+              <a:t>Post a comment that’s just an attachment if you like.</a:t>
+            </a:r>
+            <a:endParaRPr lang="en-US" sz="1800" dirty="0"/>
+          </a:p>
+          <a:p>
+            <a:pPr marL="342900" indent="-342900">
+              <a:spcAft>
+                <a:spcPts val="600"/>
+              </a:spcAft>
+              <a:buSzPct val="100000"/>
+              <a:buChar char="•"/>
+            </a:pPr>
+            <a:r>
+              <a:rPr lang="en-US" sz="1800" dirty="0">
+                <a:solidFill>
+                  <a:srgbClr val="334155"/>
+                </a:solidFill>
+                <a:latin typeface="Inter" pitchFamily="34" charset="0"/>
+                <a:ea typeface="Inter" pitchFamily="34" charset="-122"/>
+                <a:cs typeface="Inter" pitchFamily="34" charset="-120"/>
+              </a:rPr>
+              <a:t>Images show inline; documents as download links.</a:t>
+            </a:r>
+            <a:endParaRPr lang="en-US" sz="1800" dirty="0"/>
+          </a:p>
+          <a:p>
+            <a:pPr marL="342900" indent="-342900">
+              <a:spcAft>
+                <a:spcPts val="600"/>
+              </a:spcAft>
+              <a:buSzPct val="100000"/>
+              <a:buChar char="•"/>
+            </a:pPr>
+            <a:r>
+              <a:rPr lang="en-US" sz="1800" dirty="0">
+                <a:solidFill>
+                  <a:srgbClr val="334155"/>
+                </a:solidFill>
+                <a:latin typeface="Inter" pitchFamily="34" charset="0"/>
+                <a:ea typeface="Inter" pitchFamily="34" charset="-122"/>
+                <a:cs typeface="Inter" pitchFamily="34" charset="-120"/>
+              </a:rPr>
+              <a:t>Reply to comments; edit or delete your own.</a:t>
+            </a:r>
+            <a:endParaRPr lang="en-US" sz="1800" dirty="0"/>
+          </a:p>
+        </p:txBody>
+      </p:sp>
+      <p:sp>
+        <p:nvSpPr>
+          <p:cNvPr id="15" name="Shape 12"/>
+          <p:cNvSpPr/>
+          <p:nvPr/>
+        </p:nvSpPr>
+        <p:spPr>
+          <a:xfrm>
+            <a:off x="548640" y="6355080"/>
+            <a:ext cx="11094415" cy="0"/>
+          </a:xfrm>
+          <a:prstGeom prst="line">
+            <a:avLst/>
+          </a:prstGeom>
+          <a:noFill/>
+          <a:ln w="9525">
+            <a:solidFill>
+              <a:srgbClr val="E2E8F0"/>
+            </a:solidFill>
+            <a:prstDash val="solid"/>
+          </a:ln>
+        </p:spPr>
+      </p:sp>
+      <p:sp>
+        <p:nvSpPr>
+          <p:cNvPr id="16" name="Text 13"/>
+          <p:cNvSpPr/>
+          <p:nvPr/>
+        </p:nvSpPr>
+        <p:spPr>
+          <a:xfrm>
+            <a:off x="548640" y="6446520"/>
+            <a:ext cx="5486400" cy="274320"/>
+          </a:xfrm>
+          <a:prstGeom prst="rect">
+            <a:avLst/>
+          </a:prstGeom>
+          <a:noFill/>
+          <a:ln/>
+        </p:spPr>
+        <p:txBody>
+          <a:bodyPr wrap="square" lIns="0" tIns="0" rIns="0" bIns="0" rtlCol="0" anchor="ctr"/>
+          <a:lstStyle/>
+          <a:p>
+            <a:pPr indent="0" marL="0">
+              <a:buNone/>
+            </a:pPr>
+            <a:r>
+              <a:rPr lang="en-US" sz="1300" dirty="0">
+                <a:solidFill>
+                  <a:srgbClr val="64748B"/>
+                </a:solidFill>
+                <a:latin typeface="Inter" pitchFamily="34" charset="0"/>
+                <a:ea typeface="Inter" pitchFamily="34" charset="-122"/>
+                <a:cs typeface="Inter" pitchFamily="34" charset="-120"/>
+              </a:rPr>
+              <a:t>PhDapp · for students</a:t>
+            </a:r>
+            <a:endParaRPr lang="en-US" sz="1300" dirty="0"/>
+          </a:p>
+        </p:txBody>
+      </p:sp>
+      <p:sp>
+        <p:nvSpPr>
+          <p:cNvPr id="17" name="Text 14"/>
+          <p:cNvSpPr/>
+          <p:nvPr/>
+        </p:nvSpPr>
+        <p:spPr>
+          <a:xfrm>
+            <a:off x="9814255" y="6446520"/>
+            <a:ext cx="1828800" cy="274320"/>
+          </a:xfrm>
+          <a:prstGeom prst="rect">
+            <a:avLst/>
+          </a:prstGeom>
+          <a:noFill/>
+          <a:ln/>
+        </p:spPr>
+        <p:txBody>
+          <a:bodyPr wrap="square" lIns="0" tIns="0" rIns="0" bIns="0" rtlCol="0" anchor="ctr"/>
+          <a:lstStyle/>
+          <a:p>
+            <a:pPr algn="r" indent="0" marL="0">
+              <a:buNone/>
+            </a:pPr>
+            <a:r>
+              <a:rPr lang="en-US" sz="1300" dirty="0">
+                <a:solidFill>
+                  <a:srgbClr val="64748B"/>
+                </a:solidFill>
+                <a:latin typeface="Inter" pitchFamily="34" charset="0"/>
+                <a:ea typeface="Inter" pitchFamily="34" charset="-122"/>
+                <a:cs typeface="Inter" pitchFamily="34" charset="-120"/>
+              </a:rPr>
+              <a:t>10 / 17</a:t>
             </a:r>
             <a:endParaRPr lang="en-US" sz="1300" dirty="0"/>
           </a:p>
@@ -9453,7 +10198,7 @@
                 <a:ea typeface="Inter" pitchFamily="34" charset="-122"/>
                 <a:cs typeface="Inter" pitchFamily="34" charset="-120"/>
               </a:rPr>
-              <a:t>2 / 16</a:t>
+              <a:t>2 / 17</a:t>
             </a:r>
             <a:endParaRPr lang="en-US" sz="1300" dirty="0"/>
           </a:p>
@@ -10164,7 +10909,7 @@
                 <a:ea typeface="Inter" pitchFamily="34" charset="-122"/>
                 <a:cs typeface="Inter" pitchFamily="34" charset="-120"/>
               </a:rPr>
-              <a:t>3 / 16</a:t>
+              <a:t>3 / 17</a:t>
             </a:r>
             <a:endParaRPr lang="en-US" sz="1300" dirty="0"/>
           </a:p>
@@ -11170,7 +11915,7 @@
                 <a:ea typeface="Inter" pitchFamily="34" charset="-122"/>
                 <a:cs typeface="Inter" pitchFamily="34" charset="-120"/>
               </a:rPr>
-              <a:t>4 / 16</a:t>
+              <a:t>4 / 17</a:t>
             </a:r>
             <a:endParaRPr lang="en-US" sz="1300" dirty="0"/>
           </a:p>
@@ -12120,7 +12865,7 @@
                 <a:ea typeface="Inter" pitchFamily="34" charset="-122"/>
                 <a:cs typeface="Inter" pitchFamily="34" charset="-120"/>
               </a:rPr>
-              <a:t>5 / 16</a:t>
+              <a:t>5 / 17</a:t>
             </a:r>
             <a:endParaRPr lang="en-US" sz="1300" dirty="0"/>
           </a:p>
@@ -12813,7 +13558,7 @@
                 <a:ea typeface="Inter" pitchFamily="34" charset="-122"/>
                 <a:cs typeface="Inter" pitchFamily="34" charset="-120"/>
               </a:rPr>
-              <a:t>6 / 16</a:t>
+              <a:t>6 / 17</a:t>
             </a:r>
             <a:endParaRPr lang="en-US" sz="1300" dirty="0"/>
           </a:p>
@@ -13485,7 +14230,7 @@
                 <a:ea typeface="Inter" pitchFamily="34" charset="-122"/>
                 <a:cs typeface="Inter" pitchFamily="34" charset="-120"/>
               </a:rPr>
-              <a:t>7 / 16</a:t>
+              <a:t>7 / 17</a:t>
             </a:r>
             <a:endParaRPr lang="en-US" sz="1300" dirty="0"/>
           </a:p>
@@ -14196,7 +14941,7 @@
                 <a:ea typeface="Inter" pitchFamily="34" charset="-122"/>
                 <a:cs typeface="Inter" pitchFamily="34" charset="-120"/>
               </a:rPr>
-              <a:t>8 / 16</a:t>
+              <a:t>8 / 17</a:t>
             </a:r>
             <a:endParaRPr lang="en-US" sz="1300" dirty="0"/>
           </a:p>
@@ -14928,7 +15673,7 @@
                 <a:ea typeface="Inter" pitchFamily="34" charset="-122"/>
                 <a:cs typeface="Inter" pitchFamily="34" charset="-120"/>
               </a:rPr>
-              <a:t>9 / 16</a:t>
+              <a:t>9 / 17</a:t>
             </a:r>
             <a:endParaRPr lang="en-US" sz="1300" dirty="0"/>
           </a:p>

--- a/docs/PhDapp_Student_Overview.pptx
+++ b/docs/PhDapp_Student_Overview.pptx
@@ -8610,7 +8610,7 @@
                 <a:ea typeface="Inter" pitchFamily="34" charset="-122"/>
                 <a:cs typeface="Inter" pitchFamily="34" charset="-120"/>
               </a:rPr>
-              <a:t>Email-style comments</a:t>
+              <a:t>Document-style comments</a:t>
             </a:r>
             <a:endParaRPr lang="en-US" sz="2200" dirty="0"/>
           </a:p>
@@ -8653,7 +8653,7 @@
                 <a:ea typeface="Inter" pitchFamily="34" charset="-122"/>
                 <a:cs typeface="Inter" pitchFamily="34" charset="-120"/>
               </a:rPr>
-              <a:t>Write text plus images plus documents — like an email.</a:t>
+              <a:t>Build a comment like a document — text, image, more text, in any order.</a:t>
             </a:r>
             <a:endParaRPr lang="en-US" sz="1800" dirty="0"/>
           </a:p>
@@ -8674,7 +8674,7 @@
                 <a:ea typeface="Inter" pitchFamily="34" charset="-122"/>
                 <a:cs typeface="Inter" pitchFamily="34" charset="-120"/>
               </a:rPr>
-              <a:t>Attach files or drag-and-drop (up to 25 MB each).</a:t>
+              <a:t>Attach, paste (⌘V), or drag-and-drop (up to 25 MB each).</a:t>
             </a:r>
             <a:endParaRPr lang="en-US" sz="1800" dirty="0"/>
           </a:p>
@@ -8695,7 +8695,7 @@
                 <a:ea typeface="Inter" pitchFamily="34" charset="-122"/>
                 <a:cs typeface="Inter" pitchFamily="34" charset="-120"/>
               </a:rPr>
-              <a:t>Post a comment that’s just an attachment if you like.</a:t>
+              <a:t>Reorder or remove any block; post an image-only comment.</a:t>
             </a:r>
             <a:endParaRPr lang="en-US" sz="1800" dirty="0"/>
           </a:p>
